--- a/docs/pptx/carbo/jx-carbo-linsubhr-ratio-anemia2.pptx
+++ b/docs/pptx/carbo/jx-carbo-linsubhr-ratio-anemia2.pptx
@@ -2271,7 +2271,7 @@
           </p:nvSpPr>
           <p:spPr>
             <a:xfrm>
-              <a:off x="817517" y="5114368"/>
+              <a:off x="817517" y="5142518"/>
               <a:ext cx="7799693" cy="0"/>
             </a:xfrm>
             <a:custGeom>
@@ -2314,7 +2314,7 @@
           </p:nvSpPr>
           <p:spPr>
             <a:xfrm>
-              <a:off x="817517" y="4244691"/>
+              <a:off x="817517" y="4313054"/>
               <a:ext cx="7799693" cy="0"/>
             </a:xfrm>
             <a:custGeom>
@@ -2357,7 +2357,7 @@
           </p:nvSpPr>
           <p:spPr>
             <a:xfrm>
-              <a:off x="817517" y="3375014"/>
+              <a:off x="817517" y="3483591"/>
               <a:ext cx="7799693" cy="0"/>
             </a:xfrm>
             <a:custGeom>
@@ -2400,7 +2400,7 @@
           </p:nvSpPr>
           <p:spPr>
             <a:xfrm>
-              <a:off x="817517" y="2505337"/>
+              <a:off x="817517" y="2654127"/>
               <a:ext cx="7799693" cy="0"/>
             </a:xfrm>
             <a:custGeom>
@@ -2443,15 +2443,15 @@
           </p:nvSpPr>
           <p:spPr>
             <a:xfrm>
-              <a:off x="1615213" y="1896563"/>
-              <a:ext cx="0" cy="3826579"/>
+              <a:off x="1615213" y="2073503"/>
+              <a:ext cx="0" cy="3649639"/>
             </a:xfrm>
             <a:custGeom>
               <a:avLst/>
               <a:pathLst>
-                <a:path w="0" h="3826579">
+                <a:path w="0" h="3649639">
                   <a:moveTo>
-                    <a:pt x="0" y="3826579"/>
+                    <a:pt x="0" y="3649639"/>
                   </a:moveTo>
                   <a:lnTo>
                     <a:pt x="0" y="0"/>
@@ -2486,15 +2486,15 @@
           </p:nvSpPr>
           <p:spPr>
             <a:xfrm>
-              <a:off x="3387871" y="1896563"/>
-              <a:ext cx="0" cy="3826579"/>
+              <a:off x="3387871" y="2073503"/>
+              <a:ext cx="0" cy="3649639"/>
             </a:xfrm>
             <a:custGeom>
               <a:avLst/>
               <a:pathLst>
-                <a:path w="0" h="3826579">
+                <a:path w="0" h="3649639">
                   <a:moveTo>
-                    <a:pt x="0" y="3826579"/>
+                    <a:pt x="0" y="3649639"/>
                   </a:moveTo>
                   <a:lnTo>
                     <a:pt x="0" y="0"/>
@@ -2529,15 +2529,15 @@
           </p:nvSpPr>
           <p:spPr>
             <a:xfrm>
-              <a:off x="5160528" y="1896563"/>
-              <a:ext cx="0" cy="3826579"/>
+              <a:off x="5160528" y="2073503"/>
+              <a:ext cx="0" cy="3649639"/>
             </a:xfrm>
             <a:custGeom>
               <a:avLst/>
               <a:pathLst>
-                <a:path w="0" h="3826579">
+                <a:path w="0" h="3649639">
                   <a:moveTo>
-                    <a:pt x="0" y="3826579"/>
+                    <a:pt x="0" y="3649639"/>
                   </a:moveTo>
                   <a:lnTo>
                     <a:pt x="0" y="0"/>
@@ -2572,15 +2572,15 @@
           </p:nvSpPr>
           <p:spPr>
             <a:xfrm>
-              <a:off x="6933186" y="1896563"/>
-              <a:ext cx="0" cy="3826579"/>
+              <a:off x="6933186" y="2073503"/>
+              <a:ext cx="0" cy="3649639"/>
             </a:xfrm>
             <a:custGeom>
               <a:avLst/>
               <a:pathLst>
-                <a:path w="0" h="3826579">
+                <a:path w="0" h="3649639">
                   <a:moveTo>
-                    <a:pt x="0" y="3826579"/>
+                    <a:pt x="0" y="3649639"/>
                   </a:moveTo>
                   <a:lnTo>
                     <a:pt x="0" y="0"/>
@@ -2615,7 +2615,7 @@
           </p:nvSpPr>
           <p:spPr>
             <a:xfrm>
-              <a:off x="817517" y="5549207"/>
+              <a:off x="817517" y="5557249"/>
               <a:ext cx="7799693" cy="0"/>
             </a:xfrm>
             <a:custGeom>
@@ -2658,7 +2658,7 @@
           </p:nvSpPr>
           <p:spPr>
             <a:xfrm>
-              <a:off x="817517" y="4679530"/>
+              <a:off x="817517" y="4727786"/>
               <a:ext cx="7799693" cy="0"/>
             </a:xfrm>
             <a:custGeom>
@@ -2701,7 +2701,7 @@
           </p:nvSpPr>
           <p:spPr>
             <a:xfrm>
-              <a:off x="817517" y="3809853"/>
+              <a:off x="817517" y="3898322"/>
               <a:ext cx="7799693" cy="0"/>
             </a:xfrm>
             <a:custGeom>
@@ -2744,7 +2744,7 @@
           </p:nvSpPr>
           <p:spPr>
             <a:xfrm>
-              <a:off x="817517" y="2940175"/>
+              <a:off x="817517" y="3068859"/>
               <a:ext cx="7799693" cy="0"/>
             </a:xfrm>
             <a:custGeom>
@@ -2787,7 +2787,7 @@
           </p:nvSpPr>
           <p:spPr>
             <a:xfrm>
-              <a:off x="817517" y="2070498"/>
+              <a:off x="817517" y="2239395"/>
               <a:ext cx="7799693" cy="0"/>
             </a:xfrm>
             <a:custGeom>
@@ -2830,15 +2830,15 @@
           </p:nvSpPr>
           <p:spPr>
             <a:xfrm>
-              <a:off x="2501542" y="1896563"/>
-              <a:ext cx="0" cy="3826579"/>
+              <a:off x="2501542" y="2073503"/>
+              <a:ext cx="0" cy="3649639"/>
             </a:xfrm>
             <a:custGeom>
               <a:avLst/>
               <a:pathLst>
-                <a:path w="0" h="3826579">
+                <a:path w="0" h="3649639">
                   <a:moveTo>
-                    <a:pt x="0" y="3826579"/>
+                    <a:pt x="0" y="3649639"/>
                   </a:moveTo>
                   <a:lnTo>
                     <a:pt x="0" y="0"/>
@@ -2873,15 +2873,15 @@
           </p:nvSpPr>
           <p:spPr>
             <a:xfrm>
-              <a:off x="4274200" y="1896563"/>
-              <a:ext cx="0" cy="3826579"/>
+              <a:off x="4274200" y="2073503"/>
+              <a:ext cx="0" cy="3649639"/>
             </a:xfrm>
             <a:custGeom>
               <a:avLst/>
               <a:pathLst>
-                <a:path w="0" h="3826579">
+                <a:path w="0" h="3649639">
                   <a:moveTo>
-                    <a:pt x="0" y="3826579"/>
+                    <a:pt x="0" y="3649639"/>
                   </a:moveTo>
                   <a:lnTo>
                     <a:pt x="0" y="0"/>
@@ -2916,15 +2916,15 @@
           </p:nvSpPr>
           <p:spPr>
             <a:xfrm>
-              <a:off x="6046857" y="1896563"/>
-              <a:ext cx="0" cy="3826579"/>
+              <a:off x="6046857" y="2073503"/>
+              <a:ext cx="0" cy="3649639"/>
             </a:xfrm>
             <a:custGeom>
               <a:avLst/>
               <a:pathLst>
-                <a:path w="0" h="3826579">
+                <a:path w="0" h="3649639">
                   <a:moveTo>
-                    <a:pt x="0" y="3826579"/>
+                    <a:pt x="0" y="3649639"/>
                   </a:moveTo>
                   <a:lnTo>
                     <a:pt x="0" y="0"/>
@@ -2959,15 +2959,15 @@
           </p:nvSpPr>
           <p:spPr>
             <a:xfrm>
-              <a:off x="7819515" y="1896563"/>
-              <a:ext cx="0" cy="3826579"/>
+              <a:off x="7819515" y="2073503"/>
+              <a:ext cx="0" cy="3649639"/>
             </a:xfrm>
             <a:custGeom>
               <a:avLst/>
               <a:pathLst>
-                <a:path w="0" h="3826579">
+                <a:path w="0" h="3649639">
                   <a:moveTo>
-                    <a:pt x="0" y="3826579"/>
+                    <a:pt x="0" y="3649639"/>
                   </a:moveTo>
                   <a:lnTo>
                     <a:pt x="0" y="0"/>
@@ -3002,600 +3002,600 @@
           </p:nvSpPr>
           <p:spPr>
             <a:xfrm>
-              <a:off x="817517" y="2726890"/>
-              <a:ext cx="7403783" cy="2603757"/>
+              <a:off x="817517" y="2865436"/>
+              <a:ext cx="7403783" cy="2483361"/>
             </a:xfrm>
             <a:custGeom>
               <a:avLst/>
               <a:pathLst>
-                <a:path w="7403783" h="2603757">
+                <a:path w="7403783" h="2483361">
                   <a:moveTo>
                     <a:pt x="0" y="0"/>
                   </a:moveTo>
                   <a:lnTo>
-                    <a:pt x="47058" y="45749"/>
-                  </a:lnTo>
-                  <a:lnTo>
-                    <a:pt x="123691" y="118303"/>
-                  </a:lnTo>
-                  <a:lnTo>
-                    <a:pt x="200323" y="188961"/>
-                  </a:lnTo>
-                  <a:lnTo>
-                    <a:pt x="276956" y="257773"/>
-                  </a:lnTo>
-                  <a:lnTo>
-                    <a:pt x="353588" y="324786"/>
-                  </a:lnTo>
-                  <a:lnTo>
-                    <a:pt x="430221" y="390049"/>
-                  </a:lnTo>
-                  <a:lnTo>
-                    <a:pt x="506853" y="453606"/>
-                  </a:lnTo>
-                  <a:lnTo>
-                    <a:pt x="583486" y="515502"/>
-                  </a:lnTo>
-                  <a:lnTo>
-                    <a:pt x="660118" y="575781"/>
-                  </a:lnTo>
-                  <a:lnTo>
-                    <a:pt x="736751" y="634485"/>
-                  </a:lnTo>
-                  <a:lnTo>
-                    <a:pt x="813384" y="691655"/>
-                  </a:lnTo>
-                  <a:lnTo>
-                    <a:pt x="890016" y="747331"/>
-                  </a:lnTo>
-                  <a:lnTo>
-                    <a:pt x="966649" y="801552"/>
-                  </a:lnTo>
-                  <a:lnTo>
-                    <a:pt x="1043281" y="854356"/>
-                  </a:lnTo>
-                  <a:lnTo>
-                    <a:pt x="1119914" y="905781"/>
-                  </a:lnTo>
-                  <a:lnTo>
-                    <a:pt x="1196546" y="955861"/>
-                  </a:lnTo>
-                  <a:lnTo>
-                    <a:pt x="1273179" y="1004633"/>
-                  </a:lnTo>
-                  <a:lnTo>
-                    <a:pt x="1349811" y="1052131"/>
-                  </a:lnTo>
-                  <a:lnTo>
-                    <a:pt x="1426444" y="1098387"/>
-                  </a:lnTo>
-                  <a:lnTo>
-                    <a:pt x="1503076" y="1143435"/>
-                  </a:lnTo>
-                  <a:lnTo>
-                    <a:pt x="1579709" y="1187305"/>
-                  </a:lnTo>
-                  <a:lnTo>
-                    <a:pt x="1656342" y="1230030"/>
-                  </a:lnTo>
-                  <a:lnTo>
-                    <a:pt x="1732974" y="1271637"/>
-                  </a:lnTo>
-                  <a:lnTo>
-                    <a:pt x="1809607" y="1312158"/>
-                  </a:lnTo>
-                  <a:lnTo>
-                    <a:pt x="1886239" y="1351620"/>
-                  </a:lnTo>
-                  <a:lnTo>
-                    <a:pt x="1962872" y="1390050"/>
-                  </a:lnTo>
-                  <a:lnTo>
-                    <a:pt x="2039504" y="1427476"/>
-                  </a:lnTo>
-                  <a:lnTo>
-                    <a:pt x="2116137" y="1463925"/>
-                  </a:lnTo>
-                  <a:lnTo>
-                    <a:pt x="2192769" y="1499421"/>
-                  </a:lnTo>
-                  <a:lnTo>
-                    <a:pt x="2269402" y="1533989"/>
-                  </a:lnTo>
-                  <a:lnTo>
-                    <a:pt x="2346034" y="1567654"/>
-                  </a:lnTo>
-                  <a:lnTo>
-                    <a:pt x="2422667" y="1600439"/>
-                  </a:lnTo>
-                  <a:lnTo>
-                    <a:pt x="2499300" y="1632368"/>
-                  </a:lnTo>
-                  <a:lnTo>
-                    <a:pt x="2575932" y="1663462"/>
-                  </a:lnTo>
-                  <a:lnTo>
-                    <a:pt x="2652565" y="1693744"/>
-                  </a:lnTo>
-                  <a:lnTo>
-                    <a:pt x="2729197" y="1723235"/>
-                  </a:lnTo>
-                  <a:lnTo>
-                    <a:pt x="2805830" y="1751955"/>
-                  </a:lnTo>
-                  <a:lnTo>
-                    <a:pt x="2882462" y="1779924"/>
-                  </a:lnTo>
-                  <a:lnTo>
-                    <a:pt x="2959095" y="1807163"/>
-                  </a:lnTo>
-                  <a:lnTo>
-                    <a:pt x="3035727" y="1833689"/>
-                  </a:lnTo>
-                  <a:lnTo>
-                    <a:pt x="3112360" y="1859523"/>
-                  </a:lnTo>
-                  <a:lnTo>
-                    <a:pt x="3188993" y="1884682"/>
-                  </a:lnTo>
-                  <a:lnTo>
-                    <a:pt x="3265625" y="1909183"/>
-                  </a:lnTo>
-                  <a:lnTo>
-                    <a:pt x="3342258" y="1933044"/>
-                  </a:lnTo>
-                  <a:lnTo>
-                    <a:pt x="3418890" y="1954188"/>
-                  </a:lnTo>
-                  <a:lnTo>
-                    <a:pt x="3495523" y="1963902"/>
-                  </a:lnTo>
-                  <a:lnTo>
-                    <a:pt x="3572155" y="1973507"/>
-                  </a:lnTo>
-                  <a:lnTo>
-                    <a:pt x="3648788" y="1983004"/>
-                  </a:lnTo>
-                  <a:lnTo>
-                    <a:pt x="3725420" y="1992395"/>
-                  </a:lnTo>
-                  <a:lnTo>
-                    <a:pt x="3802053" y="2001681"/>
-                  </a:lnTo>
-                  <a:lnTo>
-                    <a:pt x="3878685" y="2010863"/>
-                  </a:lnTo>
-                  <a:lnTo>
-                    <a:pt x="3955318" y="2019942"/>
-                  </a:lnTo>
-                  <a:lnTo>
-                    <a:pt x="4031951" y="2028920"/>
-                  </a:lnTo>
-                  <a:lnTo>
-                    <a:pt x="4108583" y="2037797"/>
-                  </a:lnTo>
-                  <a:lnTo>
-                    <a:pt x="4185216" y="2046575"/>
-                  </a:lnTo>
-                  <a:lnTo>
-                    <a:pt x="4261848" y="2055255"/>
-                  </a:lnTo>
-                  <a:lnTo>
-                    <a:pt x="4338481" y="2063837"/>
-                  </a:lnTo>
-                  <a:lnTo>
-                    <a:pt x="4415113" y="2072324"/>
-                  </a:lnTo>
-                  <a:lnTo>
-                    <a:pt x="4491746" y="2080716"/>
-                  </a:lnTo>
-                  <a:lnTo>
-                    <a:pt x="4568378" y="2089013"/>
-                  </a:lnTo>
-                  <a:lnTo>
-                    <a:pt x="4645011" y="2097218"/>
-                  </a:lnTo>
-                  <a:lnTo>
-                    <a:pt x="4721644" y="2105331"/>
-                  </a:lnTo>
-                  <a:lnTo>
-                    <a:pt x="4798276" y="2113354"/>
-                  </a:lnTo>
-                  <a:lnTo>
-                    <a:pt x="4874909" y="2121286"/>
-                  </a:lnTo>
-                  <a:lnTo>
-                    <a:pt x="4951541" y="2129130"/>
-                  </a:lnTo>
-                  <a:lnTo>
-                    <a:pt x="5028174" y="2136886"/>
-                  </a:lnTo>
-                  <a:lnTo>
-                    <a:pt x="5104806" y="2144555"/>
-                  </a:lnTo>
-                  <a:lnTo>
-                    <a:pt x="5181439" y="2152139"/>
-                  </a:lnTo>
-                  <a:lnTo>
-                    <a:pt x="5258071" y="2159637"/>
-                  </a:lnTo>
-                  <a:lnTo>
-                    <a:pt x="5334704" y="2167052"/>
-                  </a:lnTo>
-                  <a:lnTo>
-                    <a:pt x="5411336" y="2174384"/>
-                  </a:lnTo>
-                  <a:lnTo>
-                    <a:pt x="5487969" y="2181633"/>
-                  </a:lnTo>
-                  <a:lnTo>
-                    <a:pt x="5564602" y="2188802"/>
-                  </a:lnTo>
-                  <a:lnTo>
-                    <a:pt x="5641234" y="2195890"/>
-                  </a:lnTo>
-                  <a:lnTo>
-                    <a:pt x="5717867" y="2202899"/>
-                  </a:lnTo>
-                  <a:lnTo>
-                    <a:pt x="5794499" y="2209830"/>
-                  </a:lnTo>
-                  <a:lnTo>
-                    <a:pt x="5871132" y="2216683"/>
-                  </a:lnTo>
-                  <a:lnTo>
-                    <a:pt x="5947764" y="2223459"/>
-                  </a:lnTo>
-                  <a:lnTo>
-                    <a:pt x="6024397" y="2230160"/>
-                  </a:lnTo>
-                  <a:lnTo>
-                    <a:pt x="6101029" y="2236786"/>
-                  </a:lnTo>
-                  <a:lnTo>
-                    <a:pt x="6177662" y="2243337"/>
-                  </a:lnTo>
-                  <a:lnTo>
-                    <a:pt x="6254294" y="2249815"/>
-                  </a:lnTo>
-                  <a:lnTo>
-                    <a:pt x="6330927" y="2256221"/>
-                  </a:lnTo>
-                  <a:lnTo>
-                    <a:pt x="6407560" y="2262555"/>
-                  </a:lnTo>
-                  <a:lnTo>
-                    <a:pt x="6484192" y="2268818"/>
-                  </a:lnTo>
-                  <a:lnTo>
-                    <a:pt x="6560825" y="2275011"/>
-                  </a:lnTo>
-                  <a:lnTo>
-                    <a:pt x="6637457" y="2281135"/>
-                  </a:lnTo>
-                  <a:lnTo>
-                    <a:pt x="6714090" y="2287190"/>
-                  </a:lnTo>
-                  <a:lnTo>
-                    <a:pt x="6790722" y="2293178"/>
-                  </a:lnTo>
-                  <a:lnTo>
-                    <a:pt x="6867355" y="2299098"/>
-                  </a:lnTo>
-                  <a:lnTo>
-                    <a:pt x="6943987" y="2304952"/>
-                  </a:lnTo>
-                  <a:lnTo>
-                    <a:pt x="7020620" y="2310741"/>
-                  </a:lnTo>
-                  <a:lnTo>
-                    <a:pt x="7097253" y="2316465"/>
-                  </a:lnTo>
-                  <a:lnTo>
-                    <a:pt x="7173885" y="2322125"/>
-                  </a:lnTo>
-                  <a:lnTo>
-                    <a:pt x="7250518" y="2327722"/>
-                  </a:lnTo>
-                  <a:lnTo>
-                    <a:pt x="7327150" y="2333256"/>
-                  </a:lnTo>
-                  <a:lnTo>
-                    <a:pt x="7403783" y="2338728"/>
-                  </a:lnTo>
-                  <a:lnTo>
-                    <a:pt x="7403783" y="2603757"/>
-                  </a:lnTo>
-                  <a:lnTo>
-                    <a:pt x="7327150" y="2597893"/>
-                  </a:lnTo>
-                  <a:lnTo>
-                    <a:pt x="7250518" y="2591871"/>
-                  </a:lnTo>
-                  <a:lnTo>
-                    <a:pt x="7173885" y="2585688"/>
-                  </a:lnTo>
-                  <a:lnTo>
-                    <a:pt x="7097253" y="2579339"/>
-                  </a:lnTo>
-                  <a:lnTo>
-                    <a:pt x="7020620" y="2572819"/>
-                  </a:lnTo>
-                  <a:lnTo>
-                    <a:pt x="6943987" y="2566125"/>
-                  </a:lnTo>
-                  <a:lnTo>
-                    <a:pt x="6867355" y="2559251"/>
-                  </a:lnTo>
-                  <a:lnTo>
-                    <a:pt x="6790722" y="2552192"/>
-                  </a:lnTo>
-                  <a:lnTo>
-                    <a:pt x="6714090" y="2544944"/>
-                  </a:lnTo>
-                  <a:lnTo>
-                    <a:pt x="6637457" y="2537502"/>
-                  </a:lnTo>
-                  <a:lnTo>
-                    <a:pt x="6560825" y="2529860"/>
-                  </a:lnTo>
-                  <a:lnTo>
-                    <a:pt x="6484192" y="2522013"/>
-                  </a:lnTo>
-                  <a:lnTo>
-                    <a:pt x="6407560" y="2513955"/>
-                  </a:lnTo>
-                  <a:lnTo>
-                    <a:pt x="6330927" y="2505681"/>
-                  </a:lnTo>
-                  <a:lnTo>
-                    <a:pt x="6254294" y="2497185"/>
-                  </a:lnTo>
-                  <a:lnTo>
-                    <a:pt x="6177662" y="2488461"/>
-                  </a:lnTo>
-                  <a:lnTo>
-                    <a:pt x="6101029" y="2479503"/>
-                  </a:lnTo>
-                  <a:lnTo>
-                    <a:pt x="6024397" y="2470305"/>
-                  </a:lnTo>
-                  <a:lnTo>
-                    <a:pt x="5947764" y="2460860"/>
-                  </a:lnTo>
-                  <a:lnTo>
-                    <a:pt x="5871132" y="2451161"/>
-                  </a:lnTo>
-                  <a:lnTo>
-                    <a:pt x="5794499" y="2441202"/>
-                  </a:lnTo>
-                  <a:lnTo>
-                    <a:pt x="5717867" y="2430976"/>
-                  </a:lnTo>
-                  <a:lnTo>
-                    <a:pt x="5641234" y="2420476"/>
-                  </a:lnTo>
-                  <a:lnTo>
-                    <a:pt x="5564602" y="2409694"/>
-                  </a:lnTo>
-                  <a:lnTo>
-                    <a:pt x="5487969" y="2398622"/>
-                  </a:lnTo>
-                  <a:lnTo>
-                    <a:pt x="5411336" y="2387254"/>
-                  </a:lnTo>
-                  <a:lnTo>
-                    <a:pt x="5334704" y="2375580"/>
-                  </a:lnTo>
-                  <a:lnTo>
-                    <a:pt x="5258071" y="2363593"/>
-                  </a:lnTo>
-                  <a:lnTo>
-                    <a:pt x="5181439" y="2351285"/>
-                  </a:lnTo>
-                  <a:lnTo>
-                    <a:pt x="5104806" y="2338646"/>
-                  </a:lnTo>
-                  <a:lnTo>
-                    <a:pt x="5028174" y="2325668"/>
-                  </a:lnTo>
-                  <a:lnTo>
-                    <a:pt x="4951541" y="2312342"/>
-                  </a:lnTo>
-                  <a:lnTo>
-                    <a:pt x="4874909" y="2298659"/>
-                  </a:lnTo>
-                  <a:lnTo>
-                    <a:pt x="4798276" y="2284608"/>
-                  </a:lnTo>
-                  <a:lnTo>
-                    <a:pt x="4721644" y="2270180"/>
-                  </a:lnTo>
-                  <a:lnTo>
-                    <a:pt x="4645011" y="2255365"/>
-                  </a:lnTo>
-                  <a:lnTo>
-                    <a:pt x="4568378" y="2240153"/>
-                  </a:lnTo>
-                  <a:lnTo>
-                    <a:pt x="4491746" y="2224532"/>
-                  </a:lnTo>
-                  <a:lnTo>
-                    <a:pt x="4415113" y="2208493"/>
-                  </a:lnTo>
-                  <a:lnTo>
-                    <a:pt x="4338481" y="2192022"/>
-                  </a:lnTo>
-                  <a:lnTo>
-                    <a:pt x="4261848" y="2175110"/>
-                  </a:lnTo>
-                  <a:lnTo>
-                    <a:pt x="4185216" y="2157745"/>
-                  </a:lnTo>
-                  <a:lnTo>
-                    <a:pt x="4108583" y="2139913"/>
-                  </a:lnTo>
-                  <a:lnTo>
-                    <a:pt x="4031951" y="2121603"/>
-                  </a:lnTo>
-                  <a:lnTo>
-                    <a:pt x="3955318" y="2102801"/>
-                  </a:lnTo>
-                  <a:lnTo>
-                    <a:pt x="3878685" y="2083495"/>
-                  </a:lnTo>
-                  <a:lnTo>
-                    <a:pt x="3802053" y="2063671"/>
-                  </a:lnTo>
-                  <a:lnTo>
-                    <a:pt x="3725420" y="2043315"/>
-                  </a:lnTo>
-                  <a:lnTo>
-                    <a:pt x="3648788" y="2022413"/>
-                  </a:lnTo>
-                  <a:lnTo>
-                    <a:pt x="3572155" y="2000950"/>
-                  </a:lnTo>
-                  <a:lnTo>
-                    <a:pt x="3495523" y="1978911"/>
-                  </a:lnTo>
-                  <a:lnTo>
-                    <a:pt x="3418890" y="1956281"/>
-                  </a:lnTo>
-                  <a:lnTo>
-                    <a:pt x="3342258" y="1944365"/>
-                  </a:lnTo>
-                  <a:lnTo>
-                    <a:pt x="3265625" y="1934431"/>
-                  </a:lnTo>
-                  <a:lnTo>
-                    <a:pt x="3188993" y="1924384"/>
-                  </a:lnTo>
-                  <a:lnTo>
-                    <a:pt x="3112360" y="1914223"/>
-                  </a:lnTo>
-                  <a:lnTo>
-                    <a:pt x="3035727" y="1903947"/>
-                  </a:lnTo>
-                  <a:lnTo>
-                    <a:pt x="2959095" y="1893556"/>
-                  </a:lnTo>
-                  <a:lnTo>
-                    <a:pt x="2882462" y="1883046"/>
-                  </a:lnTo>
-                  <a:lnTo>
-                    <a:pt x="2805830" y="1872418"/>
-                  </a:lnTo>
-                  <a:lnTo>
-                    <a:pt x="2729197" y="1861669"/>
-                  </a:lnTo>
-                  <a:lnTo>
-                    <a:pt x="2652565" y="1850799"/>
-                  </a:lnTo>
-                  <a:lnTo>
-                    <a:pt x="2575932" y="1839806"/>
-                  </a:lnTo>
-                  <a:lnTo>
-                    <a:pt x="2499300" y="1828688"/>
-                  </a:lnTo>
-                  <a:lnTo>
-                    <a:pt x="2422667" y="1817445"/>
-                  </a:lnTo>
-                  <a:lnTo>
-                    <a:pt x="2346034" y="1806074"/>
-                  </a:lnTo>
-                  <a:lnTo>
-                    <a:pt x="2269402" y="1794574"/>
-                  </a:lnTo>
-                  <a:lnTo>
-                    <a:pt x="2192769" y="1782945"/>
-                  </a:lnTo>
-                  <a:lnTo>
-                    <a:pt x="2116137" y="1771184"/>
-                  </a:lnTo>
-                  <a:lnTo>
-                    <a:pt x="2039504" y="1759290"/>
-                  </a:lnTo>
-                  <a:lnTo>
-                    <a:pt x="1962872" y="1747261"/>
-                  </a:lnTo>
-                  <a:lnTo>
-                    <a:pt x="1886239" y="1735096"/>
-                  </a:lnTo>
-                  <a:lnTo>
-                    <a:pt x="1809607" y="1722794"/>
-                  </a:lnTo>
-                  <a:lnTo>
-                    <a:pt x="1732974" y="1710352"/>
-                  </a:lnTo>
-                  <a:lnTo>
-                    <a:pt x="1656342" y="1697770"/>
-                  </a:lnTo>
-                  <a:lnTo>
-                    <a:pt x="1579709" y="1685045"/>
-                  </a:lnTo>
-                  <a:lnTo>
-                    <a:pt x="1503076" y="1672176"/>
-                  </a:lnTo>
-                  <a:lnTo>
-                    <a:pt x="1426444" y="1659161"/>
-                  </a:lnTo>
-                  <a:lnTo>
-                    <a:pt x="1349811" y="1646000"/>
-                  </a:lnTo>
-                  <a:lnTo>
-                    <a:pt x="1273179" y="1632689"/>
-                  </a:lnTo>
-                  <a:lnTo>
-                    <a:pt x="1196546" y="1619228"/>
-                  </a:lnTo>
-                  <a:lnTo>
-                    <a:pt x="1119914" y="1605614"/>
-                  </a:lnTo>
-                  <a:lnTo>
-                    <a:pt x="1043281" y="1591846"/>
-                  </a:lnTo>
-                  <a:lnTo>
-                    <a:pt x="966649" y="1577923"/>
-                  </a:lnTo>
-                  <a:lnTo>
-                    <a:pt x="890016" y="1563842"/>
-                  </a:lnTo>
-                  <a:lnTo>
-                    <a:pt x="813384" y="1549601"/>
-                  </a:lnTo>
-                  <a:lnTo>
-                    <a:pt x="736751" y="1535200"/>
-                  </a:lnTo>
-                  <a:lnTo>
-                    <a:pt x="660118" y="1520636"/>
-                  </a:lnTo>
-                  <a:lnTo>
-                    <a:pt x="583486" y="1505906"/>
-                  </a:lnTo>
-                  <a:lnTo>
-                    <a:pt x="506853" y="1491010"/>
-                  </a:lnTo>
-                  <a:lnTo>
-                    <a:pt x="430221" y="1475946"/>
-                  </a:lnTo>
-                  <a:lnTo>
-                    <a:pt x="353588" y="1460711"/>
-                  </a:lnTo>
-                  <a:lnTo>
-                    <a:pt x="276956" y="1445304"/>
-                  </a:lnTo>
-                  <a:lnTo>
-                    <a:pt x="200323" y="1429722"/>
-                  </a:lnTo>
-                  <a:lnTo>
-                    <a:pt x="123691" y="1413964"/>
-                  </a:lnTo>
-                  <a:lnTo>
-                    <a:pt x="47058" y="1398028"/>
-                  </a:lnTo>
-                  <a:lnTo>
-                    <a:pt x="0" y="1388131"/>
+                    <a:pt x="47058" y="43633"/>
+                  </a:lnTo>
+                  <a:lnTo>
+                    <a:pt x="123691" y="112833"/>
+                  </a:lnTo>
+                  <a:lnTo>
+                    <a:pt x="200323" y="180224"/>
+                  </a:lnTo>
+                  <a:lnTo>
+                    <a:pt x="276956" y="245853"/>
+                  </a:lnTo>
+                  <a:lnTo>
+                    <a:pt x="353588" y="309768"/>
+                  </a:lnTo>
+                  <a:lnTo>
+                    <a:pt x="430221" y="372013"/>
+                  </a:lnTo>
+                  <a:lnTo>
+                    <a:pt x="506853" y="432631"/>
+                  </a:lnTo>
+                  <a:lnTo>
+                    <a:pt x="583486" y="491666"/>
+                  </a:lnTo>
+                  <a:lnTo>
+                    <a:pt x="660118" y="549157"/>
+                  </a:lnTo>
+                  <a:lnTo>
+                    <a:pt x="736751" y="605147"/>
+                  </a:lnTo>
+                  <a:lnTo>
+                    <a:pt x="813384" y="659673"/>
+                  </a:lnTo>
+                  <a:lnTo>
+                    <a:pt x="890016" y="712775"/>
+                  </a:lnTo>
+                  <a:lnTo>
+                    <a:pt x="966649" y="764489"/>
+                  </a:lnTo>
+                  <a:lnTo>
+                    <a:pt x="1043281" y="814851"/>
+                  </a:lnTo>
+                  <a:lnTo>
+                    <a:pt x="1119914" y="863898"/>
+                  </a:lnTo>
+                  <a:lnTo>
+                    <a:pt x="1196546" y="911663"/>
+                  </a:lnTo>
+                  <a:lnTo>
+                    <a:pt x="1273179" y="958179"/>
+                  </a:lnTo>
+                  <a:lnTo>
+                    <a:pt x="1349811" y="1003481"/>
+                  </a:lnTo>
+                  <a:lnTo>
+                    <a:pt x="1426444" y="1047598"/>
+                  </a:lnTo>
+                  <a:lnTo>
+                    <a:pt x="1503076" y="1090563"/>
+                  </a:lnTo>
+                  <a:lnTo>
+                    <a:pt x="1579709" y="1132405"/>
+                  </a:lnTo>
+                  <a:lnTo>
+                    <a:pt x="1656342" y="1173154"/>
+                  </a:lnTo>
+                  <a:lnTo>
+                    <a:pt x="1732974" y="1212837"/>
+                  </a:lnTo>
+                  <a:lnTo>
+                    <a:pt x="1809607" y="1251484"/>
+                  </a:lnTo>
+                  <a:lnTo>
+                    <a:pt x="1886239" y="1289121"/>
+                  </a:lnTo>
+                  <a:lnTo>
+                    <a:pt x="1962872" y="1325775"/>
+                  </a:lnTo>
+                  <a:lnTo>
+                    <a:pt x="2039504" y="1361470"/>
+                  </a:lnTo>
+                  <a:lnTo>
+                    <a:pt x="2116137" y="1396233"/>
+                  </a:lnTo>
+                  <a:lnTo>
+                    <a:pt x="2192769" y="1430088"/>
+                  </a:lnTo>
+                  <a:lnTo>
+                    <a:pt x="2269402" y="1463058"/>
+                  </a:lnTo>
+                  <a:lnTo>
+                    <a:pt x="2346034" y="1495166"/>
+                  </a:lnTo>
+                  <a:lnTo>
+                    <a:pt x="2422667" y="1526436"/>
+                  </a:lnTo>
+                  <a:lnTo>
+                    <a:pt x="2499300" y="1556888"/>
+                  </a:lnTo>
+                  <a:lnTo>
+                    <a:pt x="2575932" y="1586544"/>
+                  </a:lnTo>
+                  <a:lnTo>
+                    <a:pt x="2652565" y="1615426"/>
+                  </a:lnTo>
+                  <a:lnTo>
+                    <a:pt x="2729197" y="1643553"/>
+                  </a:lnTo>
+                  <a:lnTo>
+                    <a:pt x="2805830" y="1670945"/>
+                  </a:lnTo>
+                  <a:lnTo>
+                    <a:pt x="2882462" y="1697621"/>
+                  </a:lnTo>
+                  <a:lnTo>
+                    <a:pt x="2959095" y="1723600"/>
+                  </a:lnTo>
+                  <a:lnTo>
+                    <a:pt x="3035727" y="1748900"/>
+                  </a:lnTo>
+                  <a:lnTo>
+                    <a:pt x="3112360" y="1773539"/>
+                  </a:lnTo>
+                  <a:lnTo>
+                    <a:pt x="3188993" y="1797535"/>
+                  </a:lnTo>
+                  <a:lnTo>
+                    <a:pt x="3265625" y="1820903"/>
+                  </a:lnTo>
+                  <a:lnTo>
+                    <a:pt x="3342258" y="1843660"/>
+                  </a:lnTo>
+                  <a:lnTo>
+                    <a:pt x="3418890" y="1863827"/>
+                  </a:lnTo>
+                  <a:lnTo>
+                    <a:pt x="3495523" y="1873092"/>
+                  </a:lnTo>
+                  <a:lnTo>
+                    <a:pt x="3572155" y="1882252"/>
+                  </a:lnTo>
+                  <a:lnTo>
+                    <a:pt x="3648788" y="1891310"/>
+                  </a:lnTo>
+                  <a:lnTo>
+                    <a:pt x="3725420" y="1900267"/>
+                  </a:lnTo>
+                  <a:lnTo>
+                    <a:pt x="3802053" y="1909124"/>
+                  </a:lnTo>
+                  <a:lnTo>
+                    <a:pt x="3878685" y="1917881"/>
+                  </a:lnTo>
+                  <a:lnTo>
+                    <a:pt x="3955318" y="1926541"/>
+                  </a:lnTo>
+                  <a:lnTo>
+                    <a:pt x="4031951" y="1935103"/>
+                  </a:lnTo>
+                  <a:lnTo>
+                    <a:pt x="4108583" y="1943570"/>
+                  </a:lnTo>
+                  <a:lnTo>
+                    <a:pt x="4185216" y="1951942"/>
+                  </a:lnTo>
+                  <a:lnTo>
+                    <a:pt x="4261848" y="1960221"/>
+                  </a:lnTo>
+                  <a:lnTo>
+                    <a:pt x="4338481" y="1968406"/>
+                  </a:lnTo>
+                  <a:lnTo>
+                    <a:pt x="4415113" y="1976500"/>
+                  </a:lnTo>
+                  <a:lnTo>
+                    <a:pt x="4491746" y="1984504"/>
+                  </a:lnTo>
+                  <a:lnTo>
+                    <a:pt x="4568378" y="1992418"/>
+                  </a:lnTo>
+                  <a:lnTo>
+                    <a:pt x="4645011" y="2000244"/>
+                  </a:lnTo>
+                  <a:lnTo>
+                    <a:pt x="4721644" y="2007982"/>
+                  </a:lnTo>
+                  <a:lnTo>
+                    <a:pt x="4798276" y="2015633"/>
+                  </a:lnTo>
+                  <a:lnTo>
+                    <a:pt x="4874909" y="2023199"/>
+                  </a:lnTo>
+                  <a:lnTo>
+                    <a:pt x="4951541" y="2030680"/>
+                  </a:lnTo>
+                  <a:lnTo>
+                    <a:pt x="5028174" y="2038077"/>
+                  </a:lnTo>
+                  <a:lnTo>
+                    <a:pt x="5104806" y="2045392"/>
+                  </a:lnTo>
+                  <a:lnTo>
+                    <a:pt x="5181439" y="2052625"/>
+                  </a:lnTo>
+                  <a:lnTo>
+                    <a:pt x="5258071" y="2059776"/>
+                  </a:lnTo>
+                  <a:lnTo>
+                    <a:pt x="5334704" y="2066848"/>
+                  </a:lnTo>
+                  <a:lnTo>
+                    <a:pt x="5411336" y="2073841"/>
+                  </a:lnTo>
+                  <a:lnTo>
+                    <a:pt x="5487969" y="2080755"/>
+                  </a:lnTo>
+                  <a:lnTo>
+                    <a:pt x="5564602" y="2087592"/>
+                  </a:lnTo>
+                  <a:lnTo>
+                    <a:pt x="5641234" y="2094353"/>
+                  </a:lnTo>
+                  <a:lnTo>
+                    <a:pt x="5717867" y="2101038"/>
+                  </a:lnTo>
+                  <a:lnTo>
+                    <a:pt x="5794499" y="2107648"/>
+                  </a:lnTo>
+                  <a:lnTo>
+                    <a:pt x="5871132" y="2114184"/>
+                  </a:lnTo>
+                  <a:lnTo>
+                    <a:pt x="5947764" y="2120647"/>
+                  </a:lnTo>
+                  <a:lnTo>
+                    <a:pt x="6024397" y="2127038"/>
+                  </a:lnTo>
+                  <a:lnTo>
+                    <a:pt x="6101029" y="2133357"/>
+                  </a:lnTo>
+                  <a:lnTo>
+                    <a:pt x="6177662" y="2139606"/>
+                  </a:lnTo>
+                  <a:lnTo>
+                    <a:pt x="6254294" y="2145785"/>
+                  </a:lnTo>
+                  <a:lnTo>
+                    <a:pt x="6330927" y="2151894"/>
+                  </a:lnTo>
+                  <a:lnTo>
+                    <a:pt x="6407560" y="2157935"/>
+                  </a:lnTo>
+                  <a:lnTo>
+                    <a:pt x="6484192" y="2163909"/>
+                  </a:lnTo>
+                  <a:lnTo>
+                    <a:pt x="6560825" y="2169815"/>
+                  </a:lnTo>
+                  <a:lnTo>
+                    <a:pt x="6637457" y="2175656"/>
+                  </a:lnTo>
+                  <a:lnTo>
+                    <a:pt x="6714090" y="2181431"/>
+                  </a:lnTo>
+                  <a:lnTo>
+                    <a:pt x="6790722" y="2187142"/>
+                  </a:lnTo>
+                  <a:lnTo>
+                    <a:pt x="6867355" y="2192789"/>
+                  </a:lnTo>
+                  <a:lnTo>
+                    <a:pt x="6943987" y="2198372"/>
+                  </a:lnTo>
+                  <a:lnTo>
+                    <a:pt x="7020620" y="2203893"/>
+                  </a:lnTo>
+                  <a:lnTo>
+                    <a:pt x="7097253" y="2209353"/>
+                  </a:lnTo>
+                  <a:lnTo>
+                    <a:pt x="7173885" y="2214751"/>
+                  </a:lnTo>
+                  <a:lnTo>
+                    <a:pt x="7250518" y="2220089"/>
+                  </a:lnTo>
+                  <a:lnTo>
+                    <a:pt x="7327150" y="2225367"/>
+                  </a:lnTo>
+                  <a:lnTo>
+                    <a:pt x="7403783" y="2230586"/>
+                  </a:lnTo>
+                  <a:lnTo>
+                    <a:pt x="7403783" y="2483361"/>
+                  </a:lnTo>
+                  <a:lnTo>
+                    <a:pt x="7327150" y="2477767"/>
+                  </a:lnTo>
+                  <a:lnTo>
+                    <a:pt x="7250518" y="2472024"/>
+                  </a:lnTo>
+                  <a:lnTo>
+                    <a:pt x="7173885" y="2466127"/>
+                  </a:lnTo>
+                  <a:lnTo>
+                    <a:pt x="7097253" y="2460071"/>
+                  </a:lnTo>
+                  <a:lnTo>
+                    <a:pt x="7020620" y="2453853"/>
+                  </a:lnTo>
+                  <a:lnTo>
+                    <a:pt x="6943987" y="2447468"/>
+                  </a:lnTo>
+                  <a:lnTo>
+                    <a:pt x="6867355" y="2440912"/>
+                  </a:lnTo>
+                  <a:lnTo>
+                    <a:pt x="6790722" y="2434180"/>
+                  </a:lnTo>
+                  <a:lnTo>
+                    <a:pt x="6714090" y="2427267"/>
+                  </a:lnTo>
+                  <a:lnTo>
+                    <a:pt x="6637457" y="2420169"/>
+                  </a:lnTo>
+                  <a:lnTo>
+                    <a:pt x="6560825" y="2412880"/>
+                  </a:lnTo>
+                  <a:lnTo>
+                    <a:pt x="6484192" y="2405396"/>
+                  </a:lnTo>
+                  <a:lnTo>
+                    <a:pt x="6407560" y="2397710"/>
+                  </a:lnTo>
+                  <a:lnTo>
+                    <a:pt x="6330927" y="2389819"/>
+                  </a:lnTo>
+                  <a:lnTo>
+                    <a:pt x="6254294" y="2381716"/>
+                  </a:lnTo>
+                  <a:lnTo>
+                    <a:pt x="6177662" y="2373395"/>
+                  </a:lnTo>
+                  <a:lnTo>
+                    <a:pt x="6101029" y="2364852"/>
+                  </a:lnTo>
+                  <a:lnTo>
+                    <a:pt x="6024397" y="2356079"/>
+                  </a:lnTo>
+                  <a:lnTo>
+                    <a:pt x="5947764" y="2347070"/>
+                  </a:lnTo>
+                  <a:lnTo>
+                    <a:pt x="5871132" y="2337820"/>
+                  </a:lnTo>
+                  <a:lnTo>
+                    <a:pt x="5794499" y="2328322"/>
+                  </a:lnTo>
+                  <a:lnTo>
+                    <a:pt x="5717867" y="2318569"/>
+                  </a:lnTo>
+                  <a:lnTo>
+                    <a:pt x="5641234" y="2308554"/>
+                  </a:lnTo>
+                  <a:lnTo>
+                    <a:pt x="5564602" y="2298270"/>
+                  </a:lnTo>
+                  <a:lnTo>
+                    <a:pt x="5487969" y="2287711"/>
+                  </a:lnTo>
+                  <a:lnTo>
+                    <a:pt x="5411336" y="2276868"/>
+                  </a:lnTo>
+                  <a:lnTo>
+                    <a:pt x="5334704" y="2265734"/>
+                  </a:lnTo>
+                  <a:lnTo>
+                    <a:pt x="5258071" y="2254301"/>
+                  </a:lnTo>
+                  <a:lnTo>
+                    <a:pt x="5181439" y="2242562"/>
+                  </a:lnTo>
+                  <a:lnTo>
+                    <a:pt x="5104806" y="2230508"/>
+                  </a:lnTo>
+                  <a:lnTo>
+                    <a:pt x="5028174" y="2218130"/>
+                  </a:lnTo>
+                  <a:lnTo>
+                    <a:pt x="4951541" y="2205420"/>
+                  </a:lnTo>
+                  <a:lnTo>
+                    <a:pt x="4874909" y="2192369"/>
+                  </a:lnTo>
+                  <a:lnTo>
+                    <a:pt x="4798276" y="2178968"/>
+                  </a:lnTo>
+                  <a:lnTo>
+                    <a:pt x="4721644" y="2165208"/>
+                  </a:lnTo>
+                  <a:lnTo>
+                    <a:pt x="4645011" y="2151078"/>
+                  </a:lnTo>
+                  <a:lnTo>
+                    <a:pt x="4568378" y="2136569"/>
+                  </a:lnTo>
+                  <a:lnTo>
+                    <a:pt x="4491746" y="2121671"/>
+                  </a:lnTo>
+                  <a:lnTo>
+                    <a:pt x="4415113" y="2106373"/>
+                  </a:lnTo>
+                  <a:lnTo>
+                    <a:pt x="4338481" y="2090664"/>
+                  </a:lnTo>
+                  <a:lnTo>
+                    <a:pt x="4261848" y="2074534"/>
+                  </a:lnTo>
+                  <a:lnTo>
+                    <a:pt x="4185216" y="2057971"/>
+                  </a:lnTo>
+                  <a:lnTo>
+                    <a:pt x="4108583" y="2040964"/>
+                  </a:lnTo>
+                  <a:lnTo>
+                    <a:pt x="4031951" y="2023501"/>
+                  </a:lnTo>
+                  <a:lnTo>
+                    <a:pt x="3955318" y="2005568"/>
+                  </a:lnTo>
+                  <a:lnTo>
+                    <a:pt x="3878685" y="1987155"/>
+                  </a:lnTo>
+                  <a:lnTo>
+                    <a:pt x="3802053" y="1968248"/>
+                  </a:lnTo>
+                  <a:lnTo>
+                    <a:pt x="3725420" y="1948833"/>
+                  </a:lnTo>
+                  <a:lnTo>
+                    <a:pt x="3648788" y="1928897"/>
+                  </a:lnTo>
+                  <a:lnTo>
+                    <a:pt x="3572155" y="1908427"/>
+                  </a:lnTo>
+                  <a:lnTo>
+                    <a:pt x="3495523" y="1887407"/>
+                  </a:lnTo>
+                  <a:lnTo>
+                    <a:pt x="3418890" y="1865823"/>
+                  </a:lnTo>
+                  <a:lnTo>
+                    <a:pt x="3342258" y="1854458"/>
+                  </a:lnTo>
+                  <a:lnTo>
+                    <a:pt x="3265625" y="1844983"/>
+                  </a:lnTo>
+                  <a:lnTo>
+                    <a:pt x="3188993" y="1835401"/>
+                  </a:lnTo>
+                  <a:lnTo>
+                    <a:pt x="3112360" y="1825710"/>
+                  </a:lnTo>
+                  <a:lnTo>
+                    <a:pt x="3035727" y="1815910"/>
+                  </a:lnTo>
+                  <a:lnTo>
+                    <a:pt x="2959095" y="1805998"/>
+                  </a:lnTo>
+                  <a:lnTo>
+                    <a:pt x="2882462" y="1795975"/>
+                  </a:lnTo>
+                  <a:lnTo>
+                    <a:pt x="2805830" y="1785838"/>
+                  </a:lnTo>
+                  <a:lnTo>
+                    <a:pt x="2729197" y="1775586"/>
+                  </a:lnTo>
+                  <a:lnTo>
+                    <a:pt x="2652565" y="1765219"/>
+                  </a:lnTo>
+                  <a:lnTo>
+                    <a:pt x="2575932" y="1754734"/>
+                  </a:lnTo>
+                  <a:lnTo>
+                    <a:pt x="2499300" y="1744130"/>
+                  </a:lnTo>
+                  <a:lnTo>
+                    <a:pt x="2422667" y="1733407"/>
+                  </a:lnTo>
+                  <a:lnTo>
+                    <a:pt x="2346034" y="1722562"/>
+                  </a:lnTo>
+                  <a:lnTo>
+                    <a:pt x="2269402" y="1711594"/>
+                  </a:lnTo>
+                  <a:lnTo>
+                    <a:pt x="2192769" y="1700502"/>
+                  </a:lnTo>
+                  <a:lnTo>
+                    <a:pt x="2116137" y="1689285"/>
+                  </a:lnTo>
+                  <a:lnTo>
+                    <a:pt x="2039504" y="1677941"/>
+                  </a:lnTo>
+                  <a:lnTo>
+                    <a:pt x="1962872" y="1666468"/>
+                  </a:lnTo>
+                  <a:lnTo>
+                    <a:pt x="1886239" y="1654866"/>
+                  </a:lnTo>
+                  <a:lnTo>
+                    <a:pt x="1809607" y="1643132"/>
+                  </a:lnTo>
+                  <a:lnTo>
+                    <a:pt x="1732974" y="1631266"/>
+                  </a:lnTo>
+                  <a:lnTo>
+                    <a:pt x="1656342" y="1619265"/>
+                  </a:lnTo>
+                  <a:lnTo>
+                    <a:pt x="1579709" y="1607129"/>
+                  </a:lnTo>
+                  <a:lnTo>
+                    <a:pt x="1503076" y="1594855"/>
+                  </a:lnTo>
+                  <a:lnTo>
+                    <a:pt x="1426444" y="1582442"/>
+                  </a:lnTo>
+                  <a:lnTo>
+                    <a:pt x="1349811" y="1569889"/>
+                  </a:lnTo>
+                  <a:lnTo>
+                    <a:pt x="1273179" y="1557194"/>
+                  </a:lnTo>
+                  <a:lnTo>
+                    <a:pt x="1196546" y="1544355"/>
+                  </a:lnTo>
+                  <a:lnTo>
+                    <a:pt x="1119914" y="1531371"/>
+                  </a:lnTo>
+                  <a:lnTo>
+                    <a:pt x="1043281" y="1518240"/>
+                  </a:lnTo>
+                  <a:lnTo>
+                    <a:pt x="966649" y="1504960"/>
+                  </a:lnTo>
+                  <a:lnTo>
+                    <a:pt x="890016" y="1491530"/>
+                  </a:lnTo>
+                  <a:lnTo>
+                    <a:pt x="813384" y="1477948"/>
+                  </a:lnTo>
+                  <a:lnTo>
+                    <a:pt x="736751" y="1464213"/>
+                  </a:lnTo>
+                  <a:lnTo>
+                    <a:pt x="660118" y="1450322"/>
+                  </a:lnTo>
+                  <a:lnTo>
+                    <a:pt x="583486" y="1436274"/>
+                  </a:lnTo>
+                  <a:lnTo>
+                    <a:pt x="506853" y="1422067"/>
+                  </a:lnTo>
+                  <a:lnTo>
+                    <a:pt x="430221" y="1407699"/>
+                  </a:lnTo>
+                  <a:lnTo>
+                    <a:pt x="353588" y="1393168"/>
+                  </a:lnTo>
+                  <a:lnTo>
+                    <a:pt x="276956" y="1378473"/>
+                  </a:lnTo>
+                  <a:lnTo>
+                    <a:pt x="200323" y="1363612"/>
+                  </a:lnTo>
+                  <a:lnTo>
+                    <a:pt x="123691" y="1348583"/>
+                  </a:lnTo>
+                  <a:lnTo>
+                    <a:pt x="47058" y="1333383"/>
+                  </a:lnTo>
+                  <a:lnTo>
+                    <a:pt x="0" y="1323944"/>
                   </a:lnTo>
                   <a:close/>
                 </a:path>
@@ -3621,306 +3621,306 @@
           </p:nvSpPr>
           <p:spPr>
             <a:xfrm>
-              <a:off x="817517" y="2726890"/>
-              <a:ext cx="7403783" cy="2338728"/>
+              <a:off x="817517" y="2865436"/>
+              <a:ext cx="7403783" cy="2230586"/>
             </a:xfrm>
             <a:custGeom>
               <a:avLst/>
               <a:pathLst>
-                <a:path w="7403783" h="2338728">
+                <a:path w="7403783" h="2230586">
                   <a:moveTo>
                     <a:pt x="0" y="0"/>
                   </a:moveTo>
                   <a:lnTo>
-                    <a:pt x="47058" y="45749"/>
-                  </a:lnTo>
-                  <a:lnTo>
-                    <a:pt x="123691" y="118303"/>
-                  </a:lnTo>
-                  <a:lnTo>
-                    <a:pt x="200323" y="188961"/>
-                  </a:lnTo>
-                  <a:lnTo>
-                    <a:pt x="276956" y="257773"/>
-                  </a:lnTo>
-                  <a:lnTo>
-                    <a:pt x="353588" y="324786"/>
-                  </a:lnTo>
-                  <a:lnTo>
-                    <a:pt x="430221" y="390049"/>
-                  </a:lnTo>
-                  <a:lnTo>
-                    <a:pt x="506853" y="453606"/>
-                  </a:lnTo>
-                  <a:lnTo>
-                    <a:pt x="583486" y="515502"/>
-                  </a:lnTo>
-                  <a:lnTo>
-                    <a:pt x="660118" y="575781"/>
-                  </a:lnTo>
-                  <a:lnTo>
-                    <a:pt x="736751" y="634485"/>
-                  </a:lnTo>
-                  <a:lnTo>
-                    <a:pt x="813384" y="691655"/>
-                  </a:lnTo>
-                  <a:lnTo>
-                    <a:pt x="890016" y="747331"/>
-                  </a:lnTo>
-                  <a:lnTo>
-                    <a:pt x="966649" y="801552"/>
-                  </a:lnTo>
-                  <a:lnTo>
-                    <a:pt x="1043281" y="854356"/>
-                  </a:lnTo>
-                  <a:lnTo>
-                    <a:pt x="1119914" y="905781"/>
-                  </a:lnTo>
-                  <a:lnTo>
-                    <a:pt x="1196546" y="955861"/>
-                  </a:lnTo>
-                  <a:lnTo>
-                    <a:pt x="1273179" y="1004633"/>
-                  </a:lnTo>
-                  <a:lnTo>
-                    <a:pt x="1349811" y="1052131"/>
-                  </a:lnTo>
-                  <a:lnTo>
-                    <a:pt x="1426444" y="1098387"/>
-                  </a:lnTo>
-                  <a:lnTo>
-                    <a:pt x="1503076" y="1143435"/>
-                  </a:lnTo>
-                  <a:lnTo>
-                    <a:pt x="1579709" y="1187305"/>
-                  </a:lnTo>
-                  <a:lnTo>
-                    <a:pt x="1656342" y="1230030"/>
-                  </a:lnTo>
-                  <a:lnTo>
-                    <a:pt x="1732974" y="1271637"/>
-                  </a:lnTo>
-                  <a:lnTo>
-                    <a:pt x="1809607" y="1312158"/>
-                  </a:lnTo>
-                  <a:lnTo>
-                    <a:pt x="1886239" y="1351620"/>
-                  </a:lnTo>
-                  <a:lnTo>
-                    <a:pt x="1962872" y="1390050"/>
-                  </a:lnTo>
-                  <a:lnTo>
-                    <a:pt x="2039504" y="1427476"/>
-                  </a:lnTo>
-                  <a:lnTo>
-                    <a:pt x="2116137" y="1463925"/>
-                  </a:lnTo>
-                  <a:lnTo>
-                    <a:pt x="2192769" y="1499421"/>
-                  </a:lnTo>
-                  <a:lnTo>
-                    <a:pt x="2269402" y="1533989"/>
-                  </a:lnTo>
-                  <a:lnTo>
-                    <a:pt x="2346034" y="1567654"/>
-                  </a:lnTo>
-                  <a:lnTo>
-                    <a:pt x="2422667" y="1600439"/>
-                  </a:lnTo>
-                  <a:lnTo>
-                    <a:pt x="2499300" y="1632368"/>
-                  </a:lnTo>
-                  <a:lnTo>
-                    <a:pt x="2575932" y="1663462"/>
-                  </a:lnTo>
-                  <a:lnTo>
-                    <a:pt x="2652565" y="1693744"/>
-                  </a:lnTo>
-                  <a:lnTo>
-                    <a:pt x="2729197" y="1723235"/>
-                  </a:lnTo>
-                  <a:lnTo>
-                    <a:pt x="2805830" y="1751955"/>
-                  </a:lnTo>
-                  <a:lnTo>
-                    <a:pt x="2882462" y="1779924"/>
-                  </a:lnTo>
-                  <a:lnTo>
-                    <a:pt x="2959095" y="1807163"/>
-                  </a:lnTo>
-                  <a:lnTo>
-                    <a:pt x="3035727" y="1833689"/>
-                  </a:lnTo>
-                  <a:lnTo>
-                    <a:pt x="3112360" y="1859523"/>
-                  </a:lnTo>
-                  <a:lnTo>
-                    <a:pt x="3188993" y="1884682"/>
-                  </a:lnTo>
-                  <a:lnTo>
-                    <a:pt x="3265625" y="1909183"/>
-                  </a:lnTo>
-                  <a:lnTo>
-                    <a:pt x="3342258" y="1933044"/>
-                  </a:lnTo>
-                  <a:lnTo>
-                    <a:pt x="3418890" y="1954188"/>
-                  </a:lnTo>
-                  <a:lnTo>
-                    <a:pt x="3495523" y="1963902"/>
-                  </a:lnTo>
-                  <a:lnTo>
-                    <a:pt x="3572155" y="1973507"/>
-                  </a:lnTo>
-                  <a:lnTo>
-                    <a:pt x="3648788" y="1983004"/>
-                  </a:lnTo>
-                  <a:lnTo>
-                    <a:pt x="3725420" y="1992395"/>
-                  </a:lnTo>
-                  <a:lnTo>
-                    <a:pt x="3802053" y="2001681"/>
-                  </a:lnTo>
-                  <a:lnTo>
-                    <a:pt x="3878685" y="2010863"/>
-                  </a:lnTo>
-                  <a:lnTo>
-                    <a:pt x="3955318" y="2019942"/>
-                  </a:lnTo>
-                  <a:lnTo>
-                    <a:pt x="4031951" y="2028920"/>
-                  </a:lnTo>
-                  <a:lnTo>
-                    <a:pt x="4108583" y="2037797"/>
-                  </a:lnTo>
-                  <a:lnTo>
-                    <a:pt x="4185216" y="2046575"/>
-                  </a:lnTo>
-                  <a:lnTo>
-                    <a:pt x="4261848" y="2055255"/>
-                  </a:lnTo>
-                  <a:lnTo>
-                    <a:pt x="4338481" y="2063837"/>
-                  </a:lnTo>
-                  <a:lnTo>
-                    <a:pt x="4415113" y="2072324"/>
-                  </a:lnTo>
-                  <a:lnTo>
-                    <a:pt x="4491746" y="2080716"/>
-                  </a:lnTo>
-                  <a:lnTo>
-                    <a:pt x="4568378" y="2089013"/>
-                  </a:lnTo>
-                  <a:lnTo>
-                    <a:pt x="4645011" y="2097218"/>
-                  </a:lnTo>
-                  <a:lnTo>
-                    <a:pt x="4721644" y="2105331"/>
-                  </a:lnTo>
-                  <a:lnTo>
-                    <a:pt x="4798276" y="2113354"/>
-                  </a:lnTo>
-                  <a:lnTo>
-                    <a:pt x="4874909" y="2121286"/>
-                  </a:lnTo>
-                  <a:lnTo>
-                    <a:pt x="4951541" y="2129130"/>
-                  </a:lnTo>
-                  <a:lnTo>
-                    <a:pt x="5028174" y="2136886"/>
-                  </a:lnTo>
-                  <a:lnTo>
-                    <a:pt x="5104806" y="2144555"/>
-                  </a:lnTo>
-                  <a:lnTo>
-                    <a:pt x="5181439" y="2152139"/>
-                  </a:lnTo>
-                  <a:lnTo>
-                    <a:pt x="5258071" y="2159637"/>
-                  </a:lnTo>
-                  <a:lnTo>
-                    <a:pt x="5334704" y="2167052"/>
-                  </a:lnTo>
-                  <a:lnTo>
-                    <a:pt x="5411336" y="2174384"/>
-                  </a:lnTo>
-                  <a:lnTo>
-                    <a:pt x="5487969" y="2181633"/>
-                  </a:lnTo>
-                  <a:lnTo>
-                    <a:pt x="5564602" y="2188802"/>
-                  </a:lnTo>
-                  <a:lnTo>
-                    <a:pt x="5641234" y="2195890"/>
-                  </a:lnTo>
-                  <a:lnTo>
-                    <a:pt x="5717867" y="2202899"/>
-                  </a:lnTo>
-                  <a:lnTo>
-                    <a:pt x="5794499" y="2209830"/>
-                  </a:lnTo>
-                  <a:lnTo>
-                    <a:pt x="5871132" y="2216683"/>
-                  </a:lnTo>
-                  <a:lnTo>
-                    <a:pt x="5947764" y="2223459"/>
-                  </a:lnTo>
-                  <a:lnTo>
-                    <a:pt x="6024397" y="2230160"/>
-                  </a:lnTo>
-                  <a:lnTo>
-                    <a:pt x="6101029" y="2236786"/>
-                  </a:lnTo>
-                  <a:lnTo>
-                    <a:pt x="6177662" y="2243337"/>
-                  </a:lnTo>
-                  <a:lnTo>
-                    <a:pt x="6254294" y="2249815"/>
-                  </a:lnTo>
-                  <a:lnTo>
-                    <a:pt x="6330927" y="2256221"/>
-                  </a:lnTo>
-                  <a:lnTo>
-                    <a:pt x="6407560" y="2262555"/>
-                  </a:lnTo>
-                  <a:lnTo>
-                    <a:pt x="6484192" y="2268818"/>
-                  </a:lnTo>
-                  <a:lnTo>
-                    <a:pt x="6560825" y="2275011"/>
-                  </a:lnTo>
-                  <a:lnTo>
-                    <a:pt x="6637457" y="2281135"/>
-                  </a:lnTo>
-                  <a:lnTo>
-                    <a:pt x="6714090" y="2287190"/>
-                  </a:lnTo>
-                  <a:lnTo>
-                    <a:pt x="6790722" y="2293178"/>
-                  </a:lnTo>
-                  <a:lnTo>
-                    <a:pt x="6867355" y="2299098"/>
-                  </a:lnTo>
-                  <a:lnTo>
-                    <a:pt x="6943987" y="2304952"/>
-                  </a:lnTo>
-                  <a:lnTo>
-                    <a:pt x="7020620" y="2310741"/>
-                  </a:lnTo>
-                  <a:lnTo>
-                    <a:pt x="7097253" y="2316465"/>
-                  </a:lnTo>
-                  <a:lnTo>
-                    <a:pt x="7173885" y="2322125"/>
-                  </a:lnTo>
-                  <a:lnTo>
-                    <a:pt x="7250518" y="2327722"/>
-                  </a:lnTo>
-                  <a:lnTo>
-                    <a:pt x="7327150" y="2333256"/>
-                  </a:lnTo>
-                  <a:lnTo>
-                    <a:pt x="7403783" y="2338728"/>
+                    <a:pt x="47058" y="43633"/>
+                  </a:lnTo>
+                  <a:lnTo>
+                    <a:pt x="123691" y="112833"/>
+                  </a:lnTo>
+                  <a:lnTo>
+                    <a:pt x="200323" y="180224"/>
+                  </a:lnTo>
+                  <a:lnTo>
+                    <a:pt x="276956" y="245853"/>
+                  </a:lnTo>
+                  <a:lnTo>
+                    <a:pt x="353588" y="309768"/>
+                  </a:lnTo>
+                  <a:lnTo>
+                    <a:pt x="430221" y="372013"/>
+                  </a:lnTo>
+                  <a:lnTo>
+                    <a:pt x="506853" y="432631"/>
+                  </a:lnTo>
+                  <a:lnTo>
+                    <a:pt x="583486" y="491666"/>
+                  </a:lnTo>
+                  <a:lnTo>
+                    <a:pt x="660118" y="549157"/>
+                  </a:lnTo>
+                  <a:lnTo>
+                    <a:pt x="736751" y="605147"/>
+                  </a:lnTo>
+                  <a:lnTo>
+                    <a:pt x="813384" y="659673"/>
+                  </a:lnTo>
+                  <a:lnTo>
+                    <a:pt x="890016" y="712775"/>
+                  </a:lnTo>
+                  <a:lnTo>
+                    <a:pt x="966649" y="764489"/>
+                  </a:lnTo>
+                  <a:lnTo>
+                    <a:pt x="1043281" y="814851"/>
+                  </a:lnTo>
+                  <a:lnTo>
+                    <a:pt x="1119914" y="863898"/>
+                  </a:lnTo>
+                  <a:lnTo>
+                    <a:pt x="1196546" y="911663"/>
+                  </a:lnTo>
+                  <a:lnTo>
+                    <a:pt x="1273179" y="958179"/>
+                  </a:lnTo>
+                  <a:lnTo>
+                    <a:pt x="1349811" y="1003481"/>
+                  </a:lnTo>
+                  <a:lnTo>
+                    <a:pt x="1426444" y="1047598"/>
+                  </a:lnTo>
+                  <a:lnTo>
+                    <a:pt x="1503076" y="1090563"/>
+                  </a:lnTo>
+                  <a:lnTo>
+                    <a:pt x="1579709" y="1132405"/>
+                  </a:lnTo>
+                  <a:lnTo>
+                    <a:pt x="1656342" y="1173154"/>
+                  </a:lnTo>
+                  <a:lnTo>
+                    <a:pt x="1732974" y="1212837"/>
+                  </a:lnTo>
+                  <a:lnTo>
+                    <a:pt x="1809607" y="1251484"/>
+                  </a:lnTo>
+                  <a:lnTo>
+                    <a:pt x="1886239" y="1289121"/>
+                  </a:lnTo>
+                  <a:lnTo>
+                    <a:pt x="1962872" y="1325775"/>
+                  </a:lnTo>
+                  <a:lnTo>
+                    <a:pt x="2039504" y="1361470"/>
+                  </a:lnTo>
+                  <a:lnTo>
+                    <a:pt x="2116137" y="1396233"/>
+                  </a:lnTo>
+                  <a:lnTo>
+                    <a:pt x="2192769" y="1430088"/>
+                  </a:lnTo>
+                  <a:lnTo>
+                    <a:pt x="2269402" y="1463058"/>
+                  </a:lnTo>
+                  <a:lnTo>
+                    <a:pt x="2346034" y="1495166"/>
+                  </a:lnTo>
+                  <a:lnTo>
+                    <a:pt x="2422667" y="1526436"/>
+                  </a:lnTo>
+                  <a:lnTo>
+                    <a:pt x="2499300" y="1556888"/>
+                  </a:lnTo>
+                  <a:lnTo>
+                    <a:pt x="2575932" y="1586544"/>
+                  </a:lnTo>
+                  <a:lnTo>
+                    <a:pt x="2652565" y="1615426"/>
+                  </a:lnTo>
+                  <a:lnTo>
+                    <a:pt x="2729197" y="1643553"/>
+                  </a:lnTo>
+                  <a:lnTo>
+                    <a:pt x="2805830" y="1670945"/>
+                  </a:lnTo>
+                  <a:lnTo>
+                    <a:pt x="2882462" y="1697621"/>
+                  </a:lnTo>
+                  <a:lnTo>
+                    <a:pt x="2959095" y="1723600"/>
+                  </a:lnTo>
+                  <a:lnTo>
+                    <a:pt x="3035727" y="1748900"/>
+                  </a:lnTo>
+                  <a:lnTo>
+                    <a:pt x="3112360" y="1773539"/>
+                  </a:lnTo>
+                  <a:lnTo>
+                    <a:pt x="3188993" y="1797535"/>
+                  </a:lnTo>
+                  <a:lnTo>
+                    <a:pt x="3265625" y="1820903"/>
+                  </a:lnTo>
+                  <a:lnTo>
+                    <a:pt x="3342258" y="1843660"/>
+                  </a:lnTo>
+                  <a:lnTo>
+                    <a:pt x="3418890" y="1863827"/>
+                  </a:lnTo>
+                  <a:lnTo>
+                    <a:pt x="3495523" y="1873092"/>
+                  </a:lnTo>
+                  <a:lnTo>
+                    <a:pt x="3572155" y="1882252"/>
+                  </a:lnTo>
+                  <a:lnTo>
+                    <a:pt x="3648788" y="1891310"/>
+                  </a:lnTo>
+                  <a:lnTo>
+                    <a:pt x="3725420" y="1900267"/>
+                  </a:lnTo>
+                  <a:lnTo>
+                    <a:pt x="3802053" y="1909124"/>
+                  </a:lnTo>
+                  <a:lnTo>
+                    <a:pt x="3878685" y="1917881"/>
+                  </a:lnTo>
+                  <a:lnTo>
+                    <a:pt x="3955318" y="1926541"/>
+                  </a:lnTo>
+                  <a:lnTo>
+                    <a:pt x="4031951" y="1935103"/>
+                  </a:lnTo>
+                  <a:lnTo>
+                    <a:pt x="4108583" y="1943570"/>
+                  </a:lnTo>
+                  <a:lnTo>
+                    <a:pt x="4185216" y="1951942"/>
+                  </a:lnTo>
+                  <a:lnTo>
+                    <a:pt x="4261848" y="1960221"/>
+                  </a:lnTo>
+                  <a:lnTo>
+                    <a:pt x="4338481" y="1968406"/>
+                  </a:lnTo>
+                  <a:lnTo>
+                    <a:pt x="4415113" y="1976500"/>
+                  </a:lnTo>
+                  <a:lnTo>
+                    <a:pt x="4491746" y="1984504"/>
+                  </a:lnTo>
+                  <a:lnTo>
+                    <a:pt x="4568378" y="1992418"/>
+                  </a:lnTo>
+                  <a:lnTo>
+                    <a:pt x="4645011" y="2000244"/>
+                  </a:lnTo>
+                  <a:lnTo>
+                    <a:pt x="4721644" y="2007982"/>
+                  </a:lnTo>
+                  <a:lnTo>
+                    <a:pt x="4798276" y="2015633"/>
+                  </a:lnTo>
+                  <a:lnTo>
+                    <a:pt x="4874909" y="2023199"/>
+                  </a:lnTo>
+                  <a:lnTo>
+                    <a:pt x="4951541" y="2030680"/>
+                  </a:lnTo>
+                  <a:lnTo>
+                    <a:pt x="5028174" y="2038077"/>
+                  </a:lnTo>
+                  <a:lnTo>
+                    <a:pt x="5104806" y="2045392"/>
+                  </a:lnTo>
+                  <a:lnTo>
+                    <a:pt x="5181439" y="2052625"/>
+                  </a:lnTo>
+                  <a:lnTo>
+                    <a:pt x="5258071" y="2059776"/>
+                  </a:lnTo>
+                  <a:lnTo>
+                    <a:pt x="5334704" y="2066848"/>
+                  </a:lnTo>
+                  <a:lnTo>
+                    <a:pt x="5411336" y="2073841"/>
+                  </a:lnTo>
+                  <a:lnTo>
+                    <a:pt x="5487969" y="2080755"/>
+                  </a:lnTo>
+                  <a:lnTo>
+                    <a:pt x="5564602" y="2087592"/>
+                  </a:lnTo>
+                  <a:lnTo>
+                    <a:pt x="5641234" y="2094353"/>
+                  </a:lnTo>
+                  <a:lnTo>
+                    <a:pt x="5717867" y="2101038"/>
+                  </a:lnTo>
+                  <a:lnTo>
+                    <a:pt x="5794499" y="2107648"/>
+                  </a:lnTo>
+                  <a:lnTo>
+                    <a:pt x="5871132" y="2114184"/>
+                  </a:lnTo>
+                  <a:lnTo>
+                    <a:pt x="5947764" y="2120647"/>
+                  </a:lnTo>
+                  <a:lnTo>
+                    <a:pt x="6024397" y="2127038"/>
+                  </a:lnTo>
+                  <a:lnTo>
+                    <a:pt x="6101029" y="2133357"/>
+                  </a:lnTo>
+                  <a:lnTo>
+                    <a:pt x="6177662" y="2139606"/>
+                  </a:lnTo>
+                  <a:lnTo>
+                    <a:pt x="6254294" y="2145785"/>
+                  </a:lnTo>
+                  <a:lnTo>
+                    <a:pt x="6330927" y="2151894"/>
+                  </a:lnTo>
+                  <a:lnTo>
+                    <a:pt x="6407560" y="2157935"/>
+                  </a:lnTo>
+                  <a:lnTo>
+                    <a:pt x="6484192" y="2163909"/>
+                  </a:lnTo>
+                  <a:lnTo>
+                    <a:pt x="6560825" y="2169815"/>
+                  </a:lnTo>
+                  <a:lnTo>
+                    <a:pt x="6637457" y="2175656"/>
+                  </a:lnTo>
+                  <a:lnTo>
+                    <a:pt x="6714090" y="2181431"/>
+                  </a:lnTo>
+                  <a:lnTo>
+                    <a:pt x="6790722" y="2187142"/>
+                  </a:lnTo>
+                  <a:lnTo>
+                    <a:pt x="6867355" y="2192789"/>
+                  </a:lnTo>
+                  <a:lnTo>
+                    <a:pt x="6943987" y="2198372"/>
+                  </a:lnTo>
+                  <a:lnTo>
+                    <a:pt x="7020620" y="2203893"/>
+                  </a:lnTo>
+                  <a:lnTo>
+                    <a:pt x="7097253" y="2209353"/>
+                  </a:lnTo>
+                  <a:lnTo>
+                    <a:pt x="7173885" y="2214751"/>
+                  </a:lnTo>
+                  <a:lnTo>
+                    <a:pt x="7250518" y="2220089"/>
+                  </a:lnTo>
+                  <a:lnTo>
+                    <a:pt x="7327150" y="2225367"/>
+                  </a:lnTo>
+                  <a:lnTo>
+                    <a:pt x="7403783" y="2230586"/>
                   </a:lnTo>
                 </a:path>
               </a:pathLst>
@@ -3940,303 +3940,303 @@
           </p:nvSpPr>
           <p:spPr>
             <a:xfrm>
-              <a:off x="817517" y="4115022"/>
-              <a:ext cx="7403783" cy="1215626"/>
+              <a:off x="817517" y="4189381"/>
+              <a:ext cx="7403783" cy="1159416"/>
             </a:xfrm>
             <a:custGeom>
               <a:avLst/>
               <a:pathLst>
-                <a:path w="7403783" h="1215626">
+                <a:path w="7403783" h="1159416">
                   <a:moveTo>
-                    <a:pt x="7403783" y="1215626"/>
+                    <a:pt x="7403783" y="1159416"/>
                   </a:moveTo>
                   <a:lnTo>
-                    <a:pt x="7327150" y="1209762"/>
-                  </a:lnTo>
-                  <a:lnTo>
-                    <a:pt x="7250518" y="1203740"/>
-                  </a:lnTo>
-                  <a:lnTo>
-                    <a:pt x="7173885" y="1197557"/>
-                  </a:lnTo>
-                  <a:lnTo>
-                    <a:pt x="7097253" y="1191208"/>
-                  </a:lnTo>
-                  <a:lnTo>
-                    <a:pt x="7020620" y="1184688"/>
-                  </a:lnTo>
-                  <a:lnTo>
-                    <a:pt x="6943987" y="1177993"/>
-                  </a:lnTo>
-                  <a:lnTo>
-                    <a:pt x="6867355" y="1171119"/>
-                  </a:lnTo>
-                  <a:lnTo>
-                    <a:pt x="6790722" y="1164061"/>
-                  </a:lnTo>
-                  <a:lnTo>
-                    <a:pt x="6714090" y="1156813"/>
-                  </a:lnTo>
-                  <a:lnTo>
-                    <a:pt x="6637457" y="1149370"/>
-                  </a:lnTo>
-                  <a:lnTo>
-                    <a:pt x="6560825" y="1141728"/>
-                  </a:lnTo>
-                  <a:lnTo>
-                    <a:pt x="6484192" y="1133881"/>
-                  </a:lnTo>
-                  <a:lnTo>
-                    <a:pt x="6407560" y="1125823"/>
-                  </a:lnTo>
-                  <a:lnTo>
-                    <a:pt x="6330927" y="1117550"/>
-                  </a:lnTo>
-                  <a:lnTo>
-                    <a:pt x="6254294" y="1109054"/>
-                  </a:lnTo>
-                  <a:lnTo>
-                    <a:pt x="6177662" y="1100330"/>
-                  </a:lnTo>
-                  <a:lnTo>
-                    <a:pt x="6101029" y="1091372"/>
-                  </a:lnTo>
-                  <a:lnTo>
-                    <a:pt x="6024397" y="1082173"/>
-                  </a:lnTo>
-                  <a:lnTo>
-                    <a:pt x="5947764" y="1072728"/>
-                  </a:lnTo>
-                  <a:lnTo>
-                    <a:pt x="5871132" y="1063030"/>
-                  </a:lnTo>
-                  <a:lnTo>
-                    <a:pt x="5794499" y="1053071"/>
-                  </a:lnTo>
-                  <a:lnTo>
-                    <a:pt x="5717867" y="1042845"/>
-                  </a:lnTo>
-                  <a:lnTo>
-                    <a:pt x="5641234" y="1032344"/>
-                  </a:lnTo>
-                  <a:lnTo>
-                    <a:pt x="5564602" y="1021562"/>
-                  </a:lnTo>
-                  <a:lnTo>
-                    <a:pt x="5487969" y="1010491"/>
-                  </a:lnTo>
-                  <a:lnTo>
-                    <a:pt x="5411336" y="999122"/>
-                  </a:lnTo>
-                  <a:lnTo>
-                    <a:pt x="5334704" y="987449"/>
-                  </a:lnTo>
-                  <a:lnTo>
-                    <a:pt x="5258071" y="975462"/>
-                  </a:lnTo>
-                  <a:lnTo>
-                    <a:pt x="5181439" y="963153"/>
-                  </a:lnTo>
-                  <a:lnTo>
-                    <a:pt x="5104806" y="950515"/>
-                  </a:lnTo>
-                  <a:lnTo>
-                    <a:pt x="5028174" y="937537"/>
-                  </a:lnTo>
-                  <a:lnTo>
-                    <a:pt x="4951541" y="924211"/>
-                  </a:lnTo>
-                  <a:lnTo>
-                    <a:pt x="4874909" y="910527"/>
-                  </a:lnTo>
-                  <a:lnTo>
-                    <a:pt x="4798276" y="896476"/>
-                  </a:lnTo>
-                  <a:lnTo>
-                    <a:pt x="4721644" y="882049"/>
-                  </a:lnTo>
-                  <a:lnTo>
-                    <a:pt x="4645011" y="867234"/>
-                  </a:lnTo>
-                  <a:lnTo>
-                    <a:pt x="4568378" y="852021"/>
-                  </a:lnTo>
-                  <a:lnTo>
-                    <a:pt x="4491746" y="836401"/>
-                  </a:lnTo>
-                  <a:lnTo>
-                    <a:pt x="4415113" y="820361"/>
-                  </a:lnTo>
-                  <a:lnTo>
-                    <a:pt x="4338481" y="803891"/>
-                  </a:lnTo>
-                  <a:lnTo>
-                    <a:pt x="4261848" y="786979"/>
-                  </a:lnTo>
-                  <a:lnTo>
-                    <a:pt x="4185216" y="769613"/>
-                  </a:lnTo>
-                  <a:lnTo>
-                    <a:pt x="4108583" y="751781"/>
-                  </a:lnTo>
-                  <a:lnTo>
-                    <a:pt x="4031951" y="733471"/>
-                  </a:lnTo>
-                  <a:lnTo>
-                    <a:pt x="3955318" y="714670"/>
-                  </a:lnTo>
-                  <a:lnTo>
-                    <a:pt x="3878685" y="695364"/>
-                  </a:lnTo>
-                  <a:lnTo>
-                    <a:pt x="3802053" y="675540"/>
-                  </a:lnTo>
-                  <a:lnTo>
-                    <a:pt x="3725420" y="655184"/>
-                  </a:lnTo>
-                  <a:lnTo>
-                    <a:pt x="3648788" y="634282"/>
-                  </a:lnTo>
-                  <a:lnTo>
-                    <a:pt x="3572155" y="612819"/>
-                  </a:lnTo>
-                  <a:lnTo>
-                    <a:pt x="3495523" y="590780"/>
-                  </a:lnTo>
-                  <a:lnTo>
-                    <a:pt x="3418890" y="568150"/>
-                  </a:lnTo>
-                  <a:lnTo>
-                    <a:pt x="3342258" y="556234"/>
-                  </a:lnTo>
-                  <a:lnTo>
-                    <a:pt x="3265625" y="546299"/>
-                  </a:lnTo>
-                  <a:lnTo>
-                    <a:pt x="3188993" y="536252"/>
-                  </a:lnTo>
-                  <a:lnTo>
-                    <a:pt x="3112360" y="526092"/>
-                  </a:lnTo>
-                  <a:lnTo>
-                    <a:pt x="3035727" y="515816"/>
-                  </a:lnTo>
-                  <a:lnTo>
-                    <a:pt x="2959095" y="505424"/>
-                  </a:lnTo>
-                  <a:lnTo>
-                    <a:pt x="2882462" y="494915"/>
-                  </a:lnTo>
-                  <a:lnTo>
-                    <a:pt x="2805830" y="484286"/>
-                  </a:lnTo>
-                  <a:lnTo>
-                    <a:pt x="2729197" y="473538"/>
-                  </a:lnTo>
-                  <a:lnTo>
-                    <a:pt x="2652565" y="462668"/>
-                  </a:lnTo>
-                  <a:lnTo>
-                    <a:pt x="2575932" y="451674"/>
-                  </a:lnTo>
-                  <a:lnTo>
-                    <a:pt x="2499300" y="440557"/>
-                  </a:lnTo>
-                  <a:lnTo>
-                    <a:pt x="2422667" y="429313"/>
-                  </a:lnTo>
-                  <a:lnTo>
-                    <a:pt x="2346034" y="417942"/>
-                  </a:lnTo>
-                  <a:lnTo>
-                    <a:pt x="2269402" y="406443"/>
-                  </a:lnTo>
-                  <a:lnTo>
-                    <a:pt x="2192769" y="394814"/>
-                  </a:lnTo>
-                  <a:lnTo>
-                    <a:pt x="2116137" y="383053"/>
-                  </a:lnTo>
-                  <a:lnTo>
-                    <a:pt x="2039504" y="371158"/>
-                  </a:lnTo>
-                  <a:lnTo>
-                    <a:pt x="1962872" y="359130"/>
-                  </a:lnTo>
-                  <a:lnTo>
-                    <a:pt x="1886239" y="346965"/>
-                  </a:lnTo>
-                  <a:lnTo>
-                    <a:pt x="1809607" y="334662"/>
-                  </a:lnTo>
-                  <a:lnTo>
-                    <a:pt x="1732974" y="322221"/>
-                  </a:lnTo>
-                  <a:lnTo>
-                    <a:pt x="1656342" y="309638"/>
-                  </a:lnTo>
-                  <a:lnTo>
-                    <a:pt x="1579709" y="296913"/>
-                  </a:lnTo>
-                  <a:lnTo>
-                    <a:pt x="1503076" y="284044"/>
-                  </a:lnTo>
-                  <a:lnTo>
-                    <a:pt x="1426444" y="271030"/>
-                  </a:lnTo>
-                  <a:lnTo>
-                    <a:pt x="1349811" y="257868"/>
-                  </a:lnTo>
-                  <a:lnTo>
-                    <a:pt x="1273179" y="244557"/>
-                  </a:lnTo>
-                  <a:lnTo>
-                    <a:pt x="1196546" y="231096"/>
-                  </a:lnTo>
-                  <a:lnTo>
-                    <a:pt x="1119914" y="217483"/>
-                  </a:lnTo>
-                  <a:lnTo>
-                    <a:pt x="1043281" y="203715"/>
-                  </a:lnTo>
-                  <a:lnTo>
-                    <a:pt x="966649" y="189791"/>
-                  </a:lnTo>
-                  <a:lnTo>
-                    <a:pt x="890016" y="175710"/>
-                  </a:lnTo>
-                  <a:lnTo>
-                    <a:pt x="813384" y="161470"/>
-                  </a:lnTo>
-                  <a:lnTo>
-                    <a:pt x="736751" y="147069"/>
-                  </a:lnTo>
-                  <a:lnTo>
-                    <a:pt x="660118" y="132504"/>
-                  </a:lnTo>
-                  <a:lnTo>
-                    <a:pt x="583486" y="117775"/>
-                  </a:lnTo>
-                  <a:lnTo>
-                    <a:pt x="506853" y="102879"/>
-                  </a:lnTo>
-                  <a:lnTo>
-                    <a:pt x="430221" y="87815"/>
-                  </a:lnTo>
-                  <a:lnTo>
-                    <a:pt x="353588" y="72580"/>
-                  </a:lnTo>
-                  <a:lnTo>
-                    <a:pt x="276956" y="57172"/>
-                  </a:lnTo>
-                  <a:lnTo>
-                    <a:pt x="200323" y="41591"/>
-                  </a:lnTo>
-                  <a:lnTo>
-                    <a:pt x="123691" y="25833"/>
-                  </a:lnTo>
-                  <a:lnTo>
-                    <a:pt x="47058" y="9896"/>
+                    <a:pt x="7327150" y="1153823"/>
+                  </a:lnTo>
+                  <a:lnTo>
+                    <a:pt x="7250518" y="1148079"/>
+                  </a:lnTo>
+                  <a:lnTo>
+                    <a:pt x="7173885" y="1142182"/>
+                  </a:lnTo>
+                  <a:lnTo>
+                    <a:pt x="7097253" y="1136127"/>
+                  </a:lnTo>
+                  <a:lnTo>
+                    <a:pt x="7020620" y="1129908"/>
+                  </a:lnTo>
+                  <a:lnTo>
+                    <a:pt x="6943987" y="1123523"/>
+                  </a:lnTo>
+                  <a:lnTo>
+                    <a:pt x="6867355" y="1116967"/>
+                  </a:lnTo>
+                  <a:lnTo>
+                    <a:pt x="6790722" y="1110235"/>
+                  </a:lnTo>
+                  <a:lnTo>
+                    <a:pt x="6714090" y="1103322"/>
+                  </a:lnTo>
+                  <a:lnTo>
+                    <a:pt x="6637457" y="1096224"/>
+                  </a:lnTo>
+                  <a:lnTo>
+                    <a:pt x="6560825" y="1088935"/>
+                  </a:lnTo>
+                  <a:lnTo>
+                    <a:pt x="6484192" y="1081451"/>
+                  </a:lnTo>
+                  <a:lnTo>
+                    <a:pt x="6407560" y="1073766"/>
+                  </a:lnTo>
+                  <a:lnTo>
+                    <a:pt x="6330927" y="1065874"/>
+                  </a:lnTo>
+                  <a:lnTo>
+                    <a:pt x="6254294" y="1057771"/>
+                  </a:lnTo>
+                  <a:lnTo>
+                    <a:pt x="6177662" y="1049451"/>
+                  </a:lnTo>
+                  <a:lnTo>
+                    <a:pt x="6101029" y="1040907"/>
+                  </a:lnTo>
+                  <a:lnTo>
+                    <a:pt x="6024397" y="1032134"/>
+                  </a:lnTo>
+                  <a:lnTo>
+                    <a:pt x="5947764" y="1023126"/>
+                  </a:lnTo>
+                  <a:lnTo>
+                    <a:pt x="5871132" y="1013875"/>
+                  </a:lnTo>
+                  <a:lnTo>
+                    <a:pt x="5794499" y="1004377"/>
+                  </a:lnTo>
+                  <a:lnTo>
+                    <a:pt x="5717867" y="994624"/>
+                  </a:lnTo>
+                  <a:lnTo>
+                    <a:pt x="5641234" y="984609"/>
+                  </a:lnTo>
+                  <a:lnTo>
+                    <a:pt x="5564602" y="974326"/>
+                  </a:lnTo>
+                  <a:lnTo>
+                    <a:pt x="5487969" y="963766"/>
+                  </a:lnTo>
+                  <a:lnTo>
+                    <a:pt x="5411336" y="952923"/>
+                  </a:lnTo>
+                  <a:lnTo>
+                    <a:pt x="5334704" y="941789"/>
+                  </a:lnTo>
+                  <a:lnTo>
+                    <a:pt x="5258071" y="930357"/>
+                  </a:lnTo>
+                  <a:lnTo>
+                    <a:pt x="5181439" y="918617"/>
+                  </a:lnTo>
+                  <a:lnTo>
+                    <a:pt x="5104806" y="906563"/>
+                  </a:lnTo>
+                  <a:lnTo>
+                    <a:pt x="5028174" y="894185"/>
+                  </a:lnTo>
+                  <a:lnTo>
+                    <a:pt x="4951541" y="881476"/>
+                  </a:lnTo>
+                  <a:lnTo>
+                    <a:pt x="4874909" y="868425"/>
+                  </a:lnTo>
+                  <a:lnTo>
+                    <a:pt x="4798276" y="855024"/>
+                  </a:lnTo>
+                  <a:lnTo>
+                    <a:pt x="4721644" y="841263"/>
+                  </a:lnTo>
+                  <a:lnTo>
+                    <a:pt x="4645011" y="827133"/>
+                  </a:lnTo>
+                  <a:lnTo>
+                    <a:pt x="4568378" y="812624"/>
+                  </a:lnTo>
+                  <a:lnTo>
+                    <a:pt x="4491746" y="797726"/>
+                  </a:lnTo>
+                  <a:lnTo>
+                    <a:pt x="4415113" y="782428"/>
+                  </a:lnTo>
+                  <a:lnTo>
+                    <a:pt x="4338481" y="766719"/>
+                  </a:lnTo>
+                  <a:lnTo>
+                    <a:pt x="4261848" y="750589"/>
+                  </a:lnTo>
+                  <a:lnTo>
+                    <a:pt x="4185216" y="734027"/>
+                  </a:lnTo>
+                  <a:lnTo>
+                    <a:pt x="4108583" y="717019"/>
+                  </a:lnTo>
+                  <a:lnTo>
+                    <a:pt x="4031951" y="699556"/>
+                  </a:lnTo>
+                  <a:lnTo>
+                    <a:pt x="3955318" y="681624"/>
+                  </a:lnTo>
+                  <a:lnTo>
+                    <a:pt x="3878685" y="663210"/>
+                  </a:lnTo>
+                  <a:lnTo>
+                    <a:pt x="3802053" y="644303"/>
+                  </a:lnTo>
+                  <a:lnTo>
+                    <a:pt x="3725420" y="624888"/>
+                  </a:lnTo>
+                  <a:lnTo>
+                    <a:pt x="3648788" y="604953"/>
+                  </a:lnTo>
+                  <a:lnTo>
+                    <a:pt x="3572155" y="584482"/>
+                  </a:lnTo>
+                  <a:lnTo>
+                    <a:pt x="3495523" y="563462"/>
+                  </a:lnTo>
+                  <a:lnTo>
+                    <a:pt x="3418890" y="541879"/>
+                  </a:lnTo>
+                  <a:lnTo>
+                    <a:pt x="3342258" y="530514"/>
+                  </a:lnTo>
+                  <a:lnTo>
+                    <a:pt x="3265625" y="521038"/>
+                  </a:lnTo>
+                  <a:lnTo>
+                    <a:pt x="3188993" y="511456"/>
+                  </a:lnTo>
+                  <a:lnTo>
+                    <a:pt x="3112360" y="501765"/>
+                  </a:lnTo>
+                  <a:lnTo>
+                    <a:pt x="3035727" y="491965"/>
+                  </a:lnTo>
+                  <a:lnTo>
+                    <a:pt x="2959095" y="482054"/>
+                  </a:lnTo>
+                  <a:lnTo>
+                    <a:pt x="2882462" y="472030"/>
+                  </a:lnTo>
+                  <a:lnTo>
+                    <a:pt x="2805830" y="461893"/>
+                  </a:lnTo>
+                  <a:lnTo>
+                    <a:pt x="2729197" y="451642"/>
+                  </a:lnTo>
+                  <a:lnTo>
+                    <a:pt x="2652565" y="441274"/>
+                  </a:lnTo>
+                  <a:lnTo>
+                    <a:pt x="2575932" y="430789"/>
+                  </a:lnTo>
+                  <a:lnTo>
+                    <a:pt x="2499300" y="420185"/>
+                  </a:lnTo>
+                  <a:lnTo>
+                    <a:pt x="2422667" y="409462"/>
+                  </a:lnTo>
+                  <a:lnTo>
+                    <a:pt x="2346034" y="398617"/>
+                  </a:lnTo>
+                  <a:lnTo>
+                    <a:pt x="2269402" y="387649"/>
+                  </a:lnTo>
+                  <a:lnTo>
+                    <a:pt x="2192769" y="376558"/>
+                  </a:lnTo>
+                  <a:lnTo>
+                    <a:pt x="2116137" y="365340"/>
+                  </a:lnTo>
+                  <a:lnTo>
+                    <a:pt x="2039504" y="353996"/>
+                  </a:lnTo>
+                  <a:lnTo>
+                    <a:pt x="1962872" y="342524"/>
+                  </a:lnTo>
+                  <a:lnTo>
+                    <a:pt x="1886239" y="330921"/>
+                  </a:lnTo>
+                  <a:lnTo>
+                    <a:pt x="1809607" y="319188"/>
+                  </a:lnTo>
+                  <a:lnTo>
+                    <a:pt x="1732974" y="307321"/>
+                  </a:lnTo>
+                  <a:lnTo>
+                    <a:pt x="1656342" y="295321"/>
+                  </a:lnTo>
+                  <a:lnTo>
+                    <a:pt x="1579709" y="283184"/>
+                  </a:lnTo>
+                  <a:lnTo>
+                    <a:pt x="1503076" y="270910"/>
+                  </a:lnTo>
+                  <a:lnTo>
+                    <a:pt x="1426444" y="258498"/>
+                  </a:lnTo>
+                  <a:lnTo>
+                    <a:pt x="1349811" y="245944"/>
+                  </a:lnTo>
+                  <a:lnTo>
+                    <a:pt x="1273179" y="233249"/>
+                  </a:lnTo>
+                  <a:lnTo>
+                    <a:pt x="1196546" y="220410"/>
+                  </a:lnTo>
+                  <a:lnTo>
+                    <a:pt x="1119914" y="207426"/>
+                  </a:lnTo>
+                  <a:lnTo>
+                    <a:pt x="1043281" y="194295"/>
+                  </a:lnTo>
+                  <a:lnTo>
+                    <a:pt x="966649" y="181016"/>
+                  </a:lnTo>
+                  <a:lnTo>
+                    <a:pt x="890016" y="167586"/>
+                  </a:lnTo>
+                  <a:lnTo>
+                    <a:pt x="813384" y="154004"/>
+                  </a:lnTo>
+                  <a:lnTo>
+                    <a:pt x="736751" y="140268"/>
+                  </a:lnTo>
+                  <a:lnTo>
+                    <a:pt x="660118" y="126377"/>
+                  </a:lnTo>
+                  <a:lnTo>
+                    <a:pt x="583486" y="112329"/>
+                  </a:lnTo>
+                  <a:lnTo>
+                    <a:pt x="506853" y="98122"/>
+                  </a:lnTo>
+                  <a:lnTo>
+                    <a:pt x="430221" y="83754"/>
+                  </a:lnTo>
+                  <a:lnTo>
+                    <a:pt x="353588" y="69224"/>
+                  </a:lnTo>
+                  <a:lnTo>
+                    <a:pt x="276956" y="54529"/>
+                  </a:lnTo>
+                  <a:lnTo>
+                    <a:pt x="200323" y="39668"/>
+                  </a:lnTo>
+                  <a:lnTo>
+                    <a:pt x="123691" y="24638"/>
+                  </a:lnTo>
+                  <a:lnTo>
+                    <a:pt x="47058" y="9439"/>
                   </a:lnTo>
                   <a:lnTo>
                     <a:pt x="0" y="0"/>
@@ -4259,306 +4259,306 @@
           </p:nvSpPr>
           <p:spPr>
             <a:xfrm>
-              <a:off x="817517" y="3537325"/>
-              <a:ext cx="7403783" cy="1686778"/>
+              <a:off x="817517" y="3638396"/>
+              <a:ext cx="7403783" cy="1608782"/>
             </a:xfrm>
             <a:custGeom>
               <a:avLst/>
               <a:pathLst>
-                <a:path w="7403783" h="1686778">
+                <a:path w="7403783" h="1608782">
                   <a:moveTo>
                     <a:pt x="0" y="0"/>
                   </a:moveTo>
                   <a:lnTo>
-                    <a:pt x="47058" y="23256"/>
-                  </a:lnTo>
-                  <a:lnTo>
-                    <a:pt x="123691" y="60420"/>
-                  </a:lnTo>
-                  <a:lnTo>
-                    <a:pt x="200323" y="96889"/>
-                  </a:lnTo>
-                  <a:lnTo>
-                    <a:pt x="276956" y="132677"/>
-                  </a:lnTo>
-                  <a:lnTo>
-                    <a:pt x="353588" y="167797"/>
-                  </a:lnTo>
-                  <a:lnTo>
-                    <a:pt x="430221" y="202260"/>
-                  </a:lnTo>
-                  <a:lnTo>
-                    <a:pt x="506853" y="236078"/>
-                  </a:lnTo>
-                  <a:lnTo>
-                    <a:pt x="583486" y="269265"/>
-                  </a:lnTo>
-                  <a:lnTo>
-                    <a:pt x="660118" y="301832"/>
-                  </a:lnTo>
-                  <a:lnTo>
-                    <a:pt x="736751" y="333790"/>
-                  </a:lnTo>
-                  <a:lnTo>
-                    <a:pt x="813384" y="365150"/>
-                  </a:lnTo>
-                  <a:lnTo>
-                    <a:pt x="890016" y="395925"/>
-                  </a:lnTo>
-                  <a:lnTo>
-                    <a:pt x="966649" y="426125"/>
-                  </a:lnTo>
-                  <a:lnTo>
-                    <a:pt x="1043281" y="455760"/>
-                  </a:lnTo>
-                  <a:lnTo>
-                    <a:pt x="1119914" y="484841"/>
-                  </a:lnTo>
-                  <a:lnTo>
-                    <a:pt x="1196546" y="513379"/>
-                  </a:lnTo>
-                  <a:lnTo>
-                    <a:pt x="1273179" y="541383"/>
-                  </a:lnTo>
-                  <a:lnTo>
-                    <a:pt x="1349811" y="568865"/>
-                  </a:lnTo>
-                  <a:lnTo>
-                    <a:pt x="1426444" y="595832"/>
-                  </a:lnTo>
-                  <a:lnTo>
-                    <a:pt x="1503076" y="622296"/>
-                  </a:lnTo>
-                  <a:lnTo>
-                    <a:pt x="1579709" y="648265"/>
-                  </a:lnTo>
-                  <a:lnTo>
-                    <a:pt x="1656342" y="673748"/>
-                  </a:lnTo>
-                  <a:lnTo>
-                    <a:pt x="1732974" y="698756"/>
-                  </a:lnTo>
-                  <a:lnTo>
-                    <a:pt x="1809607" y="723296"/>
-                  </a:lnTo>
-                  <a:lnTo>
-                    <a:pt x="1886239" y="747378"/>
-                  </a:lnTo>
-                  <a:lnTo>
-                    <a:pt x="1962872" y="771009"/>
-                  </a:lnTo>
-                  <a:lnTo>
-                    <a:pt x="2039504" y="794199"/>
-                  </a:lnTo>
-                  <a:lnTo>
-                    <a:pt x="2116137" y="816955"/>
-                  </a:lnTo>
-                  <a:lnTo>
-                    <a:pt x="2192769" y="839286"/>
-                  </a:lnTo>
-                  <a:lnTo>
-                    <a:pt x="2269402" y="861200"/>
-                  </a:lnTo>
-                  <a:lnTo>
-                    <a:pt x="2346034" y="882705"/>
-                  </a:lnTo>
-                  <a:lnTo>
-                    <a:pt x="2422667" y="903807"/>
-                  </a:lnTo>
-                  <a:lnTo>
-                    <a:pt x="2499300" y="924515"/>
-                  </a:lnTo>
-                  <a:lnTo>
-                    <a:pt x="2575932" y="944836"/>
-                  </a:lnTo>
-                  <a:lnTo>
-                    <a:pt x="2652565" y="964777"/>
-                  </a:lnTo>
-                  <a:lnTo>
-                    <a:pt x="2729197" y="984346"/>
-                  </a:lnTo>
-                  <a:lnTo>
-                    <a:pt x="2805830" y="1003549"/>
-                  </a:lnTo>
-                  <a:lnTo>
-                    <a:pt x="2882462" y="1022393"/>
-                  </a:lnTo>
-                  <a:lnTo>
-                    <a:pt x="2959095" y="1040885"/>
-                  </a:lnTo>
-                  <a:lnTo>
-                    <a:pt x="3035727" y="1059031"/>
-                  </a:lnTo>
-                  <a:lnTo>
-                    <a:pt x="3112360" y="1076838"/>
-                  </a:lnTo>
-                  <a:lnTo>
-                    <a:pt x="3188993" y="1094313"/>
-                  </a:lnTo>
-                  <a:lnTo>
-                    <a:pt x="3265625" y="1111461"/>
-                  </a:lnTo>
-                  <a:lnTo>
-                    <a:pt x="3342258" y="1128288"/>
-                  </a:lnTo>
-                  <a:lnTo>
-                    <a:pt x="3418890" y="1144801"/>
-                  </a:lnTo>
-                  <a:lnTo>
-                    <a:pt x="3495523" y="1161005"/>
-                  </a:lnTo>
-                  <a:lnTo>
-                    <a:pt x="3572155" y="1176907"/>
-                  </a:lnTo>
-                  <a:lnTo>
-                    <a:pt x="3648788" y="1192511"/>
-                  </a:lnTo>
-                  <a:lnTo>
-                    <a:pt x="3725420" y="1207823"/>
-                  </a:lnTo>
-                  <a:lnTo>
-                    <a:pt x="3802053" y="1222850"/>
-                  </a:lnTo>
-                  <a:lnTo>
-                    <a:pt x="3878685" y="1237596"/>
-                  </a:lnTo>
-                  <a:lnTo>
-                    <a:pt x="3955318" y="1252066"/>
-                  </a:lnTo>
-                  <a:lnTo>
-                    <a:pt x="4031951" y="1266265"/>
-                  </a:lnTo>
-                  <a:lnTo>
-                    <a:pt x="4108583" y="1280200"/>
-                  </a:lnTo>
-                  <a:lnTo>
-                    <a:pt x="4185216" y="1293874"/>
-                  </a:lnTo>
-                  <a:lnTo>
-                    <a:pt x="4261848" y="1307292"/>
-                  </a:lnTo>
-                  <a:lnTo>
-                    <a:pt x="4338481" y="1320460"/>
-                  </a:lnTo>
-                  <a:lnTo>
-                    <a:pt x="4415113" y="1333381"/>
-                  </a:lnTo>
-                  <a:lnTo>
-                    <a:pt x="4491746" y="1346061"/>
-                  </a:lnTo>
-                  <a:lnTo>
-                    <a:pt x="4568378" y="1358504"/>
-                  </a:lnTo>
-                  <a:lnTo>
-                    <a:pt x="4645011" y="1370715"/>
-                  </a:lnTo>
-                  <a:lnTo>
-                    <a:pt x="4721644" y="1382697"/>
-                  </a:lnTo>
-                  <a:lnTo>
-                    <a:pt x="4798276" y="1394455"/>
-                  </a:lnTo>
-                  <a:lnTo>
-                    <a:pt x="4874909" y="1405994"/>
-                  </a:lnTo>
-                  <a:lnTo>
-                    <a:pt x="4951541" y="1417317"/>
-                  </a:lnTo>
-                  <a:lnTo>
-                    <a:pt x="5028174" y="1428429"/>
-                  </a:lnTo>
-                  <a:lnTo>
-                    <a:pt x="5104806" y="1439332"/>
-                  </a:lnTo>
-                  <a:lnTo>
-                    <a:pt x="5181439" y="1450032"/>
-                  </a:lnTo>
-                  <a:lnTo>
-                    <a:pt x="5258071" y="1460532"/>
-                  </a:lnTo>
-                  <a:lnTo>
-                    <a:pt x="5334704" y="1470836"/>
-                  </a:lnTo>
-                  <a:lnTo>
-                    <a:pt x="5411336" y="1480947"/>
-                  </a:lnTo>
-                  <a:lnTo>
-                    <a:pt x="5487969" y="1490870"/>
-                  </a:lnTo>
-                  <a:lnTo>
-                    <a:pt x="5564602" y="1500606"/>
-                  </a:lnTo>
-                  <a:lnTo>
-                    <a:pt x="5641234" y="1510161"/>
-                  </a:lnTo>
-                  <a:lnTo>
-                    <a:pt x="5717867" y="1519538"/>
-                  </a:lnTo>
-                  <a:lnTo>
-                    <a:pt x="5794499" y="1528739"/>
-                  </a:lnTo>
-                  <a:lnTo>
-                    <a:pt x="5871132" y="1537768"/>
-                  </a:lnTo>
-                  <a:lnTo>
-                    <a:pt x="5947764" y="1546628"/>
-                  </a:lnTo>
-                  <a:lnTo>
-                    <a:pt x="6024397" y="1555323"/>
-                  </a:lnTo>
-                  <a:lnTo>
-                    <a:pt x="6101029" y="1563855"/>
-                  </a:lnTo>
-                  <a:lnTo>
-                    <a:pt x="6177662" y="1572228"/>
-                  </a:lnTo>
-                  <a:lnTo>
-                    <a:pt x="6254294" y="1580445"/>
-                  </a:lnTo>
-                  <a:lnTo>
-                    <a:pt x="6330927" y="1588507"/>
-                  </a:lnTo>
-                  <a:lnTo>
-                    <a:pt x="6407560" y="1596420"/>
-                  </a:lnTo>
-                  <a:lnTo>
-                    <a:pt x="6484192" y="1604184"/>
-                  </a:lnTo>
-                  <a:lnTo>
-                    <a:pt x="6560825" y="1611803"/>
-                  </a:lnTo>
-                  <a:lnTo>
-                    <a:pt x="6637457" y="1619280"/>
-                  </a:lnTo>
-                  <a:lnTo>
-                    <a:pt x="6714090" y="1626617"/>
-                  </a:lnTo>
-                  <a:lnTo>
-                    <a:pt x="6790722" y="1633817"/>
-                  </a:lnTo>
-                  <a:lnTo>
-                    <a:pt x="6867355" y="1640882"/>
-                  </a:lnTo>
-                  <a:lnTo>
-                    <a:pt x="6943987" y="1647816"/>
-                  </a:lnTo>
-                  <a:lnTo>
-                    <a:pt x="7020620" y="1654619"/>
-                  </a:lnTo>
-                  <a:lnTo>
-                    <a:pt x="7097253" y="1661296"/>
-                  </a:lnTo>
-                  <a:lnTo>
-                    <a:pt x="7173885" y="1667848"/>
-                  </a:lnTo>
-                  <a:lnTo>
-                    <a:pt x="7250518" y="1674277"/>
-                  </a:lnTo>
-                  <a:lnTo>
-                    <a:pt x="7327150" y="1680586"/>
-                  </a:lnTo>
-                  <a:lnTo>
-                    <a:pt x="7403783" y="1686778"/>
+                    <a:pt x="47058" y="22180"/>
+                  </a:lnTo>
+                  <a:lnTo>
+                    <a:pt x="123691" y="57626"/>
+                  </a:lnTo>
+                  <a:lnTo>
+                    <a:pt x="200323" y="92409"/>
+                  </a:lnTo>
+                  <a:lnTo>
+                    <a:pt x="276956" y="126542"/>
+                  </a:lnTo>
+                  <a:lnTo>
+                    <a:pt x="353588" y="160038"/>
+                  </a:lnTo>
+                  <a:lnTo>
+                    <a:pt x="430221" y="192907"/>
+                  </a:lnTo>
+                  <a:lnTo>
+                    <a:pt x="506853" y="225162"/>
+                  </a:lnTo>
+                  <a:lnTo>
+                    <a:pt x="583486" y="256814"/>
+                  </a:lnTo>
+                  <a:lnTo>
+                    <a:pt x="660118" y="287875"/>
+                  </a:lnTo>
+                  <a:lnTo>
+                    <a:pt x="736751" y="318355"/>
+                  </a:lnTo>
+                  <a:lnTo>
+                    <a:pt x="813384" y="348266"/>
+                  </a:lnTo>
+                  <a:lnTo>
+                    <a:pt x="890016" y="377618"/>
+                  </a:lnTo>
+                  <a:lnTo>
+                    <a:pt x="966649" y="406421"/>
+                  </a:lnTo>
+                  <a:lnTo>
+                    <a:pt x="1043281" y="434686"/>
+                  </a:lnTo>
+                  <a:lnTo>
+                    <a:pt x="1119914" y="462422"/>
+                  </a:lnTo>
+                  <a:lnTo>
+                    <a:pt x="1196546" y="489640"/>
+                  </a:lnTo>
+                  <a:lnTo>
+                    <a:pt x="1273179" y="516350"/>
+                  </a:lnTo>
+                  <a:lnTo>
+                    <a:pt x="1349811" y="542560"/>
+                  </a:lnTo>
+                  <a:lnTo>
+                    <a:pt x="1426444" y="568281"/>
+                  </a:lnTo>
+                  <a:lnTo>
+                    <a:pt x="1503076" y="593521"/>
+                  </a:lnTo>
+                  <a:lnTo>
+                    <a:pt x="1579709" y="618289"/>
+                  </a:lnTo>
+                  <a:lnTo>
+                    <a:pt x="1656342" y="642595"/>
+                  </a:lnTo>
+                  <a:lnTo>
+                    <a:pt x="1732974" y="666446"/>
+                  </a:lnTo>
+                  <a:lnTo>
+                    <a:pt x="1809607" y="689851"/>
+                  </a:lnTo>
+                  <a:lnTo>
+                    <a:pt x="1886239" y="712819"/>
+                  </a:lnTo>
+                  <a:lnTo>
+                    <a:pt x="1962872" y="735358"/>
+                  </a:lnTo>
+                  <a:lnTo>
+                    <a:pt x="2039504" y="757475"/>
+                  </a:lnTo>
+                  <a:lnTo>
+                    <a:pt x="2116137" y="779180"/>
+                  </a:lnTo>
+                  <a:lnTo>
+                    <a:pt x="2192769" y="800478"/>
+                  </a:lnTo>
+                  <a:lnTo>
+                    <a:pt x="2269402" y="821379"/>
+                  </a:lnTo>
+                  <a:lnTo>
+                    <a:pt x="2346034" y="841889"/>
+                  </a:lnTo>
+                  <a:lnTo>
+                    <a:pt x="2422667" y="862015"/>
+                  </a:lnTo>
+                  <a:lnTo>
+                    <a:pt x="2499300" y="881766"/>
+                  </a:lnTo>
+                  <a:lnTo>
+                    <a:pt x="2575932" y="901147"/>
+                  </a:lnTo>
+                  <a:lnTo>
+                    <a:pt x="2652565" y="920166"/>
+                  </a:lnTo>
+                  <a:lnTo>
+                    <a:pt x="2729197" y="938830"/>
+                  </a:lnTo>
+                  <a:lnTo>
+                    <a:pt x="2805830" y="957145"/>
+                  </a:lnTo>
+                  <a:lnTo>
+                    <a:pt x="2882462" y="975118"/>
+                  </a:lnTo>
+                  <a:lnTo>
+                    <a:pt x="2959095" y="992755"/>
+                  </a:lnTo>
+                  <a:lnTo>
+                    <a:pt x="3035727" y="1010062"/>
+                  </a:lnTo>
+                  <a:lnTo>
+                    <a:pt x="3112360" y="1027046"/>
+                  </a:lnTo>
+                  <a:lnTo>
+                    <a:pt x="3188993" y="1043712"/>
+                  </a:lnTo>
+                  <a:lnTo>
+                    <a:pt x="3265625" y="1060067"/>
+                  </a:lnTo>
+                  <a:lnTo>
+                    <a:pt x="3342258" y="1076116"/>
+                  </a:lnTo>
+                  <a:lnTo>
+                    <a:pt x="3418890" y="1091866"/>
+                  </a:lnTo>
+                  <a:lnTo>
+                    <a:pt x="3495523" y="1107321"/>
+                  </a:lnTo>
+                  <a:lnTo>
+                    <a:pt x="3572155" y="1122487"/>
+                  </a:lnTo>
+                  <a:lnTo>
+                    <a:pt x="3648788" y="1137370"/>
+                  </a:lnTo>
+                  <a:lnTo>
+                    <a:pt x="3725420" y="1151974"/>
+                  </a:lnTo>
+                  <a:lnTo>
+                    <a:pt x="3802053" y="1166306"/>
+                  </a:lnTo>
+                  <a:lnTo>
+                    <a:pt x="3878685" y="1180370"/>
+                  </a:lnTo>
+                  <a:lnTo>
+                    <a:pt x="3955318" y="1194171"/>
+                  </a:lnTo>
+                  <a:lnTo>
+                    <a:pt x="4031951" y="1207714"/>
+                  </a:lnTo>
+                  <a:lnTo>
+                    <a:pt x="4108583" y="1221004"/>
+                  </a:lnTo>
+                  <a:lnTo>
+                    <a:pt x="4185216" y="1234045"/>
+                  </a:lnTo>
+                  <a:lnTo>
+                    <a:pt x="4261848" y="1246843"/>
+                  </a:lnTo>
+                  <a:lnTo>
+                    <a:pt x="4338481" y="1259402"/>
+                  </a:lnTo>
+                  <a:lnTo>
+                    <a:pt x="4415113" y="1271726"/>
+                  </a:lnTo>
+                  <a:lnTo>
+                    <a:pt x="4491746" y="1283820"/>
+                  </a:lnTo>
+                  <a:lnTo>
+                    <a:pt x="4568378" y="1295687"/>
+                  </a:lnTo>
+                  <a:lnTo>
+                    <a:pt x="4645011" y="1307333"/>
+                  </a:lnTo>
+                  <a:lnTo>
+                    <a:pt x="4721644" y="1318762"/>
+                  </a:lnTo>
+                  <a:lnTo>
+                    <a:pt x="4798276" y="1329976"/>
+                  </a:lnTo>
+                  <a:lnTo>
+                    <a:pt x="4874909" y="1340981"/>
+                  </a:lnTo>
+                  <a:lnTo>
+                    <a:pt x="4951541" y="1351781"/>
+                  </a:lnTo>
+                  <a:lnTo>
+                    <a:pt x="5028174" y="1362379"/>
+                  </a:lnTo>
+                  <a:lnTo>
+                    <a:pt x="5104806" y="1372778"/>
+                  </a:lnTo>
+                  <a:lnTo>
+                    <a:pt x="5181439" y="1382983"/>
+                  </a:lnTo>
+                  <a:lnTo>
+                    <a:pt x="5258071" y="1392998"/>
+                  </a:lnTo>
+                  <a:lnTo>
+                    <a:pt x="5334704" y="1402825"/>
+                  </a:lnTo>
+                  <a:lnTo>
+                    <a:pt x="5411336" y="1412469"/>
+                  </a:lnTo>
+                  <a:lnTo>
+                    <a:pt x="5487969" y="1421932"/>
+                  </a:lnTo>
+                  <a:lnTo>
+                    <a:pt x="5564602" y="1431219"/>
+                  </a:lnTo>
+                  <a:lnTo>
+                    <a:pt x="5641234" y="1440332"/>
+                  </a:lnTo>
+                  <a:lnTo>
+                    <a:pt x="5717867" y="1449275"/>
+                  </a:lnTo>
+                  <a:lnTo>
+                    <a:pt x="5794499" y="1458050"/>
+                  </a:lnTo>
+                  <a:lnTo>
+                    <a:pt x="5871132" y="1466662"/>
+                  </a:lnTo>
+                  <a:lnTo>
+                    <a:pt x="5947764" y="1475113"/>
+                  </a:lnTo>
+                  <a:lnTo>
+                    <a:pt x="6024397" y="1483405"/>
+                  </a:lnTo>
+                  <a:lnTo>
+                    <a:pt x="6101029" y="1491543"/>
+                  </a:lnTo>
+                  <a:lnTo>
+                    <a:pt x="6177662" y="1499529"/>
+                  </a:lnTo>
+                  <a:lnTo>
+                    <a:pt x="6254294" y="1507365"/>
+                  </a:lnTo>
+                  <a:lnTo>
+                    <a:pt x="6330927" y="1515055"/>
+                  </a:lnTo>
+                  <a:lnTo>
+                    <a:pt x="6407560" y="1522602"/>
+                  </a:lnTo>
+                  <a:lnTo>
+                    <a:pt x="6484192" y="1530007"/>
+                  </a:lnTo>
+                  <a:lnTo>
+                    <a:pt x="6560825" y="1537274"/>
+                  </a:lnTo>
+                  <a:lnTo>
+                    <a:pt x="6637457" y="1544405"/>
+                  </a:lnTo>
+                  <a:lnTo>
+                    <a:pt x="6714090" y="1551403"/>
+                  </a:lnTo>
+                  <a:lnTo>
+                    <a:pt x="6790722" y="1558270"/>
+                  </a:lnTo>
+                  <a:lnTo>
+                    <a:pt x="6867355" y="1565008"/>
+                  </a:lnTo>
+                  <a:lnTo>
+                    <a:pt x="6943987" y="1571621"/>
+                  </a:lnTo>
+                  <a:lnTo>
+                    <a:pt x="7020620" y="1578110"/>
+                  </a:lnTo>
+                  <a:lnTo>
+                    <a:pt x="7097253" y="1584478"/>
+                  </a:lnTo>
+                  <a:lnTo>
+                    <a:pt x="7173885" y="1590727"/>
+                  </a:lnTo>
+                  <a:lnTo>
+                    <a:pt x="7250518" y="1596859"/>
+                  </a:lnTo>
+                  <a:lnTo>
+                    <a:pt x="7327150" y="1602877"/>
+                  </a:lnTo>
+                  <a:lnTo>
+                    <a:pt x="7403783" y="1608782"/>
                   </a:lnTo>
                 </a:path>
               </a:pathLst>
@@ -4587,7 +4587,7 @@
           </p:nvSpPr>
           <p:spPr>
             <a:xfrm>
-              <a:off x="817517" y="4679530"/>
+              <a:off x="817517" y="4727786"/>
               <a:ext cx="7799693" cy="0"/>
             </a:xfrm>
             <a:custGeom>
@@ -4630,15 +4630,15 @@
           </p:nvSpPr>
           <p:spPr>
             <a:xfrm>
-              <a:off x="4224261" y="1896563"/>
-              <a:ext cx="0" cy="3826579"/>
+              <a:off x="4224261" y="2073503"/>
+              <a:ext cx="0" cy="3649639"/>
             </a:xfrm>
             <a:custGeom>
               <a:avLst/>
               <a:pathLst>
-                <a:path w="0" h="3826579">
+                <a:path w="0" h="3649639">
                   <a:moveTo>
-                    <a:pt x="0" y="3826579"/>
+                    <a:pt x="0" y="3649639"/>
                   </a:moveTo>
                   <a:lnTo>
                     <a:pt x="0" y="0"/>
@@ -4673,7 +4673,7 @@
           </p:nvSpPr>
           <p:spPr>
             <a:xfrm>
-              <a:off x="692708" y="5509156"/>
+              <a:off x="692708" y="5517199"/>
               <a:ext cx="62179" cy="80101"/>
             </a:xfrm>
             <a:prstGeom prst="rect">
@@ -4719,7 +4719,7 @@
           </p:nvSpPr>
           <p:spPr>
             <a:xfrm>
-              <a:off x="692708" y="4639479"/>
+              <a:off x="692708" y="4687735"/>
               <a:ext cx="62179" cy="80101"/>
             </a:xfrm>
             <a:prstGeom prst="rect">
@@ -4765,7 +4765,7 @@
           </p:nvSpPr>
           <p:spPr>
             <a:xfrm>
-              <a:off x="692708" y="3769802"/>
+              <a:off x="692708" y="3858272"/>
               <a:ext cx="62179" cy="80101"/>
             </a:xfrm>
             <a:prstGeom prst="rect">
@@ -4811,7 +4811,7 @@
           </p:nvSpPr>
           <p:spPr>
             <a:xfrm>
-              <a:off x="692708" y="2900125"/>
+              <a:off x="692708" y="3028808"/>
               <a:ext cx="62179" cy="80101"/>
             </a:xfrm>
             <a:prstGeom prst="rect">
@@ -4857,7 +4857,7 @@
           </p:nvSpPr>
           <p:spPr>
             <a:xfrm>
-              <a:off x="692708" y="2030448"/>
+              <a:off x="692708" y="2199345"/>
               <a:ext cx="62179" cy="80101"/>
             </a:xfrm>
             <a:prstGeom prst="rect">
@@ -5133,7 +5133,7 @@
           </p:nvSpPr>
           <p:spPr>
             <a:xfrm rot="-5400000">
-              <a:off x="68446" y="3759743"/>
+              <a:off x="68446" y="3848213"/>
               <a:ext cx="1016904" cy="100218"/>
             </a:xfrm>
             <a:prstGeom prst="rect">
@@ -5174,6 +5174,52 @@
         <p:sp>
           <p:nvSpPr>
             <p:cNvPr id="38" name="tx38"/>
+            <p:cNvSpPr/>
+            <p:nvPr/>
+          </p:nvSpPr>
+          <p:spPr>
+            <a:xfrm>
+              <a:off x="817517" y="1896563"/>
+              <a:ext cx="5626211" cy="82021"/>
+            </a:xfrm>
+            <a:prstGeom prst="rect">
+              <a:avLst/>
+            </a:prstGeom>
+            <a:noFill/>
+          </p:spPr>
+          <p:txBody>
+            <a:bodyPr lIns="0" rIns="0" tIns="0" bIns="0" anchorCtr="1" anchor="ctr" wrap="none"/>
+            <a:lstStyle/>
+            <a:p>
+              <a:pPr algn="l" marL="0" marR="0" indent="0">
+                <a:lnSpc>
+                  <a:spcPts val="900"/>
+                </a:lnSpc>
+                <a:spcBef>
+                  <a:spcPts val="0"/>
+                </a:spcBef>
+                <a:spcAft>
+                  <a:spcPts val="0"/>
+                </a:spcAft>
+              </a:pPr>
+              <a:r>
+                <a:rPr sz="900">
+                  <a:solidFill>
+                    <a:srgbClr val="404040">
+                      <a:alpha val="100000"/>
+                    </a:srgbClr>
+                  </a:solidFill>
+                  <a:latin typeface="Helvetica"/>
+                  <a:cs typeface="Helvetica"/>
+                </a:rPr>
+                <a:t>subHR per 0.1 ratio decline: 1.24 (1.14-1.36)  |  per IQR decline (Δ = 0.30): 1.92 (1.48-2.50)  |  IQR: [0.85, 1.15]</a:t>
+              </a:r>
+            </a:p>
+          </p:txBody>
+        </p:sp>
+        <p:sp>
+          <p:nvSpPr>
+            <p:cNvPr id="39" name="tx39"/>
             <p:cNvSpPr/>
             <p:nvPr/>
           </p:nvSpPr>

--- a/docs/pptx/carbo/jx-carbo-linsubhr-ratio-anemia2.pptx
+++ b/docs/pptx/carbo/jx-carbo-linsubhr-ratio-anemia2.pptx
@@ -5180,7 +5180,7 @@
           <p:spPr>
             <a:xfrm>
               <a:off x="817517" y="1896563"/>
-              <a:ext cx="5626211" cy="82021"/>
+              <a:ext cx="6236116" cy="82021"/>
             </a:xfrm>
             <a:prstGeom prst="rect">
               <a:avLst/>
@@ -5212,7 +5212,7 @@
                   <a:latin typeface="Helvetica"/>
                   <a:cs typeface="Helvetica"/>
                 </a:rPr>
-                <a:t>subHR per 0.1 ratio decline: 1.24 (1.14-1.36)  |  per IQR decline (Δ = 0.30): 1.92 (1.48-2.50)  |  IQR: [0.85, 1.15]</a:t>
+                <a:t>subHR per 0.1 ratio decline: 1.24 (1.14-1.36), p = &lt;0.001  |  per IQR decline (Δ = 0.30): 1.92 (1.48-2.50)  |  IQR: [0.85, 1.15]</a:t>
               </a:r>
             </a:p>
           </p:txBody>

--- a/docs/pptx/carbo/jx-carbo-linsubhr-ratio-anemia2.pptx
+++ b/docs/pptx/carbo/jx-carbo-linsubhr-ratio-anemia2.pptx
@@ -5180,7 +5180,7 @@
           <p:spPr>
             <a:xfrm>
               <a:off x="817517" y="1896563"/>
-              <a:ext cx="6236116" cy="82021"/>
+              <a:ext cx="6899879" cy="82021"/>
             </a:xfrm>
             <a:prstGeom prst="rect">
               <a:avLst/>
@@ -5212,7 +5212,7 @@
                   <a:latin typeface="Helvetica"/>
                   <a:cs typeface="Helvetica"/>
                 </a:rPr>
-                <a:t>subHR per 0.1 ratio decline: 1.24 (1.14-1.36), p = &lt;0.001  |  per IQR decline (Δ = 0.30): 1.92 (1.48-2.50)  |  IQR: [0.85, 1.15]</a:t>
+                <a:t>subHR per 0.1 ratio decline: 1.24 (1.14-1.36), p_Bonf = &lt;0.001 (n = 6)  |  per IQR decline (Δ = 0.30): 1.92 (1.48-2.50)  |  IQR: [0.85, 1.15]</a:t>
               </a:r>
             </a:p>
           </p:txBody>

--- a/docs/pptx/carbo/jx-carbo-linsubhr-ratio-anemia2.pptx
+++ b/docs/pptx/carbo/jx-carbo-linsubhr-ratio-anemia2.pptx
@@ -2443,7 +2443,7 @@
           </p:nvSpPr>
           <p:spPr>
             <a:xfrm>
-              <a:off x="1615213" y="2073503"/>
+              <a:off x="1467192" y="2073503"/>
               <a:ext cx="0" cy="3649639"/>
             </a:xfrm>
             <a:custGeom>
@@ -2486,7 +2486,7 @@
           </p:nvSpPr>
           <p:spPr>
             <a:xfrm>
-              <a:off x="3387871" y="2073503"/>
+              <a:off x="3538150" y="2073503"/>
               <a:ext cx="0" cy="3649639"/>
             </a:xfrm>
             <a:custGeom>
@@ -2529,7 +2529,7 @@
           </p:nvSpPr>
           <p:spPr>
             <a:xfrm>
-              <a:off x="5160528" y="2073503"/>
+              <a:off x="5609107" y="2073503"/>
               <a:ext cx="0" cy="3649639"/>
             </a:xfrm>
             <a:custGeom>
@@ -2572,7 +2572,7 @@
           </p:nvSpPr>
           <p:spPr>
             <a:xfrm>
-              <a:off x="6933186" y="2073503"/>
+              <a:off x="7680065" y="2073503"/>
               <a:ext cx="0" cy="3649639"/>
             </a:xfrm>
             <a:custGeom>
@@ -2830,7 +2830,7 @@
           </p:nvSpPr>
           <p:spPr>
             <a:xfrm>
-              <a:off x="2501542" y="2073503"/>
+              <a:off x="2502671" y="2073503"/>
               <a:ext cx="0" cy="3649639"/>
             </a:xfrm>
             <a:custGeom>
@@ -2873,7 +2873,7 @@
           </p:nvSpPr>
           <p:spPr>
             <a:xfrm>
-              <a:off x="4274200" y="2073503"/>
+              <a:off x="4573628" y="2073503"/>
               <a:ext cx="0" cy="3649639"/>
             </a:xfrm>
             <a:custGeom>
@@ -2916,7 +2916,7 @@
           </p:nvSpPr>
           <p:spPr>
             <a:xfrm>
-              <a:off x="6046857" y="2073503"/>
+              <a:off x="6644586" y="2073503"/>
               <a:ext cx="0" cy="3649639"/>
             </a:xfrm>
             <a:custGeom>
@@ -2953,649 +2953,618 @@
         </p:sp>
         <p:sp>
           <p:nvSpPr>
-            <p:cNvPr id="20" name="pl20"/>
+            <p:cNvPr id="20" name="pg20"/>
             <p:cNvSpPr/>
             <p:nvPr/>
           </p:nvSpPr>
           <p:spPr>
             <a:xfrm>
-              <a:off x="7819515" y="2073503"/>
-              <a:ext cx="0" cy="3649639"/>
+              <a:off x="1172049" y="2690132"/>
+              <a:ext cx="7090630" cy="2658665"/>
             </a:xfrm>
             <a:custGeom>
               <a:avLst/>
               <a:pathLst>
-                <a:path w="0" h="3649639">
-                  <a:moveTo>
-                    <a:pt x="0" y="3649639"/>
-                  </a:moveTo>
-                  <a:lnTo>
-                    <a:pt x="0" y="0"/>
-                  </a:lnTo>
-                  <a:lnTo>
-                    <a:pt x="0" y="0"/>
-                  </a:lnTo>
-                </a:path>
-              </a:pathLst>
-            </a:custGeom>
-            <a:ln w="13550" cap="flat">
-              <a:solidFill>
-                <a:srgbClr val="EBEBEB">
-                  <a:alpha val="100000"/>
-                </a:srgbClr>
-              </a:solidFill>
-              <a:prstDash val="solid"/>
-              <a:round/>
-            </a:ln>
-          </p:spPr>
-          <p:txBody>
-            <a:bodyPr/>
-            <a:lstStyle/>
-            <a:p/>
-          </p:txBody>
-        </p:sp>
-        <p:sp>
-          <p:nvSpPr>
-            <p:cNvPr id="21" name="pg21"/>
-            <p:cNvSpPr/>
-            <p:nvPr/>
-          </p:nvSpPr>
-          <p:spPr>
-            <a:xfrm>
-              <a:off x="817517" y="2865436"/>
-              <a:ext cx="7403783" cy="2483361"/>
-            </a:xfrm>
-            <a:custGeom>
-              <a:avLst/>
-              <a:pathLst>
-                <a:path w="7403783" h="2483361">
+                <a:path w="7090630" h="2658665">
                   <a:moveTo>
                     <a:pt x="0" y="0"/>
                   </a:moveTo>
                   <a:lnTo>
-                    <a:pt x="47058" y="43633"/>
-                  </a:lnTo>
-                  <a:lnTo>
-                    <a:pt x="123691" y="112833"/>
-                  </a:lnTo>
-                  <a:lnTo>
-                    <a:pt x="200323" y="180224"/>
-                  </a:lnTo>
-                  <a:lnTo>
-                    <a:pt x="276956" y="245853"/>
-                  </a:lnTo>
-                  <a:lnTo>
-                    <a:pt x="353588" y="309768"/>
-                  </a:lnTo>
-                  <a:lnTo>
-                    <a:pt x="430221" y="372013"/>
-                  </a:lnTo>
-                  <a:lnTo>
-                    <a:pt x="506853" y="432631"/>
-                  </a:lnTo>
-                  <a:lnTo>
-                    <a:pt x="583486" y="491666"/>
-                  </a:lnTo>
-                  <a:lnTo>
-                    <a:pt x="660118" y="549157"/>
-                  </a:lnTo>
-                  <a:lnTo>
-                    <a:pt x="736751" y="605147"/>
-                  </a:lnTo>
-                  <a:lnTo>
-                    <a:pt x="813384" y="659673"/>
-                  </a:lnTo>
-                  <a:lnTo>
-                    <a:pt x="890016" y="712775"/>
-                  </a:lnTo>
-                  <a:lnTo>
-                    <a:pt x="966649" y="764489"/>
-                  </a:lnTo>
-                  <a:lnTo>
-                    <a:pt x="1043281" y="814851"/>
-                  </a:lnTo>
-                  <a:lnTo>
-                    <a:pt x="1119914" y="863898"/>
-                  </a:lnTo>
-                  <a:lnTo>
-                    <a:pt x="1196546" y="911663"/>
-                  </a:lnTo>
-                  <a:lnTo>
-                    <a:pt x="1273179" y="958179"/>
-                  </a:lnTo>
-                  <a:lnTo>
-                    <a:pt x="1349811" y="1003481"/>
-                  </a:lnTo>
-                  <a:lnTo>
-                    <a:pt x="1426444" y="1047598"/>
-                  </a:lnTo>
-                  <a:lnTo>
-                    <a:pt x="1503076" y="1090563"/>
-                  </a:lnTo>
-                  <a:lnTo>
-                    <a:pt x="1579709" y="1132405"/>
-                  </a:lnTo>
-                  <a:lnTo>
-                    <a:pt x="1656342" y="1173154"/>
-                  </a:lnTo>
-                  <a:lnTo>
-                    <a:pt x="1732974" y="1212837"/>
-                  </a:lnTo>
-                  <a:lnTo>
-                    <a:pt x="1809607" y="1251484"/>
-                  </a:lnTo>
-                  <a:lnTo>
-                    <a:pt x="1886239" y="1289121"/>
-                  </a:lnTo>
-                  <a:lnTo>
-                    <a:pt x="1962872" y="1325775"/>
-                  </a:lnTo>
-                  <a:lnTo>
-                    <a:pt x="2039504" y="1361470"/>
-                  </a:lnTo>
-                  <a:lnTo>
-                    <a:pt x="2116137" y="1396233"/>
-                  </a:lnTo>
-                  <a:lnTo>
-                    <a:pt x="2192769" y="1430088"/>
-                  </a:lnTo>
-                  <a:lnTo>
-                    <a:pt x="2269402" y="1463058"/>
-                  </a:lnTo>
-                  <a:lnTo>
-                    <a:pt x="2346034" y="1495166"/>
-                  </a:lnTo>
-                  <a:lnTo>
-                    <a:pt x="2422667" y="1526436"/>
-                  </a:lnTo>
-                  <a:lnTo>
-                    <a:pt x="2499300" y="1556888"/>
-                  </a:lnTo>
-                  <a:lnTo>
-                    <a:pt x="2575932" y="1586544"/>
-                  </a:lnTo>
-                  <a:lnTo>
-                    <a:pt x="2652565" y="1615426"/>
-                  </a:lnTo>
-                  <a:lnTo>
-                    <a:pt x="2729197" y="1643553"/>
-                  </a:lnTo>
-                  <a:lnTo>
-                    <a:pt x="2805830" y="1670945"/>
-                  </a:lnTo>
-                  <a:lnTo>
-                    <a:pt x="2882462" y="1697621"/>
-                  </a:lnTo>
-                  <a:lnTo>
-                    <a:pt x="2959095" y="1723600"/>
-                  </a:lnTo>
-                  <a:lnTo>
-                    <a:pt x="3035727" y="1748900"/>
-                  </a:lnTo>
-                  <a:lnTo>
-                    <a:pt x="3112360" y="1773539"/>
-                  </a:lnTo>
-                  <a:lnTo>
-                    <a:pt x="3188993" y="1797535"/>
-                  </a:lnTo>
-                  <a:lnTo>
-                    <a:pt x="3265625" y="1820903"/>
-                  </a:lnTo>
-                  <a:lnTo>
-                    <a:pt x="3342258" y="1843660"/>
-                  </a:lnTo>
-                  <a:lnTo>
-                    <a:pt x="3418890" y="1863827"/>
-                  </a:lnTo>
-                  <a:lnTo>
-                    <a:pt x="3495523" y="1873092"/>
-                  </a:lnTo>
-                  <a:lnTo>
-                    <a:pt x="3572155" y="1882252"/>
-                  </a:lnTo>
-                  <a:lnTo>
-                    <a:pt x="3648788" y="1891310"/>
-                  </a:lnTo>
-                  <a:lnTo>
-                    <a:pt x="3725420" y="1900267"/>
-                  </a:lnTo>
-                  <a:lnTo>
-                    <a:pt x="3802053" y="1909124"/>
-                  </a:lnTo>
-                  <a:lnTo>
-                    <a:pt x="3878685" y="1917881"/>
-                  </a:lnTo>
-                  <a:lnTo>
-                    <a:pt x="3955318" y="1926541"/>
-                  </a:lnTo>
-                  <a:lnTo>
-                    <a:pt x="4031951" y="1935103"/>
-                  </a:lnTo>
-                  <a:lnTo>
-                    <a:pt x="4108583" y="1943570"/>
-                  </a:lnTo>
-                  <a:lnTo>
-                    <a:pt x="4185216" y="1951942"/>
-                  </a:lnTo>
-                  <a:lnTo>
-                    <a:pt x="4261848" y="1960221"/>
-                  </a:lnTo>
-                  <a:lnTo>
-                    <a:pt x="4338481" y="1968406"/>
-                  </a:lnTo>
-                  <a:lnTo>
-                    <a:pt x="4415113" y="1976500"/>
-                  </a:lnTo>
-                  <a:lnTo>
-                    <a:pt x="4491746" y="1984504"/>
-                  </a:lnTo>
-                  <a:lnTo>
-                    <a:pt x="4568378" y="1992418"/>
-                  </a:lnTo>
-                  <a:lnTo>
-                    <a:pt x="4645011" y="2000244"/>
-                  </a:lnTo>
-                  <a:lnTo>
-                    <a:pt x="4721644" y="2007982"/>
-                  </a:lnTo>
-                  <a:lnTo>
-                    <a:pt x="4798276" y="2015633"/>
-                  </a:lnTo>
-                  <a:lnTo>
-                    <a:pt x="4874909" y="2023199"/>
-                  </a:lnTo>
-                  <a:lnTo>
-                    <a:pt x="4951541" y="2030680"/>
-                  </a:lnTo>
-                  <a:lnTo>
-                    <a:pt x="5028174" y="2038077"/>
-                  </a:lnTo>
-                  <a:lnTo>
-                    <a:pt x="5104806" y="2045392"/>
-                  </a:lnTo>
-                  <a:lnTo>
-                    <a:pt x="5181439" y="2052625"/>
-                  </a:lnTo>
-                  <a:lnTo>
-                    <a:pt x="5258071" y="2059776"/>
-                  </a:lnTo>
-                  <a:lnTo>
-                    <a:pt x="5334704" y="2066848"/>
-                  </a:lnTo>
-                  <a:lnTo>
-                    <a:pt x="5411336" y="2073841"/>
-                  </a:lnTo>
-                  <a:lnTo>
-                    <a:pt x="5487969" y="2080755"/>
-                  </a:lnTo>
-                  <a:lnTo>
-                    <a:pt x="5564602" y="2087592"/>
-                  </a:lnTo>
-                  <a:lnTo>
-                    <a:pt x="5641234" y="2094353"/>
-                  </a:lnTo>
-                  <a:lnTo>
-                    <a:pt x="5717867" y="2101038"/>
-                  </a:lnTo>
-                  <a:lnTo>
-                    <a:pt x="5794499" y="2107648"/>
-                  </a:lnTo>
-                  <a:lnTo>
-                    <a:pt x="5871132" y="2114184"/>
-                  </a:lnTo>
-                  <a:lnTo>
-                    <a:pt x="5947764" y="2120647"/>
-                  </a:lnTo>
-                  <a:lnTo>
-                    <a:pt x="6024397" y="2127038"/>
-                  </a:lnTo>
-                  <a:lnTo>
-                    <a:pt x="6101029" y="2133357"/>
-                  </a:lnTo>
-                  <a:lnTo>
-                    <a:pt x="6177662" y="2139606"/>
-                  </a:lnTo>
-                  <a:lnTo>
-                    <a:pt x="6254294" y="2145785"/>
-                  </a:lnTo>
-                  <a:lnTo>
-                    <a:pt x="6330927" y="2151894"/>
-                  </a:lnTo>
-                  <a:lnTo>
-                    <a:pt x="6407560" y="2157935"/>
-                  </a:lnTo>
-                  <a:lnTo>
-                    <a:pt x="6484192" y="2163909"/>
-                  </a:lnTo>
-                  <a:lnTo>
-                    <a:pt x="6560825" y="2169815"/>
-                  </a:lnTo>
-                  <a:lnTo>
-                    <a:pt x="6637457" y="2175656"/>
-                  </a:lnTo>
-                  <a:lnTo>
-                    <a:pt x="6714090" y="2181431"/>
-                  </a:lnTo>
-                  <a:lnTo>
-                    <a:pt x="6790722" y="2187142"/>
-                  </a:lnTo>
-                  <a:lnTo>
-                    <a:pt x="6867355" y="2192789"/>
-                  </a:lnTo>
-                  <a:lnTo>
-                    <a:pt x="6943987" y="2198372"/>
-                  </a:lnTo>
-                  <a:lnTo>
-                    <a:pt x="7020620" y="2203893"/>
-                  </a:lnTo>
-                  <a:lnTo>
-                    <a:pt x="7097253" y="2209353"/>
-                  </a:lnTo>
-                  <a:lnTo>
-                    <a:pt x="7173885" y="2214751"/>
-                  </a:lnTo>
-                  <a:lnTo>
-                    <a:pt x="7250518" y="2220089"/>
-                  </a:lnTo>
-                  <a:lnTo>
-                    <a:pt x="7327150" y="2225367"/>
-                  </a:lnTo>
-                  <a:lnTo>
-                    <a:pt x="7403783" y="2230586"/>
-                  </a:lnTo>
-                  <a:lnTo>
-                    <a:pt x="7403783" y="2483361"/>
-                  </a:lnTo>
-                  <a:lnTo>
-                    <a:pt x="7327150" y="2477767"/>
-                  </a:lnTo>
-                  <a:lnTo>
-                    <a:pt x="7250518" y="2472024"/>
-                  </a:lnTo>
-                  <a:lnTo>
-                    <a:pt x="7173885" y="2466127"/>
-                  </a:lnTo>
-                  <a:lnTo>
-                    <a:pt x="7097253" y="2460071"/>
-                  </a:lnTo>
-                  <a:lnTo>
-                    <a:pt x="7020620" y="2453853"/>
-                  </a:lnTo>
-                  <a:lnTo>
-                    <a:pt x="6943987" y="2447468"/>
-                  </a:lnTo>
-                  <a:lnTo>
-                    <a:pt x="6867355" y="2440912"/>
-                  </a:lnTo>
-                  <a:lnTo>
-                    <a:pt x="6790722" y="2434180"/>
-                  </a:lnTo>
-                  <a:lnTo>
-                    <a:pt x="6714090" y="2427267"/>
-                  </a:lnTo>
-                  <a:lnTo>
-                    <a:pt x="6637457" y="2420169"/>
-                  </a:lnTo>
-                  <a:lnTo>
-                    <a:pt x="6560825" y="2412880"/>
-                  </a:lnTo>
-                  <a:lnTo>
-                    <a:pt x="6484192" y="2405396"/>
-                  </a:lnTo>
-                  <a:lnTo>
-                    <a:pt x="6407560" y="2397710"/>
-                  </a:lnTo>
-                  <a:lnTo>
-                    <a:pt x="6330927" y="2389819"/>
-                  </a:lnTo>
-                  <a:lnTo>
-                    <a:pt x="6254294" y="2381716"/>
-                  </a:lnTo>
-                  <a:lnTo>
-                    <a:pt x="6177662" y="2373395"/>
-                  </a:lnTo>
-                  <a:lnTo>
-                    <a:pt x="6101029" y="2364852"/>
-                  </a:lnTo>
-                  <a:lnTo>
-                    <a:pt x="6024397" y="2356079"/>
-                  </a:lnTo>
-                  <a:lnTo>
-                    <a:pt x="5947764" y="2347070"/>
-                  </a:lnTo>
-                  <a:lnTo>
-                    <a:pt x="5871132" y="2337820"/>
-                  </a:lnTo>
-                  <a:lnTo>
-                    <a:pt x="5794499" y="2328322"/>
-                  </a:lnTo>
-                  <a:lnTo>
-                    <a:pt x="5717867" y="2318569"/>
-                  </a:lnTo>
-                  <a:lnTo>
-                    <a:pt x="5641234" y="2308554"/>
-                  </a:lnTo>
-                  <a:lnTo>
-                    <a:pt x="5564602" y="2298270"/>
-                  </a:lnTo>
-                  <a:lnTo>
-                    <a:pt x="5487969" y="2287711"/>
-                  </a:lnTo>
-                  <a:lnTo>
-                    <a:pt x="5411336" y="2276868"/>
-                  </a:lnTo>
-                  <a:lnTo>
-                    <a:pt x="5334704" y="2265734"/>
-                  </a:lnTo>
-                  <a:lnTo>
-                    <a:pt x="5258071" y="2254301"/>
-                  </a:lnTo>
-                  <a:lnTo>
-                    <a:pt x="5181439" y="2242562"/>
-                  </a:lnTo>
-                  <a:lnTo>
-                    <a:pt x="5104806" y="2230508"/>
-                  </a:lnTo>
-                  <a:lnTo>
-                    <a:pt x="5028174" y="2218130"/>
-                  </a:lnTo>
-                  <a:lnTo>
-                    <a:pt x="4951541" y="2205420"/>
-                  </a:lnTo>
-                  <a:lnTo>
-                    <a:pt x="4874909" y="2192369"/>
-                  </a:lnTo>
-                  <a:lnTo>
-                    <a:pt x="4798276" y="2178968"/>
-                  </a:lnTo>
-                  <a:lnTo>
-                    <a:pt x="4721644" y="2165208"/>
-                  </a:lnTo>
-                  <a:lnTo>
-                    <a:pt x="4645011" y="2151078"/>
-                  </a:lnTo>
-                  <a:lnTo>
-                    <a:pt x="4568378" y="2136569"/>
-                  </a:lnTo>
-                  <a:lnTo>
-                    <a:pt x="4491746" y="2121671"/>
-                  </a:lnTo>
-                  <a:lnTo>
-                    <a:pt x="4415113" y="2106373"/>
-                  </a:lnTo>
-                  <a:lnTo>
-                    <a:pt x="4338481" y="2090664"/>
-                  </a:lnTo>
-                  <a:lnTo>
-                    <a:pt x="4261848" y="2074534"/>
-                  </a:lnTo>
-                  <a:lnTo>
-                    <a:pt x="4185216" y="2057971"/>
-                  </a:lnTo>
-                  <a:lnTo>
-                    <a:pt x="4108583" y="2040964"/>
-                  </a:lnTo>
-                  <a:lnTo>
-                    <a:pt x="4031951" y="2023501"/>
-                  </a:lnTo>
-                  <a:lnTo>
-                    <a:pt x="3955318" y="2005568"/>
-                  </a:lnTo>
-                  <a:lnTo>
-                    <a:pt x="3878685" y="1987155"/>
-                  </a:lnTo>
-                  <a:lnTo>
-                    <a:pt x="3802053" y="1968248"/>
-                  </a:lnTo>
-                  <a:lnTo>
-                    <a:pt x="3725420" y="1948833"/>
-                  </a:lnTo>
-                  <a:lnTo>
-                    <a:pt x="3648788" y="1928897"/>
-                  </a:lnTo>
-                  <a:lnTo>
-                    <a:pt x="3572155" y="1908427"/>
-                  </a:lnTo>
-                  <a:lnTo>
-                    <a:pt x="3495523" y="1887407"/>
-                  </a:lnTo>
-                  <a:lnTo>
-                    <a:pt x="3418890" y="1865823"/>
-                  </a:lnTo>
-                  <a:lnTo>
-                    <a:pt x="3342258" y="1854458"/>
-                  </a:lnTo>
-                  <a:lnTo>
-                    <a:pt x="3265625" y="1844983"/>
-                  </a:lnTo>
-                  <a:lnTo>
-                    <a:pt x="3188993" y="1835401"/>
-                  </a:lnTo>
-                  <a:lnTo>
-                    <a:pt x="3112360" y="1825710"/>
-                  </a:lnTo>
-                  <a:lnTo>
-                    <a:pt x="3035727" y="1815910"/>
-                  </a:lnTo>
-                  <a:lnTo>
-                    <a:pt x="2959095" y="1805998"/>
-                  </a:lnTo>
-                  <a:lnTo>
-                    <a:pt x="2882462" y="1795975"/>
-                  </a:lnTo>
-                  <a:lnTo>
-                    <a:pt x="2805830" y="1785838"/>
-                  </a:lnTo>
-                  <a:lnTo>
-                    <a:pt x="2729197" y="1775586"/>
-                  </a:lnTo>
-                  <a:lnTo>
-                    <a:pt x="2652565" y="1765219"/>
-                  </a:lnTo>
-                  <a:lnTo>
-                    <a:pt x="2575932" y="1754734"/>
-                  </a:lnTo>
-                  <a:lnTo>
-                    <a:pt x="2499300" y="1744130"/>
-                  </a:lnTo>
-                  <a:lnTo>
-                    <a:pt x="2422667" y="1733407"/>
-                  </a:lnTo>
-                  <a:lnTo>
-                    <a:pt x="2346034" y="1722562"/>
-                  </a:lnTo>
-                  <a:lnTo>
-                    <a:pt x="2269402" y="1711594"/>
-                  </a:lnTo>
-                  <a:lnTo>
-                    <a:pt x="2192769" y="1700502"/>
-                  </a:lnTo>
-                  <a:lnTo>
-                    <a:pt x="2116137" y="1689285"/>
-                  </a:lnTo>
-                  <a:lnTo>
-                    <a:pt x="2039504" y="1677941"/>
-                  </a:lnTo>
-                  <a:lnTo>
-                    <a:pt x="1962872" y="1666468"/>
-                  </a:lnTo>
-                  <a:lnTo>
-                    <a:pt x="1886239" y="1654866"/>
-                  </a:lnTo>
-                  <a:lnTo>
-                    <a:pt x="1809607" y="1643132"/>
-                  </a:lnTo>
-                  <a:lnTo>
-                    <a:pt x="1732974" y="1631266"/>
-                  </a:lnTo>
-                  <a:lnTo>
-                    <a:pt x="1656342" y="1619265"/>
-                  </a:lnTo>
-                  <a:lnTo>
-                    <a:pt x="1579709" y="1607129"/>
-                  </a:lnTo>
-                  <a:lnTo>
-                    <a:pt x="1503076" y="1594855"/>
-                  </a:lnTo>
-                  <a:lnTo>
-                    <a:pt x="1426444" y="1582442"/>
-                  </a:lnTo>
-                  <a:lnTo>
-                    <a:pt x="1349811" y="1569889"/>
-                  </a:lnTo>
-                  <a:lnTo>
-                    <a:pt x="1273179" y="1557194"/>
-                  </a:lnTo>
-                  <a:lnTo>
-                    <a:pt x="1196546" y="1544355"/>
-                  </a:lnTo>
-                  <a:lnTo>
-                    <a:pt x="1119914" y="1531371"/>
-                  </a:lnTo>
-                  <a:lnTo>
-                    <a:pt x="1043281" y="1518240"/>
-                  </a:lnTo>
-                  <a:lnTo>
-                    <a:pt x="966649" y="1504960"/>
-                  </a:lnTo>
-                  <a:lnTo>
-                    <a:pt x="890016" y="1491530"/>
-                  </a:lnTo>
-                  <a:lnTo>
-                    <a:pt x="813384" y="1477948"/>
-                  </a:lnTo>
-                  <a:lnTo>
-                    <a:pt x="736751" y="1464213"/>
-                  </a:lnTo>
-                  <a:lnTo>
-                    <a:pt x="660118" y="1450322"/>
-                  </a:lnTo>
-                  <a:lnTo>
-                    <a:pt x="583486" y="1436274"/>
-                  </a:lnTo>
-                  <a:lnTo>
-                    <a:pt x="506853" y="1422067"/>
-                  </a:lnTo>
-                  <a:lnTo>
-                    <a:pt x="430221" y="1407699"/>
-                  </a:lnTo>
-                  <a:lnTo>
-                    <a:pt x="353588" y="1393168"/>
-                  </a:lnTo>
-                  <a:lnTo>
-                    <a:pt x="276956" y="1378473"/>
-                  </a:lnTo>
-                  <a:lnTo>
-                    <a:pt x="200323" y="1363612"/>
-                  </a:lnTo>
-                  <a:lnTo>
-                    <a:pt x="123691" y="1348583"/>
-                  </a:lnTo>
-                  <a:lnTo>
-                    <a:pt x="47058" y="1333383"/>
-                  </a:lnTo>
-                  <a:lnTo>
-                    <a:pt x="0" y="1323944"/>
+                    <a:pt x="71622" y="74920"/>
+                  </a:lnTo>
+                  <a:lnTo>
+                    <a:pt x="143245" y="147882"/>
+                  </a:lnTo>
+                  <a:lnTo>
+                    <a:pt x="214867" y="218938"/>
+                  </a:lnTo>
+                  <a:lnTo>
+                    <a:pt x="286490" y="288137"/>
+                  </a:lnTo>
+                  <a:lnTo>
+                    <a:pt x="358112" y="355528"/>
+                  </a:lnTo>
+                  <a:lnTo>
+                    <a:pt x="429735" y="421158"/>
+                  </a:lnTo>
+                  <a:lnTo>
+                    <a:pt x="501357" y="485073"/>
+                  </a:lnTo>
+                  <a:lnTo>
+                    <a:pt x="572980" y="547318"/>
+                  </a:lnTo>
+                  <a:lnTo>
+                    <a:pt x="644602" y="607936"/>
+                  </a:lnTo>
+                  <a:lnTo>
+                    <a:pt x="716225" y="666970"/>
+                  </a:lnTo>
+                  <a:lnTo>
+                    <a:pt x="787847" y="724462"/>
+                  </a:lnTo>
+                  <a:lnTo>
+                    <a:pt x="859470" y="780451"/>
+                  </a:lnTo>
+                  <a:lnTo>
+                    <a:pt x="931092" y="834978"/>
+                  </a:lnTo>
+                  <a:lnTo>
+                    <a:pt x="1002715" y="888079"/>
+                  </a:lnTo>
+                  <a:lnTo>
+                    <a:pt x="1074337" y="939793"/>
+                  </a:lnTo>
+                  <a:lnTo>
+                    <a:pt x="1145960" y="990156"/>
+                  </a:lnTo>
+                  <a:lnTo>
+                    <a:pt x="1217582" y="1039202"/>
+                  </a:lnTo>
+                  <a:lnTo>
+                    <a:pt x="1289205" y="1086967"/>
+                  </a:lnTo>
+                  <a:lnTo>
+                    <a:pt x="1360827" y="1133484"/>
+                  </a:lnTo>
+                  <a:lnTo>
+                    <a:pt x="1432450" y="1178785"/>
+                  </a:lnTo>
+                  <a:lnTo>
+                    <a:pt x="1504073" y="1222903"/>
+                  </a:lnTo>
+                  <a:lnTo>
+                    <a:pt x="1575695" y="1265867"/>
+                  </a:lnTo>
+                  <a:lnTo>
+                    <a:pt x="1647318" y="1307709"/>
+                  </a:lnTo>
+                  <a:lnTo>
+                    <a:pt x="1718940" y="1348458"/>
+                  </a:lnTo>
+                  <a:lnTo>
+                    <a:pt x="1790563" y="1388142"/>
+                  </a:lnTo>
+                  <a:lnTo>
+                    <a:pt x="1862185" y="1426789"/>
+                  </a:lnTo>
+                  <a:lnTo>
+                    <a:pt x="1933808" y="1464426"/>
+                  </a:lnTo>
+                  <a:lnTo>
+                    <a:pt x="2005430" y="1501079"/>
+                  </a:lnTo>
+                  <a:lnTo>
+                    <a:pt x="2077053" y="1536775"/>
+                  </a:lnTo>
+                  <a:lnTo>
+                    <a:pt x="2148675" y="1571538"/>
+                  </a:lnTo>
+                  <a:lnTo>
+                    <a:pt x="2220298" y="1605392"/>
+                  </a:lnTo>
+                  <a:lnTo>
+                    <a:pt x="2291920" y="1638362"/>
+                  </a:lnTo>
+                  <a:lnTo>
+                    <a:pt x="2363543" y="1670471"/>
+                  </a:lnTo>
+                  <a:lnTo>
+                    <a:pt x="2435165" y="1701740"/>
+                  </a:lnTo>
+                  <a:lnTo>
+                    <a:pt x="2506788" y="1732192"/>
+                  </a:lnTo>
+                  <a:lnTo>
+                    <a:pt x="2578410" y="1761849"/>
+                  </a:lnTo>
+                  <a:lnTo>
+                    <a:pt x="2650033" y="1790731"/>
+                  </a:lnTo>
+                  <a:lnTo>
+                    <a:pt x="2721655" y="1818857"/>
+                  </a:lnTo>
+                  <a:lnTo>
+                    <a:pt x="2793278" y="1846249"/>
+                  </a:lnTo>
+                  <a:lnTo>
+                    <a:pt x="2864901" y="1872925"/>
+                  </a:lnTo>
+                  <a:lnTo>
+                    <a:pt x="2936523" y="1898904"/>
+                  </a:lnTo>
+                  <a:lnTo>
+                    <a:pt x="3008146" y="1924205"/>
+                  </a:lnTo>
+                  <a:lnTo>
+                    <a:pt x="3079768" y="1948844"/>
+                  </a:lnTo>
+                  <a:lnTo>
+                    <a:pt x="3151391" y="1972839"/>
+                  </a:lnTo>
+                  <a:lnTo>
+                    <a:pt x="3223013" y="1996207"/>
+                  </a:lnTo>
+                  <a:lnTo>
+                    <a:pt x="3294636" y="2018965"/>
+                  </a:lnTo>
+                  <a:lnTo>
+                    <a:pt x="3366258" y="2039132"/>
+                  </a:lnTo>
+                  <a:lnTo>
+                    <a:pt x="3437881" y="2048396"/>
+                  </a:lnTo>
+                  <a:lnTo>
+                    <a:pt x="3509503" y="2057557"/>
+                  </a:lnTo>
+                  <a:lnTo>
+                    <a:pt x="3581126" y="2066615"/>
+                  </a:lnTo>
+                  <a:lnTo>
+                    <a:pt x="3652748" y="2075572"/>
+                  </a:lnTo>
+                  <a:lnTo>
+                    <a:pt x="3724371" y="2084428"/>
+                  </a:lnTo>
+                  <a:lnTo>
+                    <a:pt x="3795993" y="2093186"/>
+                  </a:lnTo>
+                  <a:lnTo>
+                    <a:pt x="3867616" y="2101845"/>
+                  </a:lnTo>
+                  <a:lnTo>
+                    <a:pt x="3939238" y="2110408"/>
+                  </a:lnTo>
+                  <a:lnTo>
+                    <a:pt x="4010861" y="2118875"/>
+                  </a:lnTo>
+                  <a:lnTo>
+                    <a:pt x="4082483" y="2127247"/>
+                  </a:lnTo>
+                  <a:lnTo>
+                    <a:pt x="4154106" y="2135525"/>
+                  </a:lnTo>
+                  <a:lnTo>
+                    <a:pt x="4225729" y="2143711"/>
+                  </a:lnTo>
+                  <a:lnTo>
+                    <a:pt x="4297351" y="2151805"/>
+                  </a:lnTo>
+                  <a:lnTo>
+                    <a:pt x="4368974" y="2159809"/>
+                  </a:lnTo>
+                  <a:lnTo>
+                    <a:pt x="4440596" y="2167723"/>
+                  </a:lnTo>
+                  <a:lnTo>
+                    <a:pt x="4512219" y="2175548"/>
+                  </a:lnTo>
+                  <a:lnTo>
+                    <a:pt x="4583841" y="2183286"/>
+                  </a:lnTo>
+                  <a:lnTo>
+                    <a:pt x="4655464" y="2190937"/>
+                  </a:lnTo>
+                  <a:lnTo>
+                    <a:pt x="4727086" y="2198503"/>
+                  </a:lnTo>
+                  <a:lnTo>
+                    <a:pt x="4798709" y="2205984"/>
+                  </a:lnTo>
+                  <a:lnTo>
+                    <a:pt x="4870331" y="2213382"/>
+                  </a:lnTo>
+                  <a:lnTo>
+                    <a:pt x="4941954" y="2220696"/>
+                  </a:lnTo>
+                  <a:lnTo>
+                    <a:pt x="5013576" y="2227929"/>
+                  </a:lnTo>
+                  <a:lnTo>
+                    <a:pt x="5085199" y="2235081"/>
+                  </a:lnTo>
+                  <a:lnTo>
+                    <a:pt x="5156821" y="2242153"/>
+                  </a:lnTo>
+                  <a:lnTo>
+                    <a:pt x="5228444" y="2249145"/>
+                  </a:lnTo>
+                  <a:lnTo>
+                    <a:pt x="5300066" y="2256060"/>
+                  </a:lnTo>
+                  <a:lnTo>
+                    <a:pt x="5371689" y="2262897"/>
+                  </a:lnTo>
+                  <a:lnTo>
+                    <a:pt x="5443311" y="2269658"/>
+                  </a:lnTo>
+                  <a:lnTo>
+                    <a:pt x="5514934" y="2276343"/>
+                  </a:lnTo>
+                  <a:lnTo>
+                    <a:pt x="5586557" y="2282953"/>
+                  </a:lnTo>
+                  <a:lnTo>
+                    <a:pt x="5658179" y="2289489"/>
+                  </a:lnTo>
+                  <a:lnTo>
+                    <a:pt x="5729802" y="2295952"/>
+                  </a:lnTo>
+                  <a:lnTo>
+                    <a:pt x="5801424" y="2302343"/>
+                  </a:lnTo>
+                  <a:lnTo>
+                    <a:pt x="5873047" y="2308662"/>
+                  </a:lnTo>
+                  <a:lnTo>
+                    <a:pt x="5944669" y="2314910"/>
+                  </a:lnTo>
+                  <a:lnTo>
+                    <a:pt x="6016292" y="2321089"/>
+                  </a:lnTo>
+                  <a:lnTo>
+                    <a:pt x="6087914" y="2327199"/>
+                  </a:lnTo>
+                  <a:lnTo>
+                    <a:pt x="6159537" y="2333240"/>
+                  </a:lnTo>
+                  <a:lnTo>
+                    <a:pt x="6231159" y="2339213"/>
+                  </a:lnTo>
+                  <a:lnTo>
+                    <a:pt x="6302782" y="2345120"/>
+                  </a:lnTo>
+                  <a:lnTo>
+                    <a:pt x="6374404" y="2350960"/>
+                  </a:lnTo>
+                  <a:lnTo>
+                    <a:pt x="6446027" y="2356736"/>
+                  </a:lnTo>
+                  <a:lnTo>
+                    <a:pt x="6517649" y="2362446"/>
+                  </a:lnTo>
+                  <a:lnTo>
+                    <a:pt x="6589272" y="2368093"/>
+                  </a:lnTo>
+                  <a:lnTo>
+                    <a:pt x="6660894" y="2373677"/>
+                  </a:lnTo>
+                  <a:lnTo>
+                    <a:pt x="6732517" y="2379198"/>
+                  </a:lnTo>
+                  <a:lnTo>
+                    <a:pt x="6804139" y="2384657"/>
+                  </a:lnTo>
+                  <a:lnTo>
+                    <a:pt x="6875762" y="2390055"/>
+                  </a:lnTo>
+                  <a:lnTo>
+                    <a:pt x="6947385" y="2395393"/>
+                  </a:lnTo>
+                  <a:lnTo>
+                    <a:pt x="7019007" y="2400671"/>
+                  </a:lnTo>
+                  <a:lnTo>
+                    <a:pt x="7090630" y="2405890"/>
+                  </a:lnTo>
+                  <a:lnTo>
+                    <a:pt x="7090630" y="2658665"/>
+                  </a:lnTo>
+                  <a:lnTo>
+                    <a:pt x="7019007" y="2653072"/>
+                  </a:lnTo>
+                  <a:lnTo>
+                    <a:pt x="6947385" y="2647329"/>
+                  </a:lnTo>
+                  <a:lnTo>
+                    <a:pt x="6875762" y="2641431"/>
+                  </a:lnTo>
+                  <a:lnTo>
+                    <a:pt x="6804139" y="2635376"/>
+                  </a:lnTo>
+                  <a:lnTo>
+                    <a:pt x="6732517" y="2629158"/>
+                  </a:lnTo>
+                  <a:lnTo>
+                    <a:pt x="6660894" y="2622773"/>
+                  </a:lnTo>
+                  <a:lnTo>
+                    <a:pt x="6589272" y="2616216"/>
+                  </a:lnTo>
+                  <a:lnTo>
+                    <a:pt x="6517649" y="2609484"/>
+                  </a:lnTo>
+                  <a:lnTo>
+                    <a:pt x="6446027" y="2602571"/>
+                  </a:lnTo>
+                  <a:lnTo>
+                    <a:pt x="6374404" y="2595473"/>
+                  </a:lnTo>
+                  <a:lnTo>
+                    <a:pt x="6302782" y="2588184"/>
+                  </a:lnTo>
+                  <a:lnTo>
+                    <a:pt x="6231159" y="2580700"/>
+                  </a:lnTo>
+                  <a:lnTo>
+                    <a:pt x="6159537" y="2573015"/>
+                  </a:lnTo>
+                  <a:lnTo>
+                    <a:pt x="6087914" y="2565124"/>
+                  </a:lnTo>
+                  <a:lnTo>
+                    <a:pt x="6016292" y="2557021"/>
+                  </a:lnTo>
+                  <a:lnTo>
+                    <a:pt x="5944669" y="2548700"/>
+                  </a:lnTo>
+                  <a:lnTo>
+                    <a:pt x="5873047" y="2540156"/>
+                  </a:lnTo>
+                  <a:lnTo>
+                    <a:pt x="5801424" y="2531383"/>
+                  </a:lnTo>
+                  <a:lnTo>
+                    <a:pt x="5729802" y="2522375"/>
+                  </a:lnTo>
+                  <a:lnTo>
+                    <a:pt x="5658179" y="2513125"/>
+                  </a:lnTo>
+                  <a:lnTo>
+                    <a:pt x="5586557" y="2503626"/>
+                  </a:lnTo>
+                  <a:lnTo>
+                    <a:pt x="5514934" y="2493873"/>
+                  </a:lnTo>
+                  <a:lnTo>
+                    <a:pt x="5443311" y="2483858"/>
+                  </a:lnTo>
+                  <a:lnTo>
+                    <a:pt x="5371689" y="2473575"/>
+                  </a:lnTo>
+                  <a:lnTo>
+                    <a:pt x="5300066" y="2463015"/>
+                  </a:lnTo>
+                  <a:lnTo>
+                    <a:pt x="5228444" y="2452172"/>
+                  </a:lnTo>
+                  <a:lnTo>
+                    <a:pt x="5156821" y="2441039"/>
+                  </a:lnTo>
+                  <a:lnTo>
+                    <a:pt x="5085199" y="2429606"/>
+                  </a:lnTo>
+                  <a:lnTo>
+                    <a:pt x="5013576" y="2417867"/>
+                  </a:lnTo>
+                  <a:lnTo>
+                    <a:pt x="4941954" y="2405812"/>
+                  </a:lnTo>
+                  <a:lnTo>
+                    <a:pt x="4870331" y="2393435"/>
+                  </a:lnTo>
+                  <a:lnTo>
+                    <a:pt x="4798709" y="2380725"/>
+                  </a:lnTo>
+                  <a:lnTo>
+                    <a:pt x="4727086" y="2367674"/>
+                  </a:lnTo>
+                  <a:lnTo>
+                    <a:pt x="4655464" y="2354273"/>
+                  </a:lnTo>
+                  <a:lnTo>
+                    <a:pt x="4583841" y="2340512"/>
+                  </a:lnTo>
+                  <a:lnTo>
+                    <a:pt x="4512219" y="2326382"/>
+                  </a:lnTo>
+                  <a:lnTo>
+                    <a:pt x="4440596" y="2311873"/>
+                  </a:lnTo>
+                  <a:lnTo>
+                    <a:pt x="4368974" y="2296975"/>
+                  </a:lnTo>
+                  <a:lnTo>
+                    <a:pt x="4297351" y="2281677"/>
+                  </a:lnTo>
+                  <a:lnTo>
+                    <a:pt x="4225729" y="2265969"/>
+                  </a:lnTo>
+                  <a:lnTo>
+                    <a:pt x="4154106" y="2249839"/>
+                  </a:lnTo>
+                  <a:lnTo>
+                    <a:pt x="4082483" y="2233276"/>
+                  </a:lnTo>
+                  <a:lnTo>
+                    <a:pt x="4010861" y="2216269"/>
+                  </a:lnTo>
+                  <a:lnTo>
+                    <a:pt x="3939238" y="2198805"/>
+                  </a:lnTo>
+                  <a:lnTo>
+                    <a:pt x="3867616" y="2180873"/>
+                  </a:lnTo>
+                  <a:lnTo>
+                    <a:pt x="3795993" y="2162460"/>
+                  </a:lnTo>
+                  <a:lnTo>
+                    <a:pt x="3724371" y="2143552"/>
+                  </a:lnTo>
+                  <a:lnTo>
+                    <a:pt x="3652748" y="2124138"/>
+                  </a:lnTo>
+                  <a:lnTo>
+                    <a:pt x="3581126" y="2104202"/>
+                  </a:lnTo>
+                  <a:lnTo>
+                    <a:pt x="3509503" y="2083731"/>
+                  </a:lnTo>
+                  <a:lnTo>
+                    <a:pt x="3437881" y="2062712"/>
+                  </a:lnTo>
+                  <a:lnTo>
+                    <a:pt x="3366258" y="2041128"/>
+                  </a:lnTo>
+                  <a:lnTo>
+                    <a:pt x="3294636" y="2029763"/>
+                  </a:lnTo>
+                  <a:lnTo>
+                    <a:pt x="3223013" y="2020288"/>
+                  </a:lnTo>
+                  <a:lnTo>
+                    <a:pt x="3151391" y="2010705"/>
+                  </a:lnTo>
+                  <a:lnTo>
+                    <a:pt x="3079768" y="2001015"/>
+                  </a:lnTo>
+                  <a:lnTo>
+                    <a:pt x="3008146" y="1991214"/>
+                  </a:lnTo>
+                  <a:lnTo>
+                    <a:pt x="2936523" y="1981303"/>
+                  </a:lnTo>
+                  <a:lnTo>
+                    <a:pt x="2864901" y="1971279"/>
+                  </a:lnTo>
+                  <a:lnTo>
+                    <a:pt x="2793278" y="1961142"/>
+                  </a:lnTo>
+                  <a:lnTo>
+                    <a:pt x="2721655" y="1950891"/>
+                  </a:lnTo>
+                  <a:lnTo>
+                    <a:pt x="2650033" y="1940523"/>
+                  </a:lnTo>
+                  <a:lnTo>
+                    <a:pt x="2578410" y="1930038"/>
+                  </a:lnTo>
+                  <a:lnTo>
+                    <a:pt x="2506788" y="1919435"/>
+                  </a:lnTo>
+                  <a:lnTo>
+                    <a:pt x="2435165" y="1908711"/>
+                  </a:lnTo>
+                  <a:lnTo>
+                    <a:pt x="2363543" y="1897866"/>
+                  </a:lnTo>
+                  <a:lnTo>
+                    <a:pt x="2291920" y="1886898"/>
+                  </a:lnTo>
+                  <a:lnTo>
+                    <a:pt x="2220298" y="1875807"/>
+                  </a:lnTo>
+                  <a:lnTo>
+                    <a:pt x="2148675" y="1864590"/>
+                  </a:lnTo>
+                  <a:lnTo>
+                    <a:pt x="2077053" y="1853245"/>
+                  </a:lnTo>
+                  <a:lnTo>
+                    <a:pt x="2005430" y="1841773"/>
+                  </a:lnTo>
+                  <a:lnTo>
+                    <a:pt x="1933808" y="1830170"/>
+                  </a:lnTo>
+                  <a:lnTo>
+                    <a:pt x="1862185" y="1818437"/>
+                  </a:lnTo>
+                  <a:lnTo>
+                    <a:pt x="1790563" y="1806570"/>
+                  </a:lnTo>
+                  <a:lnTo>
+                    <a:pt x="1718940" y="1794570"/>
+                  </a:lnTo>
+                  <a:lnTo>
+                    <a:pt x="1647318" y="1782433"/>
+                  </a:lnTo>
+                  <a:lnTo>
+                    <a:pt x="1575695" y="1770159"/>
+                  </a:lnTo>
+                  <a:lnTo>
+                    <a:pt x="1504073" y="1757747"/>
+                  </a:lnTo>
+                  <a:lnTo>
+                    <a:pt x="1432450" y="1745194"/>
+                  </a:lnTo>
+                  <a:lnTo>
+                    <a:pt x="1360827" y="1732498"/>
+                  </a:lnTo>
+                  <a:lnTo>
+                    <a:pt x="1289205" y="1719660"/>
+                  </a:lnTo>
+                  <a:lnTo>
+                    <a:pt x="1217582" y="1706675"/>
+                  </a:lnTo>
+                  <a:lnTo>
+                    <a:pt x="1145960" y="1693544"/>
+                  </a:lnTo>
+                  <a:lnTo>
+                    <a:pt x="1074337" y="1680265"/>
+                  </a:lnTo>
+                  <a:lnTo>
+                    <a:pt x="1002715" y="1666835"/>
+                  </a:lnTo>
+                  <a:lnTo>
+                    <a:pt x="931092" y="1653253"/>
+                  </a:lnTo>
+                  <a:lnTo>
+                    <a:pt x="859470" y="1639517"/>
+                  </a:lnTo>
+                  <a:lnTo>
+                    <a:pt x="787847" y="1625626"/>
+                  </a:lnTo>
+                  <a:lnTo>
+                    <a:pt x="716225" y="1611578"/>
+                  </a:lnTo>
+                  <a:lnTo>
+                    <a:pt x="644602" y="1597371"/>
+                  </a:lnTo>
+                  <a:lnTo>
+                    <a:pt x="572980" y="1583003"/>
+                  </a:lnTo>
+                  <a:lnTo>
+                    <a:pt x="501357" y="1568473"/>
+                  </a:lnTo>
+                  <a:lnTo>
+                    <a:pt x="429735" y="1553778"/>
+                  </a:lnTo>
+                  <a:lnTo>
+                    <a:pt x="358112" y="1538917"/>
+                  </a:lnTo>
+                  <a:lnTo>
+                    <a:pt x="286490" y="1523887"/>
+                  </a:lnTo>
+                  <a:lnTo>
+                    <a:pt x="214867" y="1508688"/>
+                  </a:lnTo>
+                  <a:lnTo>
+                    <a:pt x="143245" y="1493317"/>
+                  </a:lnTo>
+                  <a:lnTo>
+                    <a:pt x="71622" y="1477771"/>
+                  </a:lnTo>
+                  <a:lnTo>
+                    <a:pt x="0" y="1462050"/>
                   </a:lnTo>
                   <a:close/>
                 </a:path>
@@ -3615,312 +3584,643 @@
         </p:sp>
         <p:sp>
           <p:nvSpPr>
+            <p:cNvPr id="21" name="pl21"/>
+            <p:cNvSpPr/>
+            <p:nvPr/>
+          </p:nvSpPr>
+          <p:spPr>
+            <a:xfrm>
+              <a:off x="1172049" y="2690132"/>
+              <a:ext cx="7090630" cy="2405890"/>
+            </a:xfrm>
+            <a:custGeom>
+              <a:avLst/>
+              <a:pathLst>
+                <a:path w="7090630" h="2405890">
+                  <a:moveTo>
+                    <a:pt x="0" y="0"/>
+                  </a:moveTo>
+                  <a:lnTo>
+                    <a:pt x="71622" y="74920"/>
+                  </a:lnTo>
+                  <a:lnTo>
+                    <a:pt x="143245" y="147882"/>
+                  </a:lnTo>
+                  <a:lnTo>
+                    <a:pt x="214867" y="218938"/>
+                  </a:lnTo>
+                  <a:lnTo>
+                    <a:pt x="286490" y="288137"/>
+                  </a:lnTo>
+                  <a:lnTo>
+                    <a:pt x="358112" y="355528"/>
+                  </a:lnTo>
+                  <a:lnTo>
+                    <a:pt x="429735" y="421158"/>
+                  </a:lnTo>
+                  <a:lnTo>
+                    <a:pt x="501357" y="485073"/>
+                  </a:lnTo>
+                  <a:lnTo>
+                    <a:pt x="572980" y="547318"/>
+                  </a:lnTo>
+                  <a:lnTo>
+                    <a:pt x="644602" y="607936"/>
+                  </a:lnTo>
+                  <a:lnTo>
+                    <a:pt x="716225" y="666970"/>
+                  </a:lnTo>
+                  <a:lnTo>
+                    <a:pt x="787847" y="724462"/>
+                  </a:lnTo>
+                  <a:lnTo>
+                    <a:pt x="859470" y="780451"/>
+                  </a:lnTo>
+                  <a:lnTo>
+                    <a:pt x="931092" y="834978"/>
+                  </a:lnTo>
+                  <a:lnTo>
+                    <a:pt x="1002715" y="888079"/>
+                  </a:lnTo>
+                  <a:lnTo>
+                    <a:pt x="1074337" y="939793"/>
+                  </a:lnTo>
+                  <a:lnTo>
+                    <a:pt x="1145960" y="990156"/>
+                  </a:lnTo>
+                  <a:lnTo>
+                    <a:pt x="1217582" y="1039202"/>
+                  </a:lnTo>
+                  <a:lnTo>
+                    <a:pt x="1289205" y="1086967"/>
+                  </a:lnTo>
+                  <a:lnTo>
+                    <a:pt x="1360827" y="1133484"/>
+                  </a:lnTo>
+                  <a:lnTo>
+                    <a:pt x="1432450" y="1178785"/>
+                  </a:lnTo>
+                  <a:lnTo>
+                    <a:pt x="1504073" y="1222903"/>
+                  </a:lnTo>
+                  <a:lnTo>
+                    <a:pt x="1575695" y="1265867"/>
+                  </a:lnTo>
+                  <a:lnTo>
+                    <a:pt x="1647318" y="1307709"/>
+                  </a:lnTo>
+                  <a:lnTo>
+                    <a:pt x="1718940" y="1348458"/>
+                  </a:lnTo>
+                  <a:lnTo>
+                    <a:pt x="1790563" y="1388142"/>
+                  </a:lnTo>
+                  <a:lnTo>
+                    <a:pt x="1862185" y="1426789"/>
+                  </a:lnTo>
+                  <a:lnTo>
+                    <a:pt x="1933808" y="1464426"/>
+                  </a:lnTo>
+                  <a:lnTo>
+                    <a:pt x="2005430" y="1501079"/>
+                  </a:lnTo>
+                  <a:lnTo>
+                    <a:pt x="2077053" y="1536775"/>
+                  </a:lnTo>
+                  <a:lnTo>
+                    <a:pt x="2148675" y="1571538"/>
+                  </a:lnTo>
+                  <a:lnTo>
+                    <a:pt x="2220298" y="1605392"/>
+                  </a:lnTo>
+                  <a:lnTo>
+                    <a:pt x="2291920" y="1638362"/>
+                  </a:lnTo>
+                  <a:lnTo>
+                    <a:pt x="2363543" y="1670471"/>
+                  </a:lnTo>
+                  <a:lnTo>
+                    <a:pt x="2435165" y="1701740"/>
+                  </a:lnTo>
+                  <a:lnTo>
+                    <a:pt x="2506788" y="1732192"/>
+                  </a:lnTo>
+                  <a:lnTo>
+                    <a:pt x="2578410" y="1761849"/>
+                  </a:lnTo>
+                  <a:lnTo>
+                    <a:pt x="2650033" y="1790731"/>
+                  </a:lnTo>
+                  <a:lnTo>
+                    <a:pt x="2721655" y="1818857"/>
+                  </a:lnTo>
+                  <a:lnTo>
+                    <a:pt x="2793278" y="1846249"/>
+                  </a:lnTo>
+                  <a:lnTo>
+                    <a:pt x="2864901" y="1872925"/>
+                  </a:lnTo>
+                  <a:lnTo>
+                    <a:pt x="2936523" y="1898904"/>
+                  </a:lnTo>
+                  <a:lnTo>
+                    <a:pt x="3008146" y="1924205"/>
+                  </a:lnTo>
+                  <a:lnTo>
+                    <a:pt x="3079768" y="1948844"/>
+                  </a:lnTo>
+                  <a:lnTo>
+                    <a:pt x="3151391" y="1972839"/>
+                  </a:lnTo>
+                  <a:lnTo>
+                    <a:pt x="3223013" y="1996207"/>
+                  </a:lnTo>
+                  <a:lnTo>
+                    <a:pt x="3294636" y="2018965"/>
+                  </a:lnTo>
+                  <a:lnTo>
+                    <a:pt x="3366258" y="2039132"/>
+                  </a:lnTo>
+                  <a:lnTo>
+                    <a:pt x="3437881" y="2048396"/>
+                  </a:lnTo>
+                  <a:lnTo>
+                    <a:pt x="3509503" y="2057557"/>
+                  </a:lnTo>
+                  <a:lnTo>
+                    <a:pt x="3581126" y="2066615"/>
+                  </a:lnTo>
+                  <a:lnTo>
+                    <a:pt x="3652748" y="2075572"/>
+                  </a:lnTo>
+                  <a:lnTo>
+                    <a:pt x="3724371" y="2084428"/>
+                  </a:lnTo>
+                  <a:lnTo>
+                    <a:pt x="3795993" y="2093186"/>
+                  </a:lnTo>
+                  <a:lnTo>
+                    <a:pt x="3867616" y="2101845"/>
+                  </a:lnTo>
+                  <a:lnTo>
+                    <a:pt x="3939238" y="2110408"/>
+                  </a:lnTo>
+                  <a:lnTo>
+                    <a:pt x="4010861" y="2118875"/>
+                  </a:lnTo>
+                  <a:lnTo>
+                    <a:pt x="4082483" y="2127247"/>
+                  </a:lnTo>
+                  <a:lnTo>
+                    <a:pt x="4154106" y="2135525"/>
+                  </a:lnTo>
+                  <a:lnTo>
+                    <a:pt x="4225729" y="2143711"/>
+                  </a:lnTo>
+                  <a:lnTo>
+                    <a:pt x="4297351" y="2151805"/>
+                  </a:lnTo>
+                  <a:lnTo>
+                    <a:pt x="4368974" y="2159809"/>
+                  </a:lnTo>
+                  <a:lnTo>
+                    <a:pt x="4440596" y="2167723"/>
+                  </a:lnTo>
+                  <a:lnTo>
+                    <a:pt x="4512219" y="2175548"/>
+                  </a:lnTo>
+                  <a:lnTo>
+                    <a:pt x="4583841" y="2183286"/>
+                  </a:lnTo>
+                  <a:lnTo>
+                    <a:pt x="4655464" y="2190937"/>
+                  </a:lnTo>
+                  <a:lnTo>
+                    <a:pt x="4727086" y="2198503"/>
+                  </a:lnTo>
+                  <a:lnTo>
+                    <a:pt x="4798709" y="2205984"/>
+                  </a:lnTo>
+                  <a:lnTo>
+                    <a:pt x="4870331" y="2213382"/>
+                  </a:lnTo>
+                  <a:lnTo>
+                    <a:pt x="4941954" y="2220696"/>
+                  </a:lnTo>
+                  <a:lnTo>
+                    <a:pt x="5013576" y="2227929"/>
+                  </a:lnTo>
+                  <a:lnTo>
+                    <a:pt x="5085199" y="2235081"/>
+                  </a:lnTo>
+                  <a:lnTo>
+                    <a:pt x="5156821" y="2242153"/>
+                  </a:lnTo>
+                  <a:lnTo>
+                    <a:pt x="5228444" y="2249145"/>
+                  </a:lnTo>
+                  <a:lnTo>
+                    <a:pt x="5300066" y="2256060"/>
+                  </a:lnTo>
+                  <a:lnTo>
+                    <a:pt x="5371689" y="2262897"/>
+                  </a:lnTo>
+                  <a:lnTo>
+                    <a:pt x="5443311" y="2269658"/>
+                  </a:lnTo>
+                  <a:lnTo>
+                    <a:pt x="5514934" y="2276343"/>
+                  </a:lnTo>
+                  <a:lnTo>
+                    <a:pt x="5586557" y="2282953"/>
+                  </a:lnTo>
+                  <a:lnTo>
+                    <a:pt x="5658179" y="2289489"/>
+                  </a:lnTo>
+                  <a:lnTo>
+                    <a:pt x="5729802" y="2295952"/>
+                  </a:lnTo>
+                  <a:lnTo>
+                    <a:pt x="5801424" y="2302343"/>
+                  </a:lnTo>
+                  <a:lnTo>
+                    <a:pt x="5873047" y="2308662"/>
+                  </a:lnTo>
+                  <a:lnTo>
+                    <a:pt x="5944669" y="2314910"/>
+                  </a:lnTo>
+                  <a:lnTo>
+                    <a:pt x="6016292" y="2321089"/>
+                  </a:lnTo>
+                  <a:lnTo>
+                    <a:pt x="6087914" y="2327199"/>
+                  </a:lnTo>
+                  <a:lnTo>
+                    <a:pt x="6159537" y="2333240"/>
+                  </a:lnTo>
+                  <a:lnTo>
+                    <a:pt x="6231159" y="2339213"/>
+                  </a:lnTo>
+                  <a:lnTo>
+                    <a:pt x="6302782" y="2345120"/>
+                  </a:lnTo>
+                  <a:lnTo>
+                    <a:pt x="6374404" y="2350960"/>
+                  </a:lnTo>
+                  <a:lnTo>
+                    <a:pt x="6446027" y="2356736"/>
+                  </a:lnTo>
+                  <a:lnTo>
+                    <a:pt x="6517649" y="2362446"/>
+                  </a:lnTo>
+                  <a:lnTo>
+                    <a:pt x="6589272" y="2368093"/>
+                  </a:lnTo>
+                  <a:lnTo>
+                    <a:pt x="6660894" y="2373677"/>
+                  </a:lnTo>
+                  <a:lnTo>
+                    <a:pt x="6732517" y="2379198"/>
+                  </a:lnTo>
+                  <a:lnTo>
+                    <a:pt x="6804139" y="2384657"/>
+                  </a:lnTo>
+                  <a:lnTo>
+                    <a:pt x="6875762" y="2390055"/>
+                  </a:lnTo>
+                  <a:lnTo>
+                    <a:pt x="6947385" y="2395393"/>
+                  </a:lnTo>
+                  <a:lnTo>
+                    <a:pt x="7019007" y="2400671"/>
+                  </a:lnTo>
+                  <a:lnTo>
+                    <a:pt x="7090630" y="2405890"/>
+                  </a:lnTo>
+                </a:path>
+              </a:pathLst>
+            </a:custGeom>
+          </p:spPr>
+          <p:txBody>
+            <a:bodyPr/>
+            <a:lstStyle/>
+            <a:p/>
+          </p:txBody>
+        </p:sp>
+        <p:sp>
+          <p:nvSpPr>
             <p:cNvPr id="22" name="pl22"/>
             <p:cNvSpPr/>
             <p:nvPr/>
           </p:nvSpPr>
           <p:spPr>
             <a:xfrm>
-              <a:off x="817517" y="2865436"/>
-              <a:ext cx="7403783" cy="2230586"/>
+              <a:off x="1172049" y="4152182"/>
+              <a:ext cx="7090630" cy="1196615"/>
             </a:xfrm>
             <a:custGeom>
               <a:avLst/>
               <a:pathLst>
-                <a:path w="7403783" h="2230586">
+                <a:path w="7090630" h="1196615">
                   <a:moveTo>
+                    <a:pt x="7090630" y="1196615"/>
+                  </a:moveTo>
+                  <a:lnTo>
+                    <a:pt x="7019007" y="1191021"/>
+                  </a:lnTo>
+                  <a:lnTo>
+                    <a:pt x="6947385" y="1185278"/>
+                  </a:lnTo>
+                  <a:lnTo>
+                    <a:pt x="6875762" y="1179381"/>
+                  </a:lnTo>
+                  <a:lnTo>
+                    <a:pt x="6804139" y="1173325"/>
+                  </a:lnTo>
+                  <a:lnTo>
+                    <a:pt x="6732517" y="1167107"/>
+                  </a:lnTo>
+                  <a:lnTo>
+                    <a:pt x="6660894" y="1160722"/>
+                  </a:lnTo>
+                  <a:lnTo>
+                    <a:pt x="6589272" y="1154166"/>
+                  </a:lnTo>
+                  <a:lnTo>
+                    <a:pt x="6517649" y="1147434"/>
+                  </a:lnTo>
+                  <a:lnTo>
+                    <a:pt x="6446027" y="1140521"/>
+                  </a:lnTo>
+                  <a:lnTo>
+                    <a:pt x="6374404" y="1133423"/>
+                  </a:lnTo>
+                  <a:lnTo>
+                    <a:pt x="6302782" y="1126134"/>
+                  </a:lnTo>
+                  <a:lnTo>
+                    <a:pt x="6231159" y="1118650"/>
+                  </a:lnTo>
+                  <a:lnTo>
+                    <a:pt x="6159537" y="1110964"/>
+                  </a:lnTo>
+                  <a:lnTo>
+                    <a:pt x="6087914" y="1103073"/>
+                  </a:lnTo>
+                  <a:lnTo>
+                    <a:pt x="6016292" y="1094970"/>
+                  </a:lnTo>
+                  <a:lnTo>
+                    <a:pt x="5944669" y="1086649"/>
+                  </a:lnTo>
+                  <a:lnTo>
+                    <a:pt x="5873047" y="1078106"/>
+                  </a:lnTo>
+                  <a:lnTo>
+                    <a:pt x="5801424" y="1069333"/>
+                  </a:lnTo>
+                  <a:lnTo>
+                    <a:pt x="5729802" y="1060324"/>
+                  </a:lnTo>
+                  <a:lnTo>
+                    <a:pt x="5658179" y="1051074"/>
+                  </a:lnTo>
+                  <a:lnTo>
+                    <a:pt x="5586557" y="1041576"/>
+                  </a:lnTo>
+                  <a:lnTo>
+                    <a:pt x="5514934" y="1031823"/>
+                  </a:lnTo>
+                  <a:lnTo>
+                    <a:pt x="5443311" y="1021808"/>
+                  </a:lnTo>
+                  <a:lnTo>
+                    <a:pt x="5371689" y="1011524"/>
+                  </a:lnTo>
+                  <a:lnTo>
+                    <a:pt x="5300066" y="1000965"/>
+                  </a:lnTo>
+                  <a:lnTo>
+                    <a:pt x="5228444" y="990122"/>
+                  </a:lnTo>
+                  <a:lnTo>
+                    <a:pt x="5156821" y="978988"/>
+                  </a:lnTo>
+                  <a:lnTo>
+                    <a:pt x="5085199" y="967555"/>
+                  </a:lnTo>
+                  <a:lnTo>
+                    <a:pt x="5013576" y="955816"/>
+                  </a:lnTo>
+                  <a:lnTo>
+                    <a:pt x="4941954" y="943762"/>
+                  </a:lnTo>
+                  <a:lnTo>
+                    <a:pt x="4870331" y="931384"/>
+                  </a:lnTo>
+                  <a:lnTo>
+                    <a:pt x="4798709" y="918674"/>
+                  </a:lnTo>
+                  <a:lnTo>
+                    <a:pt x="4727086" y="905623"/>
+                  </a:lnTo>
+                  <a:lnTo>
+                    <a:pt x="4655464" y="892222"/>
+                  </a:lnTo>
+                  <a:lnTo>
+                    <a:pt x="4583841" y="878462"/>
+                  </a:lnTo>
+                  <a:lnTo>
+                    <a:pt x="4512219" y="864332"/>
+                  </a:lnTo>
+                  <a:lnTo>
+                    <a:pt x="4440596" y="849823"/>
+                  </a:lnTo>
+                  <a:lnTo>
+                    <a:pt x="4368974" y="834925"/>
+                  </a:lnTo>
+                  <a:lnTo>
+                    <a:pt x="4297351" y="819627"/>
+                  </a:lnTo>
+                  <a:lnTo>
+                    <a:pt x="4225729" y="803918"/>
+                  </a:lnTo>
+                  <a:lnTo>
+                    <a:pt x="4154106" y="787788"/>
+                  </a:lnTo>
+                  <a:lnTo>
+                    <a:pt x="4082483" y="771225"/>
+                  </a:lnTo>
+                  <a:lnTo>
+                    <a:pt x="4010861" y="754218"/>
+                  </a:lnTo>
+                  <a:lnTo>
+                    <a:pt x="3939238" y="736755"/>
+                  </a:lnTo>
+                  <a:lnTo>
+                    <a:pt x="3867616" y="718822"/>
+                  </a:lnTo>
+                  <a:lnTo>
+                    <a:pt x="3795993" y="700409"/>
+                  </a:lnTo>
+                  <a:lnTo>
+                    <a:pt x="3724371" y="681502"/>
+                  </a:lnTo>
+                  <a:lnTo>
+                    <a:pt x="3652748" y="662087"/>
+                  </a:lnTo>
+                  <a:lnTo>
+                    <a:pt x="3581126" y="642151"/>
+                  </a:lnTo>
+                  <a:lnTo>
+                    <a:pt x="3509503" y="621681"/>
+                  </a:lnTo>
+                  <a:lnTo>
+                    <a:pt x="3437881" y="600661"/>
+                  </a:lnTo>
+                  <a:lnTo>
+                    <a:pt x="3366258" y="579077"/>
+                  </a:lnTo>
+                  <a:lnTo>
+                    <a:pt x="3294636" y="567712"/>
+                  </a:lnTo>
+                  <a:lnTo>
+                    <a:pt x="3223013" y="558237"/>
+                  </a:lnTo>
+                  <a:lnTo>
+                    <a:pt x="3151391" y="548655"/>
+                  </a:lnTo>
+                  <a:lnTo>
+                    <a:pt x="3079768" y="538964"/>
+                  </a:lnTo>
+                  <a:lnTo>
+                    <a:pt x="3008146" y="529164"/>
+                  </a:lnTo>
+                  <a:lnTo>
+                    <a:pt x="2936523" y="519252"/>
+                  </a:lnTo>
+                  <a:lnTo>
+                    <a:pt x="2864901" y="509229"/>
+                  </a:lnTo>
+                  <a:lnTo>
+                    <a:pt x="2793278" y="499092"/>
+                  </a:lnTo>
+                  <a:lnTo>
+                    <a:pt x="2721655" y="488840"/>
+                  </a:lnTo>
+                  <a:lnTo>
+                    <a:pt x="2650033" y="478473"/>
+                  </a:lnTo>
+                  <a:lnTo>
+                    <a:pt x="2578410" y="467988"/>
+                  </a:lnTo>
+                  <a:lnTo>
+                    <a:pt x="2506788" y="457384"/>
+                  </a:lnTo>
+                  <a:lnTo>
+                    <a:pt x="2435165" y="446661"/>
+                  </a:lnTo>
+                  <a:lnTo>
+                    <a:pt x="2363543" y="435816"/>
+                  </a:lnTo>
+                  <a:lnTo>
+                    <a:pt x="2291920" y="424848"/>
+                  </a:lnTo>
+                  <a:lnTo>
+                    <a:pt x="2220298" y="413756"/>
+                  </a:lnTo>
+                  <a:lnTo>
+                    <a:pt x="2148675" y="402539"/>
+                  </a:lnTo>
+                  <a:lnTo>
+                    <a:pt x="2077053" y="391195"/>
+                  </a:lnTo>
+                  <a:lnTo>
+                    <a:pt x="2005430" y="379722"/>
+                  </a:lnTo>
+                  <a:lnTo>
+                    <a:pt x="1933808" y="368120"/>
+                  </a:lnTo>
+                  <a:lnTo>
+                    <a:pt x="1862185" y="356386"/>
+                  </a:lnTo>
+                  <a:lnTo>
+                    <a:pt x="1790563" y="344520"/>
+                  </a:lnTo>
+                  <a:lnTo>
+                    <a:pt x="1718940" y="332519"/>
+                  </a:lnTo>
+                  <a:lnTo>
+                    <a:pt x="1647318" y="320383"/>
+                  </a:lnTo>
+                  <a:lnTo>
+                    <a:pt x="1575695" y="308109"/>
+                  </a:lnTo>
+                  <a:lnTo>
+                    <a:pt x="1504073" y="295696"/>
+                  </a:lnTo>
+                  <a:lnTo>
+                    <a:pt x="1432450" y="283143"/>
+                  </a:lnTo>
+                  <a:lnTo>
+                    <a:pt x="1360827" y="270448"/>
+                  </a:lnTo>
+                  <a:lnTo>
+                    <a:pt x="1289205" y="257609"/>
+                  </a:lnTo>
+                  <a:lnTo>
+                    <a:pt x="1217582" y="244625"/>
+                  </a:lnTo>
+                  <a:lnTo>
+                    <a:pt x="1145960" y="231494"/>
+                  </a:lnTo>
+                  <a:lnTo>
+                    <a:pt x="1074337" y="218214"/>
+                  </a:lnTo>
+                  <a:lnTo>
+                    <a:pt x="1002715" y="204784"/>
+                  </a:lnTo>
+                  <a:lnTo>
+                    <a:pt x="931092" y="191202"/>
+                  </a:lnTo>
+                  <a:lnTo>
+                    <a:pt x="859470" y="177467"/>
+                  </a:lnTo>
+                  <a:lnTo>
+                    <a:pt x="787847" y="163576"/>
+                  </a:lnTo>
+                  <a:lnTo>
+                    <a:pt x="716225" y="149528"/>
+                  </a:lnTo>
+                  <a:lnTo>
+                    <a:pt x="644602" y="135321"/>
+                  </a:lnTo>
+                  <a:lnTo>
+                    <a:pt x="572980" y="120953"/>
+                  </a:lnTo>
+                  <a:lnTo>
+                    <a:pt x="501357" y="106422"/>
+                  </a:lnTo>
+                  <a:lnTo>
+                    <a:pt x="429735" y="91727"/>
+                  </a:lnTo>
+                  <a:lnTo>
+                    <a:pt x="358112" y="76866"/>
+                  </a:lnTo>
+                  <a:lnTo>
+                    <a:pt x="286490" y="61837"/>
+                  </a:lnTo>
+                  <a:lnTo>
+                    <a:pt x="214867" y="46637"/>
+                  </a:lnTo>
+                  <a:lnTo>
+                    <a:pt x="143245" y="31266"/>
+                  </a:lnTo>
+                  <a:lnTo>
+                    <a:pt x="71622" y="15721"/>
+                  </a:lnTo>
+                  <a:lnTo>
                     <a:pt x="0" y="0"/>
-                  </a:moveTo>
-                  <a:lnTo>
-                    <a:pt x="47058" y="43633"/>
-                  </a:lnTo>
-                  <a:lnTo>
-                    <a:pt x="123691" y="112833"/>
-                  </a:lnTo>
-                  <a:lnTo>
-                    <a:pt x="200323" y="180224"/>
-                  </a:lnTo>
-                  <a:lnTo>
-                    <a:pt x="276956" y="245853"/>
-                  </a:lnTo>
-                  <a:lnTo>
-                    <a:pt x="353588" y="309768"/>
-                  </a:lnTo>
-                  <a:lnTo>
-                    <a:pt x="430221" y="372013"/>
-                  </a:lnTo>
-                  <a:lnTo>
-                    <a:pt x="506853" y="432631"/>
-                  </a:lnTo>
-                  <a:lnTo>
-                    <a:pt x="583486" y="491666"/>
-                  </a:lnTo>
-                  <a:lnTo>
-                    <a:pt x="660118" y="549157"/>
-                  </a:lnTo>
-                  <a:lnTo>
-                    <a:pt x="736751" y="605147"/>
-                  </a:lnTo>
-                  <a:lnTo>
-                    <a:pt x="813384" y="659673"/>
-                  </a:lnTo>
-                  <a:lnTo>
-                    <a:pt x="890016" y="712775"/>
-                  </a:lnTo>
-                  <a:lnTo>
-                    <a:pt x="966649" y="764489"/>
-                  </a:lnTo>
-                  <a:lnTo>
-                    <a:pt x="1043281" y="814851"/>
-                  </a:lnTo>
-                  <a:lnTo>
-                    <a:pt x="1119914" y="863898"/>
-                  </a:lnTo>
-                  <a:lnTo>
-                    <a:pt x="1196546" y="911663"/>
-                  </a:lnTo>
-                  <a:lnTo>
-                    <a:pt x="1273179" y="958179"/>
-                  </a:lnTo>
-                  <a:lnTo>
-                    <a:pt x="1349811" y="1003481"/>
-                  </a:lnTo>
-                  <a:lnTo>
-                    <a:pt x="1426444" y="1047598"/>
-                  </a:lnTo>
-                  <a:lnTo>
-                    <a:pt x="1503076" y="1090563"/>
-                  </a:lnTo>
-                  <a:lnTo>
-                    <a:pt x="1579709" y="1132405"/>
-                  </a:lnTo>
-                  <a:lnTo>
-                    <a:pt x="1656342" y="1173154"/>
-                  </a:lnTo>
-                  <a:lnTo>
-                    <a:pt x="1732974" y="1212837"/>
-                  </a:lnTo>
-                  <a:lnTo>
-                    <a:pt x="1809607" y="1251484"/>
-                  </a:lnTo>
-                  <a:lnTo>
-                    <a:pt x="1886239" y="1289121"/>
-                  </a:lnTo>
-                  <a:lnTo>
-                    <a:pt x="1962872" y="1325775"/>
-                  </a:lnTo>
-                  <a:lnTo>
-                    <a:pt x="2039504" y="1361470"/>
-                  </a:lnTo>
-                  <a:lnTo>
-                    <a:pt x="2116137" y="1396233"/>
-                  </a:lnTo>
-                  <a:lnTo>
-                    <a:pt x="2192769" y="1430088"/>
-                  </a:lnTo>
-                  <a:lnTo>
-                    <a:pt x="2269402" y="1463058"/>
-                  </a:lnTo>
-                  <a:lnTo>
-                    <a:pt x="2346034" y="1495166"/>
-                  </a:lnTo>
-                  <a:lnTo>
-                    <a:pt x="2422667" y="1526436"/>
-                  </a:lnTo>
-                  <a:lnTo>
-                    <a:pt x="2499300" y="1556888"/>
-                  </a:lnTo>
-                  <a:lnTo>
-                    <a:pt x="2575932" y="1586544"/>
-                  </a:lnTo>
-                  <a:lnTo>
-                    <a:pt x="2652565" y="1615426"/>
-                  </a:lnTo>
-                  <a:lnTo>
-                    <a:pt x="2729197" y="1643553"/>
-                  </a:lnTo>
-                  <a:lnTo>
-                    <a:pt x="2805830" y="1670945"/>
-                  </a:lnTo>
-                  <a:lnTo>
-                    <a:pt x="2882462" y="1697621"/>
-                  </a:lnTo>
-                  <a:lnTo>
-                    <a:pt x="2959095" y="1723600"/>
-                  </a:lnTo>
-                  <a:lnTo>
-                    <a:pt x="3035727" y="1748900"/>
-                  </a:lnTo>
-                  <a:lnTo>
-                    <a:pt x="3112360" y="1773539"/>
-                  </a:lnTo>
-                  <a:lnTo>
-                    <a:pt x="3188993" y="1797535"/>
-                  </a:lnTo>
-                  <a:lnTo>
-                    <a:pt x="3265625" y="1820903"/>
-                  </a:lnTo>
-                  <a:lnTo>
-                    <a:pt x="3342258" y="1843660"/>
-                  </a:lnTo>
-                  <a:lnTo>
-                    <a:pt x="3418890" y="1863827"/>
-                  </a:lnTo>
-                  <a:lnTo>
-                    <a:pt x="3495523" y="1873092"/>
-                  </a:lnTo>
-                  <a:lnTo>
-                    <a:pt x="3572155" y="1882252"/>
-                  </a:lnTo>
-                  <a:lnTo>
-                    <a:pt x="3648788" y="1891310"/>
-                  </a:lnTo>
-                  <a:lnTo>
-                    <a:pt x="3725420" y="1900267"/>
-                  </a:lnTo>
-                  <a:lnTo>
-                    <a:pt x="3802053" y="1909124"/>
-                  </a:lnTo>
-                  <a:lnTo>
-                    <a:pt x="3878685" y="1917881"/>
-                  </a:lnTo>
-                  <a:lnTo>
-                    <a:pt x="3955318" y="1926541"/>
-                  </a:lnTo>
-                  <a:lnTo>
-                    <a:pt x="4031951" y="1935103"/>
-                  </a:lnTo>
-                  <a:lnTo>
-                    <a:pt x="4108583" y="1943570"/>
-                  </a:lnTo>
-                  <a:lnTo>
-                    <a:pt x="4185216" y="1951942"/>
-                  </a:lnTo>
-                  <a:lnTo>
-                    <a:pt x="4261848" y="1960221"/>
-                  </a:lnTo>
-                  <a:lnTo>
-                    <a:pt x="4338481" y="1968406"/>
-                  </a:lnTo>
-                  <a:lnTo>
-                    <a:pt x="4415113" y="1976500"/>
-                  </a:lnTo>
-                  <a:lnTo>
-                    <a:pt x="4491746" y="1984504"/>
-                  </a:lnTo>
-                  <a:lnTo>
-                    <a:pt x="4568378" y="1992418"/>
-                  </a:lnTo>
-                  <a:lnTo>
-                    <a:pt x="4645011" y="2000244"/>
-                  </a:lnTo>
-                  <a:lnTo>
-                    <a:pt x="4721644" y="2007982"/>
-                  </a:lnTo>
-                  <a:lnTo>
-                    <a:pt x="4798276" y="2015633"/>
-                  </a:lnTo>
-                  <a:lnTo>
-                    <a:pt x="4874909" y="2023199"/>
-                  </a:lnTo>
-                  <a:lnTo>
-                    <a:pt x="4951541" y="2030680"/>
-                  </a:lnTo>
-                  <a:lnTo>
-                    <a:pt x="5028174" y="2038077"/>
-                  </a:lnTo>
-                  <a:lnTo>
-                    <a:pt x="5104806" y="2045392"/>
-                  </a:lnTo>
-                  <a:lnTo>
-                    <a:pt x="5181439" y="2052625"/>
-                  </a:lnTo>
-                  <a:lnTo>
-                    <a:pt x="5258071" y="2059776"/>
-                  </a:lnTo>
-                  <a:lnTo>
-                    <a:pt x="5334704" y="2066848"/>
-                  </a:lnTo>
-                  <a:lnTo>
-                    <a:pt x="5411336" y="2073841"/>
-                  </a:lnTo>
-                  <a:lnTo>
-                    <a:pt x="5487969" y="2080755"/>
-                  </a:lnTo>
-                  <a:lnTo>
-                    <a:pt x="5564602" y="2087592"/>
-                  </a:lnTo>
-                  <a:lnTo>
-                    <a:pt x="5641234" y="2094353"/>
-                  </a:lnTo>
-                  <a:lnTo>
-                    <a:pt x="5717867" y="2101038"/>
-                  </a:lnTo>
-                  <a:lnTo>
-                    <a:pt x="5794499" y="2107648"/>
-                  </a:lnTo>
-                  <a:lnTo>
-                    <a:pt x="5871132" y="2114184"/>
-                  </a:lnTo>
-                  <a:lnTo>
-                    <a:pt x="5947764" y="2120647"/>
-                  </a:lnTo>
-                  <a:lnTo>
-                    <a:pt x="6024397" y="2127038"/>
-                  </a:lnTo>
-                  <a:lnTo>
-                    <a:pt x="6101029" y="2133357"/>
-                  </a:lnTo>
-                  <a:lnTo>
-                    <a:pt x="6177662" y="2139606"/>
-                  </a:lnTo>
-                  <a:lnTo>
-                    <a:pt x="6254294" y="2145785"/>
-                  </a:lnTo>
-                  <a:lnTo>
-                    <a:pt x="6330927" y="2151894"/>
-                  </a:lnTo>
-                  <a:lnTo>
-                    <a:pt x="6407560" y="2157935"/>
-                  </a:lnTo>
-                  <a:lnTo>
-                    <a:pt x="6484192" y="2163909"/>
-                  </a:lnTo>
-                  <a:lnTo>
-                    <a:pt x="6560825" y="2169815"/>
-                  </a:lnTo>
-                  <a:lnTo>
-                    <a:pt x="6637457" y="2175656"/>
-                  </a:lnTo>
-                  <a:lnTo>
-                    <a:pt x="6714090" y="2181431"/>
-                  </a:lnTo>
-                  <a:lnTo>
-                    <a:pt x="6790722" y="2187142"/>
-                  </a:lnTo>
-                  <a:lnTo>
-                    <a:pt x="6867355" y="2192789"/>
-                  </a:lnTo>
-                  <a:lnTo>
-                    <a:pt x="6943987" y="2198372"/>
-                  </a:lnTo>
-                  <a:lnTo>
-                    <a:pt x="7020620" y="2203893"/>
-                  </a:lnTo>
-                  <a:lnTo>
-                    <a:pt x="7097253" y="2209353"/>
-                  </a:lnTo>
-                  <a:lnTo>
-                    <a:pt x="7173885" y="2214751"/>
-                  </a:lnTo>
-                  <a:lnTo>
-                    <a:pt x="7250518" y="2220089"/>
-                  </a:lnTo>
-                  <a:lnTo>
-                    <a:pt x="7327150" y="2225367"/>
-                  </a:lnTo>
-                  <a:lnTo>
-                    <a:pt x="7403783" y="2230586"/>
                   </a:lnTo>
                 </a:path>
               </a:pathLst>
@@ -3940,625 +4240,312 @@
           </p:nvSpPr>
           <p:spPr>
             <a:xfrm>
-              <a:off x="817517" y="4189381"/>
-              <a:ext cx="7403783" cy="1159416"/>
+              <a:off x="1172049" y="3550139"/>
+              <a:ext cx="7090630" cy="1697040"/>
             </a:xfrm>
             <a:custGeom>
               <a:avLst/>
               <a:pathLst>
-                <a:path w="7403783" h="1159416">
-                  <a:moveTo>
-                    <a:pt x="7403783" y="1159416"/>
-                  </a:moveTo>
-                  <a:lnTo>
-                    <a:pt x="7327150" y="1153823"/>
-                  </a:lnTo>
-                  <a:lnTo>
-                    <a:pt x="7250518" y="1148079"/>
-                  </a:lnTo>
-                  <a:lnTo>
-                    <a:pt x="7173885" y="1142182"/>
-                  </a:lnTo>
-                  <a:lnTo>
-                    <a:pt x="7097253" y="1136127"/>
-                  </a:lnTo>
-                  <a:lnTo>
-                    <a:pt x="7020620" y="1129908"/>
-                  </a:lnTo>
-                  <a:lnTo>
-                    <a:pt x="6943987" y="1123523"/>
-                  </a:lnTo>
-                  <a:lnTo>
-                    <a:pt x="6867355" y="1116967"/>
-                  </a:lnTo>
-                  <a:lnTo>
-                    <a:pt x="6790722" y="1110235"/>
-                  </a:lnTo>
-                  <a:lnTo>
-                    <a:pt x="6714090" y="1103322"/>
-                  </a:lnTo>
-                  <a:lnTo>
-                    <a:pt x="6637457" y="1096224"/>
-                  </a:lnTo>
-                  <a:lnTo>
-                    <a:pt x="6560825" y="1088935"/>
-                  </a:lnTo>
-                  <a:lnTo>
-                    <a:pt x="6484192" y="1081451"/>
-                  </a:lnTo>
-                  <a:lnTo>
-                    <a:pt x="6407560" y="1073766"/>
-                  </a:lnTo>
-                  <a:lnTo>
-                    <a:pt x="6330927" y="1065874"/>
-                  </a:lnTo>
-                  <a:lnTo>
-                    <a:pt x="6254294" y="1057771"/>
-                  </a:lnTo>
-                  <a:lnTo>
-                    <a:pt x="6177662" y="1049451"/>
-                  </a:lnTo>
-                  <a:lnTo>
-                    <a:pt x="6101029" y="1040907"/>
-                  </a:lnTo>
-                  <a:lnTo>
-                    <a:pt x="6024397" y="1032134"/>
-                  </a:lnTo>
-                  <a:lnTo>
-                    <a:pt x="5947764" y="1023126"/>
-                  </a:lnTo>
-                  <a:lnTo>
-                    <a:pt x="5871132" y="1013875"/>
-                  </a:lnTo>
-                  <a:lnTo>
-                    <a:pt x="5794499" y="1004377"/>
-                  </a:lnTo>
-                  <a:lnTo>
-                    <a:pt x="5717867" y="994624"/>
-                  </a:lnTo>
-                  <a:lnTo>
-                    <a:pt x="5641234" y="984609"/>
-                  </a:lnTo>
-                  <a:lnTo>
-                    <a:pt x="5564602" y="974326"/>
-                  </a:lnTo>
-                  <a:lnTo>
-                    <a:pt x="5487969" y="963766"/>
-                  </a:lnTo>
-                  <a:lnTo>
-                    <a:pt x="5411336" y="952923"/>
-                  </a:lnTo>
-                  <a:lnTo>
-                    <a:pt x="5334704" y="941789"/>
-                  </a:lnTo>
-                  <a:lnTo>
-                    <a:pt x="5258071" y="930357"/>
-                  </a:lnTo>
-                  <a:lnTo>
-                    <a:pt x="5181439" y="918617"/>
-                  </a:lnTo>
-                  <a:lnTo>
-                    <a:pt x="5104806" y="906563"/>
-                  </a:lnTo>
-                  <a:lnTo>
-                    <a:pt x="5028174" y="894185"/>
-                  </a:lnTo>
-                  <a:lnTo>
-                    <a:pt x="4951541" y="881476"/>
-                  </a:lnTo>
-                  <a:lnTo>
-                    <a:pt x="4874909" y="868425"/>
-                  </a:lnTo>
-                  <a:lnTo>
-                    <a:pt x="4798276" y="855024"/>
-                  </a:lnTo>
-                  <a:lnTo>
-                    <a:pt x="4721644" y="841263"/>
-                  </a:lnTo>
-                  <a:lnTo>
-                    <a:pt x="4645011" y="827133"/>
-                  </a:lnTo>
-                  <a:lnTo>
-                    <a:pt x="4568378" y="812624"/>
-                  </a:lnTo>
-                  <a:lnTo>
-                    <a:pt x="4491746" y="797726"/>
-                  </a:lnTo>
-                  <a:lnTo>
-                    <a:pt x="4415113" y="782428"/>
-                  </a:lnTo>
-                  <a:lnTo>
-                    <a:pt x="4338481" y="766719"/>
-                  </a:lnTo>
-                  <a:lnTo>
-                    <a:pt x="4261848" y="750589"/>
-                  </a:lnTo>
-                  <a:lnTo>
-                    <a:pt x="4185216" y="734027"/>
-                  </a:lnTo>
-                  <a:lnTo>
-                    <a:pt x="4108583" y="717019"/>
-                  </a:lnTo>
-                  <a:lnTo>
-                    <a:pt x="4031951" y="699556"/>
-                  </a:lnTo>
-                  <a:lnTo>
-                    <a:pt x="3955318" y="681624"/>
-                  </a:lnTo>
-                  <a:lnTo>
-                    <a:pt x="3878685" y="663210"/>
-                  </a:lnTo>
-                  <a:lnTo>
-                    <a:pt x="3802053" y="644303"/>
-                  </a:lnTo>
-                  <a:lnTo>
-                    <a:pt x="3725420" y="624888"/>
-                  </a:lnTo>
-                  <a:lnTo>
-                    <a:pt x="3648788" y="604953"/>
-                  </a:lnTo>
-                  <a:lnTo>
-                    <a:pt x="3572155" y="584482"/>
-                  </a:lnTo>
-                  <a:lnTo>
-                    <a:pt x="3495523" y="563462"/>
-                  </a:lnTo>
-                  <a:lnTo>
-                    <a:pt x="3418890" y="541879"/>
-                  </a:lnTo>
-                  <a:lnTo>
-                    <a:pt x="3342258" y="530514"/>
-                  </a:lnTo>
-                  <a:lnTo>
-                    <a:pt x="3265625" y="521038"/>
-                  </a:lnTo>
-                  <a:lnTo>
-                    <a:pt x="3188993" y="511456"/>
-                  </a:lnTo>
-                  <a:lnTo>
-                    <a:pt x="3112360" y="501765"/>
-                  </a:lnTo>
-                  <a:lnTo>
-                    <a:pt x="3035727" y="491965"/>
-                  </a:lnTo>
-                  <a:lnTo>
-                    <a:pt x="2959095" y="482054"/>
-                  </a:lnTo>
-                  <a:lnTo>
-                    <a:pt x="2882462" y="472030"/>
-                  </a:lnTo>
-                  <a:lnTo>
-                    <a:pt x="2805830" y="461893"/>
-                  </a:lnTo>
-                  <a:lnTo>
-                    <a:pt x="2729197" y="451642"/>
-                  </a:lnTo>
-                  <a:lnTo>
-                    <a:pt x="2652565" y="441274"/>
-                  </a:lnTo>
-                  <a:lnTo>
-                    <a:pt x="2575932" y="430789"/>
-                  </a:lnTo>
-                  <a:lnTo>
-                    <a:pt x="2499300" y="420185"/>
-                  </a:lnTo>
-                  <a:lnTo>
-                    <a:pt x="2422667" y="409462"/>
-                  </a:lnTo>
-                  <a:lnTo>
-                    <a:pt x="2346034" y="398617"/>
-                  </a:lnTo>
-                  <a:lnTo>
-                    <a:pt x="2269402" y="387649"/>
-                  </a:lnTo>
-                  <a:lnTo>
-                    <a:pt x="2192769" y="376558"/>
-                  </a:lnTo>
-                  <a:lnTo>
-                    <a:pt x="2116137" y="365340"/>
-                  </a:lnTo>
-                  <a:lnTo>
-                    <a:pt x="2039504" y="353996"/>
-                  </a:lnTo>
-                  <a:lnTo>
-                    <a:pt x="1962872" y="342524"/>
-                  </a:lnTo>
-                  <a:lnTo>
-                    <a:pt x="1886239" y="330921"/>
-                  </a:lnTo>
-                  <a:lnTo>
-                    <a:pt x="1809607" y="319188"/>
-                  </a:lnTo>
-                  <a:lnTo>
-                    <a:pt x="1732974" y="307321"/>
-                  </a:lnTo>
-                  <a:lnTo>
-                    <a:pt x="1656342" y="295321"/>
-                  </a:lnTo>
-                  <a:lnTo>
-                    <a:pt x="1579709" y="283184"/>
-                  </a:lnTo>
-                  <a:lnTo>
-                    <a:pt x="1503076" y="270910"/>
-                  </a:lnTo>
-                  <a:lnTo>
-                    <a:pt x="1426444" y="258498"/>
-                  </a:lnTo>
-                  <a:lnTo>
-                    <a:pt x="1349811" y="245944"/>
-                  </a:lnTo>
-                  <a:lnTo>
-                    <a:pt x="1273179" y="233249"/>
-                  </a:lnTo>
-                  <a:lnTo>
-                    <a:pt x="1196546" y="220410"/>
-                  </a:lnTo>
-                  <a:lnTo>
-                    <a:pt x="1119914" y="207426"/>
-                  </a:lnTo>
-                  <a:lnTo>
-                    <a:pt x="1043281" y="194295"/>
-                  </a:lnTo>
-                  <a:lnTo>
-                    <a:pt x="966649" y="181016"/>
-                  </a:lnTo>
-                  <a:lnTo>
-                    <a:pt x="890016" y="167586"/>
-                  </a:lnTo>
-                  <a:lnTo>
-                    <a:pt x="813384" y="154004"/>
-                  </a:lnTo>
-                  <a:lnTo>
-                    <a:pt x="736751" y="140268"/>
-                  </a:lnTo>
-                  <a:lnTo>
-                    <a:pt x="660118" y="126377"/>
-                  </a:lnTo>
-                  <a:lnTo>
-                    <a:pt x="583486" y="112329"/>
-                  </a:lnTo>
-                  <a:lnTo>
-                    <a:pt x="506853" y="98122"/>
-                  </a:lnTo>
-                  <a:lnTo>
-                    <a:pt x="430221" y="83754"/>
-                  </a:lnTo>
-                  <a:lnTo>
-                    <a:pt x="353588" y="69224"/>
-                  </a:lnTo>
-                  <a:lnTo>
-                    <a:pt x="276956" y="54529"/>
-                  </a:lnTo>
-                  <a:lnTo>
-                    <a:pt x="200323" y="39668"/>
-                  </a:lnTo>
-                  <a:lnTo>
-                    <a:pt x="123691" y="24638"/>
-                  </a:lnTo>
-                  <a:lnTo>
-                    <a:pt x="47058" y="9439"/>
-                  </a:lnTo>
-                  <a:lnTo>
-                    <a:pt x="0" y="0"/>
-                  </a:lnTo>
-                </a:path>
-              </a:pathLst>
-            </a:custGeom>
-          </p:spPr>
-          <p:txBody>
-            <a:bodyPr/>
-            <a:lstStyle/>
-            <a:p/>
-          </p:txBody>
-        </p:sp>
-        <p:sp>
-          <p:nvSpPr>
-            <p:cNvPr id="24" name="pl24"/>
-            <p:cNvSpPr/>
-            <p:nvPr/>
-          </p:nvSpPr>
-          <p:spPr>
-            <a:xfrm>
-              <a:off x="817517" y="3638396"/>
-              <a:ext cx="7403783" cy="1608782"/>
-            </a:xfrm>
-            <a:custGeom>
-              <a:avLst/>
-              <a:pathLst>
-                <a:path w="7403783" h="1608782">
+                <a:path w="7090630" h="1697040">
                   <a:moveTo>
                     <a:pt x="0" y="0"/>
                   </a:moveTo>
                   <a:lnTo>
-                    <a:pt x="47058" y="22180"/>
-                  </a:lnTo>
-                  <a:lnTo>
-                    <a:pt x="123691" y="57626"/>
-                  </a:lnTo>
-                  <a:lnTo>
-                    <a:pt x="200323" y="92409"/>
-                  </a:lnTo>
-                  <a:lnTo>
-                    <a:pt x="276956" y="126542"/>
-                  </a:lnTo>
-                  <a:lnTo>
-                    <a:pt x="353588" y="160038"/>
-                  </a:lnTo>
-                  <a:lnTo>
-                    <a:pt x="430221" y="192907"/>
-                  </a:lnTo>
-                  <a:lnTo>
-                    <a:pt x="506853" y="225162"/>
-                  </a:lnTo>
-                  <a:lnTo>
-                    <a:pt x="583486" y="256814"/>
-                  </a:lnTo>
-                  <a:lnTo>
-                    <a:pt x="660118" y="287875"/>
-                  </a:lnTo>
-                  <a:lnTo>
-                    <a:pt x="736751" y="318355"/>
-                  </a:lnTo>
-                  <a:lnTo>
-                    <a:pt x="813384" y="348266"/>
-                  </a:lnTo>
-                  <a:lnTo>
-                    <a:pt x="890016" y="377618"/>
-                  </a:lnTo>
-                  <a:lnTo>
-                    <a:pt x="966649" y="406421"/>
-                  </a:lnTo>
-                  <a:lnTo>
-                    <a:pt x="1043281" y="434686"/>
-                  </a:lnTo>
-                  <a:lnTo>
-                    <a:pt x="1119914" y="462422"/>
-                  </a:lnTo>
-                  <a:lnTo>
-                    <a:pt x="1196546" y="489640"/>
-                  </a:lnTo>
-                  <a:lnTo>
-                    <a:pt x="1273179" y="516350"/>
-                  </a:lnTo>
-                  <a:lnTo>
-                    <a:pt x="1349811" y="542560"/>
-                  </a:lnTo>
-                  <a:lnTo>
-                    <a:pt x="1426444" y="568281"/>
-                  </a:lnTo>
-                  <a:lnTo>
-                    <a:pt x="1503076" y="593521"/>
-                  </a:lnTo>
-                  <a:lnTo>
-                    <a:pt x="1579709" y="618289"/>
-                  </a:lnTo>
-                  <a:lnTo>
-                    <a:pt x="1656342" y="642595"/>
-                  </a:lnTo>
-                  <a:lnTo>
-                    <a:pt x="1732974" y="666446"/>
-                  </a:lnTo>
-                  <a:lnTo>
-                    <a:pt x="1809607" y="689851"/>
-                  </a:lnTo>
-                  <a:lnTo>
-                    <a:pt x="1886239" y="712819"/>
-                  </a:lnTo>
-                  <a:lnTo>
-                    <a:pt x="1962872" y="735358"/>
-                  </a:lnTo>
-                  <a:lnTo>
-                    <a:pt x="2039504" y="757475"/>
-                  </a:lnTo>
-                  <a:lnTo>
-                    <a:pt x="2116137" y="779180"/>
-                  </a:lnTo>
-                  <a:lnTo>
-                    <a:pt x="2192769" y="800478"/>
-                  </a:lnTo>
-                  <a:lnTo>
-                    <a:pt x="2269402" y="821379"/>
-                  </a:lnTo>
-                  <a:lnTo>
-                    <a:pt x="2346034" y="841889"/>
-                  </a:lnTo>
-                  <a:lnTo>
-                    <a:pt x="2422667" y="862015"/>
-                  </a:lnTo>
-                  <a:lnTo>
-                    <a:pt x="2499300" y="881766"/>
-                  </a:lnTo>
-                  <a:lnTo>
-                    <a:pt x="2575932" y="901147"/>
-                  </a:lnTo>
-                  <a:lnTo>
-                    <a:pt x="2652565" y="920166"/>
-                  </a:lnTo>
-                  <a:lnTo>
-                    <a:pt x="2729197" y="938830"/>
-                  </a:lnTo>
-                  <a:lnTo>
-                    <a:pt x="2805830" y="957145"/>
-                  </a:lnTo>
-                  <a:lnTo>
-                    <a:pt x="2882462" y="975118"/>
-                  </a:lnTo>
-                  <a:lnTo>
-                    <a:pt x="2959095" y="992755"/>
-                  </a:lnTo>
-                  <a:lnTo>
-                    <a:pt x="3035727" y="1010062"/>
-                  </a:lnTo>
-                  <a:lnTo>
-                    <a:pt x="3112360" y="1027046"/>
-                  </a:lnTo>
-                  <a:lnTo>
-                    <a:pt x="3188993" y="1043712"/>
-                  </a:lnTo>
-                  <a:lnTo>
-                    <a:pt x="3265625" y="1060067"/>
-                  </a:lnTo>
-                  <a:lnTo>
-                    <a:pt x="3342258" y="1076116"/>
-                  </a:lnTo>
-                  <a:lnTo>
-                    <a:pt x="3418890" y="1091866"/>
-                  </a:lnTo>
-                  <a:lnTo>
-                    <a:pt x="3495523" y="1107321"/>
-                  </a:lnTo>
-                  <a:lnTo>
-                    <a:pt x="3572155" y="1122487"/>
-                  </a:lnTo>
-                  <a:lnTo>
-                    <a:pt x="3648788" y="1137370"/>
-                  </a:lnTo>
-                  <a:lnTo>
-                    <a:pt x="3725420" y="1151974"/>
-                  </a:lnTo>
-                  <a:lnTo>
-                    <a:pt x="3802053" y="1166306"/>
-                  </a:lnTo>
-                  <a:lnTo>
-                    <a:pt x="3878685" y="1180370"/>
-                  </a:lnTo>
-                  <a:lnTo>
-                    <a:pt x="3955318" y="1194171"/>
-                  </a:lnTo>
-                  <a:lnTo>
-                    <a:pt x="4031951" y="1207714"/>
-                  </a:lnTo>
-                  <a:lnTo>
-                    <a:pt x="4108583" y="1221004"/>
-                  </a:lnTo>
-                  <a:lnTo>
-                    <a:pt x="4185216" y="1234045"/>
-                  </a:lnTo>
-                  <a:lnTo>
-                    <a:pt x="4261848" y="1246843"/>
-                  </a:lnTo>
-                  <a:lnTo>
-                    <a:pt x="4338481" y="1259402"/>
-                  </a:lnTo>
-                  <a:lnTo>
-                    <a:pt x="4415113" y="1271726"/>
-                  </a:lnTo>
-                  <a:lnTo>
-                    <a:pt x="4491746" y="1283820"/>
-                  </a:lnTo>
-                  <a:lnTo>
-                    <a:pt x="4568378" y="1295687"/>
-                  </a:lnTo>
-                  <a:lnTo>
-                    <a:pt x="4645011" y="1307333"/>
-                  </a:lnTo>
-                  <a:lnTo>
-                    <a:pt x="4721644" y="1318762"/>
-                  </a:lnTo>
-                  <a:lnTo>
-                    <a:pt x="4798276" y="1329976"/>
-                  </a:lnTo>
-                  <a:lnTo>
-                    <a:pt x="4874909" y="1340981"/>
-                  </a:lnTo>
-                  <a:lnTo>
-                    <a:pt x="4951541" y="1351781"/>
-                  </a:lnTo>
-                  <a:lnTo>
-                    <a:pt x="5028174" y="1362379"/>
-                  </a:lnTo>
-                  <a:lnTo>
-                    <a:pt x="5104806" y="1372778"/>
-                  </a:lnTo>
-                  <a:lnTo>
-                    <a:pt x="5181439" y="1382983"/>
-                  </a:lnTo>
-                  <a:lnTo>
-                    <a:pt x="5258071" y="1392998"/>
-                  </a:lnTo>
-                  <a:lnTo>
-                    <a:pt x="5334704" y="1402825"/>
-                  </a:lnTo>
-                  <a:lnTo>
-                    <a:pt x="5411336" y="1412469"/>
-                  </a:lnTo>
-                  <a:lnTo>
-                    <a:pt x="5487969" y="1421932"/>
-                  </a:lnTo>
-                  <a:lnTo>
-                    <a:pt x="5564602" y="1431219"/>
-                  </a:lnTo>
-                  <a:lnTo>
-                    <a:pt x="5641234" y="1440332"/>
-                  </a:lnTo>
-                  <a:lnTo>
-                    <a:pt x="5717867" y="1449275"/>
-                  </a:lnTo>
-                  <a:lnTo>
-                    <a:pt x="5794499" y="1458050"/>
-                  </a:lnTo>
-                  <a:lnTo>
-                    <a:pt x="5871132" y="1466662"/>
-                  </a:lnTo>
-                  <a:lnTo>
-                    <a:pt x="5947764" y="1475113"/>
-                  </a:lnTo>
-                  <a:lnTo>
-                    <a:pt x="6024397" y="1483405"/>
-                  </a:lnTo>
-                  <a:lnTo>
-                    <a:pt x="6101029" y="1491543"/>
-                  </a:lnTo>
-                  <a:lnTo>
-                    <a:pt x="6177662" y="1499529"/>
-                  </a:lnTo>
-                  <a:lnTo>
-                    <a:pt x="6254294" y="1507365"/>
-                  </a:lnTo>
-                  <a:lnTo>
-                    <a:pt x="6330927" y="1515055"/>
-                  </a:lnTo>
-                  <a:lnTo>
-                    <a:pt x="6407560" y="1522602"/>
-                  </a:lnTo>
-                  <a:lnTo>
-                    <a:pt x="6484192" y="1530007"/>
-                  </a:lnTo>
-                  <a:lnTo>
-                    <a:pt x="6560825" y="1537274"/>
-                  </a:lnTo>
-                  <a:lnTo>
-                    <a:pt x="6637457" y="1544405"/>
-                  </a:lnTo>
-                  <a:lnTo>
-                    <a:pt x="6714090" y="1551403"/>
-                  </a:lnTo>
-                  <a:lnTo>
-                    <a:pt x="6790722" y="1558270"/>
-                  </a:lnTo>
-                  <a:lnTo>
-                    <a:pt x="6867355" y="1565008"/>
-                  </a:lnTo>
-                  <a:lnTo>
-                    <a:pt x="6943987" y="1571621"/>
-                  </a:lnTo>
-                  <a:lnTo>
-                    <a:pt x="7020620" y="1578110"/>
-                  </a:lnTo>
-                  <a:lnTo>
-                    <a:pt x="7097253" y="1584478"/>
-                  </a:lnTo>
-                  <a:lnTo>
-                    <a:pt x="7173885" y="1590727"/>
-                  </a:lnTo>
-                  <a:lnTo>
-                    <a:pt x="7250518" y="1596859"/>
-                  </a:lnTo>
-                  <a:lnTo>
-                    <a:pt x="7327150" y="1602877"/>
-                  </a:lnTo>
-                  <a:lnTo>
-                    <a:pt x="7403783" y="1608782"/>
+                    <a:pt x="71622" y="37509"/>
+                  </a:lnTo>
+                  <a:lnTo>
+                    <a:pt x="143245" y="74318"/>
+                  </a:lnTo>
+                  <a:lnTo>
+                    <a:pt x="214867" y="110438"/>
+                  </a:lnTo>
+                  <a:lnTo>
+                    <a:pt x="286490" y="145884"/>
+                  </a:lnTo>
+                  <a:lnTo>
+                    <a:pt x="358112" y="180667"/>
+                  </a:lnTo>
+                  <a:lnTo>
+                    <a:pt x="429735" y="214800"/>
+                  </a:lnTo>
+                  <a:lnTo>
+                    <a:pt x="501357" y="248296"/>
+                  </a:lnTo>
+                  <a:lnTo>
+                    <a:pt x="572980" y="281165"/>
+                  </a:lnTo>
+                  <a:lnTo>
+                    <a:pt x="644602" y="313420"/>
+                  </a:lnTo>
+                  <a:lnTo>
+                    <a:pt x="716225" y="345072"/>
+                  </a:lnTo>
+                  <a:lnTo>
+                    <a:pt x="787847" y="376133"/>
+                  </a:lnTo>
+                  <a:lnTo>
+                    <a:pt x="859470" y="406613"/>
+                  </a:lnTo>
+                  <a:lnTo>
+                    <a:pt x="931092" y="436524"/>
+                  </a:lnTo>
+                  <a:lnTo>
+                    <a:pt x="1002715" y="465875"/>
+                  </a:lnTo>
+                  <a:lnTo>
+                    <a:pt x="1074337" y="494678"/>
+                  </a:lnTo>
+                  <a:lnTo>
+                    <a:pt x="1145960" y="522943"/>
+                  </a:lnTo>
+                  <a:lnTo>
+                    <a:pt x="1217582" y="550680"/>
+                  </a:lnTo>
+                  <a:lnTo>
+                    <a:pt x="1289205" y="577898"/>
+                  </a:lnTo>
+                  <a:lnTo>
+                    <a:pt x="1360827" y="604608"/>
+                  </a:lnTo>
+                  <a:lnTo>
+                    <a:pt x="1432450" y="630818"/>
+                  </a:lnTo>
+                  <a:lnTo>
+                    <a:pt x="1504073" y="656539"/>
+                  </a:lnTo>
+                  <a:lnTo>
+                    <a:pt x="1575695" y="681779"/>
+                  </a:lnTo>
+                  <a:lnTo>
+                    <a:pt x="1647318" y="706547"/>
+                  </a:lnTo>
+                  <a:lnTo>
+                    <a:pt x="1718940" y="730852"/>
+                  </a:lnTo>
+                  <a:lnTo>
+                    <a:pt x="1790563" y="754703"/>
+                  </a:lnTo>
+                  <a:lnTo>
+                    <a:pt x="1862185" y="778109"/>
+                  </a:lnTo>
+                  <a:lnTo>
+                    <a:pt x="1933808" y="801077"/>
+                  </a:lnTo>
+                  <a:lnTo>
+                    <a:pt x="2005430" y="823616"/>
+                  </a:lnTo>
+                  <a:lnTo>
+                    <a:pt x="2077053" y="845733"/>
+                  </a:lnTo>
+                  <a:lnTo>
+                    <a:pt x="2148675" y="867437"/>
+                  </a:lnTo>
+                  <a:lnTo>
+                    <a:pt x="2220298" y="888736"/>
+                  </a:lnTo>
+                  <a:lnTo>
+                    <a:pt x="2291920" y="909636"/>
+                  </a:lnTo>
+                  <a:lnTo>
+                    <a:pt x="2363543" y="930146"/>
+                  </a:lnTo>
+                  <a:lnTo>
+                    <a:pt x="2435165" y="950273"/>
+                  </a:lnTo>
+                  <a:lnTo>
+                    <a:pt x="2506788" y="970024"/>
+                  </a:lnTo>
+                  <a:lnTo>
+                    <a:pt x="2578410" y="989405"/>
+                  </a:lnTo>
+                  <a:lnTo>
+                    <a:pt x="2650033" y="1008424"/>
+                  </a:lnTo>
+                  <a:lnTo>
+                    <a:pt x="2721655" y="1027088"/>
+                  </a:lnTo>
+                  <a:lnTo>
+                    <a:pt x="2793278" y="1045403"/>
+                  </a:lnTo>
+                  <a:lnTo>
+                    <a:pt x="2864901" y="1063376"/>
+                  </a:lnTo>
+                  <a:lnTo>
+                    <a:pt x="2936523" y="1081012"/>
+                  </a:lnTo>
+                  <a:lnTo>
+                    <a:pt x="3008146" y="1098320"/>
+                  </a:lnTo>
+                  <a:lnTo>
+                    <a:pt x="3079768" y="1115303"/>
+                  </a:lnTo>
+                  <a:lnTo>
+                    <a:pt x="3151391" y="1131970"/>
+                  </a:lnTo>
+                  <a:lnTo>
+                    <a:pt x="3223013" y="1148325"/>
+                  </a:lnTo>
+                  <a:lnTo>
+                    <a:pt x="3294636" y="1164374"/>
+                  </a:lnTo>
+                  <a:lnTo>
+                    <a:pt x="3366258" y="1180123"/>
+                  </a:lnTo>
+                  <a:lnTo>
+                    <a:pt x="3437881" y="1195578"/>
+                  </a:lnTo>
+                  <a:lnTo>
+                    <a:pt x="3509503" y="1210745"/>
+                  </a:lnTo>
+                  <a:lnTo>
+                    <a:pt x="3581126" y="1225627"/>
+                  </a:lnTo>
+                  <a:lnTo>
+                    <a:pt x="3652748" y="1240232"/>
+                  </a:lnTo>
+                  <a:lnTo>
+                    <a:pt x="3724371" y="1254564"/>
+                  </a:lnTo>
+                  <a:lnTo>
+                    <a:pt x="3795993" y="1268627"/>
+                  </a:lnTo>
+                  <a:lnTo>
+                    <a:pt x="3867616" y="1282428"/>
+                  </a:lnTo>
+                  <a:lnTo>
+                    <a:pt x="3939238" y="1295972"/>
+                  </a:lnTo>
+                  <a:lnTo>
+                    <a:pt x="4010861" y="1309262"/>
+                  </a:lnTo>
+                  <a:lnTo>
+                    <a:pt x="4082483" y="1322303"/>
+                  </a:lnTo>
+                  <a:lnTo>
+                    <a:pt x="4154106" y="1335101"/>
+                  </a:lnTo>
+                  <a:lnTo>
+                    <a:pt x="4225729" y="1347660"/>
+                  </a:lnTo>
+                  <a:lnTo>
+                    <a:pt x="4297351" y="1359984"/>
+                  </a:lnTo>
+                  <a:lnTo>
+                    <a:pt x="4368974" y="1372078"/>
+                  </a:lnTo>
+                  <a:lnTo>
+                    <a:pt x="4440596" y="1383945"/>
+                  </a:lnTo>
+                  <a:lnTo>
+                    <a:pt x="4512219" y="1395591"/>
+                  </a:lnTo>
+                  <a:lnTo>
+                    <a:pt x="4583841" y="1407019"/>
+                  </a:lnTo>
+                  <a:lnTo>
+                    <a:pt x="4655464" y="1418234"/>
+                  </a:lnTo>
+                  <a:lnTo>
+                    <a:pt x="4727086" y="1429239"/>
+                  </a:lnTo>
+                  <a:lnTo>
+                    <a:pt x="4798709" y="1440039"/>
+                  </a:lnTo>
+                  <a:lnTo>
+                    <a:pt x="4870331" y="1450636"/>
+                  </a:lnTo>
+                  <a:lnTo>
+                    <a:pt x="4941954" y="1461036"/>
+                  </a:lnTo>
+                  <a:lnTo>
+                    <a:pt x="5013576" y="1471241"/>
+                  </a:lnTo>
+                  <a:lnTo>
+                    <a:pt x="5085199" y="1481256"/>
+                  </a:lnTo>
+                  <a:lnTo>
+                    <a:pt x="5156821" y="1491083"/>
+                  </a:lnTo>
+                  <a:lnTo>
+                    <a:pt x="5228444" y="1500727"/>
+                  </a:lnTo>
+                  <a:lnTo>
+                    <a:pt x="5300066" y="1510190"/>
+                  </a:lnTo>
+                  <a:lnTo>
+                    <a:pt x="5371689" y="1519477"/>
+                  </a:lnTo>
+                  <a:lnTo>
+                    <a:pt x="5443311" y="1528590"/>
+                  </a:lnTo>
+                  <a:lnTo>
+                    <a:pt x="5514934" y="1537533"/>
+                  </a:lnTo>
+                  <a:lnTo>
+                    <a:pt x="5586557" y="1546308"/>
+                  </a:lnTo>
+                  <a:lnTo>
+                    <a:pt x="5658179" y="1554920"/>
+                  </a:lnTo>
+                  <a:lnTo>
+                    <a:pt x="5729802" y="1563370"/>
+                  </a:lnTo>
+                  <a:lnTo>
+                    <a:pt x="5801424" y="1571663"/>
+                  </a:lnTo>
+                  <a:lnTo>
+                    <a:pt x="5873047" y="1579801"/>
+                  </a:lnTo>
+                  <a:lnTo>
+                    <a:pt x="5944669" y="1587787"/>
+                  </a:lnTo>
+                  <a:lnTo>
+                    <a:pt x="6016292" y="1595623"/>
+                  </a:lnTo>
+                  <a:lnTo>
+                    <a:pt x="6087914" y="1603313"/>
+                  </a:lnTo>
+                  <a:lnTo>
+                    <a:pt x="6159537" y="1610859"/>
+                  </a:lnTo>
+                  <a:lnTo>
+                    <a:pt x="6231159" y="1618265"/>
+                  </a:lnTo>
+                  <a:lnTo>
+                    <a:pt x="6302782" y="1625532"/>
+                  </a:lnTo>
+                  <a:lnTo>
+                    <a:pt x="6374404" y="1632663"/>
+                  </a:lnTo>
+                  <a:lnTo>
+                    <a:pt x="6446027" y="1639660"/>
+                  </a:lnTo>
+                  <a:lnTo>
+                    <a:pt x="6517649" y="1646527"/>
+                  </a:lnTo>
+                  <a:lnTo>
+                    <a:pt x="6589272" y="1653266"/>
+                  </a:lnTo>
+                  <a:lnTo>
+                    <a:pt x="6660894" y="1659879"/>
+                  </a:lnTo>
+                  <a:lnTo>
+                    <a:pt x="6732517" y="1666368"/>
+                  </a:lnTo>
+                  <a:lnTo>
+                    <a:pt x="6804139" y="1672736"/>
+                  </a:lnTo>
+                  <a:lnTo>
+                    <a:pt x="6875762" y="1678985"/>
+                  </a:lnTo>
+                  <a:lnTo>
+                    <a:pt x="6947385" y="1685117"/>
+                  </a:lnTo>
+                  <a:lnTo>
+                    <a:pt x="7019007" y="1691135"/>
+                  </a:lnTo>
+                  <a:lnTo>
+                    <a:pt x="7090630" y="1697040"/>
                   </a:lnTo>
                 </a:path>
               </a:pathLst>
@@ -4581,7 +4568,7 @@
         </p:sp>
         <p:sp>
           <p:nvSpPr>
-            <p:cNvPr id="25" name="pl25"/>
+            <p:cNvPr id="24" name="pl24"/>
             <p:cNvSpPr/>
             <p:nvPr/>
           </p:nvSpPr>
@@ -4624,13 +4611,13 @@
         </p:sp>
         <p:sp>
           <p:nvSpPr>
-            <p:cNvPr id="26" name="pl26"/>
+            <p:cNvPr id="25" name="pl25"/>
             <p:cNvSpPr/>
             <p:nvPr/>
           </p:nvSpPr>
           <p:spPr>
             <a:xfrm>
-              <a:off x="4224261" y="2073503"/>
+              <a:off x="4526955" y="2073503"/>
               <a:ext cx="0" cy="3649639"/>
             </a:xfrm>
             <a:custGeom>
@@ -4667,7 +4654,7 @@
         </p:sp>
         <p:sp>
           <p:nvSpPr>
-            <p:cNvPr id="27" name="tx27"/>
+            <p:cNvPr id="26" name="tx26"/>
             <p:cNvSpPr/>
             <p:nvPr/>
           </p:nvSpPr>
@@ -4713,7 +4700,7 @@
         </p:sp>
         <p:sp>
           <p:nvSpPr>
-            <p:cNvPr id="28" name="tx28"/>
+            <p:cNvPr id="27" name="tx27"/>
             <p:cNvSpPr/>
             <p:nvPr/>
           </p:nvSpPr>
@@ -4759,7 +4746,7 @@
         </p:sp>
         <p:sp>
           <p:nvSpPr>
-            <p:cNvPr id="29" name="tx29"/>
+            <p:cNvPr id="28" name="tx28"/>
             <p:cNvSpPr/>
             <p:nvPr/>
           </p:nvSpPr>
@@ -4805,7 +4792,7 @@
         </p:sp>
         <p:sp>
           <p:nvSpPr>
-            <p:cNvPr id="30" name="tx30"/>
+            <p:cNvPr id="29" name="tx29"/>
             <p:cNvSpPr/>
             <p:nvPr/>
           </p:nvSpPr>
@@ -4851,7 +4838,7 @@
         </p:sp>
         <p:sp>
           <p:nvSpPr>
-            <p:cNvPr id="31" name="tx31"/>
+            <p:cNvPr id="30" name="tx30"/>
             <p:cNvSpPr/>
             <p:nvPr/>
           </p:nvSpPr>
@@ -4897,14 +4884,14 @@
         </p:sp>
         <p:sp>
           <p:nvSpPr>
-            <p:cNvPr id="32" name="tx32"/>
+            <p:cNvPr id="31" name="tx31"/>
             <p:cNvSpPr/>
             <p:nvPr/>
           </p:nvSpPr>
           <p:spPr>
             <a:xfrm>
-              <a:off x="2423864" y="5785772"/>
-              <a:ext cx="155356" cy="80101"/>
+              <a:off x="2421884" y="5785772"/>
+              <a:ext cx="161574" cy="80101"/>
             </a:xfrm>
             <a:prstGeom prst="rect">
               <a:avLst/>
@@ -4936,21 +4923,21 @@
                   <a:latin typeface="Helvetica"/>
                   <a:cs typeface="Helvetica"/>
                 </a:rPr>
-                <a:t>0.8</a:t>
+                <a:t>-25</a:t>
               </a:r>
             </a:p>
           </p:txBody>
         </p:sp>
         <p:sp>
           <p:nvSpPr>
-            <p:cNvPr id="33" name="tx33"/>
+            <p:cNvPr id="32" name="tx32"/>
             <p:cNvSpPr/>
             <p:nvPr/>
           </p:nvSpPr>
           <p:spPr>
             <a:xfrm>
-              <a:off x="4196521" y="5785772"/>
-              <a:ext cx="155356" cy="80101"/>
+              <a:off x="4542539" y="5785772"/>
+              <a:ext cx="62179" cy="80101"/>
             </a:xfrm>
             <a:prstGeom prst="rect">
               <a:avLst/>
@@ -4982,21 +4969,21 @@
                   <a:latin typeface="Helvetica"/>
                   <a:cs typeface="Helvetica"/>
                 </a:rPr>
-                <a:t>1.0</a:t>
+                <a:t>0</a:t>
               </a:r>
             </a:p>
           </p:txBody>
         </p:sp>
         <p:sp>
           <p:nvSpPr>
-            <p:cNvPr id="34" name="tx34"/>
+            <p:cNvPr id="33" name="tx33"/>
             <p:cNvSpPr/>
             <p:nvPr/>
           </p:nvSpPr>
           <p:spPr>
             <a:xfrm>
-              <a:off x="5969179" y="5785772"/>
-              <a:ext cx="155356" cy="80101"/>
+              <a:off x="6582407" y="5785772"/>
+              <a:ext cx="124358" cy="80101"/>
             </a:xfrm>
             <a:prstGeom prst="rect">
               <a:avLst/>
@@ -5028,67 +5015,21 @@
                   <a:latin typeface="Helvetica"/>
                   <a:cs typeface="Helvetica"/>
                 </a:rPr>
-                <a:t>1.2</a:t>
+                <a:t>25</a:t>
               </a:r>
             </a:p>
           </p:txBody>
         </p:sp>
         <p:sp>
           <p:nvSpPr>
-            <p:cNvPr id="35" name="tx35"/>
+            <p:cNvPr id="34" name="tx34"/>
             <p:cNvSpPr/>
             <p:nvPr/>
           </p:nvSpPr>
           <p:spPr>
             <a:xfrm>
-              <a:off x="7741836" y="5785772"/>
-              <a:ext cx="155356" cy="80101"/>
-            </a:xfrm>
-            <a:prstGeom prst="rect">
-              <a:avLst/>
-            </a:prstGeom>
-            <a:noFill/>
-          </p:spPr>
-          <p:txBody>
-            <a:bodyPr lIns="0" rIns="0" tIns="0" bIns="0" anchorCtr="1" anchor="ctr" wrap="none"/>
-            <a:lstStyle/>
-            <a:p>
-              <a:pPr algn="l" marL="0" marR="0" indent="0">
-                <a:lnSpc>
-                  <a:spcPts val="880"/>
-                </a:lnSpc>
-                <a:spcBef>
-                  <a:spcPts val="0"/>
-                </a:spcBef>
-                <a:spcAft>
-                  <a:spcPts val="0"/>
-                </a:spcAft>
-              </a:pPr>
-              <a:r>
-                <a:rPr sz="880">
-                  <a:solidFill>
-                    <a:srgbClr val="4D4D4D">
-                      <a:alpha val="100000"/>
-                    </a:srgbClr>
-                  </a:solidFill>
-                  <a:latin typeface="Helvetica"/>
-                  <a:cs typeface="Helvetica"/>
-                </a:rPr>
-                <a:t>1.4</a:t>
-              </a:r>
-            </a:p>
-          </p:txBody>
-        </p:sp>
-        <p:sp>
-          <p:nvSpPr>
-            <p:cNvPr id="36" name="tx36"/>
-            <p:cNvSpPr/>
-            <p:nvPr/>
-          </p:nvSpPr>
-          <p:spPr>
-            <a:xfrm>
-              <a:off x="3879271" y="5925448"/>
-              <a:ext cx="1676186" cy="100218"/>
+              <a:off x="2928340" y="5925448"/>
+              <a:ext cx="3578047" cy="100218"/>
             </a:xfrm>
             <a:prstGeom prst="rect">
               <a:avLst/>
@@ -5120,14 +5061,14 @@
                   <a:latin typeface="Helvetica"/>
                   <a:cs typeface="Helvetica"/>
                 </a:rPr>
-                <a:t>CKD-EPI Cr-Cys / CG ratio</a:t>
+                <a:t>eGFR difference (%): 100 × (CKD-EPI Cr-Cys − CG) / CG</a:t>
               </a:r>
             </a:p>
           </p:txBody>
         </p:sp>
         <p:sp>
           <p:nvSpPr>
-            <p:cNvPr id="37" name="tx37"/>
+            <p:cNvPr id="35" name="tx35"/>
             <p:cNvSpPr/>
             <p:nvPr/>
           </p:nvSpPr>
@@ -5173,14 +5114,14 @@
         </p:sp>
         <p:sp>
           <p:nvSpPr>
-            <p:cNvPr id="38" name="tx38"/>
+            <p:cNvPr id="36" name="tx36"/>
             <p:cNvSpPr/>
             <p:nvPr/>
           </p:nvSpPr>
           <p:spPr>
             <a:xfrm>
               <a:off x="817517" y="1896563"/>
-              <a:ext cx="6899879" cy="82021"/>
+              <a:ext cx="7052127" cy="82021"/>
             </a:xfrm>
             <a:prstGeom prst="rect">
               <a:avLst/>
@@ -5212,14 +5153,14 @@
                   <a:latin typeface="Helvetica"/>
                   <a:cs typeface="Helvetica"/>
                 </a:rPr>
-                <a:t>subHR per 0.1 ratio decline: 1.24 (1.14-1.36), p_Bonf = &lt;0.001 (n = 6)  |  per IQR decline (Δ = 0.30): 1.92 (1.48-2.50)  |  IQR: [0.85, 1.15]</a:t>
+                <a:t>subHR per 10 % decline: 1.24 (1.14-1.36), p_Bonf = &lt;0.001 (n = 6)  |  per IQR decline (Δ = 29.9 %): 1.92 (1.48-2.50)  |  IQR: [-15.0, 14.9] %</a:t>
               </a:r>
             </a:p>
           </p:txBody>
         </p:sp>
         <p:sp>
           <p:nvSpPr>
-            <p:cNvPr id="39" name="tx39"/>
+            <p:cNvPr id="37" name="tx37"/>
             <p:cNvSpPr/>
             <p:nvPr/>
           </p:nvSpPr>

--- a/docs/pptx/carbo/jx-carbo-linsubhr-ratio-anemia2.pptx
+++ b/docs/pptx/carbo/jx-carbo-linsubhr-ratio-anemia2.pptx
@@ -2265,34 +2265,26 @@
         </p:sp>
         <p:sp>
           <p:nvSpPr>
-            <p:cNvPr id="4" name="pl4"/>
+            <p:cNvPr id="4" name="rc4"/>
             <p:cNvSpPr/>
             <p:nvPr/>
           </p:nvSpPr>
           <p:spPr>
             <a:xfrm>
-              <a:off x="817517" y="5142518"/>
-              <a:ext cx="7799693" cy="0"/>
+              <a:off x="457200" y="1600200"/>
+              <a:ext cx="8229600" cy="4525962"/>
             </a:xfrm>
-            <a:custGeom>
+            <a:prstGeom prst="rect">
               <a:avLst/>
-              <a:pathLst>
-                <a:path w="7799693" h="0">
-                  <a:moveTo>
-                    <a:pt x="0" y="0"/>
-                  </a:moveTo>
-                  <a:lnTo>
-                    <a:pt x="7799693" y="0"/>
-                  </a:lnTo>
-                  <a:lnTo>
-                    <a:pt x="7799693" y="0"/>
-                  </a:lnTo>
-                </a:path>
-              </a:pathLst>
-            </a:custGeom>
-            <a:ln w="6775" cap="flat">
+            </a:prstGeom>
+            <a:solidFill>
+              <a:srgbClr val="FFFFFF">
+                <a:alpha val="100000"/>
+              </a:srgbClr>
+            </a:solidFill>
+            <a:ln w="13550" cap="rnd">
               <a:solidFill>
-                <a:srgbClr val="EBEBEB">
+                <a:srgbClr val="FFFFFF">
                   <a:alpha val="100000"/>
                 </a:srgbClr>
               </a:solidFill>
@@ -2314,21 +2306,21 @@
           </p:nvSpPr>
           <p:spPr>
             <a:xfrm>
-              <a:off x="817517" y="4313054"/>
-              <a:ext cx="7799693" cy="0"/>
+              <a:off x="887106" y="3250627"/>
+              <a:ext cx="7660515" cy="0"/>
             </a:xfrm>
             <a:custGeom>
               <a:avLst/>
               <a:pathLst>
-                <a:path w="7799693" h="0">
+                <a:path w="7660515" h="0">
                   <a:moveTo>
                     <a:pt x="0" y="0"/>
                   </a:moveTo>
                   <a:lnTo>
-                    <a:pt x="7799693" y="0"/>
-                  </a:lnTo>
-                  <a:lnTo>
-                    <a:pt x="7799693" y="0"/>
+                    <a:pt x="7660515" y="0"/>
+                  </a:lnTo>
+                  <a:lnTo>
+                    <a:pt x="7660515" y="0"/>
                   </a:lnTo>
                 </a:path>
               </a:pathLst>
@@ -2357,21 +2349,21 @@
           </p:nvSpPr>
           <p:spPr>
             <a:xfrm>
-              <a:off x="817517" y="3483591"/>
-              <a:ext cx="7799693" cy="0"/>
+              <a:off x="887106" y="2951293"/>
+              <a:ext cx="7660515" cy="0"/>
             </a:xfrm>
             <a:custGeom>
               <a:avLst/>
               <a:pathLst>
-                <a:path w="7799693" h="0">
+                <a:path w="7660515" h="0">
                   <a:moveTo>
                     <a:pt x="0" y="0"/>
                   </a:moveTo>
                   <a:lnTo>
-                    <a:pt x="7799693" y="0"/>
-                  </a:lnTo>
-                  <a:lnTo>
-                    <a:pt x="7799693" y="0"/>
+                    <a:pt x="7660515" y="0"/>
+                  </a:lnTo>
+                  <a:lnTo>
+                    <a:pt x="7660515" y="0"/>
                   </a:lnTo>
                 </a:path>
               </a:pathLst>
@@ -2400,21 +2392,21 @@
           </p:nvSpPr>
           <p:spPr>
             <a:xfrm>
-              <a:off x="817517" y="2654127"/>
-              <a:ext cx="7799693" cy="0"/>
+              <a:off x="887106" y="2651959"/>
+              <a:ext cx="7660515" cy="0"/>
             </a:xfrm>
             <a:custGeom>
               <a:avLst/>
               <a:pathLst>
-                <a:path w="7799693" h="0">
+                <a:path w="7660515" h="0">
                   <a:moveTo>
                     <a:pt x="0" y="0"/>
                   </a:moveTo>
                   <a:lnTo>
-                    <a:pt x="7799693" y="0"/>
-                  </a:lnTo>
-                  <a:lnTo>
-                    <a:pt x="7799693" y="0"/>
+                    <a:pt x="7660515" y="0"/>
+                  </a:lnTo>
+                  <a:lnTo>
+                    <a:pt x="7660515" y="0"/>
                   </a:lnTo>
                 </a:path>
               </a:pathLst>
@@ -2443,21 +2435,21 @@
           </p:nvSpPr>
           <p:spPr>
             <a:xfrm>
-              <a:off x="1467192" y="2073503"/>
-              <a:ext cx="0" cy="3649639"/>
+              <a:off x="887106" y="2352625"/>
+              <a:ext cx="7660515" cy="0"/>
             </a:xfrm>
             <a:custGeom>
               <a:avLst/>
               <a:pathLst>
-                <a:path w="0" h="3649639">
+                <a:path w="7660515" h="0">
                   <a:moveTo>
-                    <a:pt x="0" y="3649639"/>
+                    <a:pt x="0" y="0"/>
                   </a:moveTo>
                   <a:lnTo>
-                    <a:pt x="0" y="0"/>
-                  </a:lnTo>
-                  <a:lnTo>
-                    <a:pt x="0" y="0"/>
+                    <a:pt x="7660515" y="0"/>
+                  </a:lnTo>
+                  <a:lnTo>
+                    <a:pt x="7660515" y="0"/>
                   </a:lnTo>
                 </a:path>
               </a:pathLst>
@@ -2486,15 +2478,15 @@
           </p:nvSpPr>
           <p:spPr>
             <a:xfrm>
-              <a:off x="3538150" y="2073503"/>
-              <a:ext cx="0" cy="3649639"/>
+              <a:off x="1525188" y="2143092"/>
+              <a:ext cx="0" cy="1317069"/>
             </a:xfrm>
             <a:custGeom>
               <a:avLst/>
               <a:pathLst>
-                <a:path w="0" h="3649639">
+                <a:path w="0" h="1317069">
                   <a:moveTo>
-                    <a:pt x="0" y="3649639"/>
+                    <a:pt x="0" y="1317069"/>
                   </a:moveTo>
                   <a:lnTo>
                     <a:pt x="0" y="0"/>
@@ -2529,15 +2521,15 @@
           </p:nvSpPr>
           <p:spPr>
             <a:xfrm>
-              <a:off x="5609107" y="2073503"/>
-              <a:ext cx="0" cy="3649639"/>
+              <a:off x="3559192" y="2143092"/>
+              <a:ext cx="0" cy="1317069"/>
             </a:xfrm>
             <a:custGeom>
               <a:avLst/>
               <a:pathLst>
-                <a:path w="0" h="3649639">
+                <a:path w="0" h="1317069">
                   <a:moveTo>
-                    <a:pt x="0" y="3649639"/>
+                    <a:pt x="0" y="1317069"/>
                   </a:moveTo>
                   <a:lnTo>
                     <a:pt x="0" y="0"/>
@@ -2572,15 +2564,15 @@
           </p:nvSpPr>
           <p:spPr>
             <a:xfrm>
-              <a:off x="7680065" y="2073503"/>
-              <a:ext cx="0" cy="3649639"/>
+              <a:off x="5593195" y="2143092"/>
+              <a:ext cx="0" cy="1317069"/>
             </a:xfrm>
             <a:custGeom>
               <a:avLst/>
               <a:pathLst>
-                <a:path w="0" h="3649639">
+                <a:path w="0" h="1317069">
                   <a:moveTo>
-                    <a:pt x="0" y="3649639"/>
+                    <a:pt x="0" y="1317069"/>
                   </a:moveTo>
                   <a:lnTo>
                     <a:pt x="0" y="0"/>
@@ -2615,26 +2607,26 @@
           </p:nvSpPr>
           <p:spPr>
             <a:xfrm>
-              <a:off x="817517" y="5557249"/>
-              <a:ext cx="7799693" cy="0"/>
+              <a:off x="7627198" y="2143092"/>
+              <a:ext cx="0" cy="1317069"/>
             </a:xfrm>
             <a:custGeom>
               <a:avLst/>
               <a:pathLst>
-                <a:path w="7799693" h="0">
+                <a:path w="0" h="1317069">
                   <a:moveTo>
+                    <a:pt x="0" y="1317069"/>
+                  </a:moveTo>
+                  <a:lnTo>
                     <a:pt x="0" y="0"/>
-                  </a:moveTo>
-                  <a:lnTo>
-                    <a:pt x="7799693" y="0"/>
-                  </a:lnTo>
-                  <a:lnTo>
-                    <a:pt x="7799693" y="0"/>
+                  </a:lnTo>
+                  <a:lnTo>
+                    <a:pt x="0" y="0"/>
                   </a:lnTo>
                 </a:path>
               </a:pathLst>
             </a:custGeom>
-            <a:ln w="13550" cap="flat">
+            <a:ln w="6775" cap="flat">
               <a:solidFill>
                 <a:srgbClr val="EBEBEB">
                   <a:alpha val="100000"/>
@@ -2658,21 +2650,21 @@
           </p:nvSpPr>
           <p:spPr>
             <a:xfrm>
-              <a:off x="817517" y="4727786"/>
-              <a:ext cx="7799693" cy="0"/>
+              <a:off x="887106" y="3400294"/>
+              <a:ext cx="7660515" cy="0"/>
             </a:xfrm>
             <a:custGeom>
               <a:avLst/>
               <a:pathLst>
-                <a:path w="7799693" h="0">
+                <a:path w="7660515" h="0">
                   <a:moveTo>
                     <a:pt x="0" y="0"/>
                   </a:moveTo>
                   <a:lnTo>
-                    <a:pt x="7799693" y="0"/>
-                  </a:lnTo>
-                  <a:lnTo>
-                    <a:pt x="7799693" y="0"/>
+                    <a:pt x="7660515" y="0"/>
+                  </a:lnTo>
+                  <a:lnTo>
+                    <a:pt x="7660515" y="0"/>
                   </a:lnTo>
                 </a:path>
               </a:pathLst>
@@ -2701,21 +2693,21 @@
           </p:nvSpPr>
           <p:spPr>
             <a:xfrm>
-              <a:off x="817517" y="3898322"/>
-              <a:ext cx="7799693" cy="0"/>
+              <a:off x="887106" y="3100960"/>
+              <a:ext cx="7660515" cy="0"/>
             </a:xfrm>
             <a:custGeom>
               <a:avLst/>
               <a:pathLst>
-                <a:path w="7799693" h="0">
+                <a:path w="7660515" h="0">
                   <a:moveTo>
                     <a:pt x="0" y="0"/>
                   </a:moveTo>
                   <a:lnTo>
-                    <a:pt x="7799693" y="0"/>
-                  </a:lnTo>
-                  <a:lnTo>
-                    <a:pt x="7799693" y="0"/>
+                    <a:pt x="7660515" y="0"/>
+                  </a:lnTo>
+                  <a:lnTo>
+                    <a:pt x="7660515" y="0"/>
                   </a:lnTo>
                 </a:path>
               </a:pathLst>
@@ -2744,21 +2736,21 @@
           </p:nvSpPr>
           <p:spPr>
             <a:xfrm>
-              <a:off x="817517" y="3068859"/>
-              <a:ext cx="7799693" cy="0"/>
+              <a:off x="887106" y="2801626"/>
+              <a:ext cx="7660515" cy="0"/>
             </a:xfrm>
             <a:custGeom>
               <a:avLst/>
               <a:pathLst>
-                <a:path w="7799693" h="0">
+                <a:path w="7660515" h="0">
                   <a:moveTo>
                     <a:pt x="0" y="0"/>
                   </a:moveTo>
                   <a:lnTo>
-                    <a:pt x="7799693" y="0"/>
-                  </a:lnTo>
-                  <a:lnTo>
-                    <a:pt x="7799693" y="0"/>
+                    <a:pt x="7660515" y="0"/>
+                  </a:lnTo>
+                  <a:lnTo>
+                    <a:pt x="7660515" y="0"/>
                   </a:lnTo>
                 </a:path>
               </a:pathLst>
@@ -2787,21 +2779,21 @@
           </p:nvSpPr>
           <p:spPr>
             <a:xfrm>
-              <a:off x="817517" y="2239395"/>
-              <a:ext cx="7799693" cy="0"/>
+              <a:off x="887106" y="2502292"/>
+              <a:ext cx="7660515" cy="0"/>
             </a:xfrm>
             <a:custGeom>
               <a:avLst/>
               <a:pathLst>
-                <a:path w="7799693" h="0">
+                <a:path w="7660515" h="0">
                   <a:moveTo>
                     <a:pt x="0" y="0"/>
                   </a:moveTo>
                   <a:lnTo>
-                    <a:pt x="7799693" y="0"/>
-                  </a:lnTo>
-                  <a:lnTo>
-                    <a:pt x="7799693" y="0"/>
+                    <a:pt x="7660515" y="0"/>
+                  </a:lnTo>
+                  <a:lnTo>
+                    <a:pt x="7660515" y="0"/>
                   </a:lnTo>
                 </a:path>
               </a:pathLst>
@@ -2830,21 +2822,21 @@
           </p:nvSpPr>
           <p:spPr>
             <a:xfrm>
-              <a:off x="2502671" y="2073503"/>
-              <a:ext cx="0" cy="3649639"/>
+              <a:off x="887106" y="2202958"/>
+              <a:ext cx="7660515" cy="0"/>
             </a:xfrm>
             <a:custGeom>
               <a:avLst/>
               <a:pathLst>
-                <a:path w="0" h="3649639">
+                <a:path w="7660515" h="0">
                   <a:moveTo>
-                    <a:pt x="0" y="3649639"/>
+                    <a:pt x="0" y="0"/>
                   </a:moveTo>
                   <a:lnTo>
-                    <a:pt x="0" y="0"/>
-                  </a:lnTo>
-                  <a:lnTo>
-                    <a:pt x="0" y="0"/>
+                    <a:pt x="7660515" y="0"/>
+                  </a:lnTo>
+                  <a:lnTo>
+                    <a:pt x="7660515" y="0"/>
                   </a:lnTo>
                 </a:path>
               </a:pathLst>
@@ -2873,15 +2865,15 @@
           </p:nvSpPr>
           <p:spPr>
             <a:xfrm>
-              <a:off x="4573628" y="2073503"/>
-              <a:ext cx="0" cy="3649639"/>
+              <a:off x="2542190" y="2143092"/>
+              <a:ext cx="0" cy="1317069"/>
             </a:xfrm>
             <a:custGeom>
               <a:avLst/>
               <a:pathLst>
-                <a:path w="0" h="3649639">
+                <a:path w="0" h="1317069">
                   <a:moveTo>
-                    <a:pt x="0" y="3649639"/>
+                    <a:pt x="0" y="1317069"/>
                   </a:moveTo>
                   <a:lnTo>
                     <a:pt x="0" y="0"/>
@@ -2916,15 +2908,15 @@
           </p:nvSpPr>
           <p:spPr>
             <a:xfrm>
-              <a:off x="6644586" y="2073503"/>
-              <a:ext cx="0" cy="3649639"/>
+              <a:off x="4576193" y="2143092"/>
+              <a:ext cx="0" cy="1317069"/>
             </a:xfrm>
             <a:custGeom>
               <a:avLst/>
               <a:pathLst>
-                <a:path w="0" h="3649639">
+                <a:path w="0" h="1317069">
                   <a:moveTo>
-                    <a:pt x="0" y="3649639"/>
+                    <a:pt x="0" y="1317069"/>
                   </a:moveTo>
                   <a:lnTo>
                     <a:pt x="0" y="0"/>
@@ -2953,618 +2945,661 @@
         </p:sp>
         <p:sp>
           <p:nvSpPr>
-            <p:cNvPr id="20" name="pg20"/>
+            <p:cNvPr id="20" name="pl20"/>
             <p:cNvSpPr/>
             <p:nvPr/>
           </p:nvSpPr>
           <p:spPr>
             <a:xfrm>
-              <a:off x="1172049" y="2690132"/>
-              <a:ext cx="7090630" cy="2658665"/>
+              <a:off x="6610197" y="2143092"/>
+              <a:ext cx="0" cy="1317069"/>
             </a:xfrm>
             <a:custGeom>
               <a:avLst/>
               <a:pathLst>
-                <a:path w="7090630" h="2658665">
+                <a:path w="0" h="1317069">
+                  <a:moveTo>
+                    <a:pt x="0" y="1317069"/>
+                  </a:moveTo>
+                  <a:lnTo>
+                    <a:pt x="0" y="0"/>
+                  </a:lnTo>
+                  <a:lnTo>
+                    <a:pt x="0" y="0"/>
+                  </a:lnTo>
+                </a:path>
+              </a:pathLst>
+            </a:custGeom>
+            <a:ln w="13550" cap="flat">
+              <a:solidFill>
+                <a:srgbClr val="EBEBEB">
+                  <a:alpha val="100000"/>
+                </a:srgbClr>
+              </a:solidFill>
+              <a:prstDash val="solid"/>
+              <a:round/>
+            </a:ln>
+          </p:spPr>
+          <p:txBody>
+            <a:bodyPr/>
+            <a:lstStyle/>
+            <a:p/>
+          </p:txBody>
+        </p:sp>
+        <p:sp>
+          <p:nvSpPr>
+            <p:cNvPr id="21" name="pg21"/>
+            <p:cNvSpPr/>
+            <p:nvPr/>
+          </p:nvSpPr>
+          <p:spPr>
+            <a:xfrm>
+              <a:off x="1235312" y="2365618"/>
+              <a:ext cx="6964104" cy="959449"/>
+            </a:xfrm>
+            <a:custGeom>
+              <a:avLst/>
+              <a:pathLst>
+                <a:path w="6964104" h="959449">
                   <a:moveTo>
                     <a:pt x="0" y="0"/>
                   </a:moveTo>
                   <a:lnTo>
-                    <a:pt x="71622" y="74920"/>
-                  </a:lnTo>
-                  <a:lnTo>
-                    <a:pt x="143245" y="147882"/>
-                  </a:lnTo>
-                  <a:lnTo>
-                    <a:pt x="214867" y="218938"/>
-                  </a:lnTo>
-                  <a:lnTo>
-                    <a:pt x="286490" y="288137"/>
-                  </a:lnTo>
-                  <a:lnTo>
-                    <a:pt x="358112" y="355528"/>
-                  </a:lnTo>
-                  <a:lnTo>
-                    <a:pt x="429735" y="421158"/>
-                  </a:lnTo>
-                  <a:lnTo>
-                    <a:pt x="501357" y="485073"/>
-                  </a:lnTo>
-                  <a:lnTo>
-                    <a:pt x="572980" y="547318"/>
-                  </a:lnTo>
-                  <a:lnTo>
-                    <a:pt x="644602" y="607936"/>
-                  </a:lnTo>
-                  <a:lnTo>
-                    <a:pt x="716225" y="666970"/>
-                  </a:lnTo>
-                  <a:lnTo>
-                    <a:pt x="787847" y="724462"/>
-                  </a:lnTo>
-                  <a:lnTo>
-                    <a:pt x="859470" y="780451"/>
-                  </a:lnTo>
-                  <a:lnTo>
-                    <a:pt x="931092" y="834978"/>
-                  </a:lnTo>
-                  <a:lnTo>
-                    <a:pt x="1002715" y="888079"/>
-                  </a:lnTo>
-                  <a:lnTo>
-                    <a:pt x="1074337" y="939793"/>
-                  </a:lnTo>
-                  <a:lnTo>
-                    <a:pt x="1145960" y="990156"/>
-                  </a:lnTo>
-                  <a:lnTo>
-                    <a:pt x="1217582" y="1039202"/>
-                  </a:lnTo>
-                  <a:lnTo>
-                    <a:pt x="1289205" y="1086967"/>
-                  </a:lnTo>
-                  <a:lnTo>
-                    <a:pt x="1360827" y="1133484"/>
-                  </a:lnTo>
-                  <a:lnTo>
-                    <a:pt x="1432450" y="1178785"/>
-                  </a:lnTo>
-                  <a:lnTo>
-                    <a:pt x="1504073" y="1222903"/>
-                  </a:lnTo>
-                  <a:lnTo>
-                    <a:pt x="1575695" y="1265867"/>
-                  </a:lnTo>
-                  <a:lnTo>
-                    <a:pt x="1647318" y="1307709"/>
-                  </a:lnTo>
-                  <a:lnTo>
-                    <a:pt x="1718940" y="1348458"/>
-                  </a:lnTo>
-                  <a:lnTo>
-                    <a:pt x="1790563" y="1388142"/>
-                  </a:lnTo>
-                  <a:lnTo>
-                    <a:pt x="1862185" y="1426789"/>
-                  </a:lnTo>
-                  <a:lnTo>
-                    <a:pt x="1933808" y="1464426"/>
-                  </a:lnTo>
-                  <a:lnTo>
-                    <a:pt x="2005430" y="1501079"/>
-                  </a:lnTo>
-                  <a:lnTo>
-                    <a:pt x="2077053" y="1536775"/>
-                  </a:lnTo>
-                  <a:lnTo>
-                    <a:pt x="2148675" y="1571538"/>
-                  </a:lnTo>
-                  <a:lnTo>
-                    <a:pt x="2220298" y="1605392"/>
-                  </a:lnTo>
-                  <a:lnTo>
-                    <a:pt x="2291920" y="1638362"/>
-                  </a:lnTo>
-                  <a:lnTo>
-                    <a:pt x="2363543" y="1670471"/>
-                  </a:lnTo>
-                  <a:lnTo>
-                    <a:pt x="2435165" y="1701740"/>
-                  </a:lnTo>
-                  <a:lnTo>
-                    <a:pt x="2506788" y="1732192"/>
-                  </a:lnTo>
-                  <a:lnTo>
-                    <a:pt x="2578410" y="1761849"/>
-                  </a:lnTo>
-                  <a:lnTo>
-                    <a:pt x="2650033" y="1790731"/>
-                  </a:lnTo>
-                  <a:lnTo>
-                    <a:pt x="2721655" y="1818857"/>
-                  </a:lnTo>
-                  <a:lnTo>
-                    <a:pt x="2793278" y="1846249"/>
-                  </a:lnTo>
-                  <a:lnTo>
-                    <a:pt x="2864901" y="1872925"/>
-                  </a:lnTo>
-                  <a:lnTo>
-                    <a:pt x="2936523" y="1898904"/>
-                  </a:lnTo>
-                  <a:lnTo>
-                    <a:pt x="3008146" y="1924205"/>
-                  </a:lnTo>
-                  <a:lnTo>
-                    <a:pt x="3079768" y="1948844"/>
-                  </a:lnTo>
-                  <a:lnTo>
-                    <a:pt x="3151391" y="1972839"/>
-                  </a:lnTo>
-                  <a:lnTo>
-                    <a:pt x="3223013" y="1996207"/>
-                  </a:lnTo>
-                  <a:lnTo>
-                    <a:pt x="3294636" y="2018965"/>
-                  </a:lnTo>
-                  <a:lnTo>
-                    <a:pt x="3366258" y="2039132"/>
-                  </a:lnTo>
-                  <a:lnTo>
-                    <a:pt x="3437881" y="2048396"/>
-                  </a:lnTo>
-                  <a:lnTo>
-                    <a:pt x="3509503" y="2057557"/>
-                  </a:lnTo>
-                  <a:lnTo>
-                    <a:pt x="3581126" y="2066615"/>
-                  </a:lnTo>
-                  <a:lnTo>
-                    <a:pt x="3652748" y="2075572"/>
-                  </a:lnTo>
-                  <a:lnTo>
-                    <a:pt x="3724371" y="2084428"/>
-                  </a:lnTo>
-                  <a:lnTo>
-                    <a:pt x="3795993" y="2093186"/>
-                  </a:lnTo>
-                  <a:lnTo>
-                    <a:pt x="3867616" y="2101845"/>
-                  </a:lnTo>
-                  <a:lnTo>
-                    <a:pt x="3939238" y="2110408"/>
-                  </a:lnTo>
-                  <a:lnTo>
-                    <a:pt x="4010861" y="2118875"/>
-                  </a:lnTo>
-                  <a:lnTo>
-                    <a:pt x="4082483" y="2127247"/>
-                  </a:lnTo>
-                  <a:lnTo>
-                    <a:pt x="4154106" y="2135525"/>
-                  </a:lnTo>
-                  <a:lnTo>
-                    <a:pt x="4225729" y="2143711"/>
-                  </a:lnTo>
-                  <a:lnTo>
-                    <a:pt x="4297351" y="2151805"/>
-                  </a:lnTo>
-                  <a:lnTo>
-                    <a:pt x="4368974" y="2159809"/>
-                  </a:lnTo>
-                  <a:lnTo>
-                    <a:pt x="4440596" y="2167723"/>
-                  </a:lnTo>
-                  <a:lnTo>
-                    <a:pt x="4512219" y="2175548"/>
-                  </a:lnTo>
-                  <a:lnTo>
-                    <a:pt x="4583841" y="2183286"/>
-                  </a:lnTo>
-                  <a:lnTo>
-                    <a:pt x="4655464" y="2190937"/>
-                  </a:lnTo>
-                  <a:lnTo>
-                    <a:pt x="4727086" y="2198503"/>
-                  </a:lnTo>
-                  <a:lnTo>
-                    <a:pt x="4798709" y="2205984"/>
-                  </a:lnTo>
-                  <a:lnTo>
-                    <a:pt x="4870331" y="2213382"/>
-                  </a:lnTo>
-                  <a:lnTo>
-                    <a:pt x="4941954" y="2220696"/>
-                  </a:lnTo>
-                  <a:lnTo>
-                    <a:pt x="5013576" y="2227929"/>
-                  </a:lnTo>
-                  <a:lnTo>
-                    <a:pt x="5085199" y="2235081"/>
-                  </a:lnTo>
-                  <a:lnTo>
-                    <a:pt x="5156821" y="2242153"/>
-                  </a:lnTo>
-                  <a:lnTo>
-                    <a:pt x="5228444" y="2249145"/>
-                  </a:lnTo>
-                  <a:lnTo>
-                    <a:pt x="5300066" y="2256060"/>
-                  </a:lnTo>
-                  <a:lnTo>
-                    <a:pt x="5371689" y="2262897"/>
-                  </a:lnTo>
-                  <a:lnTo>
-                    <a:pt x="5443311" y="2269658"/>
-                  </a:lnTo>
-                  <a:lnTo>
-                    <a:pt x="5514934" y="2276343"/>
-                  </a:lnTo>
-                  <a:lnTo>
-                    <a:pt x="5586557" y="2282953"/>
-                  </a:lnTo>
-                  <a:lnTo>
-                    <a:pt x="5658179" y="2289489"/>
-                  </a:lnTo>
-                  <a:lnTo>
-                    <a:pt x="5729802" y="2295952"/>
-                  </a:lnTo>
-                  <a:lnTo>
-                    <a:pt x="5801424" y="2302343"/>
-                  </a:lnTo>
-                  <a:lnTo>
-                    <a:pt x="5873047" y="2308662"/>
-                  </a:lnTo>
-                  <a:lnTo>
-                    <a:pt x="5944669" y="2314910"/>
-                  </a:lnTo>
-                  <a:lnTo>
-                    <a:pt x="6016292" y="2321089"/>
-                  </a:lnTo>
-                  <a:lnTo>
-                    <a:pt x="6087914" y="2327199"/>
-                  </a:lnTo>
-                  <a:lnTo>
-                    <a:pt x="6159537" y="2333240"/>
-                  </a:lnTo>
-                  <a:lnTo>
-                    <a:pt x="6231159" y="2339213"/>
-                  </a:lnTo>
-                  <a:lnTo>
-                    <a:pt x="6302782" y="2345120"/>
-                  </a:lnTo>
-                  <a:lnTo>
-                    <a:pt x="6374404" y="2350960"/>
-                  </a:lnTo>
-                  <a:lnTo>
-                    <a:pt x="6446027" y="2356736"/>
-                  </a:lnTo>
-                  <a:lnTo>
-                    <a:pt x="6517649" y="2362446"/>
-                  </a:lnTo>
-                  <a:lnTo>
-                    <a:pt x="6589272" y="2368093"/>
-                  </a:lnTo>
-                  <a:lnTo>
-                    <a:pt x="6660894" y="2373677"/>
-                  </a:lnTo>
-                  <a:lnTo>
-                    <a:pt x="6732517" y="2379198"/>
-                  </a:lnTo>
-                  <a:lnTo>
-                    <a:pt x="6804139" y="2384657"/>
-                  </a:lnTo>
-                  <a:lnTo>
-                    <a:pt x="6875762" y="2390055"/>
-                  </a:lnTo>
-                  <a:lnTo>
-                    <a:pt x="6947385" y="2395393"/>
-                  </a:lnTo>
-                  <a:lnTo>
-                    <a:pt x="7019007" y="2400671"/>
-                  </a:lnTo>
-                  <a:lnTo>
-                    <a:pt x="7090630" y="2405890"/>
-                  </a:lnTo>
-                  <a:lnTo>
-                    <a:pt x="7090630" y="2658665"/>
-                  </a:lnTo>
-                  <a:lnTo>
-                    <a:pt x="7019007" y="2653072"/>
-                  </a:lnTo>
-                  <a:lnTo>
-                    <a:pt x="6947385" y="2647329"/>
-                  </a:lnTo>
-                  <a:lnTo>
-                    <a:pt x="6875762" y="2641431"/>
-                  </a:lnTo>
-                  <a:lnTo>
-                    <a:pt x="6804139" y="2635376"/>
-                  </a:lnTo>
-                  <a:lnTo>
-                    <a:pt x="6732517" y="2629158"/>
-                  </a:lnTo>
-                  <a:lnTo>
-                    <a:pt x="6660894" y="2622773"/>
-                  </a:lnTo>
-                  <a:lnTo>
-                    <a:pt x="6589272" y="2616216"/>
-                  </a:lnTo>
-                  <a:lnTo>
-                    <a:pt x="6517649" y="2609484"/>
-                  </a:lnTo>
-                  <a:lnTo>
-                    <a:pt x="6446027" y="2602571"/>
-                  </a:lnTo>
-                  <a:lnTo>
-                    <a:pt x="6374404" y="2595473"/>
-                  </a:lnTo>
-                  <a:lnTo>
-                    <a:pt x="6302782" y="2588184"/>
-                  </a:lnTo>
-                  <a:lnTo>
-                    <a:pt x="6231159" y="2580700"/>
-                  </a:lnTo>
-                  <a:lnTo>
-                    <a:pt x="6159537" y="2573015"/>
-                  </a:lnTo>
-                  <a:lnTo>
-                    <a:pt x="6087914" y="2565124"/>
-                  </a:lnTo>
-                  <a:lnTo>
-                    <a:pt x="6016292" y="2557021"/>
-                  </a:lnTo>
-                  <a:lnTo>
-                    <a:pt x="5944669" y="2548700"/>
-                  </a:lnTo>
-                  <a:lnTo>
-                    <a:pt x="5873047" y="2540156"/>
-                  </a:lnTo>
-                  <a:lnTo>
-                    <a:pt x="5801424" y="2531383"/>
-                  </a:lnTo>
-                  <a:lnTo>
-                    <a:pt x="5729802" y="2522375"/>
-                  </a:lnTo>
-                  <a:lnTo>
-                    <a:pt x="5658179" y="2513125"/>
-                  </a:lnTo>
-                  <a:lnTo>
-                    <a:pt x="5586557" y="2503626"/>
-                  </a:lnTo>
-                  <a:lnTo>
-                    <a:pt x="5514934" y="2493873"/>
-                  </a:lnTo>
-                  <a:lnTo>
-                    <a:pt x="5443311" y="2483858"/>
-                  </a:lnTo>
-                  <a:lnTo>
-                    <a:pt x="5371689" y="2473575"/>
-                  </a:lnTo>
-                  <a:lnTo>
-                    <a:pt x="5300066" y="2463015"/>
-                  </a:lnTo>
-                  <a:lnTo>
-                    <a:pt x="5228444" y="2452172"/>
-                  </a:lnTo>
-                  <a:lnTo>
-                    <a:pt x="5156821" y="2441039"/>
-                  </a:lnTo>
-                  <a:lnTo>
-                    <a:pt x="5085199" y="2429606"/>
-                  </a:lnTo>
-                  <a:lnTo>
-                    <a:pt x="5013576" y="2417867"/>
-                  </a:lnTo>
-                  <a:lnTo>
-                    <a:pt x="4941954" y="2405812"/>
-                  </a:lnTo>
-                  <a:lnTo>
-                    <a:pt x="4870331" y="2393435"/>
-                  </a:lnTo>
-                  <a:lnTo>
-                    <a:pt x="4798709" y="2380725"/>
-                  </a:lnTo>
-                  <a:lnTo>
-                    <a:pt x="4727086" y="2367674"/>
-                  </a:lnTo>
-                  <a:lnTo>
-                    <a:pt x="4655464" y="2354273"/>
-                  </a:lnTo>
-                  <a:lnTo>
-                    <a:pt x="4583841" y="2340512"/>
-                  </a:lnTo>
-                  <a:lnTo>
-                    <a:pt x="4512219" y="2326382"/>
-                  </a:lnTo>
-                  <a:lnTo>
-                    <a:pt x="4440596" y="2311873"/>
-                  </a:lnTo>
-                  <a:lnTo>
-                    <a:pt x="4368974" y="2296975"/>
-                  </a:lnTo>
-                  <a:lnTo>
-                    <a:pt x="4297351" y="2281677"/>
-                  </a:lnTo>
-                  <a:lnTo>
-                    <a:pt x="4225729" y="2265969"/>
-                  </a:lnTo>
-                  <a:lnTo>
-                    <a:pt x="4154106" y="2249839"/>
-                  </a:lnTo>
-                  <a:lnTo>
-                    <a:pt x="4082483" y="2233276"/>
-                  </a:lnTo>
-                  <a:lnTo>
-                    <a:pt x="4010861" y="2216269"/>
-                  </a:lnTo>
-                  <a:lnTo>
-                    <a:pt x="3939238" y="2198805"/>
-                  </a:lnTo>
-                  <a:lnTo>
-                    <a:pt x="3867616" y="2180873"/>
-                  </a:lnTo>
-                  <a:lnTo>
-                    <a:pt x="3795993" y="2162460"/>
-                  </a:lnTo>
-                  <a:lnTo>
-                    <a:pt x="3724371" y="2143552"/>
-                  </a:lnTo>
-                  <a:lnTo>
-                    <a:pt x="3652748" y="2124138"/>
-                  </a:lnTo>
-                  <a:lnTo>
-                    <a:pt x="3581126" y="2104202"/>
-                  </a:lnTo>
-                  <a:lnTo>
-                    <a:pt x="3509503" y="2083731"/>
-                  </a:lnTo>
-                  <a:lnTo>
-                    <a:pt x="3437881" y="2062712"/>
-                  </a:lnTo>
-                  <a:lnTo>
-                    <a:pt x="3366258" y="2041128"/>
-                  </a:lnTo>
-                  <a:lnTo>
-                    <a:pt x="3294636" y="2029763"/>
-                  </a:lnTo>
-                  <a:lnTo>
-                    <a:pt x="3223013" y="2020288"/>
-                  </a:lnTo>
-                  <a:lnTo>
-                    <a:pt x="3151391" y="2010705"/>
-                  </a:lnTo>
-                  <a:lnTo>
-                    <a:pt x="3079768" y="2001015"/>
-                  </a:lnTo>
-                  <a:lnTo>
-                    <a:pt x="3008146" y="1991214"/>
-                  </a:lnTo>
-                  <a:lnTo>
-                    <a:pt x="2936523" y="1981303"/>
-                  </a:lnTo>
-                  <a:lnTo>
-                    <a:pt x="2864901" y="1971279"/>
-                  </a:lnTo>
-                  <a:lnTo>
-                    <a:pt x="2793278" y="1961142"/>
-                  </a:lnTo>
-                  <a:lnTo>
-                    <a:pt x="2721655" y="1950891"/>
-                  </a:lnTo>
-                  <a:lnTo>
-                    <a:pt x="2650033" y="1940523"/>
-                  </a:lnTo>
-                  <a:lnTo>
-                    <a:pt x="2578410" y="1930038"/>
-                  </a:lnTo>
-                  <a:lnTo>
-                    <a:pt x="2506788" y="1919435"/>
-                  </a:lnTo>
-                  <a:lnTo>
-                    <a:pt x="2435165" y="1908711"/>
-                  </a:lnTo>
-                  <a:lnTo>
-                    <a:pt x="2363543" y="1897866"/>
-                  </a:lnTo>
-                  <a:lnTo>
-                    <a:pt x="2291920" y="1886898"/>
-                  </a:lnTo>
-                  <a:lnTo>
-                    <a:pt x="2220298" y="1875807"/>
-                  </a:lnTo>
-                  <a:lnTo>
-                    <a:pt x="2148675" y="1864590"/>
-                  </a:lnTo>
-                  <a:lnTo>
-                    <a:pt x="2077053" y="1853245"/>
-                  </a:lnTo>
-                  <a:lnTo>
-                    <a:pt x="2005430" y="1841773"/>
-                  </a:lnTo>
-                  <a:lnTo>
-                    <a:pt x="1933808" y="1830170"/>
-                  </a:lnTo>
-                  <a:lnTo>
-                    <a:pt x="1862185" y="1818437"/>
-                  </a:lnTo>
-                  <a:lnTo>
-                    <a:pt x="1790563" y="1806570"/>
-                  </a:lnTo>
-                  <a:lnTo>
-                    <a:pt x="1718940" y="1794570"/>
-                  </a:lnTo>
-                  <a:lnTo>
-                    <a:pt x="1647318" y="1782433"/>
-                  </a:lnTo>
-                  <a:lnTo>
-                    <a:pt x="1575695" y="1770159"/>
-                  </a:lnTo>
-                  <a:lnTo>
-                    <a:pt x="1504073" y="1757747"/>
-                  </a:lnTo>
-                  <a:lnTo>
-                    <a:pt x="1432450" y="1745194"/>
-                  </a:lnTo>
-                  <a:lnTo>
-                    <a:pt x="1360827" y="1732498"/>
-                  </a:lnTo>
-                  <a:lnTo>
-                    <a:pt x="1289205" y="1719660"/>
-                  </a:lnTo>
-                  <a:lnTo>
-                    <a:pt x="1217582" y="1706675"/>
-                  </a:lnTo>
-                  <a:lnTo>
-                    <a:pt x="1145960" y="1693544"/>
-                  </a:lnTo>
-                  <a:lnTo>
-                    <a:pt x="1074337" y="1680265"/>
-                  </a:lnTo>
-                  <a:lnTo>
-                    <a:pt x="1002715" y="1666835"/>
-                  </a:lnTo>
-                  <a:lnTo>
-                    <a:pt x="931092" y="1653253"/>
-                  </a:lnTo>
-                  <a:lnTo>
-                    <a:pt x="859470" y="1639517"/>
-                  </a:lnTo>
-                  <a:lnTo>
-                    <a:pt x="787847" y="1625626"/>
-                  </a:lnTo>
-                  <a:lnTo>
-                    <a:pt x="716225" y="1611578"/>
-                  </a:lnTo>
-                  <a:lnTo>
-                    <a:pt x="644602" y="1597371"/>
-                  </a:lnTo>
-                  <a:lnTo>
-                    <a:pt x="572980" y="1583003"/>
-                  </a:lnTo>
-                  <a:lnTo>
-                    <a:pt x="501357" y="1568473"/>
-                  </a:lnTo>
-                  <a:lnTo>
-                    <a:pt x="429735" y="1553778"/>
-                  </a:lnTo>
-                  <a:lnTo>
-                    <a:pt x="358112" y="1538917"/>
-                  </a:lnTo>
-                  <a:lnTo>
-                    <a:pt x="286490" y="1523887"/>
-                  </a:lnTo>
-                  <a:lnTo>
-                    <a:pt x="214867" y="1508688"/>
-                  </a:lnTo>
-                  <a:lnTo>
-                    <a:pt x="143245" y="1493317"/>
-                  </a:lnTo>
-                  <a:lnTo>
-                    <a:pt x="71622" y="1477771"/>
-                  </a:lnTo>
-                  <a:lnTo>
-                    <a:pt x="0" y="1462050"/>
+                    <a:pt x="70344" y="27036"/>
+                  </a:lnTo>
+                  <a:lnTo>
+                    <a:pt x="140688" y="53367"/>
+                  </a:lnTo>
+                  <a:lnTo>
+                    <a:pt x="211033" y="79009"/>
+                  </a:lnTo>
+                  <a:lnTo>
+                    <a:pt x="281377" y="103982"/>
+                  </a:lnTo>
+                  <a:lnTo>
+                    <a:pt x="351722" y="128301"/>
+                  </a:lnTo>
+                  <a:lnTo>
+                    <a:pt x="422066" y="151986"/>
+                  </a:lnTo>
+                  <a:lnTo>
+                    <a:pt x="492411" y="175051"/>
+                  </a:lnTo>
+                  <a:lnTo>
+                    <a:pt x="562755" y="197514"/>
+                  </a:lnTo>
+                  <a:lnTo>
+                    <a:pt x="633100" y="219389"/>
+                  </a:lnTo>
+                  <a:lnTo>
+                    <a:pt x="703444" y="240694"/>
+                  </a:lnTo>
+                  <a:lnTo>
+                    <a:pt x="773789" y="261441"/>
+                  </a:lnTo>
+                  <a:lnTo>
+                    <a:pt x="844133" y="281646"/>
+                  </a:lnTo>
+                  <a:lnTo>
+                    <a:pt x="914478" y="301323"/>
+                  </a:lnTo>
+                  <a:lnTo>
+                    <a:pt x="984822" y="320487"/>
+                  </a:lnTo>
+                  <a:lnTo>
+                    <a:pt x="1055167" y="339149"/>
+                  </a:lnTo>
+                  <a:lnTo>
+                    <a:pt x="1125511" y="357324"/>
+                  </a:lnTo>
+                  <a:lnTo>
+                    <a:pt x="1195856" y="375023"/>
+                  </a:lnTo>
+                  <a:lnTo>
+                    <a:pt x="1266200" y="392261"/>
+                  </a:lnTo>
+                  <a:lnTo>
+                    <a:pt x="1336545" y="409047"/>
+                  </a:lnTo>
+                  <a:lnTo>
+                    <a:pt x="1406889" y="425396"/>
+                  </a:lnTo>
+                  <a:lnTo>
+                    <a:pt x="1477234" y="441317"/>
+                  </a:lnTo>
+                  <a:lnTo>
+                    <a:pt x="1547578" y="456821"/>
+                  </a:lnTo>
+                  <a:lnTo>
+                    <a:pt x="1617923" y="471921"/>
+                  </a:lnTo>
+                  <a:lnTo>
+                    <a:pt x="1688267" y="486626"/>
+                  </a:lnTo>
+                  <a:lnTo>
+                    <a:pt x="1758612" y="500947"/>
+                  </a:lnTo>
+                  <a:lnTo>
+                    <a:pt x="1828956" y="514894"/>
+                  </a:lnTo>
+                  <a:lnTo>
+                    <a:pt x="1899301" y="528476"/>
+                  </a:lnTo>
+                  <a:lnTo>
+                    <a:pt x="1969645" y="541704"/>
+                  </a:lnTo>
+                  <a:lnTo>
+                    <a:pt x="2039990" y="554586"/>
+                  </a:lnTo>
+                  <a:lnTo>
+                    <a:pt x="2110334" y="567131"/>
+                  </a:lnTo>
+                  <a:lnTo>
+                    <a:pt x="2180679" y="579348"/>
+                  </a:lnTo>
+                  <a:lnTo>
+                    <a:pt x="2251023" y="591246"/>
+                  </a:lnTo>
+                  <a:lnTo>
+                    <a:pt x="2321368" y="602833"/>
+                  </a:lnTo>
+                  <a:lnTo>
+                    <a:pt x="2391712" y="614118"/>
+                  </a:lnTo>
+                  <a:lnTo>
+                    <a:pt x="2462057" y="625107"/>
+                  </a:lnTo>
+                  <a:lnTo>
+                    <a:pt x="2532401" y="635810"/>
+                  </a:lnTo>
+                  <a:lnTo>
+                    <a:pt x="2602746" y="646232"/>
+                  </a:lnTo>
+                  <a:lnTo>
+                    <a:pt x="2673090" y="656383"/>
+                  </a:lnTo>
+                  <a:lnTo>
+                    <a:pt x="2743435" y="666268"/>
+                  </a:lnTo>
+                  <a:lnTo>
+                    <a:pt x="2813779" y="675894"/>
+                  </a:lnTo>
+                  <a:lnTo>
+                    <a:pt x="2884124" y="685270"/>
+                  </a:lnTo>
+                  <a:lnTo>
+                    <a:pt x="2954468" y="694400"/>
+                  </a:lnTo>
+                  <a:lnTo>
+                    <a:pt x="3024813" y="703292"/>
+                  </a:lnTo>
+                  <a:lnTo>
+                    <a:pt x="3095157" y="711951"/>
+                  </a:lnTo>
+                  <a:lnTo>
+                    <a:pt x="3165502" y="720384"/>
+                  </a:lnTo>
+                  <a:lnTo>
+                    <a:pt x="3235846" y="728597"/>
+                  </a:lnTo>
+                  <a:lnTo>
+                    <a:pt x="3306191" y="735874"/>
+                  </a:lnTo>
+                  <a:lnTo>
+                    <a:pt x="3376535" y="739218"/>
+                  </a:lnTo>
+                  <a:lnTo>
+                    <a:pt x="3446880" y="742524"/>
+                  </a:lnTo>
+                  <a:lnTo>
+                    <a:pt x="3517224" y="745792"/>
+                  </a:lnTo>
+                  <a:lnTo>
+                    <a:pt x="3587569" y="749025"/>
+                  </a:lnTo>
+                  <a:lnTo>
+                    <a:pt x="3657913" y="752221"/>
+                  </a:lnTo>
+                  <a:lnTo>
+                    <a:pt x="3728257" y="755381"/>
+                  </a:lnTo>
+                  <a:lnTo>
+                    <a:pt x="3798602" y="758506"/>
+                  </a:lnTo>
+                  <a:lnTo>
+                    <a:pt x="3868946" y="761596"/>
+                  </a:lnTo>
+                  <a:lnTo>
+                    <a:pt x="3939291" y="764652"/>
+                  </a:lnTo>
+                  <a:lnTo>
+                    <a:pt x="4009635" y="767673"/>
+                  </a:lnTo>
+                  <a:lnTo>
+                    <a:pt x="4079980" y="770660"/>
+                  </a:lnTo>
+                  <a:lnTo>
+                    <a:pt x="4150324" y="773614"/>
+                  </a:lnTo>
+                  <a:lnTo>
+                    <a:pt x="4220669" y="776535"/>
+                  </a:lnTo>
+                  <a:lnTo>
+                    <a:pt x="4291013" y="779424"/>
+                  </a:lnTo>
+                  <a:lnTo>
+                    <a:pt x="4361358" y="782280"/>
+                  </a:lnTo>
+                  <a:lnTo>
+                    <a:pt x="4431702" y="785104"/>
+                  </a:lnTo>
+                  <a:lnTo>
+                    <a:pt x="4502047" y="787896"/>
+                  </a:lnTo>
+                  <a:lnTo>
+                    <a:pt x="4572391" y="790657"/>
+                  </a:lnTo>
+                  <a:lnTo>
+                    <a:pt x="4642736" y="793388"/>
+                  </a:lnTo>
+                  <a:lnTo>
+                    <a:pt x="4713080" y="796088"/>
+                  </a:lnTo>
+                  <a:lnTo>
+                    <a:pt x="4783425" y="798757"/>
+                  </a:lnTo>
+                  <a:lnTo>
+                    <a:pt x="4853769" y="801397"/>
+                  </a:lnTo>
+                  <a:lnTo>
+                    <a:pt x="4924114" y="804007"/>
+                  </a:lnTo>
+                  <a:lnTo>
+                    <a:pt x="4994458" y="806588"/>
+                  </a:lnTo>
+                  <a:lnTo>
+                    <a:pt x="5064803" y="809140"/>
+                  </a:lnTo>
+                  <a:lnTo>
+                    <a:pt x="5135147" y="811663"/>
+                  </a:lnTo>
+                  <a:lnTo>
+                    <a:pt x="5205492" y="814159"/>
+                  </a:lnTo>
+                  <a:lnTo>
+                    <a:pt x="5275836" y="816626"/>
+                  </a:lnTo>
+                  <a:lnTo>
+                    <a:pt x="5346181" y="819066"/>
+                  </a:lnTo>
+                  <a:lnTo>
+                    <a:pt x="5416525" y="821478"/>
+                  </a:lnTo>
+                  <a:lnTo>
+                    <a:pt x="5486870" y="823864"/>
+                  </a:lnTo>
+                  <a:lnTo>
+                    <a:pt x="5557214" y="826222"/>
+                  </a:lnTo>
+                  <a:lnTo>
+                    <a:pt x="5627559" y="828555"/>
+                  </a:lnTo>
+                  <a:lnTo>
+                    <a:pt x="5697903" y="830861"/>
+                  </a:lnTo>
+                  <a:lnTo>
+                    <a:pt x="5768248" y="833141"/>
+                  </a:lnTo>
+                  <a:lnTo>
+                    <a:pt x="5838592" y="835396"/>
+                  </a:lnTo>
+                  <a:lnTo>
+                    <a:pt x="5908937" y="837626"/>
+                  </a:lnTo>
+                  <a:lnTo>
+                    <a:pt x="5979281" y="839831"/>
+                  </a:lnTo>
+                  <a:lnTo>
+                    <a:pt x="6049626" y="842011"/>
+                  </a:lnTo>
+                  <a:lnTo>
+                    <a:pt x="6119970" y="844167"/>
+                  </a:lnTo>
+                  <a:lnTo>
+                    <a:pt x="6190315" y="846298"/>
+                  </a:lnTo>
+                  <a:lnTo>
+                    <a:pt x="6260659" y="848406"/>
+                  </a:lnTo>
+                  <a:lnTo>
+                    <a:pt x="6331004" y="850490"/>
+                  </a:lnTo>
+                  <a:lnTo>
+                    <a:pt x="6401348" y="852551"/>
+                  </a:lnTo>
+                  <a:lnTo>
+                    <a:pt x="6471693" y="854589"/>
+                  </a:lnTo>
+                  <a:lnTo>
+                    <a:pt x="6542037" y="856604"/>
+                  </a:lnTo>
+                  <a:lnTo>
+                    <a:pt x="6612382" y="858596"/>
+                  </a:lnTo>
+                  <a:lnTo>
+                    <a:pt x="6682726" y="860566"/>
+                  </a:lnTo>
+                  <a:lnTo>
+                    <a:pt x="6753071" y="862514"/>
+                  </a:lnTo>
+                  <a:lnTo>
+                    <a:pt x="6823415" y="864441"/>
+                  </a:lnTo>
+                  <a:lnTo>
+                    <a:pt x="6893760" y="866345"/>
+                  </a:lnTo>
+                  <a:lnTo>
+                    <a:pt x="6964104" y="868229"/>
+                  </a:lnTo>
+                  <a:lnTo>
+                    <a:pt x="6964104" y="959449"/>
+                  </a:lnTo>
+                  <a:lnTo>
+                    <a:pt x="6893760" y="957431"/>
+                  </a:lnTo>
+                  <a:lnTo>
+                    <a:pt x="6823415" y="955358"/>
+                  </a:lnTo>
+                  <a:lnTo>
+                    <a:pt x="6753071" y="953230"/>
+                  </a:lnTo>
+                  <a:lnTo>
+                    <a:pt x="6682726" y="951045"/>
+                  </a:lnTo>
+                  <a:lnTo>
+                    <a:pt x="6612382" y="948801"/>
+                  </a:lnTo>
+                  <a:lnTo>
+                    <a:pt x="6542037" y="946497"/>
+                  </a:lnTo>
+                  <a:lnTo>
+                    <a:pt x="6471693" y="944131"/>
+                  </a:lnTo>
+                  <a:lnTo>
+                    <a:pt x="6401348" y="941701"/>
+                  </a:lnTo>
+                  <a:lnTo>
+                    <a:pt x="6331004" y="939206"/>
+                  </a:lnTo>
+                  <a:lnTo>
+                    <a:pt x="6260659" y="936645"/>
+                  </a:lnTo>
+                  <a:lnTo>
+                    <a:pt x="6190315" y="934015"/>
+                  </a:lnTo>
+                  <a:lnTo>
+                    <a:pt x="6119970" y="931314"/>
+                  </a:lnTo>
+                  <a:lnTo>
+                    <a:pt x="6049626" y="928540"/>
+                  </a:lnTo>
+                  <a:lnTo>
+                    <a:pt x="5979281" y="925692"/>
+                  </a:lnTo>
+                  <a:lnTo>
+                    <a:pt x="5908937" y="922768"/>
+                  </a:lnTo>
+                  <a:lnTo>
+                    <a:pt x="5838592" y="919766"/>
+                  </a:lnTo>
+                  <a:lnTo>
+                    <a:pt x="5768248" y="916682"/>
+                  </a:lnTo>
+                  <a:lnTo>
+                    <a:pt x="5697903" y="913516"/>
+                  </a:lnTo>
+                  <a:lnTo>
+                    <a:pt x="5627559" y="910265"/>
+                  </a:lnTo>
+                  <a:lnTo>
+                    <a:pt x="5557214" y="906927"/>
+                  </a:lnTo>
+                  <a:lnTo>
+                    <a:pt x="5486870" y="903500"/>
+                  </a:lnTo>
+                  <a:lnTo>
+                    <a:pt x="5416525" y="899980"/>
+                  </a:lnTo>
+                  <a:lnTo>
+                    <a:pt x="5346181" y="896366"/>
+                  </a:lnTo>
+                  <a:lnTo>
+                    <a:pt x="5275836" y="892655"/>
+                  </a:lnTo>
+                  <a:lnTo>
+                    <a:pt x="5205492" y="888844"/>
+                  </a:lnTo>
+                  <a:lnTo>
+                    <a:pt x="5135147" y="884931"/>
+                  </a:lnTo>
+                  <a:lnTo>
+                    <a:pt x="5064803" y="880913"/>
+                  </a:lnTo>
+                  <a:lnTo>
+                    <a:pt x="4994458" y="876787"/>
+                  </a:lnTo>
+                  <a:lnTo>
+                    <a:pt x="4924114" y="872551"/>
+                  </a:lnTo>
+                  <a:lnTo>
+                    <a:pt x="4853769" y="868201"/>
+                  </a:lnTo>
+                  <a:lnTo>
+                    <a:pt x="4783425" y="863734"/>
+                  </a:lnTo>
+                  <a:lnTo>
+                    <a:pt x="4713080" y="859147"/>
+                  </a:lnTo>
+                  <a:lnTo>
+                    <a:pt x="4642736" y="854438"/>
+                  </a:lnTo>
+                  <a:lnTo>
+                    <a:pt x="4572391" y="849601"/>
+                  </a:lnTo>
+                  <a:lnTo>
+                    <a:pt x="4502047" y="844636"/>
+                  </a:lnTo>
+                  <a:lnTo>
+                    <a:pt x="4431702" y="839536"/>
+                  </a:lnTo>
+                  <a:lnTo>
+                    <a:pt x="4361358" y="834300"/>
+                  </a:lnTo>
+                  <a:lnTo>
+                    <a:pt x="4291013" y="828924"/>
+                  </a:lnTo>
+                  <a:lnTo>
+                    <a:pt x="4220669" y="823403"/>
+                  </a:lnTo>
+                  <a:lnTo>
+                    <a:pt x="4150324" y="817734"/>
+                  </a:lnTo>
+                  <a:lnTo>
+                    <a:pt x="4079980" y="811913"/>
+                  </a:lnTo>
+                  <a:lnTo>
+                    <a:pt x="4009635" y="805936"/>
+                  </a:lnTo>
+                  <a:lnTo>
+                    <a:pt x="3939291" y="799799"/>
+                  </a:lnTo>
+                  <a:lnTo>
+                    <a:pt x="3868946" y="793497"/>
+                  </a:lnTo>
+                  <a:lnTo>
+                    <a:pt x="3798602" y="787025"/>
+                  </a:lnTo>
+                  <a:lnTo>
+                    <a:pt x="3728257" y="780380"/>
+                  </a:lnTo>
+                  <a:lnTo>
+                    <a:pt x="3657913" y="773557"/>
+                  </a:lnTo>
+                  <a:lnTo>
+                    <a:pt x="3587569" y="766551"/>
+                  </a:lnTo>
+                  <a:lnTo>
+                    <a:pt x="3517224" y="759357"/>
+                  </a:lnTo>
+                  <a:lnTo>
+                    <a:pt x="3446880" y="751969"/>
+                  </a:lnTo>
+                  <a:lnTo>
+                    <a:pt x="3376535" y="744384"/>
+                  </a:lnTo>
+                  <a:lnTo>
+                    <a:pt x="3306191" y="736595"/>
+                  </a:lnTo>
+                  <a:lnTo>
+                    <a:pt x="3235846" y="732493"/>
+                  </a:lnTo>
+                  <a:lnTo>
+                    <a:pt x="3165502" y="729074"/>
+                  </a:lnTo>
+                  <a:lnTo>
+                    <a:pt x="3095157" y="725616"/>
+                  </a:lnTo>
+                  <a:lnTo>
+                    <a:pt x="3024813" y="722119"/>
+                  </a:lnTo>
+                  <a:lnTo>
+                    <a:pt x="2954468" y="718582"/>
+                  </a:lnTo>
+                  <a:lnTo>
+                    <a:pt x="2884124" y="715005"/>
+                  </a:lnTo>
+                  <a:lnTo>
+                    <a:pt x="2813779" y="711388"/>
+                  </a:lnTo>
+                  <a:lnTo>
+                    <a:pt x="2743435" y="707730"/>
+                  </a:lnTo>
+                  <a:lnTo>
+                    <a:pt x="2673090" y="704030"/>
+                  </a:lnTo>
+                  <a:lnTo>
+                    <a:pt x="2602746" y="700289"/>
+                  </a:lnTo>
+                  <a:lnTo>
+                    <a:pt x="2532401" y="696505"/>
+                  </a:lnTo>
+                  <a:lnTo>
+                    <a:pt x="2462057" y="692678"/>
+                  </a:lnTo>
+                  <a:lnTo>
+                    <a:pt x="2391712" y="688809"/>
+                  </a:lnTo>
+                  <a:lnTo>
+                    <a:pt x="2321368" y="684895"/>
+                  </a:lnTo>
+                  <a:lnTo>
+                    <a:pt x="2251023" y="680937"/>
+                  </a:lnTo>
+                  <a:lnTo>
+                    <a:pt x="2180679" y="676934"/>
+                  </a:lnTo>
+                  <a:lnTo>
+                    <a:pt x="2110334" y="672886"/>
+                  </a:lnTo>
+                  <a:lnTo>
+                    <a:pt x="2039990" y="668792"/>
+                  </a:lnTo>
+                  <a:lnTo>
+                    <a:pt x="1969645" y="664652"/>
+                  </a:lnTo>
+                  <a:lnTo>
+                    <a:pt x="1899301" y="660465"/>
+                  </a:lnTo>
+                  <a:lnTo>
+                    <a:pt x="1828956" y="656231"/>
+                  </a:lnTo>
+                  <a:lnTo>
+                    <a:pt x="1758612" y="651948"/>
+                  </a:lnTo>
+                  <a:lnTo>
+                    <a:pt x="1688267" y="647618"/>
+                  </a:lnTo>
+                  <a:lnTo>
+                    <a:pt x="1617923" y="643238"/>
+                  </a:lnTo>
+                  <a:lnTo>
+                    <a:pt x="1547578" y="638809"/>
+                  </a:lnTo>
+                  <a:lnTo>
+                    <a:pt x="1477234" y="634329"/>
+                  </a:lnTo>
+                  <a:lnTo>
+                    <a:pt x="1406889" y="629799"/>
+                  </a:lnTo>
+                  <a:lnTo>
+                    <a:pt x="1336545" y="625218"/>
+                  </a:lnTo>
+                  <a:lnTo>
+                    <a:pt x="1266200" y="620584"/>
+                  </a:lnTo>
+                  <a:lnTo>
+                    <a:pt x="1195856" y="615899"/>
+                  </a:lnTo>
+                  <a:lnTo>
+                    <a:pt x="1125511" y="611160"/>
+                  </a:lnTo>
+                  <a:lnTo>
+                    <a:pt x="1055167" y="606368"/>
+                  </a:lnTo>
+                  <a:lnTo>
+                    <a:pt x="984822" y="601521"/>
+                  </a:lnTo>
+                  <a:lnTo>
+                    <a:pt x="914478" y="596620"/>
+                  </a:lnTo>
+                  <a:lnTo>
+                    <a:pt x="844133" y="591663"/>
+                  </a:lnTo>
+                  <a:lnTo>
+                    <a:pt x="773789" y="586650"/>
+                  </a:lnTo>
+                  <a:lnTo>
+                    <a:pt x="703444" y="581580"/>
+                  </a:lnTo>
+                  <a:lnTo>
+                    <a:pt x="633100" y="576453"/>
+                  </a:lnTo>
+                  <a:lnTo>
+                    <a:pt x="562755" y="571268"/>
+                  </a:lnTo>
+                  <a:lnTo>
+                    <a:pt x="492411" y="566025"/>
+                  </a:lnTo>
+                  <a:lnTo>
+                    <a:pt x="422066" y="560722"/>
+                  </a:lnTo>
+                  <a:lnTo>
+                    <a:pt x="351722" y="555359"/>
+                  </a:lnTo>
+                  <a:lnTo>
+                    <a:pt x="281377" y="549935"/>
+                  </a:lnTo>
+                  <a:lnTo>
+                    <a:pt x="211033" y="544450"/>
+                  </a:lnTo>
+                  <a:lnTo>
+                    <a:pt x="140688" y="538902"/>
+                  </a:lnTo>
+                  <a:lnTo>
+                    <a:pt x="70344" y="533293"/>
+                  </a:lnTo>
+                  <a:lnTo>
+                    <a:pt x="0" y="527619"/>
                   </a:lnTo>
                   <a:close/>
                 </a:path>
@@ -3584,643 +3619,318 @@
         </p:sp>
         <p:sp>
           <p:nvSpPr>
-            <p:cNvPr id="21" name="pl21"/>
-            <p:cNvSpPr/>
-            <p:nvPr/>
-          </p:nvSpPr>
-          <p:spPr>
-            <a:xfrm>
-              <a:off x="1172049" y="2690132"/>
-              <a:ext cx="7090630" cy="2405890"/>
-            </a:xfrm>
-            <a:custGeom>
-              <a:avLst/>
-              <a:pathLst>
-                <a:path w="7090630" h="2405890">
-                  <a:moveTo>
-                    <a:pt x="0" y="0"/>
-                  </a:moveTo>
-                  <a:lnTo>
-                    <a:pt x="71622" y="74920"/>
-                  </a:lnTo>
-                  <a:lnTo>
-                    <a:pt x="143245" y="147882"/>
-                  </a:lnTo>
-                  <a:lnTo>
-                    <a:pt x="214867" y="218938"/>
-                  </a:lnTo>
-                  <a:lnTo>
-                    <a:pt x="286490" y="288137"/>
-                  </a:lnTo>
-                  <a:lnTo>
-                    <a:pt x="358112" y="355528"/>
-                  </a:lnTo>
-                  <a:lnTo>
-                    <a:pt x="429735" y="421158"/>
-                  </a:lnTo>
-                  <a:lnTo>
-                    <a:pt x="501357" y="485073"/>
-                  </a:lnTo>
-                  <a:lnTo>
-                    <a:pt x="572980" y="547318"/>
-                  </a:lnTo>
-                  <a:lnTo>
-                    <a:pt x="644602" y="607936"/>
-                  </a:lnTo>
-                  <a:lnTo>
-                    <a:pt x="716225" y="666970"/>
-                  </a:lnTo>
-                  <a:lnTo>
-                    <a:pt x="787847" y="724462"/>
-                  </a:lnTo>
-                  <a:lnTo>
-                    <a:pt x="859470" y="780451"/>
-                  </a:lnTo>
-                  <a:lnTo>
-                    <a:pt x="931092" y="834978"/>
-                  </a:lnTo>
-                  <a:lnTo>
-                    <a:pt x="1002715" y="888079"/>
-                  </a:lnTo>
-                  <a:lnTo>
-                    <a:pt x="1074337" y="939793"/>
-                  </a:lnTo>
-                  <a:lnTo>
-                    <a:pt x="1145960" y="990156"/>
-                  </a:lnTo>
-                  <a:lnTo>
-                    <a:pt x="1217582" y="1039202"/>
-                  </a:lnTo>
-                  <a:lnTo>
-                    <a:pt x="1289205" y="1086967"/>
-                  </a:lnTo>
-                  <a:lnTo>
-                    <a:pt x="1360827" y="1133484"/>
-                  </a:lnTo>
-                  <a:lnTo>
-                    <a:pt x="1432450" y="1178785"/>
-                  </a:lnTo>
-                  <a:lnTo>
-                    <a:pt x="1504073" y="1222903"/>
-                  </a:lnTo>
-                  <a:lnTo>
-                    <a:pt x="1575695" y="1265867"/>
-                  </a:lnTo>
-                  <a:lnTo>
-                    <a:pt x="1647318" y="1307709"/>
-                  </a:lnTo>
-                  <a:lnTo>
-                    <a:pt x="1718940" y="1348458"/>
-                  </a:lnTo>
-                  <a:lnTo>
-                    <a:pt x="1790563" y="1388142"/>
-                  </a:lnTo>
-                  <a:lnTo>
-                    <a:pt x="1862185" y="1426789"/>
-                  </a:lnTo>
-                  <a:lnTo>
-                    <a:pt x="1933808" y="1464426"/>
-                  </a:lnTo>
-                  <a:lnTo>
-                    <a:pt x="2005430" y="1501079"/>
-                  </a:lnTo>
-                  <a:lnTo>
-                    <a:pt x="2077053" y="1536775"/>
-                  </a:lnTo>
-                  <a:lnTo>
-                    <a:pt x="2148675" y="1571538"/>
-                  </a:lnTo>
-                  <a:lnTo>
-                    <a:pt x="2220298" y="1605392"/>
-                  </a:lnTo>
-                  <a:lnTo>
-                    <a:pt x="2291920" y="1638362"/>
-                  </a:lnTo>
-                  <a:lnTo>
-                    <a:pt x="2363543" y="1670471"/>
-                  </a:lnTo>
-                  <a:lnTo>
-                    <a:pt x="2435165" y="1701740"/>
-                  </a:lnTo>
-                  <a:lnTo>
-                    <a:pt x="2506788" y="1732192"/>
-                  </a:lnTo>
-                  <a:lnTo>
-                    <a:pt x="2578410" y="1761849"/>
-                  </a:lnTo>
-                  <a:lnTo>
-                    <a:pt x="2650033" y="1790731"/>
-                  </a:lnTo>
-                  <a:lnTo>
-                    <a:pt x="2721655" y="1818857"/>
-                  </a:lnTo>
-                  <a:lnTo>
-                    <a:pt x="2793278" y="1846249"/>
-                  </a:lnTo>
-                  <a:lnTo>
-                    <a:pt x="2864901" y="1872925"/>
-                  </a:lnTo>
-                  <a:lnTo>
-                    <a:pt x="2936523" y="1898904"/>
-                  </a:lnTo>
-                  <a:lnTo>
-                    <a:pt x="3008146" y="1924205"/>
-                  </a:lnTo>
-                  <a:lnTo>
-                    <a:pt x="3079768" y="1948844"/>
-                  </a:lnTo>
-                  <a:lnTo>
-                    <a:pt x="3151391" y="1972839"/>
-                  </a:lnTo>
-                  <a:lnTo>
-                    <a:pt x="3223013" y="1996207"/>
-                  </a:lnTo>
-                  <a:lnTo>
-                    <a:pt x="3294636" y="2018965"/>
-                  </a:lnTo>
-                  <a:lnTo>
-                    <a:pt x="3366258" y="2039132"/>
-                  </a:lnTo>
-                  <a:lnTo>
-                    <a:pt x="3437881" y="2048396"/>
-                  </a:lnTo>
-                  <a:lnTo>
-                    <a:pt x="3509503" y="2057557"/>
-                  </a:lnTo>
-                  <a:lnTo>
-                    <a:pt x="3581126" y="2066615"/>
-                  </a:lnTo>
-                  <a:lnTo>
-                    <a:pt x="3652748" y="2075572"/>
-                  </a:lnTo>
-                  <a:lnTo>
-                    <a:pt x="3724371" y="2084428"/>
-                  </a:lnTo>
-                  <a:lnTo>
-                    <a:pt x="3795993" y="2093186"/>
-                  </a:lnTo>
-                  <a:lnTo>
-                    <a:pt x="3867616" y="2101845"/>
-                  </a:lnTo>
-                  <a:lnTo>
-                    <a:pt x="3939238" y="2110408"/>
-                  </a:lnTo>
-                  <a:lnTo>
-                    <a:pt x="4010861" y="2118875"/>
-                  </a:lnTo>
-                  <a:lnTo>
-                    <a:pt x="4082483" y="2127247"/>
-                  </a:lnTo>
-                  <a:lnTo>
-                    <a:pt x="4154106" y="2135525"/>
-                  </a:lnTo>
-                  <a:lnTo>
-                    <a:pt x="4225729" y="2143711"/>
-                  </a:lnTo>
-                  <a:lnTo>
-                    <a:pt x="4297351" y="2151805"/>
-                  </a:lnTo>
-                  <a:lnTo>
-                    <a:pt x="4368974" y="2159809"/>
-                  </a:lnTo>
-                  <a:lnTo>
-                    <a:pt x="4440596" y="2167723"/>
-                  </a:lnTo>
-                  <a:lnTo>
-                    <a:pt x="4512219" y="2175548"/>
-                  </a:lnTo>
-                  <a:lnTo>
-                    <a:pt x="4583841" y="2183286"/>
-                  </a:lnTo>
-                  <a:lnTo>
-                    <a:pt x="4655464" y="2190937"/>
-                  </a:lnTo>
-                  <a:lnTo>
-                    <a:pt x="4727086" y="2198503"/>
-                  </a:lnTo>
-                  <a:lnTo>
-                    <a:pt x="4798709" y="2205984"/>
-                  </a:lnTo>
-                  <a:lnTo>
-                    <a:pt x="4870331" y="2213382"/>
-                  </a:lnTo>
-                  <a:lnTo>
-                    <a:pt x="4941954" y="2220696"/>
-                  </a:lnTo>
-                  <a:lnTo>
-                    <a:pt x="5013576" y="2227929"/>
-                  </a:lnTo>
-                  <a:lnTo>
-                    <a:pt x="5085199" y="2235081"/>
-                  </a:lnTo>
-                  <a:lnTo>
-                    <a:pt x="5156821" y="2242153"/>
-                  </a:lnTo>
-                  <a:lnTo>
-                    <a:pt x="5228444" y="2249145"/>
-                  </a:lnTo>
-                  <a:lnTo>
-                    <a:pt x="5300066" y="2256060"/>
-                  </a:lnTo>
-                  <a:lnTo>
-                    <a:pt x="5371689" y="2262897"/>
-                  </a:lnTo>
-                  <a:lnTo>
-                    <a:pt x="5443311" y="2269658"/>
-                  </a:lnTo>
-                  <a:lnTo>
-                    <a:pt x="5514934" y="2276343"/>
-                  </a:lnTo>
-                  <a:lnTo>
-                    <a:pt x="5586557" y="2282953"/>
-                  </a:lnTo>
-                  <a:lnTo>
-                    <a:pt x="5658179" y="2289489"/>
-                  </a:lnTo>
-                  <a:lnTo>
-                    <a:pt x="5729802" y="2295952"/>
-                  </a:lnTo>
-                  <a:lnTo>
-                    <a:pt x="5801424" y="2302343"/>
-                  </a:lnTo>
-                  <a:lnTo>
-                    <a:pt x="5873047" y="2308662"/>
-                  </a:lnTo>
-                  <a:lnTo>
-                    <a:pt x="5944669" y="2314910"/>
-                  </a:lnTo>
-                  <a:lnTo>
-                    <a:pt x="6016292" y="2321089"/>
-                  </a:lnTo>
-                  <a:lnTo>
-                    <a:pt x="6087914" y="2327199"/>
-                  </a:lnTo>
-                  <a:lnTo>
-                    <a:pt x="6159537" y="2333240"/>
-                  </a:lnTo>
-                  <a:lnTo>
-                    <a:pt x="6231159" y="2339213"/>
-                  </a:lnTo>
-                  <a:lnTo>
-                    <a:pt x="6302782" y="2345120"/>
-                  </a:lnTo>
-                  <a:lnTo>
-                    <a:pt x="6374404" y="2350960"/>
-                  </a:lnTo>
-                  <a:lnTo>
-                    <a:pt x="6446027" y="2356736"/>
-                  </a:lnTo>
-                  <a:lnTo>
-                    <a:pt x="6517649" y="2362446"/>
-                  </a:lnTo>
-                  <a:lnTo>
-                    <a:pt x="6589272" y="2368093"/>
-                  </a:lnTo>
-                  <a:lnTo>
-                    <a:pt x="6660894" y="2373677"/>
-                  </a:lnTo>
-                  <a:lnTo>
-                    <a:pt x="6732517" y="2379198"/>
-                  </a:lnTo>
-                  <a:lnTo>
-                    <a:pt x="6804139" y="2384657"/>
-                  </a:lnTo>
-                  <a:lnTo>
-                    <a:pt x="6875762" y="2390055"/>
-                  </a:lnTo>
-                  <a:lnTo>
-                    <a:pt x="6947385" y="2395393"/>
-                  </a:lnTo>
-                  <a:lnTo>
-                    <a:pt x="7019007" y="2400671"/>
-                  </a:lnTo>
-                  <a:lnTo>
-                    <a:pt x="7090630" y="2405890"/>
-                  </a:lnTo>
-                </a:path>
-              </a:pathLst>
-            </a:custGeom>
-          </p:spPr>
-          <p:txBody>
-            <a:bodyPr/>
-            <a:lstStyle/>
-            <a:p/>
-          </p:txBody>
-        </p:sp>
-        <p:sp>
-          <p:nvSpPr>
             <p:cNvPr id="22" name="pl22"/>
             <p:cNvSpPr/>
             <p:nvPr/>
           </p:nvSpPr>
           <p:spPr>
             <a:xfrm>
-              <a:off x="1172049" y="4152182"/>
-              <a:ext cx="7090630" cy="1196615"/>
+              <a:off x="1235312" y="2365618"/>
+              <a:ext cx="6964104" cy="868229"/>
             </a:xfrm>
             <a:custGeom>
               <a:avLst/>
               <a:pathLst>
-                <a:path w="7090630" h="1196615">
+                <a:path w="6964104" h="868229">
                   <a:moveTo>
-                    <a:pt x="7090630" y="1196615"/>
+                    <a:pt x="0" y="0"/>
                   </a:moveTo>
                   <a:lnTo>
-                    <a:pt x="7019007" y="1191021"/>
-                  </a:lnTo>
-                  <a:lnTo>
-                    <a:pt x="6947385" y="1185278"/>
-                  </a:lnTo>
-                  <a:lnTo>
-                    <a:pt x="6875762" y="1179381"/>
-                  </a:lnTo>
-                  <a:lnTo>
-                    <a:pt x="6804139" y="1173325"/>
-                  </a:lnTo>
-                  <a:lnTo>
-                    <a:pt x="6732517" y="1167107"/>
-                  </a:lnTo>
-                  <a:lnTo>
-                    <a:pt x="6660894" y="1160722"/>
-                  </a:lnTo>
-                  <a:lnTo>
-                    <a:pt x="6589272" y="1154166"/>
-                  </a:lnTo>
-                  <a:lnTo>
-                    <a:pt x="6517649" y="1147434"/>
-                  </a:lnTo>
-                  <a:lnTo>
-                    <a:pt x="6446027" y="1140521"/>
-                  </a:lnTo>
-                  <a:lnTo>
-                    <a:pt x="6374404" y="1133423"/>
-                  </a:lnTo>
-                  <a:lnTo>
-                    <a:pt x="6302782" y="1126134"/>
-                  </a:lnTo>
-                  <a:lnTo>
-                    <a:pt x="6231159" y="1118650"/>
-                  </a:lnTo>
-                  <a:lnTo>
-                    <a:pt x="6159537" y="1110964"/>
-                  </a:lnTo>
-                  <a:lnTo>
-                    <a:pt x="6087914" y="1103073"/>
-                  </a:lnTo>
-                  <a:lnTo>
-                    <a:pt x="6016292" y="1094970"/>
-                  </a:lnTo>
-                  <a:lnTo>
-                    <a:pt x="5944669" y="1086649"/>
-                  </a:lnTo>
-                  <a:lnTo>
-                    <a:pt x="5873047" y="1078106"/>
-                  </a:lnTo>
-                  <a:lnTo>
-                    <a:pt x="5801424" y="1069333"/>
-                  </a:lnTo>
-                  <a:lnTo>
-                    <a:pt x="5729802" y="1060324"/>
-                  </a:lnTo>
-                  <a:lnTo>
-                    <a:pt x="5658179" y="1051074"/>
-                  </a:lnTo>
-                  <a:lnTo>
-                    <a:pt x="5586557" y="1041576"/>
-                  </a:lnTo>
-                  <a:lnTo>
-                    <a:pt x="5514934" y="1031823"/>
-                  </a:lnTo>
-                  <a:lnTo>
-                    <a:pt x="5443311" y="1021808"/>
-                  </a:lnTo>
-                  <a:lnTo>
-                    <a:pt x="5371689" y="1011524"/>
-                  </a:lnTo>
-                  <a:lnTo>
-                    <a:pt x="5300066" y="1000965"/>
-                  </a:lnTo>
-                  <a:lnTo>
-                    <a:pt x="5228444" y="990122"/>
-                  </a:lnTo>
-                  <a:lnTo>
-                    <a:pt x="5156821" y="978988"/>
-                  </a:lnTo>
-                  <a:lnTo>
-                    <a:pt x="5085199" y="967555"/>
-                  </a:lnTo>
-                  <a:lnTo>
-                    <a:pt x="5013576" y="955816"/>
-                  </a:lnTo>
-                  <a:lnTo>
-                    <a:pt x="4941954" y="943762"/>
-                  </a:lnTo>
-                  <a:lnTo>
-                    <a:pt x="4870331" y="931384"/>
-                  </a:lnTo>
-                  <a:lnTo>
-                    <a:pt x="4798709" y="918674"/>
-                  </a:lnTo>
-                  <a:lnTo>
-                    <a:pt x="4727086" y="905623"/>
-                  </a:lnTo>
-                  <a:lnTo>
-                    <a:pt x="4655464" y="892222"/>
-                  </a:lnTo>
-                  <a:lnTo>
-                    <a:pt x="4583841" y="878462"/>
-                  </a:lnTo>
-                  <a:lnTo>
-                    <a:pt x="4512219" y="864332"/>
-                  </a:lnTo>
-                  <a:lnTo>
-                    <a:pt x="4440596" y="849823"/>
-                  </a:lnTo>
-                  <a:lnTo>
-                    <a:pt x="4368974" y="834925"/>
-                  </a:lnTo>
-                  <a:lnTo>
-                    <a:pt x="4297351" y="819627"/>
-                  </a:lnTo>
-                  <a:lnTo>
-                    <a:pt x="4225729" y="803918"/>
-                  </a:lnTo>
-                  <a:lnTo>
-                    <a:pt x="4154106" y="787788"/>
-                  </a:lnTo>
-                  <a:lnTo>
-                    <a:pt x="4082483" y="771225"/>
-                  </a:lnTo>
-                  <a:lnTo>
-                    <a:pt x="4010861" y="754218"/>
-                  </a:lnTo>
-                  <a:lnTo>
-                    <a:pt x="3939238" y="736755"/>
-                  </a:lnTo>
-                  <a:lnTo>
-                    <a:pt x="3867616" y="718822"/>
-                  </a:lnTo>
-                  <a:lnTo>
-                    <a:pt x="3795993" y="700409"/>
-                  </a:lnTo>
-                  <a:lnTo>
-                    <a:pt x="3724371" y="681502"/>
-                  </a:lnTo>
-                  <a:lnTo>
-                    <a:pt x="3652748" y="662087"/>
-                  </a:lnTo>
-                  <a:lnTo>
-                    <a:pt x="3581126" y="642151"/>
-                  </a:lnTo>
-                  <a:lnTo>
-                    <a:pt x="3509503" y="621681"/>
-                  </a:lnTo>
-                  <a:lnTo>
-                    <a:pt x="3437881" y="600661"/>
-                  </a:lnTo>
-                  <a:lnTo>
-                    <a:pt x="3366258" y="579077"/>
-                  </a:lnTo>
-                  <a:lnTo>
-                    <a:pt x="3294636" y="567712"/>
-                  </a:lnTo>
-                  <a:lnTo>
-                    <a:pt x="3223013" y="558237"/>
-                  </a:lnTo>
-                  <a:lnTo>
-                    <a:pt x="3151391" y="548655"/>
-                  </a:lnTo>
-                  <a:lnTo>
-                    <a:pt x="3079768" y="538964"/>
-                  </a:lnTo>
-                  <a:lnTo>
-                    <a:pt x="3008146" y="529164"/>
-                  </a:lnTo>
-                  <a:lnTo>
-                    <a:pt x="2936523" y="519252"/>
-                  </a:lnTo>
-                  <a:lnTo>
-                    <a:pt x="2864901" y="509229"/>
-                  </a:lnTo>
-                  <a:lnTo>
-                    <a:pt x="2793278" y="499092"/>
-                  </a:lnTo>
-                  <a:lnTo>
-                    <a:pt x="2721655" y="488840"/>
-                  </a:lnTo>
-                  <a:lnTo>
-                    <a:pt x="2650033" y="478473"/>
-                  </a:lnTo>
-                  <a:lnTo>
-                    <a:pt x="2578410" y="467988"/>
-                  </a:lnTo>
-                  <a:lnTo>
-                    <a:pt x="2506788" y="457384"/>
-                  </a:lnTo>
-                  <a:lnTo>
-                    <a:pt x="2435165" y="446661"/>
-                  </a:lnTo>
-                  <a:lnTo>
-                    <a:pt x="2363543" y="435816"/>
-                  </a:lnTo>
-                  <a:lnTo>
-                    <a:pt x="2291920" y="424848"/>
-                  </a:lnTo>
-                  <a:lnTo>
-                    <a:pt x="2220298" y="413756"/>
-                  </a:lnTo>
-                  <a:lnTo>
-                    <a:pt x="2148675" y="402539"/>
-                  </a:lnTo>
-                  <a:lnTo>
-                    <a:pt x="2077053" y="391195"/>
-                  </a:lnTo>
-                  <a:lnTo>
-                    <a:pt x="2005430" y="379722"/>
-                  </a:lnTo>
-                  <a:lnTo>
-                    <a:pt x="1933808" y="368120"/>
-                  </a:lnTo>
-                  <a:lnTo>
-                    <a:pt x="1862185" y="356386"/>
-                  </a:lnTo>
-                  <a:lnTo>
-                    <a:pt x="1790563" y="344520"/>
-                  </a:lnTo>
-                  <a:lnTo>
-                    <a:pt x="1718940" y="332519"/>
-                  </a:lnTo>
-                  <a:lnTo>
-                    <a:pt x="1647318" y="320383"/>
-                  </a:lnTo>
-                  <a:lnTo>
-                    <a:pt x="1575695" y="308109"/>
-                  </a:lnTo>
-                  <a:lnTo>
-                    <a:pt x="1504073" y="295696"/>
-                  </a:lnTo>
-                  <a:lnTo>
-                    <a:pt x="1432450" y="283143"/>
-                  </a:lnTo>
-                  <a:lnTo>
-                    <a:pt x="1360827" y="270448"/>
-                  </a:lnTo>
-                  <a:lnTo>
-                    <a:pt x="1289205" y="257609"/>
-                  </a:lnTo>
-                  <a:lnTo>
-                    <a:pt x="1217582" y="244625"/>
-                  </a:lnTo>
-                  <a:lnTo>
-                    <a:pt x="1145960" y="231494"/>
-                  </a:lnTo>
-                  <a:lnTo>
-                    <a:pt x="1074337" y="218214"/>
-                  </a:lnTo>
-                  <a:lnTo>
-                    <a:pt x="1002715" y="204784"/>
-                  </a:lnTo>
-                  <a:lnTo>
-                    <a:pt x="931092" y="191202"/>
-                  </a:lnTo>
-                  <a:lnTo>
-                    <a:pt x="859470" y="177467"/>
-                  </a:lnTo>
-                  <a:lnTo>
-                    <a:pt x="787847" y="163576"/>
-                  </a:lnTo>
-                  <a:lnTo>
-                    <a:pt x="716225" y="149528"/>
-                  </a:lnTo>
-                  <a:lnTo>
-                    <a:pt x="644602" y="135321"/>
-                  </a:lnTo>
-                  <a:lnTo>
-                    <a:pt x="572980" y="120953"/>
-                  </a:lnTo>
-                  <a:lnTo>
-                    <a:pt x="501357" y="106422"/>
-                  </a:lnTo>
-                  <a:lnTo>
-                    <a:pt x="429735" y="91727"/>
-                  </a:lnTo>
-                  <a:lnTo>
-                    <a:pt x="358112" y="76866"/>
-                  </a:lnTo>
-                  <a:lnTo>
-                    <a:pt x="286490" y="61837"/>
-                  </a:lnTo>
-                  <a:lnTo>
-                    <a:pt x="214867" y="46637"/>
-                  </a:lnTo>
-                  <a:lnTo>
-                    <a:pt x="143245" y="31266"/>
-                  </a:lnTo>
-                  <a:lnTo>
-                    <a:pt x="71622" y="15721"/>
-                  </a:lnTo>
-                  <a:lnTo>
-                    <a:pt x="0" y="0"/>
+                    <a:pt x="70344" y="27036"/>
+                  </a:lnTo>
+                  <a:lnTo>
+                    <a:pt x="140688" y="53367"/>
+                  </a:lnTo>
+                  <a:lnTo>
+                    <a:pt x="211033" y="79009"/>
+                  </a:lnTo>
+                  <a:lnTo>
+                    <a:pt x="281377" y="103982"/>
+                  </a:lnTo>
+                  <a:lnTo>
+                    <a:pt x="351722" y="128301"/>
+                  </a:lnTo>
+                  <a:lnTo>
+                    <a:pt x="422066" y="151986"/>
+                  </a:lnTo>
+                  <a:lnTo>
+                    <a:pt x="492411" y="175051"/>
+                  </a:lnTo>
+                  <a:lnTo>
+                    <a:pt x="562755" y="197514"/>
+                  </a:lnTo>
+                  <a:lnTo>
+                    <a:pt x="633100" y="219389"/>
+                  </a:lnTo>
+                  <a:lnTo>
+                    <a:pt x="703444" y="240694"/>
+                  </a:lnTo>
+                  <a:lnTo>
+                    <a:pt x="773789" y="261441"/>
+                  </a:lnTo>
+                  <a:lnTo>
+                    <a:pt x="844133" y="281646"/>
+                  </a:lnTo>
+                  <a:lnTo>
+                    <a:pt x="914478" y="301323"/>
+                  </a:lnTo>
+                  <a:lnTo>
+                    <a:pt x="984822" y="320487"/>
+                  </a:lnTo>
+                  <a:lnTo>
+                    <a:pt x="1055167" y="339149"/>
+                  </a:lnTo>
+                  <a:lnTo>
+                    <a:pt x="1125511" y="357324"/>
+                  </a:lnTo>
+                  <a:lnTo>
+                    <a:pt x="1195856" y="375023"/>
+                  </a:lnTo>
+                  <a:lnTo>
+                    <a:pt x="1266200" y="392261"/>
+                  </a:lnTo>
+                  <a:lnTo>
+                    <a:pt x="1336545" y="409047"/>
+                  </a:lnTo>
+                  <a:lnTo>
+                    <a:pt x="1406889" y="425396"/>
+                  </a:lnTo>
+                  <a:lnTo>
+                    <a:pt x="1477234" y="441317"/>
+                  </a:lnTo>
+                  <a:lnTo>
+                    <a:pt x="1547578" y="456821"/>
+                  </a:lnTo>
+                  <a:lnTo>
+                    <a:pt x="1617923" y="471921"/>
+                  </a:lnTo>
+                  <a:lnTo>
+                    <a:pt x="1688267" y="486626"/>
+                  </a:lnTo>
+                  <a:lnTo>
+                    <a:pt x="1758612" y="500947"/>
+                  </a:lnTo>
+                  <a:lnTo>
+                    <a:pt x="1828956" y="514894"/>
+                  </a:lnTo>
+                  <a:lnTo>
+                    <a:pt x="1899301" y="528476"/>
+                  </a:lnTo>
+                  <a:lnTo>
+                    <a:pt x="1969645" y="541704"/>
+                  </a:lnTo>
+                  <a:lnTo>
+                    <a:pt x="2039990" y="554586"/>
+                  </a:lnTo>
+                  <a:lnTo>
+                    <a:pt x="2110334" y="567131"/>
+                  </a:lnTo>
+                  <a:lnTo>
+                    <a:pt x="2180679" y="579348"/>
+                  </a:lnTo>
+                  <a:lnTo>
+                    <a:pt x="2251023" y="591246"/>
+                  </a:lnTo>
+                  <a:lnTo>
+                    <a:pt x="2321368" y="602833"/>
+                  </a:lnTo>
+                  <a:lnTo>
+                    <a:pt x="2391712" y="614118"/>
+                  </a:lnTo>
+                  <a:lnTo>
+                    <a:pt x="2462057" y="625107"/>
+                  </a:lnTo>
+                  <a:lnTo>
+                    <a:pt x="2532401" y="635810"/>
+                  </a:lnTo>
+                  <a:lnTo>
+                    <a:pt x="2602746" y="646232"/>
+                  </a:lnTo>
+                  <a:lnTo>
+                    <a:pt x="2673090" y="656383"/>
+                  </a:lnTo>
+                  <a:lnTo>
+                    <a:pt x="2743435" y="666268"/>
+                  </a:lnTo>
+                  <a:lnTo>
+                    <a:pt x="2813779" y="675894"/>
+                  </a:lnTo>
+                  <a:lnTo>
+                    <a:pt x="2884124" y="685270"/>
+                  </a:lnTo>
+                  <a:lnTo>
+                    <a:pt x="2954468" y="694400"/>
+                  </a:lnTo>
+                  <a:lnTo>
+                    <a:pt x="3024813" y="703292"/>
+                  </a:lnTo>
+                  <a:lnTo>
+                    <a:pt x="3095157" y="711951"/>
+                  </a:lnTo>
+                  <a:lnTo>
+                    <a:pt x="3165502" y="720384"/>
+                  </a:lnTo>
+                  <a:lnTo>
+                    <a:pt x="3235846" y="728597"/>
+                  </a:lnTo>
+                  <a:lnTo>
+                    <a:pt x="3306191" y="735874"/>
+                  </a:lnTo>
+                  <a:lnTo>
+                    <a:pt x="3376535" y="739218"/>
+                  </a:lnTo>
+                  <a:lnTo>
+                    <a:pt x="3446880" y="742524"/>
+                  </a:lnTo>
+                  <a:lnTo>
+                    <a:pt x="3517224" y="745792"/>
+                  </a:lnTo>
+                  <a:lnTo>
+                    <a:pt x="3587569" y="749025"/>
+                  </a:lnTo>
+                  <a:lnTo>
+                    <a:pt x="3657913" y="752221"/>
+                  </a:lnTo>
+                  <a:lnTo>
+                    <a:pt x="3728257" y="755381"/>
+                  </a:lnTo>
+                  <a:lnTo>
+                    <a:pt x="3798602" y="758506"/>
+                  </a:lnTo>
+                  <a:lnTo>
+                    <a:pt x="3868946" y="761596"/>
+                  </a:lnTo>
+                  <a:lnTo>
+                    <a:pt x="3939291" y="764652"/>
+                  </a:lnTo>
+                  <a:lnTo>
+                    <a:pt x="4009635" y="767673"/>
+                  </a:lnTo>
+                  <a:lnTo>
+                    <a:pt x="4079980" y="770660"/>
+                  </a:lnTo>
+                  <a:lnTo>
+                    <a:pt x="4150324" y="773614"/>
+                  </a:lnTo>
+                  <a:lnTo>
+                    <a:pt x="4220669" y="776535"/>
+                  </a:lnTo>
+                  <a:lnTo>
+                    <a:pt x="4291013" y="779424"/>
+                  </a:lnTo>
+                  <a:lnTo>
+                    <a:pt x="4361358" y="782280"/>
+                  </a:lnTo>
+                  <a:lnTo>
+                    <a:pt x="4431702" y="785104"/>
+                  </a:lnTo>
+                  <a:lnTo>
+                    <a:pt x="4502047" y="787896"/>
+                  </a:lnTo>
+                  <a:lnTo>
+                    <a:pt x="4572391" y="790657"/>
+                  </a:lnTo>
+                  <a:lnTo>
+                    <a:pt x="4642736" y="793388"/>
+                  </a:lnTo>
+                  <a:lnTo>
+                    <a:pt x="4713080" y="796088"/>
+                  </a:lnTo>
+                  <a:lnTo>
+                    <a:pt x="4783425" y="798757"/>
+                  </a:lnTo>
+                  <a:lnTo>
+                    <a:pt x="4853769" y="801397"/>
+                  </a:lnTo>
+                  <a:lnTo>
+                    <a:pt x="4924114" y="804007"/>
+                  </a:lnTo>
+                  <a:lnTo>
+                    <a:pt x="4994458" y="806588"/>
+                  </a:lnTo>
+                  <a:lnTo>
+                    <a:pt x="5064803" y="809140"/>
+                  </a:lnTo>
+                  <a:lnTo>
+                    <a:pt x="5135147" y="811663"/>
+                  </a:lnTo>
+                  <a:lnTo>
+                    <a:pt x="5205492" y="814159"/>
+                  </a:lnTo>
+                  <a:lnTo>
+                    <a:pt x="5275836" y="816626"/>
+                  </a:lnTo>
+                  <a:lnTo>
+                    <a:pt x="5346181" y="819066"/>
+                  </a:lnTo>
+                  <a:lnTo>
+                    <a:pt x="5416525" y="821478"/>
+                  </a:lnTo>
+                  <a:lnTo>
+                    <a:pt x="5486870" y="823864"/>
+                  </a:lnTo>
+                  <a:lnTo>
+                    <a:pt x="5557214" y="826222"/>
+                  </a:lnTo>
+                  <a:lnTo>
+                    <a:pt x="5627559" y="828555"/>
+                  </a:lnTo>
+                  <a:lnTo>
+                    <a:pt x="5697903" y="830861"/>
+                  </a:lnTo>
+                  <a:lnTo>
+                    <a:pt x="5768248" y="833141"/>
+                  </a:lnTo>
+                  <a:lnTo>
+                    <a:pt x="5838592" y="835396"/>
+                  </a:lnTo>
+                  <a:lnTo>
+                    <a:pt x="5908937" y="837626"/>
+                  </a:lnTo>
+                  <a:lnTo>
+                    <a:pt x="5979281" y="839831"/>
+                  </a:lnTo>
+                  <a:lnTo>
+                    <a:pt x="6049626" y="842011"/>
+                  </a:lnTo>
+                  <a:lnTo>
+                    <a:pt x="6119970" y="844167"/>
+                  </a:lnTo>
+                  <a:lnTo>
+                    <a:pt x="6190315" y="846298"/>
+                  </a:lnTo>
+                  <a:lnTo>
+                    <a:pt x="6260659" y="848406"/>
+                  </a:lnTo>
+                  <a:lnTo>
+                    <a:pt x="6331004" y="850490"/>
+                  </a:lnTo>
+                  <a:lnTo>
+                    <a:pt x="6401348" y="852551"/>
+                  </a:lnTo>
+                  <a:lnTo>
+                    <a:pt x="6471693" y="854589"/>
+                  </a:lnTo>
+                  <a:lnTo>
+                    <a:pt x="6542037" y="856604"/>
+                  </a:lnTo>
+                  <a:lnTo>
+                    <a:pt x="6612382" y="858596"/>
+                  </a:lnTo>
+                  <a:lnTo>
+                    <a:pt x="6682726" y="860566"/>
+                  </a:lnTo>
+                  <a:lnTo>
+                    <a:pt x="6753071" y="862514"/>
+                  </a:lnTo>
+                  <a:lnTo>
+                    <a:pt x="6823415" y="864441"/>
+                  </a:lnTo>
+                  <a:lnTo>
+                    <a:pt x="6893760" y="866345"/>
+                  </a:lnTo>
+                  <a:lnTo>
+                    <a:pt x="6964104" y="868229"/>
                   </a:lnTo>
                 </a:path>
               </a:pathLst>
@@ -4240,312 +3950,637 @@
           </p:nvSpPr>
           <p:spPr>
             <a:xfrm>
-              <a:off x="1172049" y="3550139"/>
-              <a:ext cx="7090630" cy="1697040"/>
+              <a:off x="1235312" y="2893238"/>
+              <a:ext cx="6964104" cy="431830"/>
             </a:xfrm>
             <a:custGeom>
               <a:avLst/>
               <a:pathLst>
-                <a:path w="7090630" h="1697040">
+                <a:path w="6964104" h="431830">
+                  <a:moveTo>
+                    <a:pt x="6964104" y="431830"/>
+                  </a:moveTo>
+                  <a:lnTo>
+                    <a:pt x="6893760" y="429811"/>
+                  </a:lnTo>
+                  <a:lnTo>
+                    <a:pt x="6823415" y="427739"/>
+                  </a:lnTo>
+                  <a:lnTo>
+                    <a:pt x="6753071" y="425610"/>
+                  </a:lnTo>
+                  <a:lnTo>
+                    <a:pt x="6682726" y="423425"/>
+                  </a:lnTo>
+                  <a:lnTo>
+                    <a:pt x="6612382" y="421181"/>
+                  </a:lnTo>
+                  <a:lnTo>
+                    <a:pt x="6542037" y="418877"/>
+                  </a:lnTo>
+                  <a:lnTo>
+                    <a:pt x="6471693" y="416511"/>
+                  </a:lnTo>
+                  <a:lnTo>
+                    <a:pt x="6401348" y="414082"/>
+                  </a:lnTo>
+                  <a:lnTo>
+                    <a:pt x="6331004" y="411587"/>
+                  </a:lnTo>
+                  <a:lnTo>
+                    <a:pt x="6260659" y="409025"/>
+                  </a:lnTo>
+                  <a:lnTo>
+                    <a:pt x="6190315" y="406395"/>
+                  </a:lnTo>
+                  <a:lnTo>
+                    <a:pt x="6119970" y="403694"/>
+                  </a:lnTo>
+                  <a:lnTo>
+                    <a:pt x="6049626" y="400921"/>
+                  </a:lnTo>
+                  <a:lnTo>
+                    <a:pt x="5979281" y="398073"/>
+                  </a:lnTo>
+                  <a:lnTo>
+                    <a:pt x="5908937" y="395149"/>
+                  </a:lnTo>
+                  <a:lnTo>
+                    <a:pt x="5838592" y="392146"/>
+                  </a:lnTo>
+                  <a:lnTo>
+                    <a:pt x="5768248" y="389063"/>
+                  </a:lnTo>
+                  <a:lnTo>
+                    <a:pt x="5697903" y="385897"/>
+                  </a:lnTo>
+                  <a:lnTo>
+                    <a:pt x="5627559" y="382646"/>
+                  </a:lnTo>
+                  <a:lnTo>
+                    <a:pt x="5557214" y="379308"/>
+                  </a:lnTo>
+                  <a:lnTo>
+                    <a:pt x="5486870" y="375880"/>
+                  </a:lnTo>
+                  <a:lnTo>
+                    <a:pt x="5416525" y="372360"/>
+                  </a:lnTo>
+                  <a:lnTo>
+                    <a:pt x="5346181" y="368746"/>
+                  </a:lnTo>
+                  <a:lnTo>
+                    <a:pt x="5275836" y="365035"/>
+                  </a:lnTo>
+                  <a:lnTo>
+                    <a:pt x="5205492" y="361224"/>
+                  </a:lnTo>
+                  <a:lnTo>
+                    <a:pt x="5135147" y="357311"/>
+                  </a:lnTo>
+                  <a:lnTo>
+                    <a:pt x="5064803" y="353293"/>
+                  </a:lnTo>
+                  <a:lnTo>
+                    <a:pt x="4994458" y="349168"/>
+                  </a:lnTo>
+                  <a:lnTo>
+                    <a:pt x="4924114" y="344931"/>
+                  </a:lnTo>
+                  <a:lnTo>
+                    <a:pt x="4853769" y="340581"/>
+                  </a:lnTo>
+                  <a:lnTo>
+                    <a:pt x="4783425" y="336114"/>
+                  </a:lnTo>
+                  <a:lnTo>
+                    <a:pt x="4713080" y="331528"/>
+                  </a:lnTo>
+                  <a:lnTo>
+                    <a:pt x="4642736" y="326818"/>
+                  </a:lnTo>
+                  <a:lnTo>
+                    <a:pt x="4572391" y="321982"/>
+                  </a:lnTo>
+                  <a:lnTo>
+                    <a:pt x="4502047" y="317016"/>
+                  </a:lnTo>
+                  <a:lnTo>
+                    <a:pt x="4431702" y="311917"/>
+                  </a:lnTo>
+                  <a:lnTo>
+                    <a:pt x="4361358" y="306681"/>
+                  </a:lnTo>
+                  <a:lnTo>
+                    <a:pt x="4291013" y="301304"/>
+                  </a:lnTo>
+                  <a:lnTo>
+                    <a:pt x="4220669" y="295784"/>
+                  </a:lnTo>
+                  <a:lnTo>
+                    <a:pt x="4150324" y="290115"/>
+                  </a:lnTo>
+                  <a:lnTo>
+                    <a:pt x="4079980" y="284294"/>
+                  </a:lnTo>
+                  <a:lnTo>
+                    <a:pt x="4009635" y="278317"/>
+                  </a:lnTo>
+                  <a:lnTo>
+                    <a:pt x="3939291" y="272179"/>
+                  </a:lnTo>
+                  <a:lnTo>
+                    <a:pt x="3868946" y="265877"/>
+                  </a:lnTo>
+                  <a:lnTo>
+                    <a:pt x="3798602" y="259406"/>
+                  </a:lnTo>
+                  <a:lnTo>
+                    <a:pt x="3728257" y="252761"/>
+                  </a:lnTo>
+                  <a:lnTo>
+                    <a:pt x="3657913" y="245938"/>
+                  </a:lnTo>
+                  <a:lnTo>
+                    <a:pt x="3587569" y="238931"/>
+                  </a:lnTo>
+                  <a:lnTo>
+                    <a:pt x="3517224" y="231737"/>
+                  </a:lnTo>
+                  <a:lnTo>
+                    <a:pt x="3446880" y="224350"/>
+                  </a:lnTo>
+                  <a:lnTo>
+                    <a:pt x="3376535" y="216764"/>
+                  </a:lnTo>
+                  <a:lnTo>
+                    <a:pt x="3306191" y="208975"/>
+                  </a:lnTo>
+                  <a:lnTo>
+                    <a:pt x="3235846" y="204874"/>
+                  </a:lnTo>
+                  <a:lnTo>
+                    <a:pt x="3165502" y="201454"/>
+                  </a:lnTo>
+                  <a:lnTo>
+                    <a:pt x="3095157" y="197996"/>
+                  </a:lnTo>
+                  <a:lnTo>
+                    <a:pt x="3024813" y="194499"/>
+                  </a:lnTo>
+                  <a:lnTo>
+                    <a:pt x="2954468" y="190962"/>
+                  </a:lnTo>
+                  <a:lnTo>
+                    <a:pt x="2884124" y="187386"/>
+                  </a:lnTo>
+                  <a:lnTo>
+                    <a:pt x="2813779" y="183768"/>
+                  </a:lnTo>
+                  <a:lnTo>
+                    <a:pt x="2743435" y="180110"/>
+                  </a:lnTo>
+                  <a:lnTo>
+                    <a:pt x="2673090" y="176411"/>
+                  </a:lnTo>
+                  <a:lnTo>
+                    <a:pt x="2602746" y="172669"/>
+                  </a:lnTo>
+                  <a:lnTo>
+                    <a:pt x="2532401" y="168885"/>
+                  </a:lnTo>
+                  <a:lnTo>
+                    <a:pt x="2462057" y="165059"/>
+                  </a:lnTo>
+                  <a:lnTo>
+                    <a:pt x="2391712" y="161189"/>
+                  </a:lnTo>
+                  <a:lnTo>
+                    <a:pt x="2321368" y="157275"/>
+                  </a:lnTo>
+                  <a:lnTo>
+                    <a:pt x="2251023" y="153317"/>
+                  </a:lnTo>
+                  <a:lnTo>
+                    <a:pt x="2180679" y="149315"/>
+                  </a:lnTo>
+                  <a:lnTo>
+                    <a:pt x="2110334" y="145267"/>
+                  </a:lnTo>
+                  <a:lnTo>
+                    <a:pt x="2039990" y="141173"/>
+                  </a:lnTo>
+                  <a:lnTo>
+                    <a:pt x="1969645" y="137033"/>
+                  </a:lnTo>
+                  <a:lnTo>
+                    <a:pt x="1899301" y="132846"/>
+                  </a:lnTo>
+                  <a:lnTo>
+                    <a:pt x="1828956" y="128611"/>
+                  </a:lnTo>
+                  <a:lnTo>
+                    <a:pt x="1758612" y="124329"/>
+                  </a:lnTo>
+                  <a:lnTo>
+                    <a:pt x="1688267" y="119998"/>
+                  </a:lnTo>
+                  <a:lnTo>
+                    <a:pt x="1617923" y="115618"/>
+                  </a:lnTo>
+                  <a:lnTo>
+                    <a:pt x="1547578" y="111189"/>
+                  </a:lnTo>
+                  <a:lnTo>
+                    <a:pt x="1477234" y="106710"/>
+                  </a:lnTo>
+                  <a:lnTo>
+                    <a:pt x="1406889" y="102179"/>
+                  </a:lnTo>
+                  <a:lnTo>
+                    <a:pt x="1336545" y="97598"/>
+                  </a:lnTo>
+                  <a:lnTo>
+                    <a:pt x="1266200" y="92965"/>
+                  </a:lnTo>
+                  <a:lnTo>
+                    <a:pt x="1195856" y="88279"/>
+                  </a:lnTo>
+                  <a:lnTo>
+                    <a:pt x="1125511" y="83540"/>
+                  </a:lnTo>
+                  <a:lnTo>
+                    <a:pt x="1055167" y="78748"/>
+                  </a:lnTo>
+                  <a:lnTo>
+                    <a:pt x="984822" y="73902"/>
+                  </a:lnTo>
+                  <a:lnTo>
+                    <a:pt x="914478" y="69000"/>
+                  </a:lnTo>
+                  <a:lnTo>
+                    <a:pt x="844133" y="64043"/>
+                  </a:lnTo>
+                  <a:lnTo>
+                    <a:pt x="773789" y="59030"/>
+                  </a:lnTo>
+                  <a:lnTo>
+                    <a:pt x="703444" y="53961"/>
+                  </a:lnTo>
+                  <a:lnTo>
+                    <a:pt x="633100" y="48834"/>
+                  </a:lnTo>
+                  <a:lnTo>
+                    <a:pt x="562755" y="43649"/>
+                  </a:lnTo>
+                  <a:lnTo>
+                    <a:pt x="492411" y="38405"/>
+                  </a:lnTo>
+                  <a:lnTo>
+                    <a:pt x="422066" y="33102"/>
+                  </a:lnTo>
+                  <a:lnTo>
+                    <a:pt x="351722" y="27739"/>
+                  </a:lnTo>
+                  <a:lnTo>
+                    <a:pt x="281377" y="22315"/>
+                  </a:lnTo>
+                  <a:lnTo>
+                    <a:pt x="211033" y="16830"/>
+                  </a:lnTo>
+                  <a:lnTo>
+                    <a:pt x="140688" y="11283"/>
+                  </a:lnTo>
+                  <a:lnTo>
+                    <a:pt x="70344" y="5673"/>
+                  </a:lnTo>
+                  <a:lnTo>
+                    <a:pt x="0" y="0"/>
+                  </a:lnTo>
+                </a:path>
+              </a:pathLst>
+            </a:custGeom>
+          </p:spPr>
+          <p:txBody>
+            <a:bodyPr/>
+            <a:lstStyle/>
+            <a:p/>
+          </p:txBody>
+        </p:sp>
+        <p:sp>
+          <p:nvSpPr>
+            <p:cNvPr id="24" name="pl24"/>
+            <p:cNvSpPr/>
+            <p:nvPr/>
+          </p:nvSpPr>
+          <p:spPr>
+            <a:xfrm>
+              <a:off x="1235312" y="2675975"/>
+              <a:ext cx="6964104" cy="612421"/>
+            </a:xfrm>
+            <a:custGeom>
+              <a:avLst/>
+              <a:pathLst>
+                <a:path w="6964104" h="612421">
                   <a:moveTo>
                     <a:pt x="0" y="0"/>
                   </a:moveTo>
                   <a:lnTo>
-                    <a:pt x="71622" y="37509"/>
-                  </a:lnTo>
-                  <a:lnTo>
-                    <a:pt x="143245" y="74318"/>
-                  </a:lnTo>
-                  <a:lnTo>
-                    <a:pt x="214867" y="110438"/>
-                  </a:lnTo>
-                  <a:lnTo>
-                    <a:pt x="286490" y="145884"/>
-                  </a:lnTo>
-                  <a:lnTo>
-                    <a:pt x="358112" y="180667"/>
-                  </a:lnTo>
-                  <a:lnTo>
-                    <a:pt x="429735" y="214800"/>
-                  </a:lnTo>
-                  <a:lnTo>
-                    <a:pt x="501357" y="248296"/>
-                  </a:lnTo>
-                  <a:lnTo>
-                    <a:pt x="572980" y="281165"/>
-                  </a:lnTo>
-                  <a:lnTo>
-                    <a:pt x="644602" y="313420"/>
-                  </a:lnTo>
-                  <a:lnTo>
-                    <a:pt x="716225" y="345072"/>
-                  </a:lnTo>
-                  <a:lnTo>
-                    <a:pt x="787847" y="376133"/>
-                  </a:lnTo>
-                  <a:lnTo>
-                    <a:pt x="859470" y="406613"/>
-                  </a:lnTo>
-                  <a:lnTo>
-                    <a:pt x="931092" y="436524"/>
-                  </a:lnTo>
-                  <a:lnTo>
-                    <a:pt x="1002715" y="465875"/>
-                  </a:lnTo>
-                  <a:lnTo>
-                    <a:pt x="1074337" y="494678"/>
-                  </a:lnTo>
-                  <a:lnTo>
-                    <a:pt x="1145960" y="522943"/>
-                  </a:lnTo>
-                  <a:lnTo>
-                    <a:pt x="1217582" y="550680"/>
-                  </a:lnTo>
-                  <a:lnTo>
-                    <a:pt x="1289205" y="577898"/>
-                  </a:lnTo>
-                  <a:lnTo>
-                    <a:pt x="1360827" y="604608"/>
-                  </a:lnTo>
-                  <a:lnTo>
-                    <a:pt x="1432450" y="630818"/>
-                  </a:lnTo>
-                  <a:lnTo>
-                    <a:pt x="1504073" y="656539"/>
-                  </a:lnTo>
-                  <a:lnTo>
-                    <a:pt x="1575695" y="681779"/>
-                  </a:lnTo>
-                  <a:lnTo>
-                    <a:pt x="1647318" y="706547"/>
-                  </a:lnTo>
-                  <a:lnTo>
-                    <a:pt x="1718940" y="730852"/>
-                  </a:lnTo>
-                  <a:lnTo>
-                    <a:pt x="1790563" y="754703"/>
-                  </a:lnTo>
-                  <a:lnTo>
-                    <a:pt x="1862185" y="778109"/>
-                  </a:lnTo>
-                  <a:lnTo>
-                    <a:pt x="1933808" y="801077"/>
-                  </a:lnTo>
-                  <a:lnTo>
-                    <a:pt x="2005430" y="823616"/>
-                  </a:lnTo>
-                  <a:lnTo>
-                    <a:pt x="2077053" y="845733"/>
-                  </a:lnTo>
-                  <a:lnTo>
-                    <a:pt x="2148675" y="867437"/>
-                  </a:lnTo>
-                  <a:lnTo>
-                    <a:pt x="2220298" y="888736"/>
-                  </a:lnTo>
-                  <a:lnTo>
-                    <a:pt x="2291920" y="909636"/>
-                  </a:lnTo>
-                  <a:lnTo>
-                    <a:pt x="2363543" y="930146"/>
-                  </a:lnTo>
-                  <a:lnTo>
-                    <a:pt x="2435165" y="950273"/>
-                  </a:lnTo>
-                  <a:lnTo>
-                    <a:pt x="2506788" y="970024"/>
-                  </a:lnTo>
-                  <a:lnTo>
-                    <a:pt x="2578410" y="989405"/>
-                  </a:lnTo>
-                  <a:lnTo>
-                    <a:pt x="2650033" y="1008424"/>
-                  </a:lnTo>
-                  <a:lnTo>
-                    <a:pt x="2721655" y="1027088"/>
-                  </a:lnTo>
-                  <a:lnTo>
-                    <a:pt x="2793278" y="1045403"/>
-                  </a:lnTo>
-                  <a:lnTo>
-                    <a:pt x="2864901" y="1063376"/>
-                  </a:lnTo>
-                  <a:lnTo>
-                    <a:pt x="2936523" y="1081012"/>
-                  </a:lnTo>
-                  <a:lnTo>
-                    <a:pt x="3008146" y="1098320"/>
-                  </a:lnTo>
-                  <a:lnTo>
-                    <a:pt x="3079768" y="1115303"/>
-                  </a:lnTo>
-                  <a:lnTo>
-                    <a:pt x="3151391" y="1131970"/>
-                  </a:lnTo>
-                  <a:lnTo>
-                    <a:pt x="3223013" y="1148325"/>
-                  </a:lnTo>
-                  <a:lnTo>
-                    <a:pt x="3294636" y="1164374"/>
-                  </a:lnTo>
-                  <a:lnTo>
-                    <a:pt x="3366258" y="1180123"/>
-                  </a:lnTo>
-                  <a:lnTo>
-                    <a:pt x="3437881" y="1195578"/>
-                  </a:lnTo>
-                  <a:lnTo>
-                    <a:pt x="3509503" y="1210745"/>
-                  </a:lnTo>
-                  <a:lnTo>
-                    <a:pt x="3581126" y="1225627"/>
-                  </a:lnTo>
-                  <a:lnTo>
-                    <a:pt x="3652748" y="1240232"/>
-                  </a:lnTo>
-                  <a:lnTo>
-                    <a:pt x="3724371" y="1254564"/>
-                  </a:lnTo>
-                  <a:lnTo>
-                    <a:pt x="3795993" y="1268627"/>
-                  </a:lnTo>
-                  <a:lnTo>
-                    <a:pt x="3867616" y="1282428"/>
-                  </a:lnTo>
-                  <a:lnTo>
-                    <a:pt x="3939238" y="1295972"/>
-                  </a:lnTo>
-                  <a:lnTo>
-                    <a:pt x="4010861" y="1309262"/>
-                  </a:lnTo>
-                  <a:lnTo>
-                    <a:pt x="4082483" y="1322303"/>
-                  </a:lnTo>
-                  <a:lnTo>
-                    <a:pt x="4154106" y="1335101"/>
-                  </a:lnTo>
-                  <a:lnTo>
-                    <a:pt x="4225729" y="1347660"/>
-                  </a:lnTo>
-                  <a:lnTo>
-                    <a:pt x="4297351" y="1359984"/>
-                  </a:lnTo>
-                  <a:lnTo>
-                    <a:pt x="4368974" y="1372078"/>
-                  </a:lnTo>
-                  <a:lnTo>
-                    <a:pt x="4440596" y="1383945"/>
-                  </a:lnTo>
-                  <a:lnTo>
-                    <a:pt x="4512219" y="1395591"/>
-                  </a:lnTo>
-                  <a:lnTo>
-                    <a:pt x="4583841" y="1407019"/>
-                  </a:lnTo>
-                  <a:lnTo>
-                    <a:pt x="4655464" y="1418234"/>
-                  </a:lnTo>
-                  <a:lnTo>
-                    <a:pt x="4727086" y="1429239"/>
-                  </a:lnTo>
-                  <a:lnTo>
-                    <a:pt x="4798709" y="1440039"/>
-                  </a:lnTo>
-                  <a:lnTo>
-                    <a:pt x="4870331" y="1450636"/>
-                  </a:lnTo>
-                  <a:lnTo>
-                    <a:pt x="4941954" y="1461036"/>
-                  </a:lnTo>
-                  <a:lnTo>
-                    <a:pt x="5013576" y="1471241"/>
-                  </a:lnTo>
-                  <a:lnTo>
-                    <a:pt x="5085199" y="1481256"/>
-                  </a:lnTo>
-                  <a:lnTo>
-                    <a:pt x="5156821" y="1491083"/>
-                  </a:lnTo>
-                  <a:lnTo>
-                    <a:pt x="5228444" y="1500727"/>
-                  </a:lnTo>
-                  <a:lnTo>
-                    <a:pt x="5300066" y="1510190"/>
-                  </a:lnTo>
-                  <a:lnTo>
-                    <a:pt x="5371689" y="1519477"/>
-                  </a:lnTo>
-                  <a:lnTo>
-                    <a:pt x="5443311" y="1528590"/>
-                  </a:lnTo>
-                  <a:lnTo>
-                    <a:pt x="5514934" y="1537533"/>
-                  </a:lnTo>
-                  <a:lnTo>
-                    <a:pt x="5586557" y="1546308"/>
-                  </a:lnTo>
-                  <a:lnTo>
-                    <a:pt x="5658179" y="1554920"/>
-                  </a:lnTo>
-                  <a:lnTo>
-                    <a:pt x="5729802" y="1563370"/>
-                  </a:lnTo>
-                  <a:lnTo>
-                    <a:pt x="5801424" y="1571663"/>
-                  </a:lnTo>
-                  <a:lnTo>
-                    <a:pt x="5873047" y="1579801"/>
-                  </a:lnTo>
-                  <a:lnTo>
-                    <a:pt x="5944669" y="1587787"/>
-                  </a:lnTo>
-                  <a:lnTo>
-                    <a:pt x="6016292" y="1595623"/>
-                  </a:lnTo>
-                  <a:lnTo>
-                    <a:pt x="6087914" y="1603313"/>
-                  </a:lnTo>
-                  <a:lnTo>
-                    <a:pt x="6159537" y="1610859"/>
-                  </a:lnTo>
-                  <a:lnTo>
-                    <a:pt x="6231159" y="1618265"/>
-                  </a:lnTo>
-                  <a:lnTo>
-                    <a:pt x="6302782" y="1625532"/>
-                  </a:lnTo>
-                  <a:lnTo>
-                    <a:pt x="6374404" y="1632663"/>
-                  </a:lnTo>
-                  <a:lnTo>
-                    <a:pt x="6446027" y="1639660"/>
-                  </a:lnTo>
-                  <a:lnTo>
-                    <a:pt x="6517649" y="1646527"/>
-                  </a:lnTo>
-                  <a:lnTo>
-                    <a:pt x="6589272" y="1653266"/>
-                  </a:lnTo>
-                  <a:lnTo>
-                    <a:pt x="6660894" y="1659879"/>
-                  </a:lnTo>
-                  <a:lnTo>
-                    <a:pt x="6732517" y="1666368"/>
-                  </a:lnTo>
-                  <a:lnTo>
-                    <a:pt x="6804139" y="1672736"/>
-                  </a:lnTo>
-                  <a:lnTo>
-                    <a:pt x="6875762" y="1678985"/>
-                  </a:lnTo>
-                  <a:lnTo>
-                    <a:pt x="6947385" y="1685117"/>
-                  </a:lnTo>
-                  <a:lnTo>
-                    <a:pt x="7019007" y="1691135"/>
-                  </a:lnTo>
-                  <a:lnTo>
-                    <a:pt x="7090630" y="1697040"/>
+                    <a:pt x="70344" y="13536"/>
+                  </a:lnTo>
+                  <a:lnTo>
+                    <a:pt x="140688" y="26819"/>
+                  </a:lnTo>
+                  <a:lnTo>
+                    <a:pt x="211033" y="39854"/>
+                  </a:lnTo>
+                  <a:lnTo>
+                    <a:pt x="281377" y="52646"/>
+                  </a:lnTo>
+                  <a:lnTo>
+                    <a:pt x="351722" y="65198"/>
+                  </a:lnTo>
+                  <a:lnTo>
+                    <a:pt x="422066" y="77516"/>
+                  </a:lnTo>
+                  <a:lnTo>
+                    <a:pt x="492411" y="89604"/>
+                  </a:lnTo>
+                  <a:lnTo>
+                    <a:pt x="562755" y="101465"/>
+                  </a:lnTo>
+                  <a:lnTo>
+                    <a:pt x="633100" y="113106"/>
+                  </a:lnTo>
+                  <a:lnTo>
+                    <a:pt x="703444" y="124528"/>
+                  </a:lnTo>
+                  <a:lnTo>
+                    <a:pt x="773789" y="135737"/>
+                  </a:lnTo>
+                  <a:lnTo>
+                    <a:pt x="844133" y="146737"/>
+                  </a:lnTo>
+                  <a:lnTo>
+                    <a:pt x="914478" y="157531"/>
+                  </a:lnTo>
+                  <a:lnTo>
+                    <a:pt x="984822" y="168123"/>
+                  </a:lnTo>
+                  <a:lnTo>
+                    <a:pt x="1055167" y="178518"/>
+                  </a:lnTo>
+                  <a:lnTo>
+                    <a:pt x="1125511" y="188718"/>
+                  </a:lnTo>
+                  <a:lnTo>
+                    <a:pt x="1195856" y="198727"/>
+                  </a:lnTo>
+                  <a:lnTo>
+                    <a:pt x="1266200" y="208550"/>
+                  </a:lnTo>
+                  <a:lnTo>
+                    <a:pt x="1336545" y="218188"/>
+                  </a:lnTo>
+                  <a:lnTo>
+                    <a:pt x="1406889" y="227647"/>
+                  </a:lnTo>
+                  <a:lnTo>
+                    <a:pt x="1477234" y="236929"/>
+                  </a:lnTo>
+                  <a:lnTo>
+                    <a:pt x="1547578" y="246038"/>
+                  </a:lnTo>
+                  <a:lnTo>
+                    <a:pt x="1617923" y="254976"/>
+                  </a:lnTo>
+                  <a:lnTo>
+                    <a:pt x="1688267" y="263747"/>
+                  </a:lnTo>
+                  <a:lnTo>
+                    <a:pt x="1758612" y="272354"/>
+                  </a:lnTo>
+                  <a:lnTo>
+                    <a:pt x="1828956" y="280801"/>
+                  </a:lnTo>
+                  <a:lnTo>
+                    <a:pt x="1899301" y="289089"/>
+                  </a:lnTo>
+                  <a:lnTo>
+                    <a:pt x="1969645" y="297223"/>
+                  </a:lnTo>
+                  <a:lnTo>
+                    <a:pt x="2039990" y="305205"/>
+                  </a:lnTo>
+                  <a:lnTo>
+                    <a:pt x="2110334" y="313037"/>
+                  </a:lnTo>
+                  <a:lnTo>
+                    <a:pt x="2180679" y="320724"/>
+                  </a:lnTo>
+                  <a:lnTo>
+                    <a:pt x="2251023" y="328266"/>
+                  </a:lnTo>
+                  <a:lnTo>
+                    <a:pt x="2321368" y="335668"/>
+                  </a:lnTo>
+                  <a:lnTo>
+                    <a:pt x="2391712" y="342931"/>
+                  </a:lnTo>
+                  <a:lnTo>
+                    <a:pt x="2462057" y="350058"/>
+                  </a:lnTo>
+                  <a:lnTo>
+                    <a:pt x="2532401" y="357053"/>
+                  </a:lnTo>
+                  <a:lnTo>
+                    <a:pt x="2602746" y="363916"/>
+                  </a:lnTo>
+                  <a:lnTo>
+                    <a:pt x="2673090" y="370652"/>
+                  </a:lnTo>
+                  <a:lnTo>
+                    <a:pt x="2743435" y="377261"/>
+                  </a:lnTo>
+                  <a:lnTo>
+                    <a:pt x="2813779" y="383747"/>
+                  </a:lnTo>
+                  <a:lnTo>
+                    <a:pt x="2884124" y="390112"/>
+                  </a:lnTo>
+                  <a:lnTo>
+                    <a:pt x="2954468" y="396357"/>
+                  </a:lnTo>
+                  <a:lnTo>
+                    <a:pt x="3024813" y="402486"/>
+                  </a:lnTo>
+                  <a:lnTo>
+                    <a:pt x="3095157" y="408501"/>
+                  </a:lnTo>
+                  <a:lnTo>
+                    <a:pt x="3165502" y="414403"/>
+                  </a:lnTo>
+                  <a:lnTo>
+                    <a:pt x="3235846" y="420195"/>
+                  </a:lnTo>
+                  <a:lnTo>
+                    <a:pt x="3306191" y="425878"/>
+                  </a:lnTo>
+                  <a:lnTo>
+                    <a:pt x="3376535" y="431456"/>
+                  </a:lnTo>
+                  <a:lnTo>
+                    <a:pt x="3446880" y="436929"/>
+                  </a:lnTo>
+                  <a:lnTo>
+                    <a:pt x="3517224" y="442300"/>
+                  </a:lnTo>
+                  <a:lnTo>
+                    <a:pt x="3587569" y="447570"/>
+                  </a:lnTo>
+                  <a:lnTo>
+                    <a:pt x="3657913" y="452742"/>
+                  </a:lnTo>
+                  <a:lnTo>
+                    <a:pt x="3728257" y="457817"/>
+                  </a:lnTo>
+                  <a:lnTo>
+                    <a:pt x="3798602" y="462798"/>
+                  </a:lnTo>
+                  <a:lnTo>
+                    <a:pt x="3868946" y="467685"/>
+                  </a:lnTo>
+                  <a:lnTo>
+                    <a:pt x="3939291" y="472481"/>
+                  </a:lnTo>
+                  <a:lnTo>
+                    <a:pt x="4009635" y="477188"/>
+                  </a:lnTo>
+                  <a:lnTo>
+                    <a:pt x="4079980" y="481806"/>
+                  </a:lnTo>
+                  <a:lnTo>
+                    <a:pt x="4150324" y="486338"/>
+                  </a:lnTo>
+                  <a:lnTo>
+                    <a:pt x="4220669" y="490786"/>
+                  </a:lnTo>
+                  <a:lnTo>
+                    <a:pt x="4291013" y="495150"/>
+                  </a:lnTo>
+                  <a:lnTo>
+                    <a:pt x="4361358" y="499433"/>
+                  </a:lnTo>
+                  <a:lnTo>
+                    <a:pt x="4431702" y="503636"/>
+                  </a:lnTo>
+                  <a:lnTo>
+                    <a:pt x="4502047" y="507760"/>
+                  </a:lnTo>
+                  <a:lnTo>
+                    <a:pt x="4572391" y="511807"/>
+                  </a:lnTo>
+                  <a:lnTo>
+                    <a:pt x="4642736" y="515779"/>
+                  </a:lnTo>
+                  <a:lnTo>
+                    <a:pt x="4713080" y="519676"/>
+                  </a:lnTo>
+                  <a:lnTo>
+                    <a:pt x="4783425" y="523500"/>
+                  </a:lnTo>
+                  <a:lnTo>
+                    <a:pt x="4853769" y="527253"/>
+                  </a:lnTo>
+                  <a:lnTo>
+                    <a:pt x="4924114" y="530936"/>
+                  </a:lnTo>
+                  <a:lnTo>
+                    <a:pt x="4994458" y="534550"/>
+                  </a:lnTo>
+                  <a:lnTo>
+                    <a:pt x="5064803" y="538096"/>
+                  </a:lnTo>
+                  <a:lnTo>
+                    <a:pt x="5135147" y="541577"/>
+                  </a:lnTo>
+                  <a:lnTo>
+                    <a:pt x="5205492" y="544992"/>
+                  </a:lnTo>
+                  <a:lnTo>
+                    <a:pt x="5275836" y="548343"/>
+                  </a:lnTo>
+                  <a:lnTo>
+                    <a:pt x="5346181" y="551632"/>
+                  </a:lnTo>
+                  <a:lnTo>
+                    <a:pt x="5416525" y="554859"/>
+                  </a:lnTo>
+                  <a:lnTo>
+                    <a:pt x="5486870" y="558026"/>
+                  </a:lnTo>
+                  <a:lnTo>
+                    <a:pt x="5557214" y="561134"/>
+                  </a:lnTo>
+                  <a:lnTo>
+                    <a:pt x="5627559" y="564183"/>
+                  </a:lnTo>
+                  <a:lnTo>
+                    <a:pt x="5697903" y="567176"/>
+                  </a:lnTo>
+                  <a:lnTo>
+                    <a:pt x="5768248" y="570113"/>
+                  </a:lnTo>
+                  <a:lnTo>
+                    <a:pt x="5838592" y="572995"/>
+                  </a:lnTo>
+                  <a:lnTo>
+                    <a:pt x="5908937" y="575823"/>
+                  </a:lnTo>
+                  <a:lnTo>
+                    <a:pt x="5979281" y="578598"/>
+                  </a:lnTo>
+                  <a:lnTo>
+                    <a:pt x="6049626" y="581321"/>
+                  </a:lnTo>
+                  <a:lnTo>
+                    <a:pt x="6119970" y="583993"/>
+                  </a:lnTo>
+                  <a:lnTo>
+                    <a:pt x="6190315" y="586616"/>
+                  </a:lnTo>
+                  <a:lnTo>
+                    <a:pt x="6260659" y="589189"/>
+                  </a:lnTo>
+                  <a:lnTo>
+                    <a:pt x="6331004" y="591715"/>
+                  </a:lnTo>
+                  <a:lnTo>
+                    <a:pt x="6401348" y="594193"/>
+                  </a:lnTo>
+                  <a:lnTo>
+                    <a:pt x="6471693" y="596625"/>
+                  </a:lnTo>
+                  <a:lnTo>
+                    <a:pt x="6542037" y="599011"/>
+                  </a:lnTo>
+                  <a:lnTo>
+                    <a:pt x="6612382" y="601353"/>
+                  </a:lnTo>
+                  <a:lnTo>
+                    <a:pt x="6682726" y="603651"/>
+                  </a:lnTo>
+                  <a:lnTo>
+                    <a:pt x="6753071" y="605906"/>
+                  </a:lnTo>
+                  <a:lnTo>
+                    <a:pt x="6823415" y="608119"/>
+                  </a:lnTo>
+                  <a:lnTo>
+                    <a:pt x="6893760" y="610290"/>
+                  </a:lnTo>
+                  <a:lnTo>
+                    <a:pt x="6964104" y="612421"/>
                   </a:lnTo>
                 </a:path>
               </a:pathLst>
@@ -4568,27 +4603,27 @@
         </p:sp>
         <p:sp>
           <p:nvSpPr>
-            <p:cNvPr id="24" name="pl24"/>
+            <p:cNvPr id="25" name="pl25"/>
             <p:cNvSpPr/>
             <p:nvPr/>
           </p:nvSpPr>
           <p:spPr>
             <a:xfrm>
-              <a:off x="817517" y="4727786"/>
-              <a:ext cx="7799693" cy="0"/>
+              <a:off x="887106" y="3100960"/>
+              <a:ext cx="7660515" cy="0"/>
             </a:xfrm>
             <a:custGeom>
               <a:avLst/>
               <a:pathLst>
-                <a:path w="7799693" h="0">
+                <a:path w="7660515" h="0">
                   <a:moveTo>
                     <a:pt x="0" y="0"/>
                   </a:moveTo>
                   <a:lnTo>
-                    <a:pt x="7799693" y="0"/>
-                  </a:lnTo>
-                  <a:lnTo>
-                    <a:pt x="7799693" y="0"/>
+                    <a:pt x="7660515" y="0"/>
+                  </a:lnTo>
+                  <a:lnTo>
+                    <a:pt x="7660515" y="0"/>
                   </a:lnTo>
                 </a:path>
               </a:pathLst>
@@ -4611,21 +4646,21 @@
         </p:sp>
         <p:sp>
           <p:nvSpPr>
-            <p:cNvPr id="25" name="pl25"/>
+            <p:cNvPr id="26" name="pl26"/>
             <p:cNvSpPr/>
             <p:nvPr/>
           </p:nvSpPr>
           <p:spPr>
             <a:xfrm>
-              <a:off x="4526955" y="2073503"/>
-              <a:ext cx="0" cy="3649639"/>
+              <a:off x="4530353" y="2143092"/>
+              <a:ext cx="0" cy="1317069"/>
             </a:xfrm>
             <a:custGeom>
               <a:avLst/>
               <a:pathLst>
-                <a:path w="0" h="3649639">
+                <a:path w="0" h="1317069">
                   <a:moveTo>
-                    <a:pt x="0" y="3649639"/>
+                    <a:pt x="0" y="1317069"/>
                   </a:moveTo>
                   <a:lnTo>
                     <a:pt x="0" y="0"/>
@@ -4654,13 +4689,13 @@
         </p:sp>
         <p:sp>
           <p:nvSpPr>
-            <p:cNvPr id="26" name="tx26"/>
+            <p:cNvPr id="27" name="tx27"/>
             <p:cNvSpPr/>
             <p:nvPr/>
           </p:nvSpPr>
           <p:spPr>
             <a:xfrm>
-              <a:off x="692708" y="5517199"/>
+              <a:off x="762297" y="3360243"/>
               <a:ext cx="62179" cy="80101"/>
             </a:xfrm>
             <a:prstGeom prst="rect">
@@ -4700,13 +4735,13 @@
         </p:sp>
         <p:sp>
           <p:nvSpPr>
-            <p:cNvPr id="27" name="tx27"/>
+            <p:cNvPr id="28" name="tx28"/>
             <p:cNvSpPr/>
             <p:nvPr/>
           </p:nvSpPr>
           <p:spPr>
             <a:xfrm>
-              <a:off x="692708" y="4687735"/>
+              <a:off x="762297" y="3060909"/>
               <a:ext cx="62179" cy="80101"/>
             </a:xfrm>
             <a:prstGeom prst="rect">
@@ -4746,13 +4781,13 @@
         </p:sp>
         <p:sp>
           <p:nvSpPr>
-            <p:cNvPr id="28" name="tx28"/>
+            <p:cNvPr id="29" name="tx29"/>
             <p:cNvSpPr/>
             <p:nvPr/>
           </p:nvSpPr>
           <p:spPr>
             <a:xfrm>
-              <a:off x="692708" y="3858272"/>
+              <a:off x="762297" y="2761575"/>
               <a:ext cx="62179" cy="80101"/>
             </a:xfrm>
             <a:prstGeom prst="rect">
@@ -4792,13 +4827,13 @@
         </p:sp>
         <p:sp>
           <p:nvSpPr>
-            <p:cNvPr id="29" name="tx29"/>
+            <p:cNvPr id="30" name="tx30"/>
             <p:cNvSpPr/>
             <p:nvPr/>
           </p:nvSpPr>
           <p:spPr>
             <a:xfrm>
-              <a:off x="692708" y="3028808"/>
+              <a:off x="762297" y="2462242"/>
               <a:ext cx="62179" cy="80101"/>
             </a:xfrm>
             <a:prstGeom prst="rect">
@@ -4838,13 +4873,13 @@
         </p:sp>
         <p:sp>
           <p:nvSpPr>
-            <p:cNvPr id="30" name="tx30"/>
+            <p:cNvPr id="31" name="tx31"/>
             <p:cNvSpPr/>
             <p:nvPr/>
           </p:nvSpPr>
           <p:spPr>
             <a:xfrm>
-              <a:off x="692708" y="2199345"/>
+              <a:off x="762297" y="2162908"/>
               <a:ext cx="62179" cy="80101"/>
             </a:xfrm>
             <a:prstGeom prst="rect">
@@ -4884,13 +4919,13 @@
         </p:sp>
         <p:sp>
           <p:nvSpPr>
-            <p:cNvPr id="31" name="tx31"/>
+            <p:cNvPr id="32" name="tx32"/>
             <p:cNvSpPr/>
             <p:nvPr/>
           </p:nvSpPr>
           <p:spPr>
             <a:xfrm>
-              <a:off x="2421884" y="5785772"/>
+              <a:off x="2461403" y="3522791"/>
               <a:ext cx="161574" cy="80101"/>
             </a:xfrm>
             <a:prstGeom prst="rect">
@@ -4930,13 +4965,13 @@
         </p:sp>
         <p:sp>
           <p:nvSpPr>
-            <p:cNvPr id="32" name="tx32"/>
+            <p:cNvPr id="33" name="tx33"/>
             <p:cNvSpPr/>
             <p:nvPr/>
           </p:nvSpPr>
           <p:spPr>
             <a:xfrm>
-              <a:off x="4542539" y="5785772"/>
+              <a:off x="4545104" y="3522791"/>
               <a:ext cx="62179" cy="80101"/>
             </a:xfrm>
             <a:prstGeom prst="rect">
@@ -4976,13 +5011,13 @@
         </p:sp>
         <p:sp>
           <p:nvSpPr>
-            <p:cNvPr id="33" name="tx33"/>
+            <p:cNvPr id="34" name="tx34"/>
             <p:cNvSpPr/>
             <p:nvPr/>
           </p:nvSpPr>
           <p:spPr>
             <a:xfrm>
-              <a:off x="6582407" y="5785772"/>
+              <a:off x="6548017" y="3522791"/>
               <a:ext cx="124358" cy="80101"/>
             </a:xfrm>
             <a:prstGeom prst="rect">
@@ -5022,13 +5057,13 @@
         </p:sp>
         <p:sp>
           <p:nvSpPr>
-            <p:cNvPr id="34" name="tx34"/>
+            <p:cNvPr id="35" name="tx35"/>
             <p:cNvSpPr/>
             <p:nvPr/>
           </p:nvSpPr>
           <p:spPr>
             <a:xfrm>
-              <a:off x="2928340" y="5925448"/>
+              <a:off x="2928340" y="3662467"/>
               <a:ext cx="3578047" cy="100218"/>
             </a:xfrm>
             <a:prstGeom prst="rect">
@@ -5068,13 +5103,13 @@
         </p:sp>
         <p:sp>
           <p:nvSpPr>
-            <p:cNvPr id="35" name="tx35"/>
+            <p:cNvPr id="36" name="tx36"/>
             <p:cNvSpPr/>
             <p:nvPr/>
           </p:nvSpPr>
           <p:spPr>
             <a:xfrm rot="-5400000">
-              <a:off x="68446" y="3848213"/>
+              <a:off x="138035" y="2751517"/>
               <a:ext cx="1016904" cy="100218"/>
             </a:xfrm>
             <a:prstGeom prst="rect">
@@ -5114,13 +5149,13 @@
         </p:sp>
         <p:sp>
           <p:nvSpPr>
-            <p:cNvPr id="36" name="tx36"/>
+            <p:cNvPr id="37" name="tx37"/>
             <p:cNvSpPr/>
             <p:nvPr/>
           </p:nvSpPr>
           <p:spPr>
             <a:xfrm>
-              <a:off x="817517" y="1896563"/>
+              <a:off x="887106" y="1966152"/>
               <a:ext cx="7052127" cy="82021"/>
             </a:xfrm>
             <a:prstGeom prst="rect">
@@ -5160,13 +5195,3746 @@
         </p:sp>
         <p:sp>
           <p:nvSpPr>
-            <p:cNvPr id="37" name="tx37"/>
+            <p:cNvPr id="38" name="tx38"/>
             <p:cNvSpPr/>
             <p:nvPr/>
           </p:nvSpPr>
           <p:spPr>
             <a:xfrm>
-              <a:off x="817517" y="1669789"/>
+              <a:off x="887106" y="1739378"/>
+              <a:ext cx="2234793" cy="120152"/>
+            </a:xfrm>
+            <a:prstGeom prst="rect">
+              <a:avLst/>
+            </a:prstGeom>
+            <a:noFill/>
+          </p:spPr>
+          <p:txBody>
+            <a:bodyPr lIns="0" rIns="0" tIns="0" bIns="0" anchorCtr="1" anchor="ctr" wrap="none"/>
+            <a:lstStyle/>
+            <a:p>
+              <a:pPr algn="l" marL="0" marR="0" indent="0">
+                <a:lnSpc>
+                  <a:spcPts val="1320"/>
+                </a:lnSpc>
+                <a:spcBef>
+                  <a:spcPts val="0"/>
+                </a:spcBef>
+                <a:spcAft>
+                  <a:spcPts val="0"/>
+                </a:spcAft>
+              </a:pPr>
+              <a:r>
+                <a:rPr sz="1320">
+                  <a:solidFill>
+                    <a:srgbClr val="000000">
+                      <a:alpha val="100000"/>
+                    </a:srgbClr>
+                  </a:solidFill>
+                  <a:latin typeface="Helvetica"/>
+                  <a:cs typeface="Helvetica"/>
+                </a:rPr>
+                <a:t>Anemia Grade 2 (Carboplatin)</a:t>
+              </a:r>
+            </a:p>
+          </p:txBody>
+        </p:sp>
+        <p:sp>
+          <p:nvSpPr>
+            <p:cNvPr id="39" name="pl39"/>
+            <p:cNvSpPr/>
+            <p:nvPr/>
+          </p:nvSpPr>
+          <p:spPr>
+            <a:xfrm>
+              <a:off x="887106" y="5444019"/>
+              <a:ext cx="7660515" cy="0"/>
+            </a:xfrm>
+            <a:custGeom>
+              <a:avLst/>
+              <a:pathLst>
+                <a:path w="7660515" h="0">
+                  <a:moveTo>
+                    <a:pt x="0" y="0"/>
+                  </a:moveTo>
+                  <a:lnTo>
+                    <a:pt x="7660515" y="0"/>
+                  </a:lnTo>
+                  <a:lnTo>
+                    <a:pt x="7660515" y="0"/>
+                  </a:lnTo>
+                </a:path>
+              </a:pathLst>
+            </a:custGeom>
+            <a:ln w="6775" cap="flat">
+              <a:solidFill>
+                <a:srgbClr val="EBEBEB">
+                  <a:alpha val="100000"/>
+                </a:srgbClr>
+              </a:solidFill>
+              <a:prstDash val="solid"/>
+              <a:round/>
+            </a:ln>
+          </p:spPr>
+          <p:txBody>
+            <a:bodyPr/>
+            <a:lstStyle/>
+            <a:p/>
+          </p:txBody>
+        </p:sp>
+        <p:sp>
+          <p:nvSpPr>
+            <p:cNvPr id="40" name="pl40"/>
+            <p:cNvSpPr/>
+            <p:nvPr/>
+          </p:nvSpPr>
+          <p:spPr>
+            <a:xfrm>
+              <a:off x="887106" y="5144686"/>
+              <a:ext cx="7660515" cy="0"/>
+            </a:xfrm>
+            <a:custGeom>
+              <a:avLst/>
+              <a:pathLst>
+                <a:path w="7660515" h="0">
+                  <a:moveTo>
+                    <a:pt x="0" y="0"/>
+                  </a:moveTo>
+                  <a:lnTo>
+                    <a:pt x="7660515" y="0"/>
+                  </a:lnTo>
+                  <a:lnTo>
+                    <a:pt x="7660515" y="0"/>
+                  </a:lnTo>
+                </a:path>
+              </a:pathLst>
+            </a:custGeom>
+            <a:ln w="6775" cap="flat">
+              <a:solidFill>
+                <a:srgbClr val="EBEBEB">
+                  <a:alpha val="100000"/>
+                </a:srgbClr>
+              </a:solidFill>
+              <a:prstDash val="solid"/>
+              <a:round/>
+            </a:ln>
+          </p:spPr>
+          <p:txBody>
+            <a:bodyPr/>
+            <a:lstStyle/>
+            <a:p/>
+          </p:txBody>
+        </p:sp>
+        <p:sp>
+          <p:nvSpPr>
+            <p:cNvPr id="41" name="pl41"/>
+            <p:cNvSpPr/>
+            <p:nvPr/>
+          </p:nvSpPr>
+          <p:spPr>
+            <a:xfrm>
+              <a:off x="887106" y="4845352"/>
+              <a:ext cx="7660515" cy="0"/>
+            </a:xfrm>
+            <a:custGeom>
+              <a:avLst/>
+              <a:pathLst>
+                <a:path w="7660515" h="0">
+                  <a:moveTo>
+                    <a:pt x="0" y="0"/>
+                  </a:moveTo>
+                  <a:lnTo>
+                    <a:pt x="7660515" y="0"/>
+                  </a:lnTo>
+                  <a:lnTo>
+                    <a:pt x="7660515" y="0"/>
+                  </a:lnTo>
+                </a:path>
+              </a:pathLst>
+            </a:custGeom>
+            <a:ln w="6775" cap="flat">
+              <a:solidFill>
+                <a:srgbClr val="EBEBEB">
+                  <a:alpha val="100000"/>
+                </a:srgbClr>
+              </a:solidFill>
+              <a:prstDash val="solid"/>
+              <a:round/>
+            </a:ln>
+          </p:spPr>
+          <p:txBody>
+            <a:bodyPr/>
+            <a:lstStyle/>
+            <a:p/>
+          </p:txBody>
+        </p:sp>
+        <p:sp>
+          <p:nvSpPr>
+            <p:cNvPr id="42" name="pl42"/>
+            <p:cNvSpPr/>
+            <p:nvPr/>
+          </p:nvSpPr>
+          <p:spPr>
+            <a:xfrm>
+              <a:off x="887106" y="4546018"/>
+              <a:ext cx="7660515" cy="0"/>
+            </a:xfrm>
+            <a:custGeom>
+              <a:avLst/>
+              <a:pathLst>
+                <a:path w="7660515" h="0">
+                  <a:moveTo>
+                    <a:pt x="0" y="0"/>
+                  </a:moveTo>
+                  <a:lnTo>
+                    <a:pt x="7660515" y="0"/>
+                  </a:lnTo>
+                  <a:lnTo>
+                    <a:pt x="7660515" y="0"/>
+                  </a:lnTo>
+                </a:path>
+              </a:pathLst>
+            </a:custGeom>
+            <a:ln w="6775" cap="flat">
+              <a:solidFill>
+                <a:srgbClr val="EBEBEB">
+                  <a:alpha val="100000"/>
+                </a:srgbClr>
+              </a:solidFill>
+              <a:prstDash val="solid"/>
+              <a:round/>
+            </a:ln>
+          </p:spPr>
+          <p:txBody>
+            <a:bodyPr/>
+            <a:lstStyle/>
+            <a:p/>
+          </p:txBody>
+        </p:sp>
+        <p:sp>
+          <p:nvSpPr>
+            <p:cNvPr id="43" name="pl43"/>
+            <p:cNvSpPr/>
+            <p:nvPr/>
+          </p:nvSpPr>
+          <p:spPr>
+            <a:xfrm>
+              <a:off x="914987" y="4336484"/>
+              <a:ext cx="0" cy="1317069"/>
+            </a:xfrm>
+            <a:custGeom>
+              <a:avLst/>
+              <a:pathLst>
+                <a:path w="0" h="1317069">
+                  <a:moveTo>
+                    <a:pt x="0" y="1317069"/>
+                  </a:moveTo>
+                  <a:lnTo>
+                    <a:pt x="0" y="0"/>
+                  </a:lnTo>
+                  <a:lnTo>
+                    <a:pt x="0" y="0"/>
+                  </a:lnTo>
+                </a:path>
+              </a:pathLst>
+            </a:custGeom>
+            <a:ln w="6775" cap="flat">
+              <a:solidFill>
+                <a:srgbClr val="EBEBEB">
+                  <a:alpha val="100000"/>
+                </a:srgbClr>
+              </a:solidFill>
+              <a:prstDash val="solid"/>
+              <a:round/>
+            </a:ln>
+          </p:spPr>
+          <p:txBody>
+            <a:bodyPr/>
+            <a:lstStyle/>
+            <a:p/>
+          </p:txBody>
+        </p:sp>
+        <p:sp>
+          <p:nvSpPr>
+            <p:cNvPr id="44" name="pl44"/>
+            <p:cNvSpPr/>
+            <p:nvPr/>
+          </p:nvSpPr>
+          <p:spPr>
+            <a:xfrm>
+              <a:off x="1728588" y="4336484"/>
+              <a:ext cx="0" cy="1317069"/>
+            </a:xfrm>
+            <a:custGeom>
+              <a:avLst/>
+              <a:pathLst>
+                <a:path w="0" h="1317069">
+                  <a:moveTo>
+                    <a:pt x="0" y="1317069"/>
+                  </a:moveTo>
+                  <a:lnTo>
+                    <a:pt x="0" y="0"/>
+                  </a:lnTo>
+                  <a:lnTo>
+                    <a:pt x="0" y="0"/>
+                  </a:lnTo>
+                </a:path>
+              </a:pathLst>
+            </a:custGeom>
+            <a:ln w="6775" cap="flat">
+              <a:solidFill>
+                <a:srgbClr val="EBEBEB">
+                  <a:alpha val="100000"/>
+                </a:srgbClr>
+              </a:solidFill>
+              <a:prstDash val="solid"/>
+              <a:round/>
+            </a:ln>
+          </p:spPr>
+          <p:txBody>
+            <a:bodyPr/>
+            <a:lstStyle/>
+            <a:p/>
+          </p:txBody>
+        </p:sp>
+        <p:sp>
+          <p:nvSpPr>
+            <p:cNvPr id="45" name="pl45"/>
+            <p:cNvSpPr/>
+            <p:nvPr/>
+          </p:nvSpPr>
+          <p:spPr>
+            <a:xfrm>
+              <a:off x="2542190" y="4336484"/>
+              <a:ext cx="0" cy="1317069"/>
+            </a:xfrm>
+            <a:custGeom>
+              <a:avLst/>
+              <a:pathLst>
+                <a:path w="0" h="1317069">
+                  <a:moveTo>
+                    <a:pt x="0" y="1317069"/>
+                  </a:moveTo>
+                  <a:lnTo>
+                    <a:pt x="0" y="0"/>
+                  </a:lnTo>
+                  <a:lnTo>
+                    <a:pt x="0" y="0"/>
+                  </a:lnTo>
+                </a:path>
+              </a:pathLst>
+            </a:custGeom>
+            <a:ln w="6775" cap="flat">
+              <a:solidFill>
+                <a:srgbClr val="EBEBEB">
+                  <a:alpha val="100000"/>
+                </a:srgbClr>
+              </a:solidFill>
+              <a:prstDash val="solid"/>
+              <a:round/>
+            </a:ln>
+          </p:spPr>
+          <p:txBody>
+            <a:bodyPr/>
+            <a:lstStyle/>
+            <a:p/>
+          </p:txBody>
+        </p:sp>
+        <p:sp>
+          <p:nvSpPr>
+            <p:cNvPr id="46" name="pl46"/>
+            <p:cNvSpPr/>
+            <p:nvPr/>
+          </p:nvSpPr>
+          <p:spPr>
+            <a:xfrm>
+              <a:off x="3355791" y="4336484"/>
+              <a:ext cx="0" cy="1317069"/>
+            </a:xfrm>
+            <a:custGeom>
+              <a:avLst/>
+              <a:pathLst>
+                <a:path w="0" h="1317069">
+                  <a:moveTo>
+                    <a:pt x="0" y="1317069"/>
+                  </a:moveTo>
+                  <a:lnTo>
+                    <a:pt x="0" y="0"/>
+                  </a:lnTo>
+                  <a:lnTo>
+                    <a:pt x="0" y="0"/>
+                  </a:lnTo>
+                </a:path>
+              </a:pathLst>
+            </a:custGeom>
+            <a:ln w="6775" cap="flat">
+              <a:solidFill>
+                <a:srgbClr val="EBEBEB">
+                  <a:alpha val="100000"/>
+                </a:srgbClr>
+              </a:solidFill>
+              <a:prstDash val="solid"/>
+              <a:round/>
+            </a:ln>
+          </p:spPr>
+          <p:txBody>
+            <a:bodyPr/>
+            <a:lstStyle/>
+            <a:p/>
+          </p:txBody>
+        </p:sp>
+        <p:sp>
+          <p:nvSpPr>
+            <p:cNvPr id="47" name="pl47"/>
+            <p:cNvSpPr/>
+            <p:nvPr/>
+          </p:nvSpPr>
+          <p:spPr>
+            <a:xfrm>
+              <a:off x="4169393" y="4336484"/>
+              <a:ext cx="0" cy="1317069"/>
+            </a:xfrm>
+            <a:custGeom>
+              <a:avLst/>
+              <a:pathLst>
+                <a:path w="0" h="1317069">
+                  <a:moveTo>
+                    <a:pt x="0" y="1317069"/>
+                  </a:moveTo>
+                  <a:lnTo>
+                    <a:pt x="0" y="0"/>
+                  </a:lnTo>
+                  <a:lnTo>
+                    <a:pt x="0" y="0"/>
+                  </a:lnTo>
+                </a:path>
+              </a:pathLst>
+            </a:custGeom>
+            <a:ln w="6775" cap="flat">
+              <a:solidFill>
+                <a:srgbClr val="EBEBEB">
+                  <a:alpha val="100000"/>
+                </a:srgbClr>
+              </a:solidFill>
+              <a:prstDash val="solid"/>
+              <a:round/>
+            </a:ln>
+          </p:spPr>
+          <p:txBody>
+            <a:bodyPr/>
+            <a:lstStyle/>
+            <a:p/>
+          </p:txBody>
+        </p:sp>
+        <p:sp>
+          <p:nvSpPr>
+            <p:cNvPr id="48" name="pl48"/>
+            <p:cNvSpPr/>
+            <p:nvPr/>
+          </p:nvSpPr>
+          <p:spPr>
+            <a:xfrm>
+              <a:off x="4982994" y="4336484"/>
+              <a:ext cx="0" cy="1317069"/>
+            </a:xfrm>
+            <a:custGeom>
+              <a:avLst/>
+              <a:pathLst>
+                <a:path w="0" h="1317069">
+                  <a:moveTo>
+                    <a:pt x="0" y="1317069"/>
+                  </a:moveTo>
+                  <a:lnTo>
+                    <a:pt x="0" y="0"/>
+                  </a:lnTo>
+                  <a:lnTo>
+                    <a:pt x="0" y="0"/>
+                  </a:lnTo>
+                </a:path>
+              </a:pathLst>
+            </a:custGeom>
+            <a:ln w="6775" cap="flat">
+              <a:solidFill>
+                <a:srgbClr val="EBEBEB">
+                  <a:alpha val="100000"/>
+                </a:srgbClr>
+              </a:solidFill>
+              <a:prstDash val="solid"/>
+              <a:round/>
+            </a:ln>
+          </p:spPr>
+          <p:txBody>
+            <a:bodyPr/>
+            <a:lstStyle/>
+            <a:p/>
+          </p:txBody>
+        </p:sp>
+        <p:sp>
+          <p:nvSpPr>
+            <p:cNvPr id="49" name="pl49"/>
+            <p:cNvSpPr/>
+            <p:nvPr/>
+          </p:nvSpPr>
+          <p:spPr>
+            <a:xfrm>
+              <a:off x="5796595" y="4336484"/>
+              <a:ext cx="0" cy="1317069"/>
+            </a:xfrm>
+            <a:custGeom>
+              <a:avLst/>
+              <a:pathLst>
+                <a:path w="0" h="1317069">
+                  <a:moveTo>
+                    <a:pt x="0" y="1317069"/>
+                  </a:moveTo>
+                  <a:lnTo>
+                    <a:pt x="0" y="0"/>
+                  </a:lnTo>
+                  <a:lnTo>
+                    <a:pt x="0" y="0"/>
+                  </a:lnTo>
+                </a:path>
+              </a:pathLst>
+            </a:custGeom>
+            <a:ln w="6775" cap="flat">
+              <a:solidFill>
+                <a:srgbClr val="EBEBEB">
+                  <a:alpha val="100000"/>
+                </a:srgbClr>
+              </a:solidFill>
+              <a:prstDash val="solid"/>
+              <a:round/>
+            </a:ln>
+          </p:spPr>
+          <p:txBody>
+            <a:bodyPr/>
+            <a:lstStyle/>
+            <a:p/>
+          </p:txBody>
+        </p:sp>
+        <p:sp>
+          <p:nvSpPr>
+            <p:cNvPr id="50" name="pl50"/>
+            <p:cNvSpPr/>
+            <p:nvPr/>
+          </p:nvSpPr>
+          <p:spPr>
+            <a:xfrm>
+              <a:off x="6610197" y="4336484"/>
+              <a:ext cx="0" cy="1317069"/>
+            </a:xfrm>
+            <a:custGeom>
+              <a:avLst/>
+              <a:pathLst>
+                <a:path w="0" h="1317069">
+                  <a:moveTo>
+                    <a:pt x="0" y="1317069"/>
+                  </a:moveTo>
+                  <a:lnTo>
+                    <a:pt x="0" y="0"/>
+                  </a:lnTo>
+                  <a:lnTo>
+                    <a:pt x="0" y="0"/>
+                  </a:lnTo>
+                </a:path>
+              </a:pathLst>
+            </a:custGeom>
+            <a:ln w="6775" cap="flat">
+              <a:solidFill>
+                <a:srgbClr val="EBEBEB">
+                  <a:alpha val="100000"/>
+                </a:srgbClr>
+              </a:solidFill>
+              <a:prstDash val="solid"/>
+              <a:round/>
+            </a:ln>
+          </p:spPr>
+          <p:txBody>
+            <a:bodyPr/>
+            <a:lstStyle/>
+            <a:p/>
+          </p:txBody>
+        </p:sp>
+        <p:sp>
+          <p:nvSpPr>
+            <p:cNvPr id="51" name="pl51"/>
+            <p:cNvSpPr/>
+            <p:nvPr/>
+          </p:nvSpPr>
+          <p:spPr>
+            <a:xfrm>
+              <a:off x="7423798" y="4336484"/>
+              <a:ext cx="0" cy="1317069"/>
+            </a:xfrm>
+            <a:custGeom>
+              <a:avLst/>
+              <a:pathLst>
+                <a:path w="0" h="1317069">
+                  <a:moveTo>
+                    <a:pt x="0" y="1317069"/>
+                  </a:moveTo>
+                  <a:lnTo>
+                    <a:pt x="0" y="0"/>
+                  </a:lnTo>
+                  <a:lnTo>
+                    <a:pt x="0" y="0"/>
+                  </a:lnTo>
+                </a:path>
+              </a:pathLst>
+            </a:custGeom>
+            <a:ln w="6775" cap="flat">
+              <a:solidFill>
+                <a:srgbClr val="EBEBEB">
+                  <a:alpha val="100000"/>
+                </a:srgbClr>
+              </a:solidFill>
+              <a:prstDash val="solid"/>
+              <a:round/>
+            </a:ln>
+          </p:spPr>
+          <p:txBody>
+            <a:bodyPr/>
+            <a:lstStyle/>
+            <a:p/>
+          </p:txBody>
+        </p:sp>
+        <p:sp>
+          <p:nvSpPr>
+            <p:cNvPr id="52" name="pl52"/>
+            <p:cNvSpPr/>
+            <p:nvPr/>
+          </p:nvSpPr>
+          <p:spPr>
+            <a:xfrm>
+              <a:off x="8237399" y="4336484"/>
+              <a:ext cx="0" cy="1317069"/>
+            </a:xfrm>
+            <a:custGeom>
+              <a:avLst/>
+              <a:pathLst>
+                <a:path w="0" h="1317069">
+                  <a:moveTo>
+                    <a:pt x="0" y="1317069"/>
+                  </a:moveTo>
+                  <a:lnTo>
+                    <a:pt x="0" y="0"/>
+                  </a:lnTo>
+                  <a:lnTo>
+                    <a:pt x="0" y="0"/>
+                  </a:lnTo>
+                </a:path>
+              </a:pathLst>
+            </a:custGeom>
+            <a:ln w="6775" cap="flat">
+              <a:solidFill>
+                <a:srgbClr val="EBEBEB">
+                  <a:alpha val="100000"/>
+                </a:srgbClr>
+              </a:solidFill>
+              <a:prstDash val="solid"/>
+              <a:round/>
+            </a:ln>
+          </p:spPr>
+          <p:txBody>
+            <a:bodyPr/>
+            <a:lstStyle/>
+            <a:p/>
+          </p:txBody>
+        </p:sp>
+        <p:sp>
+          <p:nvSpPr>
+            <p:cNvPr id="53" name="pl53"/>
+            <p:cNvSpPr/>
+            <p:nvPr/>
+          </p:nvSpPr>
+          <p:spPr>
+            <a:xfrm>
+              <a:off x="887106" y="5593686"/>
+              <a:ext cx="7660515" cy="0"/>
+            </a:xfrm>
+            <a:custGeom>
+              <a:avLst/>
+              <a:pathLst>
+                <a:path w="7660515" h="0">
+                  <a:moveTo>
+                    <a:pt x="0" y="0"/>
+                  </a:moveTo>
+                  <a:lnTo>
+                    <a:pt x="7660515" y="0"/>
+                  </a:lnTo>
+                  <a:lnTo>
+                    <a:pt x="7660515" y="0"/>
+                  </a:lnTo>
+                </a:path>
+              </a:pathLst>
+            </a:custGeom>
+            <a:ln w="13550" cap="flat">
+              <a:solidFill>
+                <a:srgbClr val="EBEBEB">
+                  <a:alpha val="100000"/>
+                </a:srgbClr>
+              </a:solidFill>
+              <a:prstDash val="solid"/>
+              <a:round/>
+            </a:ln>
+          </p:spPr>
+          <p:txBody>
+            <a:bodyPr/>
+            <a:lstStyle/>
+            <a:p/>
+          </p:txBody>
+        </p:sp>
+        <p:sp>
+          <p:nvSpPr>
+            <p:cNvPr id="54" name="pl54"/>
+            <p:cNvSpPr/>
+            <p:nvPr/>
+          </p:nvSpPr>
+          <p:spPr>
+            <a:xfrm>
+              <a:off x="887106" y="5294352"/>
+              <a:ext cx="7660515" cy="0"/>
+            </a:xfrm>
+            <a:custGeom>
+              <a:avLst/>
+              <a:pathLst>
+                <a:path w="7660515" h="0">
+                  <a:moveTo>
+                    <a:pt x="0" y="0"/>
+                  </a:moveTo>
+                  <a:lnTo>
+                    <a:pt x="7660515" y="0"/>
+                  </a:lnTo>
+                  <a:lnTo>
+                    <a:pt x="7660515" y="0"/>
+                  </a:lnTo>
+                </a:path>
+              </a:pathLst>
+            </a:custGeom>
+            <a:ln w="13550" cap="flat">
+              <a:solidFill>
+                <a:srgbClr val="EBEBEB">
+                  <a:alpha val="100000"/>
+                </a:srgbClr>
+              </a:solidFill>
+              <a:prstDash val="solid"/>
+              <a:round/>
+            </a:ln>
+          </p:spPr>
+          <p:txBody>
+            <a:bodyPr/>
+            <a:lstStyle/>
+            <a:p/>
+          </p:txBody>
+        </p:sp>
+        <p:sp>
+          <p:nvSpPr>
+            <p:cNvPr id="55" name="pl55"/>
+            <p:cNvSpPr/>
+            <p:nvPr/>
+          </p:nvSpPr>
+          <p:spPr>
+            <a:xfrm>
+              <a:off x="887106" y="4995019"/>
+              <a:ext cx="7660515" cy="0"/>
+            </a:xfrm>
+            <a:custGeom>
+              <a:avLst/>
+              <a:pathLst>
+                <a:path w="7660515" h="0">
+                  <a:moveTo>
+                    <a:pt x="0" y="0"/>
+                  </a:moveTo>
+                  <a:lnTo>
+                    <a:pt x="7660515" y="0"/>
+                  </a:lnTo>
+                  <a:lnTo>
+                    <a:pt x="7660515" y="0"/>
+                  </a:lnTo>
+                </a:path>
+              </a:pathLst>
+            </a:custGeom>
+            <a:ln w="13550" cap="flat">
+              <a:solidFill>
+                <a:srgbClr val="EBEBEB">
+                  <a:alpha val="100000"/>
+                </a:srgbClr>
+              </a:solidFill>
+              <a:prstDash val="solid"/>
+              <a:round/>
+            </a:ln>
+          </p:spPr>
+          <p:txBody>
+            <a:bodyPr/>
+            <a:lstStyle/>
+            <a:p/>
+          </p:txBody>
+        </p:sp>
+        <p:sp>
+          <p:nvSpPr>
+            <p:cNvPr id="56" name="pl56"/>
+            <p:cNvSpPr/>
+            <p:nvPr/>
+          </p:nvSpPr>
+          <p:spPr>
+            <a:xfrm>
+              <a:off x="887106" y="4695685"/>
+              <a:ext cx="7660515" cy="0"/>
+            </a:xfrm>
+            <a:custGeom>
+              <a:avLst/>
+              <a:pathLst>
+                <a:path w="7660515" h="0">
+                  <a:moveTo>
+                    <a:pt x="0" y="0"/>
+                  </a:moveTo>
+                  <a:lnTo>
+                    <a:pt x="7660515" y="0"/>
+                  </a:lnTo>
+                  <a:lnTo>
+                    <a:pt x="7660515" y="0"/>
+                  </a:lnTo>
+                </a:path>
+              </a:pathLst>
+            </a:custGeom>
+            <a:ln w="13550" cap="flat">
+              <a:solidFill>
+                <a:srgbClr val="EBEBEB">
+                  <a:alpha val="100000"/>
+                </a:srgbClr>
+              </a:solidFill>
+              <a:prstDash val="solid"/>
+              <a:round/>
+            </a:ln>
+          </p:spPr>
+          <p:txBody>
+            <a:bodyPr/>
+            <a:lstStyle/>
+            <a:p/>
+          </p:txBody>
+        </p:sp>
+        <p:sp>
+          <p:nvSpPr>
+            <p:cNvPr id="57" name="pl57"/>
+            <p:cNvSpPr/>
+            <p:nvPr/>
+          </p:nvSpPr>
+          <p:spPr>
+            <a:xfrm>
+              <a:off x="887106" y="4396351"/>
+              <a:ext cx="7660515" cy="0"/>
+            </a:xfrm>
+            <a:custGeom>
+              <a:avLst/>
+              <a:pathLst>
+                <a:path w="7660515" h="0">
+                  <a:moveTo>
+                    <a:pt x="0" y="0"/>
+                  </a:moveTo>
+                  <a:lnTo>
+                    <a:pt x="7660515" y="0"/>
+                  </a:lnTo>
+                  <a:lnTo>
+                    <a:pt x="7660515" y="0"/>
+                  </a:lnTo>
+                </a:path>
+              </a:pathLst>
+            </a:custGeom>
+            <a:ln w="13550" cap="flat">
+              <a:solidFill>
+                <a:srgbClr val="EBEBEB">
+                  <a:alpha val="100000"/>
+                </a:srgbClr>
+              </a:solidFill>
+              <a:prstDash val="solid"/>
+              <a:round/>
+            </a:ln>
+          </p:spPr>
+          <p:txBody>
+            <a:bodyPr/>
+            <a:lstStyle/>
+            <a:p/>
+          </p:txBody>
+        </p:sp>
+        <p:sp>
+          <p:nvSpPr>
+            <p:cNvPr id="58" name="pl58"/>
+            <p:cNvSpPr/>
+            <p:nvPr/>
+          </p:nvSpPr>
+          <p:spPr>
+            <a:xfrm>
+              <a:off x="1321788" y="4336484"/>
+              <a:ext cx="0" cy="1317069"/>
+            </a:xfrm>
+            <a:custGeom>
+              <a:avLst/>
+              <a:pathLst>
+                <a:path w="0" h="1317069">
+                  <a:moveTo>
+                    <a:pt x="0" y="1317069"/>
+                  </a:moveTo>
+                  <a:lnTo>
+                    <a:pt x="0" y="0"/>
+                  </a:lnTo>
+                  <a:lnTo>
+                    <a:pt x="0" y="0"/>
+                  </a:lnTo>
+                </a:path>
+              </a:pathLst>
+            </a:custGeom>
+            <a:ln w="13550" cap="flat">
+              <a:solidFill>
+                <a:srgbClr val="EBEBEB">
+                  <a:alpha val="100000"/>
+                </a:srgbClr>
+              </a:solidFill>
+              <a:prstDash val="solid"/>
+              <a:round/>
+            </a:ln>
+          </p:spPr>
+          <p:txBody>
+            <a:bodyPr/>
+            <a:lstStyle/>
+            <a:p/>
+          </p:txBody>
+        </p:sp>
+        <p:sp>
+          <p:nvSpPr>
+            <p:cNvPr id="59" name="pl59"/>
+            <p:cNvSpPr/>
+            <p:nvPr/>
+          </p:nvSpPr>
+          <p:spPr>
+            <a:xfrm>
+              <a:off x="2135389" y="4336484"/>
+              <a:ext cx="0" cy="1317069"/>
+            </a:xfrm>
+            <a:custGeom>
+              <a:avLst/>
+              <a:pathLst>
+                <a:path w="0" h="1317069">
+                  <a:moveTo>
+                    <a:pt x="0" y="1317069"/>
+                  </a:moveTo>
+                  <a:lnTo>
+                    <a:pt x="0" y="0"/>
+                  </a:lnTo>
+                  <a:lnTo>
+                    <a:pt x="0" y="0"/>
+                  </a:lnTo>
+                </a:path>
+              </a:pathLst>
+            </a:custGeom>
+            <a:ln w="13550" cap="flat">
+              <a:solidFill>
+                <a:srgbClr val="EBEBEB">
+                  <a:alpha val="100000"/>
+                </a:srgbClr>
+              </a:solidFill>
+              <a:prstDash val="solid"/>
+              <a:round/>
+            </a:ln>
+          </p:spPr>
+          <p:txBody>
+            <a:bodyPr/>
+            <a:lstStyle/>
+            <a:p/>
+          </p:txBody>
+        </p:sp>
+        <p:sp>
+          <p:nvSpPr>
+            <p:cNvPr id="60" name="pl60"/>
+            <p:cNvSpPr/>
+            <p:nvPr/>
+          </p:nvSpPr>
+          <p:spPr>
+            <a:xfrm>
+              <a:off x="2948991" y="4336484"/>
+              <a:ext cx="0" cy="1317069"/>
+            </a:xfrm>
+            <a:custGeom>
+              <a:avLst/>
+              <a:pathLst>
+                <a:path w="0" h="1317069">
+                  <a:moveTo>
+                    <a:pt x="0" y="1317069"/>
+                  </a:moveTo>
+                  <a:lnTo>
+                    <a:pt x="0" y="0"/>
+                  </a:lnTo>
+                  <a:lnTo>
+                    <a:pt x="0" y="0"/>
+                  </a:lnTo>
+                </a:path>
+              </a:pathLst>
+            </a:custGeom>
+            <a:ln w="13550" cap="flat">
+              <a:solidFill>
+                <a:srgbClr val="EBEBEB">
+                  <a:alpha val="100000"/>
+                </a:srgbClr>
+              </a:solidFill>
+              <a:prstDash val="solid"/>
+              <a:round/>
+            </a:ln>
+          </p:spPr>
+          <p:txBody>
+            <a:bodyPr/>
+            <a:lstStyle/>
+            <a:p/>
+          </p:txBody>
+        </p:sp>
+        <p:sp>
+          <p:nvSpPr>
+            <p:cNvPr id="61" name="pl61"/>
+            <p:cNvSpPr/>
+            <p:nvPr/>
+          </p:nvSpPr>
+          <p:spPr>
+            <a:xfrm>
+              <a:off x="3762592" y="4336484"/>
+              <a:ext cx="0" cy="1317069"/>
+            </a:xfrm>
+            <a:custGeom>
+              <a:avLst/>
+              <a:pathLst>
+                <a:path w="0" h="1317069">
+                  <a:moveTo>
+                    <a:pt x="0" y="1317069"/>
+                  </a:moveTo>
+                  <a:lnTo>
+                    <a:pt x="0" y="0"/>
+                  </a:lnTo>
+                  <a:lnTo>
+                    <a:pt x="0" y="0"/>
+                  </a:lnTo>
+                </a:path>
+              </a:pathLst>
+            </a:custGeom>
+            <a:ln w="13550" cap="flat">
+              <a:solidFill>
+                <a:srgbClr val="EBEBEB">
+                  <a:alpha val="100000"/>
+                </a:srgbClr>
+              </a:solidFill>
+              <a:prstDash val="solid"/>
+              <a:round/>
+            </a:ln>
+          </p:spPr>
+          <p:txBody>
+            <a:bodyPr/>
+            <a:lstStyle/>
+            <a:p/>
+          </p:txBody>
+        </p:sp>
+        <p:sp>
+          <p:nvSpPr>
+            <p:cNvPr id="62" name="pl62"/>
+            <p:cNvSpPr/>
+            <p:nvPr/>
+          </p:nvSpPr>
+          <p:spPr>
+            <a:xfrm>
+              <a:off x="4576193" y="4336484"/>
+              <a:ext cx="0" cy="1317069"/>
+            </a:xfrm>
+            <a:custGeom>
+              <a:avLst/>
+              <a:pathLst>
+                <a:path w="0" h="1317069">
+                  <a:moveTo>
+                    <a:pt x="0" y="1317069"/>
+                  </a:moveTo>
+                  <a:lnTo>
+                    <a:pt x="0" y="0"/>
+                  </a:lnTo>
+                  <a:lnTo>
+                    <a:pt x="0" y="0"/>
+                  </a:lnTo>
+                </a:path>
+              </a:pathLst>
+            </a:custGeom>
+            <a:ln w="13550" cap="flat">
+              <a:solidFill>
+                <a:srgbClr val="EBEBEB">
+                  <a:alpha val="100000"/>
+                </a:srgbClr>
+              </a:solidFill>
+              <a:prstDash val="solid"/>
+              <a:round/>
+            </a:ln>
+          </p:spPr>
+          <p:txBody>
+            <a:bodyPr/>
+            <a:lstStyle/>
+            <a:p/>
+          </p:txBody>
+        </p:sp>
+        <p:sp>
+          <p:nvSpPr>
+            <p:cNvPr id="63" name="pl63"/>
+            <p:cNvSpPr/>
+            <p:nvPr/>
+          </p:nvSpPr>
+          <p:spPr>
+            <a:xfrm>
+              <a:off x="5389795" y="4336484"/>
+              <a:ext cx="0" cy="1317069"/>
+            </a:xfrm>
+            <a:custGeom>
+              <a:avLst/>
+              <a:pathLst>
+                <a:path w="0" h="1317069">
+                  <a:moveTo>
+                    <a:pt x="0" y="1317069"/>
+                  </a:moveTo>
+                  <a:lnTo>
+                    <a:pt x="0" y="0"/>
+                  </a:lnTo>
+                  <a:lnTo>
+                    <a:pt x="0" y="0"/>
+                  </a:lnTo>
+                </a:path>
+              </a:pathLst>
+            </a:custGeom>
+            <a:ln w="13550" cap="flat">
+              <a:solidFill>
+                <a:srgbClr val="EBEBEB">
+                  <a:alpha val="100000"/>
+                </a:srgbClr>
+              </a:solidFill>
+              <a:prstDash val="solid"/>
+              <a:round/>
+            </a:ln>
+          </p:spPr>
+          <p:txBody>
+            <a:bodyPr/>
+            <a:lstStyle/>
+            <a:p/>
+          </p:txBody>
+        </p:sp>
+        <p:sp>
+          <p:nvSpPr>
+            <p:cNvPr id="64" name="pl64"/>
+            <p:cNvSpPr/>
+            <p:nvPr/>
+          </p:nvSpPr>
+          <p:spPr>
+            <a:xfrm>
+              <a:off x="6203396" y="4336484"/>
+              <a:ext cx="0" cy="1317069"/>
+            </a:xfrm>
+            <a:custGeom>
+              <a:avLst/>
+              <a:pathLst>
+                <a:path w="0" h="1317069">
+                  <a:moveTo>
+                    <a:pt x="0" y="1317069"/>
+                  </a:moveTo>
+                  <a:lnTo>
+                    <a:pt x="0" y="0"/>
+                  </a:lnTo>
+                  <a:lnTo>
+                    <a:pt x="0" y="0"/>
+                  </a:lnTo>
+                </a:path>
+              </a:pathLst>
+            </a:custGeom>
+            <a:ln w="13550" cap="flat">
+              <a:solidFill>
+                <a:srgbClr val="EBEBEB">
+                  <a:alpha val="100000"/>
+                </a:srgbClr>
+              </a:solidFill>
+              <a:prstDash val="solid"/>
+              <a:round/>
+            </a:ln>
+          </p:spPr>
+          <p:txBody>
+            <a:bodyPr/>
+            <a:lstStyle/>
+            <a:p/>
+          </p:txBody>
+        </p:sp>
+        <p:sp>
+          <p:nvSpPr>
+            <p:cNvPr id="65" name="pl65"/>
+            <p:cNvSpPr/>
+            <p:nvPr/>
+          </p:nvSpPr>
+          <p:spPr>
+            <a:xfrm>
+              <a:off x="7016997" y="4336484"/>
+              <a:ext cx="0" cy="1317069"/>
+            </a:xfrm>
+            <a:custGeom>
+              <a:avLst/>
+              <a:pathLst>
+                <a:path w="0" h="1317069">
+                  <a:moveTo>
+                    <a:pt x="0" y="1317069"/>
+                  </a:moveTo>
+                  <a:lnTo>
+                    <a:pt x="0" y="0"/>
+                  </a:lnTo>
+                  <a:lnTo>
+                    <a:pt x="0" y="0"/>
+                  </a:lnTo>
+                </a:path>
+              </a:pathLst>
+            </a:custGeom>
+            <a:ln w="13550" cap="flat">
+              <a:solidFill>
+                <a:srgbClr val="EBEBEB">
+                  <a:alpha val="100000"/>
+                </a:srgbClr>
+              </a:solidFill>
+              <a:prstDash val="solid"/>
+              <a:round/>
+            </a:ln>
+          </p:spPr>
+          <p:txBody>
+            <a:bodyPr/>
+            <a:lstStyle/>
+            <a:p/>
+          </p:txBody>
+        </p:sp>
+        <p:sp>
+          <p:nvSpPr>
+            <p:cNvPr id="66" name="pl66"/>
+            <p:cNvSpPr/>
+            <p:nvPr/>
+          </p:nvSpPr>
+          <p:spPr>
+            <a:xfrm>
+              <a:off x="7830599" y="4336484"/>
+              <a:ext cx="0" cy="1317069"/>
+            </a:xfrm>
+            <a:custGeom>
+              <a:avLst/>
+              <a:pathLst>
+                <a:path w="0" h="1317069">
+                  <a:moveTo>
+                    <a:pt x="0" y="1317069"/>
+                  </a:moveTo>
+                  <a:lnTo>
+                    <a:pt x="0" y="0"/>
+                  </a:lnTo>
+                  <a:lnTo>
+                    <a:pt x="0" y="0"/>
+                  </a:lnTo>
+                </a:path>
+              </a:pathLst>
+            </a:custGeom>
+            <a:ln w="13550" cap="flat">
+              <a:solidFill>
+                <a:srgbClr val="EBEBEB">
+                  <a:alpha val="100000"/>
+                </a:srgbClr>
+              </a:solidFill>
+              <a:prstDash val="solid"/>
+              <a:round/>
+            </a:ln>
+          </p:spPr>
+          <p:txBody>
+            <a:bodyPr/>
+            <a:lstStyle/>
+            <a:p/>
+          </p:txBody>
+        </p:sp>
+        <p:sp>
+          <p:nvSpPr>
+            <p:cNvPr id="67" name="pg67"/>
+            <p:cNvSpPr/>
+            <p:nvPr/>
+          </p:nvSpPr>
+          <p:spPr>
+            <a:xfrm>
+              <a:off x="1235312" y="4559011"/>
+              <a:ext cx="6964104" cy="959449"/>
+            </a:xfrm>
+            <a:custGeom>
+              <a:avLst/>
+              <a:pathLst>
+                <a:path w="6964104" h="959449">
+                  <a:moveTo>
+                    <a:pt x="0" y="0"/>
+                  </a:moveTo>
+                  <a:lnTo>
+                    <a:pt x="70344" y="27036"/>
+                  </a:lnTo>
+                  <a:lnTo>
+                    <a:pt x="140688" y="53367"/>
+                  </a:lnTo>
+                  <a:lnTo>
+                    <a:pt x="211033" y="79009"/>
+                  </a:lnTo>
+                  <a:lnTo>
+                    <a:pt x="281377" y="103982"/>
+                  </a:lnTo>
+                  <a:lnTo>
+                    <a:pt x="351722" y="128301"/>
+                  </a:lnTo>
+                  <a:lnTo>
+                    <a:pt x="422066" y="151986"/>
+                  </a:lnTo>
+                  <a:lnTo>
+                    <a:pt x="492411" y="175051"/>
+                  </a:lnTo>
+                  <a:lnTo>
+                    <a:pt x="562755" y="197514"/>
+                  </a:lnTo>
+                  <a:lnTo>
+                    <a:pt x="633100" y="219389"/>
+                  </a:lnTo>
+                  <a:lnTo>
+                    <a:pt x="703444" y="240694"/>
+                  </a:lnTo>
+                  <a:lnTo>
+                    <a:pt x="773789" y="261441"/>
+                  </a:lnTo>
+                  <a:lnTo>
+                    <a:pt x="844133" y="281646"/>
+                  </a:lnTo>
+                  <a:lnTo>
+                    <a:pt x="914478" y="301323"/>
+                  </a:lnTo>
+                  <a:lnTo>
+                    <a:pt x="984822" y="320487"/>
+                  </a:lnTo>
+                  <a:lnTo>
+                    <a:pt x="1055167" y="339149"/>
+                  </a:lnTo>
+                  <a:lnTo>
+                    <a:pt x="1125511" y="357324"/>
+                  </a:lnTo>
+                  <a:lnTo>
+                    <a:pt x="1195856" y="375023"/>
+                  </a:lnTo>
+                  <a:lnTo>
+                    <a:pt x="1266200" y="392261"/>
+                  </a:lnTo>
+                  <a:lnTo>
+                    <a:pt x="1336545" y="409047"/>
+                  </a:lnTo>
+                  <a:lnTo>
+                    <a:pt x="1406889" y="425396"/>
+                  </a:lnTo>
+                  <a:lnTo>
+                    <a:pt x="1477234" y="441317"/>
+                  </a:lnTo>
+                  <a:lnTo>
+                    <a:pt x="1547578" y="456821"/>
+                  </a:lnTo>
+                  <a:lnTo>
+                    <a:pt x="1617923" y="471921"/>
+                  </a:lnTo>
+                  <a:lnTo>
+                    <a:pt x="1688267" y="486626"/>
+                  </a:lnTo>
+                  <a:lnTo>
+                    <a:pt x="1758612" y="500947"/>
+                  </a:lnTo>
+                  <a:lnTo>
+                    <a:pt x="1828956" y="514894"/>
+                  </a:lnTo>
+                  <a:lnTo>
+                    <a:pt x="1899301" y="528476"/>
+                  </a:lnTo>
+                  <a:lnTo>
+                    <a:pt x="1969645" y="541704"/>
+                  </a:lnTo>
+                  <a:lnTo>
+                    <a:pt x="2039990" y="554586"/>
+                  </a:lnTo>
+                  <a:lnTo>
+                    <a:pt x="2110334" y="567131"/>
+                  </a:lnTo>
+                  <a:lnTo>
+                    <a:pt x="2180679" y="579348"/>
+                  </a:lnTo>
+                  <a:lnTo>
+                    <a:pt x="2251023" y="591246"/>
+                  </a:lnTo>
+                  <a:lnTo>
+                    <a:pt x="2321368" y="602833"/>
+                  </a:lnTo>
+                  <a:lnTo>
+                    <a:pt x="2391712" y="614118"/>
+                  </a:lnTo>
+                  <a:lnTo>
+                    <a:pt x="2462057" y="625107"/>
+                  </a:lnTo>
+                  <a:lnTo>
+                    <a:pt x="2532401" y="635810"/>
+                  </a:lnTo>
+                  <a:lnTo>
+                    <a:pt x="2602746" y="646232"/>
+                  </a:lnTo>
+                  <a:lnTo>
+                    <a:pt x="2673090" y="656383"/>
+                  </a:lnTo>
+                  <a:lnTo>
+                    <a:pt x="2743435" y="666268"/>
+                  </a:lnTo>
+                  <a:lnTo>
+                    <a:pt x="2813779" y="675894"/>
+                  </a:lnTo>
+                  <a:lnTo>
+                    <a:pt x="2884124" y="685270"/>
+                  </a:lnTo>
+                  <a:lnTo>
+                    <a:pt x="2954468" y="694400"/>
+                  </a:lnTo>
+                  <a:lnTo>
+                    <a:pt x="3024813" y="703292"/>
+                  </a:lnTo>
+                  <a:lnTo>
+                    <a:pt x="3095157" y="711951"/>
+                  </a:lnTo>
+                  <a:lnTo>
+                    <a:pt x="3165502" y="720384"/>
+                  </a:lnTo>
+                  <a:lnTo>
+                    <a:pt x="3235846" y="728597"/>
+                  </a:lnTo>
+                  <a:lnTo>
+                    <a:pt x="3306191" y="735874"/>
+                  </a:lnTo>
+                  <a:lnTo>
+                    <a:pt x="3376535" y="739218"/>
+                  </a:lnTo>
+                  <a:lnTo>
+                    <a:pt x="3446880" y="742524"/>
+                  </a:lnTo>
+                  <a:lnTo>
+                    <a:pt x="3517224" y="745792"/>
+                  </a:lnTo>
+                  <a:lnTo>
+                    <a:pt x="3587569" y="749025"/>
+                  </a:lnTo>
+                  <a:lnTo>
+                    <a:pt x="3657913" y="752221"/>
+                  </a:lnTo>
+                  <a:lnTo>
+                    <a:pt x="3728257" y="755381"/>
+                  </a:lnTo>
+                  <a:lnTo>
+                    <a:pt x="3798602" y="758506"/>
+                  </a:lnTo>
+                  <a:lnTo>
+                    <a:pt x="3868946" y="761596"/>
+                  </a:lnTo>
+                  <a:lnTo>
+                    <a:pt x="3939291" y="764652"/>
+                  </a:lnTo>
+                  <a:lnTo>
+                    <a:pt x="4009635" y="767673"/>
+                  </a:lnTo>
+                  <a:lnTo>
+                    <a:pt x="4079980" y="770660"/>
+                  </a:lnTo>
+                  <a:lnTo>
+                    <a:pt x="4150324" y="773614"/>
+                  </a:lnTo>
+                  <a:lnTo>
+                    <a:pt x="4220669" y="776535"/>
+                  </a:lnTo>
+                  <a:lnTo>
+                    <a:pt x="4291013" y="779424"/>
+                  </a:lnTo>
+                  <a:lnTo>
+                    <a:pt x="4361358" y="782280"/>
+                  </a:lnTo>
+                  <a:lnTo>
+                    <a:pt x="4431702" y="785104"/>
+                  </a:lnTo>
+                  <a:lnTo>
+                    <a:pt x="4502047" y="787896"/>
+                  </a:lnTo>
+                  <a:lnTo>
+                    <a:pt x="4572391" y="790657"/>
+                  </a:lnTo>
+                  <a:lnTo>
+                    <a:pt x="4642736" y="793388"/>
+                  </a:lnTo>
+                  <a:lnTo>
+                    <a:pt x="4713080" y="796088"/>
+                  </a:lnTo>
+                  <a:lnTo>
+                    <a:pt x="4783425" y="798757"/>
+                  </a:lnTo>
+                  <a:lnTo>
+                    <a:pt x="4853769" y="801397"/>
+                  </a:lnTo>
+                  <a:lnTo>
+                    <a:pt x="4924114" y="804007"/>
+                  </a:lnTo>
+                  <a:lnTo>
+                    <a:pt x="4994458" y="806588"/>
+                  </a:lnTo>
+                  <a:lnTo>
+                    <a:pt x="5064803" y="809140"/>
+                  </a:lnTo>
+                  <a:lnTo>
+                    <a:pt x="5135147" y="811663"/>
+                  </a:lnTo>
+                  <a:lnTo>
+                    <a:pt x="5205492" y="814159"/>
+                  </a:lnTo>
+                  <a:lnTo>
+                    <a:pt x="5275836" y="816626"/>
+                  </a:lnTo>
+                  <a:lnTo>
+                    <a:pt x="5346181" y="819066"/>
+                  </a:lnTo>
+                  <a:lnTo>
+                    <a:pt x="5416525" y="821478"/>
+                  </a:lnTo>
+                  <a:lnTo>
+                    <a:pt x="5486870" y="823864"/>
+                  </a:lnTo>
+                  <a:lnTo>
+                    <a:pt x="5557214" y="826222"/>
+                  </a:lnTo>
+                  <a:lnTo>
+                    <a:pt x="5627559" y="828555"/>
+                  </a:lnTo>
+                  <a:lnTo>
+                    <a:pt x="5697903" y="830861"/>
+                  </a:lnTo>
+                  <a:lnTo>
+                    <a:pt x="5768248" y="833141"/>
+                  </a:lnTo>
+                  <a:lnTo>
+                    <a:pt x="5838592" y="835396"/>
+                  </a:lnTo>
+                  <a:lnTo>
+                    <a:pt x="5908937" y="837626"/>
+                  </a:lnTo>
+                  <a:lnTo>
+                    <a:pt x="5979281" y="839831"/>
+                  </a:lnTo>
+                  <a:lnTo>
+                    <a:pt x="6049626" y="842011"/>
+                  </a:lnTo>
+                  <a:lnTo>
+                    <a:pt x="6119970" y="844167"/>
+                  </a:lnTo>
+                  <a:lnTo>
+                    <a:pt x="6190315" y="846298"/>
+                  </a:lnTo>
+                  <a:lnTo>
+                    <a:pt x="6260659" y="848406"/>
+                  </a:lnTo>
+                  <a:lnTo>
+                    <a:pt x="6331004" y="850490"/>
+                  </a:lnTo>
+                  <a:lnTo>
+                    <a:pt x="6401348" y="852551"/>
+                  </a:lnTo>
+                  <a:lnTo>
+                    <a:pt x="6471693" y="854589"/>
+                  </a:lnTo>
+                  <a:lnTo>
+                    <a:pt x="6542037" y="856604"/>
+                  </a:lnTo>
+                  <a:lnTo>
+                    <a:pt x="6612382" y="858596"/>
+                  </a:lnTo>
+                  <a:lnTo>
+                    <a:pt x="6682726" y="860566"/>
+                  </a:lnTo>
+                  <a:lnTo>
+                    <a:pt x="6753071" y="862514"/>
+                  </a:lnTo>
+                  <a:lnTo>
+                    <a:pt x="6823415" y="864441"/>
+                  </a:lnTo>
+                  <a:lnTo>
+                    <a:pt x="6893760" y="866345"/>
+                  </a:lnTo>
+                  <a:lnTo>
+                    <a:pt x="6964104" y="868229"/>
+                  </a:lnTo>
+                  <a:lnTo>
+                    <a:pt x="6964104" y="959449"/>
+                  </a:lnTo>
+                  <a:lnTo>
+                    <a:pt x="6893760" y="957431"/>
+                  </a:lnTo>
+                  <a:lnTo>
+                    <a:pt x="6823415" y="955358"/>
+                  </a:lnTo>
+                  <a:lnTo>
+                    <a:pt x="6753071" y="953230"/>
+                  </a:lnTo>
+                  <a:lnTo>
+                    <a:pt x="6682726" y="951045"/>
+                  </a:lnTo>
+                  <a:lnTo>
+                    <a:pt x="6612382" y="948801"/>
+                  </a:lnTo>
+                  <a:lnTo>
+                    <a:pt x="6542037" y="946497"/>
+                  </a:lnTo>
+                  <a:lnTo>
+                    <a:pt x="6471693" y="944131"/>
+                  </a:lnTo>
+                  <a:lnTo>
+                    <a:pt x="6401348" y="941701"/>
+                  </a:lnTo>
+                  <a:lnTo>
+                    <a:pt x="6331004" y="939206"/>
+                  </a:lnTo>
+                  <a:lnTo>
+                    <a:pt x="6260659" y="936645"/>
+                  </a:lnTo>
+                  <a:lnTo>
+                    <a:pt x="6190315" y="934015"/>
+                  </a:lnTo>
+                  <a:lnTo>
+                    <a:pt x="6119970" y="931314"/>
+                  </a:lnTo>
+                  <a:lnTo>
+                    <a:pt x="6049626" y="928540"/>
+                  </a:lnTo>
+                  <a:lnTo>
+                    <a:pt x="5979281" y="925692"/>
+                  </a:lnTo>
+                  <a:lnTo>
+                    <a:pt x="5908937" y="922768"/>
+                  </a:lnTo>
+                  <a:lnTo>
+                    <a:pt x="5838592" y="919766"/>
+                  </a:lnTo>
+                  <a:lnTo>
+                    <a:pt x="5768248" y="916682"/>
+                  </a:lnTo>
+                  <a:lnTo>
+                    <a:pt x="5697903" y="913516"/>
+                  </a:lnTo>
+                  <a:lnTo>
+                    <a:pt x="5627559" y="910265"/>
+                  </a:lnTo>
+                  <a:lnTo>
+                    <a:pt x="5557214" y="906927"/>
+                  </a:lnTo>
+                  <a:lnTo>
+                    <a:pt x="5486870" y="903500"/>
+                  </a:lnTo>
+                  <a:lnTo>
+                    <a:pt x="5416525" y="899980"/>
+                  </a:lnTo>
+                  <a:lnTo>
+                    <a:pt x="5346181" y="896366"/>
+                  </a:lnTo>
+                  <a:lnTo>
+                    <a:pt x="5275836" y="892655"/>
+                  </a:lnTo>
+                  <a:lnTo>
+                    <a:pt x="5205492" y="888844"/>
+                  </a:lnTo>
+                  <a:lnTo>
+                    <a:pt x="5135147" y="884931"/>
+                  </a:lnTo>
+                  <a:lnTo>
+                    <a:pt x="5064803" y="880913"/>
+                  </a:lnTo>
+                  <a:lnTo>
+                    <a:pt x="4994458" y="876787"/>
+                  </a:lnTo>
+                  <a:lnTo>
+                    <a:pt x="4924114" y="872551"/>
+                  </a:lnTo>
+                  <a:lnTo>
+                    <a:pt x="4853769" y="868201"/>
+                  </a:lnTo>
+                  <a:lnTo>
+                    <a:pt x="4783425" y="863734"/>
+                  </a:lnTo>
+                  <a:lnTo>
+                    <a:pt x="4713080" y="859147"/>
+                  </a:lnTo>
+                  <a:lnTo>
+                    <a:pt x="4642736" y="854438"/>
+                  </a:lnTo>
+                  <a:lnTo>
+                    <a:pt x="4572391" y="849601"/>
+                  </a:lnTo>
+                  <a:lnTo>
+                    <a:pt x="4502047" y="844636"/>
+                  </a:lnTo>
+                  <a:lnTo>
+                    <a:pt x="4431702" y="839536"/>
+                  </a:lnTo>
+                  <a:lnTo>
+                    <a:pt x="4361358" y="834300"/>
+                  </a:lnTo>
+                  <a:lnTo>
+                    <a:pt x="4291013" y="828924"/>
+                  </a:lnTo>
+                  <a:lnTo>
+                    <a:pt x="4220669" y="823403"/>
+                  </a:lnTo>
+                  <a:lnTo>
+                    <a:pt x="4150324" y="817734"/>
+                  </a:lnTo>
+                  <a:lnTo>
+                    <a:pt x="4079980" y="811913"/>
+                  </a:lnTo>
+                  <a:lnTo>
+                    <a:pt x="4009635" y="805936"/>
+                  </a:lnTo>
+                  <a:lnTo>
+                    <a:pt x="3939291" y="799799"/>
+                  </a:lnTo>
+                  <a:lnTo>
+                    <a:pt x="3868946" y="793497"/>
+                  </a:lnTo>
+                  <a:lnTo>
+                    <a:pt x="3798602" y="787025"/>
+                  </a:lnTo>
+                  <a:lnTo>
+                    <a:pt x="3728257" y="780380"/>
+                  </a:lnTo>
+                  <a:lnTo>
+                    <a:pt x="3657913" y="773557"/>
+                  </a:lnTo>
+                  <a:lnTo>
+                    <a:pt x="3587569" y="766551"/>
+                  </a:lnTo>
+                  <a:lnTo>
+                    <a:pt x="3517224" y="759357"/>
+                  </a:lnTo>
+                  <a:lnTo>
+                    <a:pt x="3446880" y="751969"/>
+                  </a:lnTo>
+                  <a:lnTo>
+                    <a:pt x="3376535" y="744384"/>
+                  </a:lnTo>
+                  <a:lnTo>
+                    <a:pt x="3306191" y="736595"/>
+                  </a:lnTo>
+                  <a:lnTo>
+                    <a:pt x="3235846" y="732493"/>
+                  </a:lnTo>
+                  <a:lnTo>
+                    <a:pt x="3165502" y="729074"/>
+                  </a:lnTo>
+                  <a:lnTo>
+                    <a:pt x="3095157" y="725616"/>
+                  </a:lnTo>
+                  <a:lnTo>
+                    <a:pt x="3024813" y="722119"/>
+                  </a:lnTo>
+                  <a:lnTo>
+                    <a:pt x="2954468" y="718582"/>
+                  </a:lnTo>
+                  <a:lnTo>
+                    <a:pt x="2884124" y="715005"/>
+                  </a:lnTo>
+                  <a:lnTo>
+                    <a:pt x="2813779" y="711388"/>
+                  </a:lnTo>
+                  <a:lnTo>
+                    <a:pt x="2743435" y="707730"/>
+                  </a:lnTo>
+                  <a:lnTo>
+                    <a:pt x="2673090" y="704030"/>
+                  </a:lnTo>
+                  <a:lnTo>
+                    <a:pt x="2602746" y="700289"/>
+                  </a:lnTo>
+                  <a:lnTo>
+                    <a:pt x="2532401" y="696505"/>
+                  </a:lnTo>
+                  <a:lnTo>
+                    <a:pt x="2462057" y="692678"/>
+                  </a:lnTo>
+                  <a:lnTo>
+                    <a:pt x="2391712" y="688809"/>
+                  </a:lnTo>
+                  <a:lnTo>
+                    <a:pt x="2321368" y="684895"/>
+                  </a:lnTo>
+                  <a:lnTo>
+                    <a:pt x="2251023" y="680937"/>
+                  </a:lnTo>
+                  <a:lnTo>
+                    <a:pt x="2180679" y="676934"/>
+                  </a:lnTo>
+                  <a:lnTo>
+                    <a:pt x="2110334" y="672886"/>
+                  </a:lnTo>
+                  <a:lnTo>
+                    <a:pt x="2039990" y="668792"/>
+                  </a:lnTo>
+                  <a:lnTo>
+                    <a:pt x="1969645" y="664652"/>
+                  </a:lnTo>
+                  <a:lnTo>
+                    <a:pt x="1899301" y="660465"/>
+                  </a:lnTo>
+                  <a:lnTo>
+                    <a:pt x="1828956" y="656231"/>
+                  </a:lnTo>
+                  <a:lnTo>
+                    <a:pt x="1758612" y="651948"/>
+                  </a:lnTo>
+                  <a:lnTo>
+                    <a:pt x="1688267" y="647618"/>
+                  </a:lnTo>
+                  <a:lnTo>
+                    <a:pt x="1617923" y="643238"/>
+                  </a:lnTo>
+                  <a:lnTo>
+                    <a:pt x="1547578" y="638809"/>
+                  </a:lnTo>
+                  <a:lnTo>
+                    <a:pt x="1477234" y="634329"/>
+                  </a:lnTo>
+                  <a:lnTo>
+                    <a:pt x="1406889" y="629799"/>
+                  </a:lnTo>
+                  <a:lnTo>
+                    <a:pt x="1336545" y="625218"/>
+                  </a:lnTo>
+                  <a:lnTo>
+                    <a:pt x="1266200" y="620584"/>
+                  </a:lnTo>
+                  <a:lnTo>
+                    <a:pt x="1195856" y="615899"/>
+                  </a:lnTo>
+                  <a:lnTo>
+                    <a:pt x="1125511" y="611160"/>
+                  </a:lnTo>
+                  <a:lnTo>
+                    <a:pt x="1055167" y="606368"/>
+                  </a:lnTo>
+                  <a:lnTo>
+                    <a:pt x="984822" y="601521"/>
+                  </a:lnTo>
+                  <a:lnTo>
+                    <a:pt x="914478" y="596620"/>
+                  </a:lnTo>
+                  <a:lnTo>
+                    <a:pt x="844133" y="591663"/>
+                  </a:lnTo>
+                  <a:lnTo>
+                    <a:pt x="773789" y="586650"/>
+                  </a:lnTo>
+                  <a:lnTo>
+                    <a:pt x="703444" y="581580"/>
+                  </a:lnTo>
+                  <a:lnTo>
+                    <a:pt x="633100" y="576453"/>
+                  </a:lnTo>
+                  <a:lnTo>
+                    <a:pt x="562755" y="571268"/>
+                  </a:lnTo>
+                  <a:lnTo>
+                    <a:pt x="492411" y="566025"/>
+                  </a:lnTo>
+                  <a:lnTo>
+                    <a:pt x="422066" y="560722"/>
+                  </a:lnTo>
+                  <a:lnTo>
+                    <a:pt x="351722" y="555359"/>
+                  </a:lnTo>
+                  <a:lnTo>
+                    <a:pt x="281377" y="549935"/>
+                  </a:lnTo>
+                  <a:lnTo>
+                    <a:pt x="211033" y="544450"/>
+                  </a:lnTo>
+                  <a:lnTo>
+                    <a:pt x="140688" y="538902"/>
+                  </a:lnTo>
+                  <a:lnTo>
+                    <a:pt x="70344" y="533293"/>
+                  </a:lnTo>
+                  <a:lnTo>
+                    <a:pt x="0" y="527619"/>
+                  </a:lnTo>
+                  <a:close/>
+                </a:path>
+              </a:pathLst>
+            </a:custGeom>
+            <a:solidFill>
+              <a:srgbClr val="FF8C00">
+                <a:alpha val="20000"/>
+              </a:srgbClr>
+            </a:solidFill>
+          </p:spPr>
+          <p:txBody>
+            <a:bodyPr/>
+            <a:lstStyle/>
+            <a:p/>
+          </p:txBody>
+        </p:sp>
+        <p:sp>
+          <p:nvSpPr>
+            <p:cNvPr id="68" name="pl68"/>
+            <p:cNvSpPr/>
+            <p:nvPr/>
+          </p:nvSpPr>
+          <p:spPr>
+            <a:xfrm>
+              <a:off x="1235312" y="4559011"/>
+              <a:ext cx="6964104" cy="868229"/>
+            </a:xfrm>
+            <a:custGeom>
+              <a:avLst/>
+              <a:pathLst>
+                <a:path w="6964104" h="868229">
+                  <a:moveTo>
+                    <a:pt x="0" y="0"/>
+                  </a:moveTo>
+                  <a:lnTo>
+                    <a:pt x="70344" y="27036"/>
+                  </a:lnTo>
+                  <a:lnTo>
+                    <a:pt x="140688" y="53367"/>
+                  </a:lnTo>
+                  <a:lnTo>
+                    <a:pt x="211033" y="79009"/>
+                  </a:lnTo>
+                  <a:lnTo>
+                    <a:pt x="281377" y="103982"/>
+                  </a:lnTo>
+                  <a:lnTo>
+                    <a:pt x="351722" y="128301"/>
+                  </a:lnTo>
+                  <a:lnTo>
+                    <a:pt x="422066" y="151986"/>
+                  </a:lnTo>
+                  <a:lnTo>
+                    <a:pt x="492411" y="175051"/>
+                  </a:lnTo>
+                  <a:lnTo>
+                    <a:pt x="562755" y="197514"/>
+                  </a:lnTo>
+                  <a:lnTo>
+                    <a:pt x="633100" y="219389"/>
+                  </a:lnTo>
+                  <a:lnTo>
+                    <a:pt x="703444" y="240694"/>
+                  </a:lnTo>
+                  <a:lnTo>
+                    <a:pt x="773789" y="261441"/>
+                  </a:lnTo>
+                  <a:lnTo>
+                    <a:pt x="844133" y="281646"/>
+                  </a:lnTo>
+                  <a:lnTo>
+                    <a:pt x="914478" y="301323"/>
+                  </a:lnTo>
+                  <a:lnTo>
+                    <a:pt x="984822" y="320487"/>
+                  </a:lnTo>
+                  <a:lnTo>
+                    <a:pt x="1055167" y="339149"/>
+                  </a:lnTo>
+                  <a:lnTo>
+                    <a:pt x="1125511" y="357324"/>
+                  </a:lnTo>
+                  <a:lnTo>
+                    <a:pt x="1195856" y="375023"/>
+                  </a:lnTo>
+                  <a:lnTo>
+                    <a:pt x="1266200" y="392261"/>
+                  </a:lnTo>
+                  <a:lnTo>
+                    <a:pt x="1336545" y="409047"/>
+                  </a:lnTo>
+                  <a:lnTo>
+                    <a:pt x="1406889" y="425396"/>
+                  </a:lnTo>
+                  <a:lnTo>
+                    <a:pt x="1477234" y="441317"/>
+                  </a:lnTo>
+                  <a:lnTo>
+                    <a:pt x="1547578" y="456821"/>
+                  </a:lnTo>
+                  <a:lnTo>
+                    <a:pt x="1617923" y="471921"/>
+                  </a:lnTo>
+                  <a:lnTo>
+                    <a:pt x="1688267" y="486626"/>
+                  </a:lnTo>
+                  <a:lnTo>
+                    <a:pt x="1758612" y="500947"/>
+                  </a:lnTo>
+                  <a:lnTo>
+                    <a:pt x="1828956" y="514894"/>
+                  </a:lnTo>
+                  <a:lnTo>
+                    <a:pt x="1899301" y="528476"/>
+                  </a:lnTo>
+                  <a:lnTo>
+                    <a:pt x="1969645" y="541704"/>
+                  </a:lnTo>
+                  <a:lnTo>
+                    <a:pt x="2039990" y="554586"/>
+                  </a:lnTo>
+                  <a:lnTo>
+                    <a:pt x="2110334" y="567131"/>
+                  </a:lnTo>
+                  <a:lnTo>
+                    <a:pt x="2180679" y="579348"/>
+                  </a:lnTo>
+                  <a:lnTo>
+                    <a:pt x="2251023" y="591246"/>
+                  </a:lnTo>
+                  <a:lnTo>
+                    <a:pt x="2321368" y="602833"/>
+                  </a:lnTo>
+                  <a:lnTo>
+                    <a:pt x="2391712" y="614118"/>
+                  </a:lnTo>
+                  <a:lnTo>
+                    <a:pt x="2462057" y="625107"/>
+                  </a:lnTo>
+                  <a:lnTo>
+                    <a:pt x="2532401" y="635810"/>
+                  </a:lnTo>
+                  <a:lnTo>
+                    <a:pt x="2602746" y="646232"/>
+                  </a:lnTo>
+                  <a:lnTo>
+                    <a:pt x="2673090" y="656383"/>
+                  </a:lnTo>
+                  <a:lnTo>
+                    <a:pt x="2743435" y="666268"/>
+                  </a:lnTo>
+                  <a:lnTo>
+                    <a:pt x="2813779" y="675894"/>
+                  </a:lnTo>
+                  <a:lnTo>
+                    <a:pt x="2884124" y="685270"/>
+                  </a:lnTo>
+                  <a:lnTo>
+                    <a:pt x="2954468" y="694400"/>
+                  </a:lnTo>
+                  <a:lnTo>
+                    <a:pt x="3024813" y="703292"/>
+                  </a:lnTo>
+                  <a:lnTo>
+                    <a:pt x="3095157" y="711951"/>
+                  </a:lnTo>
+                  <a:lnTo>
+                    <a:pt x="3165502" y="720384"/>
+                  </a:lnTo>
+                  <a:lnTo>
+                    <a:pt x="3235846" y="728597"/>
+                  </a:lnTo>
+                  <a:lnTo>
+                    <a:pt x="3306191" y="735874"/>
+                  </a:lnTo>
+                  <a:lnTo>
+                    <a:pt x="3376535" y="739218"/>
+                  </a:lnTo>
+                  <a:lnTo>
+                    <a:pt x="3446880" y="742524"/>
+                  </a:lnTo>
+                  <a:lnTo>
+                    <a:pt x="3517224" y="745792"/>
+                  </a:lnTo>
+                  <a:lnTo>
+                    <a:pt x="3587569" y="749025"/>
+                  </a:lnTo>
+                  <a:lnTo>
+                    <a:pt x="3657913" y="752221"/>
+                  </a:lnTo>
+                  <a:lnTo>
+                    <a:pt x="3728257" y="755381"/>
+                  </a:lnTo>
+                  <a:lnTo>
+                    <a:pt x="3798602" y="758506"/>
+                  </a:lnTo>
+                  <a:lnTo>
+                    <a:pt x="3868946" y="761596"/>
+                  </a:lnTo>
+                  <a:lnTo>
+                    <a:pt x="3939291" y="764652"/>
+                  </a:lnTo>
+                  <a:lnTo>
+                    <a:pt x="4009635" y="767673"/>
+                  </a:lnTo>
+                  <a:lnTo>
+                    <a:pt x="4079980" y="770660"/>
+                  </a:lnTo>
+                  <a:lnTo>
+                    <a:pt x="4150324" y="773614"/>
+                  </a:lnTo>
+                  <a:lnTo>
+                    <a:pt x="4220669" y="776535"/>
+                  </a:lnTo>
+                  <a:lnTo>
+                    <a:pt x="4291013" y="779424"/>
+                  </a:lnTo>
+                  <a:lnTo>
+                    <a:pt x="4361358" y="782280"/>
+                  </a:lnTo>
+                  <a:lnTo>
+                    <a:pt x="4431702" y="785104"/>
+                  </a:lnTo>
+                  <a:lnTo>
+                    <a:pt x="4502047" y="787896"/>
+                  </a:lnTo>
+                  <a:lnTo>
+                    <a:pt x="4572391" y="790657"/>
+                  </a:lnTo>
+                  <a:lnTo>
+                    <a:pt x="4642736" y="793388"/>
+                  </a:lnTo>
+                  <a:lnTo>
+                    <a:pt x="4713080" y="796088"/>
+                  </a:lnTo>
+                  <a:lnTo>
+                    <a:pt x="4783425" y="798757"/>
+                  </a:lnTo>
+                  <a:lnTo>
+                    <a:pt x="4853769" y="801397"/>
+                  </a:lnTo>
+                  <a:lnTo>
+                    <a:pt x="4924114" y="804007"/>
+                  </a:lnTo>
+                  <a:lnTo>
+                    <a:pt x="4994458" y="806588"/>
+                  </a:lnTo>
+                  <a:lnTo>
+                    <a:pt x="5064803" y="809140"/>
+                  </a:lnTo>
+                  <a:lnTo>
+                    <a:pt x="5135147" y="811663"/>
+                  </a:lnTo>
+                  <a:lnTo>
+                    <a:pt x="5205492" y="814159"/>
+                  </a:lnTo>
+                  <a:lnTo>
+                    <a:pt x="5275836" y="816626"/>
+                  </a:lnTo>
+                  <a:lnTo>
+                    <a:pt x="5346181" y="819066"/>
+                  </a:lnTo>
+                  <a:lnTo>
+                    <a:pt x="5416525" y="821478"/>
+                  </a:lnTo>
+                  <a:lnTo>
+                    <a:pt x="5486870" y="823864"/>
+                  </a:lnTo>
+                  <a:lnTo>
+                    <a:pt x="5557214" y="826222"/>
+                  </a:lnTo>
+                  <a:lnTo>
+                    <a:pt x="5627559" y="828555"/>
+                  </a:lnTo>
+                  <a:lnTo>
+                    <a:pt x="5697903" y="830861"/>
+                  </a:lnTo>
+                  <a:lnTo>
+                    <a:pt x="5768248" y="833141"/>
+                  </a:lnTo>
+                  <a:lnTo>
+                    <a:pt x="5838592" y="835396"/>
+                  </a:lnTo>
+                  <a:lnTo>
+                    <a:pt x="5908937" y="837626"/>
+                  </a:lnTo>
+                  <a:lnTo>
+                    <a:pt x="5979281" y="839831"/>
+                  </a:lnTo>
+                  <a:lnTo>
+                    <a:pt x="6049626" y="842011"/>
+                  </a:lnTo>
+                  <a:lnTo>
+                    <a:pt x="6119970" y="844167"/>
+                  </a:lnTo>
+                  <a:lnTo>
+                    <a:pt x="6190315" y="846298"/>
+                  </a:lnTo>
+                  <a:lnTo>
+                    <a:pt x="6260659" y="848406"/>
+                  </a:lnTo>
+                  <a:lnTo>
+                    <a:pt x="6331004" y="850490"/>
+                  </a:lnTo>
+                  <a:lnTo>
+                    <a:pt x="6401348" y="852551"/>
+                  </a:lnTo>
+                  <a:lnTo>
+                    <a:pt x="6471693" y="854589"/>
+                  </a:lnTo>
+                  <a:lnTo>
+                    <a:pt x="6542037" y="856604"/>
+                  </a:lnTo>
+                  <a:lnTo>
+                    <a:pt x="6612382" y="858596"/>
+                  </a:lnTo>
+                  <a:lnTo>
+                    <a:pt x="6682726" y="860566"/>
+                  </a:lnTo>
+                  <a:lnTo>
+                    <a:pt x="6753071" y="862514"/>
+                  </a:lnTo>
+                  <a:lnTo>
+                    <a:pt x="6823415" y="864441"/>
+                  </a:lnTo>
+                  <a:lnTo>
+                    <a:pt x="6893760" y="866345"/>
+                  </a:lnTo>
+                  <a:lnTo>
+                    <a:pt x="6964104" y="868229"/>
+                  </a:lnTo>
+                </a:path>
+              </a:pathLst>
+            </a:custGeom>
+          </p:spPr>
+          <p:txBody>
+            <a:bodyPr/>
+            <a:lstStyle/>
+            <a:p/>
+          </p:txBody>
+        </p:sp>
+        <p:sp>
+          <p:nvSpPr>
+            <p:cNvPr id="69" name="pl69"/>
+            <p:cNvSpPr/>
+            <p:nvPr/>
+          </p:nvSpPr>
+          <p:spPr>
+            <a:xfrm>
+              <a:off x="1235312" y="5086631"/>
+              <a:ext cx="6964104" cy="431830"/>
+            </a:xfrm>
+            <a:custGeom>
+              <a:avLst/>
+              <a:pathLst>
+                <a:path w="6964104" h="431830">
+                  <a:moveTo>
+                    <a:pt x="6964104" y="431830"/>
+                  </a:moveTo>
+                  <a:lnTo>
+                    <a:pt x="6893760" y="429811"/>
+                  </a:lnTo>
+                  <a:lnTo>
+                    <a:pt x="6823415" y="427739"/>
+                  </a:lnTo>
+                  <a:lnTo>
+                    <a:pt x="6753071" y="425610"/>
+                  </a:lnTo>
+                  <a:lnTo>
+                    <a:pt x="6682726" y="423425"/>
+                  </a:lnTo>
+                  <a:lnTo>
+                    <a:pt x="6612382" y="421181"/>
+                  </a:lnTo>
+                  <a:lnTo>
+                    <a:pt x="6542037" y="418877"/>
+                  </a:lnTo>
+                  <a:lnTo>
+                    <a:pt x="6471693" y="416511"/>
+                  </a:lnTo>
+                  <a:lnTo>
+                    <a:pt x="6401348" y="414082"/>
+                  </a:lnTo>
+                  <a:lnTo>
+                    <a:pt x="6331004" y="411587"/>
+                  </a:lnTo>
+                  <a:lnTo>
+                    <a:pt x="6260659" y="409025"/>
+                  </a:lnTo>
+                  <a:lnTo>
+                    <a:pt x="6190315" y="406395"/>
+                  </a:lnTo>
+                  <a:lnTo>
+                    <a:pt x="6119970" y="403694"/>
+                  </a:lnTo>
+                  <a:lnTo>
+                    <a:pt x="6049626" y="400921"/>
+                  </a:lnTo>
+                  <a:lnTo>
+                    <a:pt x="5979281" y="398073"/>
+                  </a:lnTo>
+                  <a:lnTo>
+                    <a:pt x="5908937" y="395149"/>
+                  </a:lnTo>
+                  <a:lnTo>
+                    <a:pt x="5838592" y="392146"/>
+                  </a:lnTo>
+                  <a:lnTo>
+                    <a:pt x="5768248" y="389063"/>
+                  </a:lnTo>
+                  <a:lnTo>
+                    <a:pt x="5697903" y="385897"/>
+                  </a:lnTo>
+                  <a:lnTo>
+                    <a:pt x="5627559" y="382646"/>
+                  </a:lnTo>
+                  <a:lnTo>
+                    <a:pt x="5557214" y="379308"/>
+                  </a:lnTo>
+                  <a:lnTo>
+                    <a:pt x="5486870" y="375880"/>
+                  </a:lnTo>
+                  <a:lnTo>
+                    <a:pt x="5416525" y="372360"/>
+                  </a:lnTo>
+                  <a:lnTo>
+                    <a:pt x="5346181" y="368746"/>
+                  </a:lnTo>
+                  <a:lnTo>
+                    <a:pt x="5275836" y="365035"/>
+                  </a:lnTo>
+                  <a:lnTo>
+                    <a:pt x="5205492" y="361224"/>
+                  </a:lnTo>
+                  <a:lnTo>
+                    <a:pt x="5135147" y="357311"/>
+                  </a:lnTo>
+                  <a:lnTo>
+                    <a:pt x="5064803" y="353293"/>
+                  </a:lnTo>
+                  <a:lnTo>
+                    <a:pt x="4994458" y="349168"/>
+                  </a:lnTo>
+                  <a:lnTo>
+                    <a:pt x="4924114" y="344931"/>
+                  </a:lnTo>
+                  <a:lnTo>
+                    <a:pt x="4853769" y="340581"/>
+                  </a:lnTo>
+                  <a:lnTo>
+                    <a:pt x="4783425" y="336114"/>
+                  </a:lnTo>
+                  <a:lnTo>
+                    <a:pt x="4713080" y="331528"/>
+                  </a:lnTo>
+                  <a:lnTo>
+                    <a:pt x="4642736" y="326818"/>
+                  </a:lnTo>
+                  <a:lnTo>
+                    <a:pt x="4572391" y="321982"/>
+                  </a:lnTo>
+                  <a:lnTo>
+                    <a:pt x="4502047" y="317016"/>
+                  </a:lnTo>
+                  <a:lnTo>
+                    <a:pt x="4431702" y="311917"/>
+                  </a:lnTo>
+                  <a:lnTo>
+                    <a:pt x="4361358" y="306681"/>
+                  </a:lnTo>
+                  <a:lnTo>
+                    <a:pt x="4291013" y="301304"/>
+                  </a:lnTo>
+                  <a:lnTo>
+                    <a:pt x="4220669" y="295784"/>
+                  </a:lnTo>
+                  <a:lnTo>
+                    <a:pt x="4150324" y="290115"/>
+                  </a:lnTo>
+                  <a:lnTo>
+                    <a:pt x="4079980" y="284294"/>
+                  </a:lnTo>
+                  <a:lnTo>
+                    <a:pt x="4009635" y="278317"/>
+                  </a:lnTo>
+                  <a:lnTo>
+                    <a:pt x="3939291" y="272179"/>
+                  </a:lnTo>
+                  <a:lnTo>
+                    <a:pt x="3868946" y="265877"/>
+                  </a:lnTo>
+                  <a:lnTo>
+                    <a:pt x="3798602" y="259406"/>
+                  </a:lnTo>
+                  <a:lnTo>
+                    <a:pt x="3728257" y="252761"/>
+                  </a:lnTo>
+                  <a:lnTo>
+                    <a:pt x="3657913" y="245938"/>
+                  </a:lnTo>
+                  <a:lnTo>
+                    <a:pt x="3587569" y="238931"/>
+                  </a:lnTo>
+                  <a:lnTo>
+                    <a:pt x="3517224" y="231737"/>
+                  </a:lnTo>
+                  <a:lnTo>
+                    <a:pt x="3446880" y="224350"/>
+                  </a:lnTo>
+                  <a:lnTo>
+                    <a:pt x="3376535" y="216764"/>
+                  </a:lnTo>
+                  <a:lnTo>
+                    <a:pt x="3306191" y="208975"/>
+                  </a:lnTo>
+                  <a:lnTo>
+                    <a:pt x="3235846" y="204874"/>
+                  </a:lnTo>
+                  <a:lnTo>
+                    <a:pt x="3165502" y="201454"/>
+                  </a:lnTo>
+                  <a:lnTo>
+                    <a:pt x="3095157" y="197996"/>
+                  </a:lnTo>
+                  <a:lnTo>
+                    <a:pt x="3024813" y="194499"/>
+                  </a:lnTo>
+                  <a:lnTo>
+                    <a:pt x="2954468" y="190962"/>
+                  </a:lnTo>
+                  <a:lnTo>
+                    <a:pt x="2884124" y="187386"/>
+                  </a:lnTo>
+                  <a:lnTo>
+                    <a:pt x="2813779" y="183768"/>
+                  </a:lnTo>
+                  <a:lnTo>
+                    <a:pt x="2743435" y="180110"/>
+                  </a:lnTo>
+                  <a:lnTo>
+                    <a:pt x="2673090" y="176411"/>
+                  </a:lnTo>
+                  <a:lnTo>
+                    <a:pt x="2602746" y="172669"/>
+                  </a:lnTo>
+                  <a:lnTo>
+                    <a:pt x="2532401" y="168885"/>
+                  </a:lnTo>
+                  <a:lnTo>
+                    <a:pt x="2462057" y="165059"/>
+                  </a:lnTo>
+                  <a:lnTo>
+                    <a:pt x="2391712" y="161189"/>
+                  </a:lnTo>
+                  <a:lnTo>
+                    <a:pt x="2321368" y="157275"/>
+                  </a:lnTo>
+                  <a:lnTo>
+                    <a:pt x="2251023" y="153317"/>
+                  </a:lnTo>
+                  <a:lnTo>
+                    <a:pt x="2180679" y="149315"/>
+                  </a:lnTo>
+                  <a:lnTo>
+                    <a:pt x="2110334" y="145267"/>
+                  </a:lnTo>
+                  <a:lnTo>
+                    <a:pt x="2039990" y="141173"/>
+                  </a:lnTo>
+                  <a:lnTo>
+                    <a:pt x="1969645" y="137033"/>
+                  </a:lnTo>
+                  <a:lnTo>
+                    <a:pt x="1899301" y="132846"/>
+                  </a:lnTo>
+                  <a:lnTo>
+                    <a:pt x="1828956" y="128611"/>
+                  </a:lnTo>
+                  <a:lnTo>
+                    <a:pt x="1758612" y="124329"/>
+                  </a:lnTo>
+                  <a:lnTo>
+                    <a:pt x="1688267" y="119998"/>
+                  </a:lnTo>
+                  <a:lnTo>
+                    <a:pt x="1617923" y="115618"/>
+                  </a:lnTo>
+                  <a:lnTo>
+                    <a:pt x="1547578" y="111189"/>
+                  </a:lnTo>
+                  <a:lnTo>
+                    <a:pt x="1477234" y="106710"/>
+                  </a:lnTo>
+                  <a:lnTo>
+                    <a:pt x="1406889" y="102179"/>
+                  </a:lnTo>
+                  <a:lnTo>
+                    <a:pt x="1336545" y="97598"/>
+                  </a:lnTo>
+                  <a:lnTo>
+                    <a:pt x="1266200" y="92965"/>
+                  </a:lnTo>
+                  <a:lnTo>
+                    <a:pt x="1195856" y="88279"/>
+                  </a:lnTo>
+                  <a:lnTo>
+                    <a:pt x="1125511" y="83540"/>
+                  </a:lnTo>
+                  <a:lnTo>
+                    <a:pt x="1055167" y="78748"/>
+                  </a:lnTo>
+                  <a:lnTo>
+                    <a:pt x="984822" y="73902"/>
+                  </a:lnTo>
+                  <a:lnTo>
+                    <a:pt x="914478" y="69000"/>
+                  </a:lnTo>
+                  <a:lnTo>
+                    <a:pt x="844133" y="64043"/>
+                  </a:lnTo>
+                  <a:lnTo>
+                    <a:pt x="773789" y="59030"/>
+                  </a:lnTo>
+                  <a:lnTo>
+                    <a:pt x="703444" y="53961"/>
+                  </a:lnTo>
+                  <a:lnTo>
+                    <a:pt x="633100" y="48834"/>
+                  </a:lnTo>
+                  <a:lnTo>
+                    <a:pt x="562755" y="43649"/>
+                  </a:lnTo>
+                  <a:lnTo>
+                    <a:pt x="492411" y="38405"/>
+                  </a:lnTo>
+                  <a:lnTo>
+                    <a:pt x="422066" y="33102"/>
+                  </a:lnTo>
+                  <a:lnTo>
+                    <a:pt x="351722" y="27739"/>
+                  </a:lnTo>
+                  <a:lnTo>
+                    <a:pt x="281377" y="22315"/>
+                  </a:lnTo>
+                  <a:lnTo>
+                    <a:pt x="211033" y="16830"/>
+                  </a:lnTo>
+                  <a:lnTo>
+                    <a:pt x="140688" y="11283"/>
+                  </a:lnTo>
+                  <a:lnTo>
+                    <a:pt x="70344" y="5673"/>
+                  </a:lnTo>
+                  <a:lnTo>
+                    <a:pt x="0" y="0"/>
+                  </a:lnTo>
+                </a:path>
+              </a:pathLst>
+            </a:custGeom>
+          </p:spPr>
+          <p:txBody>
+            <a:bodyPr/>
+            <a:lstStyle/>
+            <a:p/>
+          </p:txBody>
+        </p:sp>
+        <p:sp>
+          <p:nvSpPr>
+            <p:cNvPr id="70" name="pl70"/>
+            <p:cNvSpPr/>
+            <p:nvPr/>
+          </p:nvSpPr>
+          <p:spPr>
+            <a:xfrm>
+              <a:off x="1235312" y="4869367"/>
+              <a:ext cx="6964104" cy="612421"/>
+            </a:xfrm>
+            <a:custGeom>
+              <a:avLst/>
+              <a:pathLst>
+                <a:path w="6964104" h="612421">
+                  <a:moveTo>
+                    <a:pt x="0" y="0"/>
+                  </a:moveTo>
+                  <a:lnTo>
+                    <a:pt x="70344" y="13536"/>
+                  </a:lnTo>
+                  <a:lnTo>
+                    <a:pt x="140688" y="26819"/>
+                  </a:lnTo>
+                  <a:lnTo>
+                    <a:pt x="211033" y="39854"/>
+                  </a:lnTo>
+                  <a:lnTo>
+                    <a:pt x="281377" y="52646"/>
+                  </a:lnTo>
+                  <a:lnTo>
+                    <a:pt x="351722" y="65198"/>
+                  </a:lnTo>
+                  <a:lnTo>
+                    <a:pt x="422066" y="77516"/>
+                  </a:lnTo>
+                  <a:lnTo>
+                    <a:pt x="492411" y="89604"/>
+                  </a:lnTo>
+                  <a:lnTo>
+                    <a:pt x="562755" y="101465"/>
+                  </a:lnTo>
+                  <a:lnTo>
+                    <a:pt x="633100" y="113106"/>
+                  </a:lnTo>
+                  <a:lnTo>
+                    <a:pt x="703444" y="124528"/>
+                  </a:lnTo>
+                  <a:lnTo>
+                    <a:pt x="773789" y="135737"/>
+                  </a:lnTo>
+                  <a:lnTo>
+                    <a:pt x="844133" y="146737"/>
+                  </a:lnTo>
+                  <a:lnTo>
+                    <a:pt x="914478" y="157531"/>
+                  </a:lnTo>
+                  <a:lnTo>
+                    <a:pt x="984822" y="168123"/>
+                  </a:lnTo>
+                  <a:lnTo>
+                    <a:pt x="1055167" y="178518"/>
+                  </a:lnTo>
+                  <a:lnTo>
+                    <a:pt x="1125511" y="188718"/>
+                  </a:lnTo>
+                  <a:lnTo>
+                    <a:pt x="1195856" y="198727"/>
+                  </a:lnTo>
+                  <a:lnTo>
+                    <a:pt x="1266200" y="208550"/>
+                  </a:lnTo>
+                  <a:lnTo>
+                    <a:pt x="1336545" y="218188"/>
+                  </a:lnTo>
+                  <a:lnTo>
+                    <a:pt x="1406889" y="227647"/>
+                  </a:lnTo>
+                  <a:lnTo>
+                    <a:pt x="1477234" y="236929"/>
+                  </a:lnTo>
+                  <a:lnTo>
+                    <a:pt x="1547578" y="246038"/>
+                  </a:lnTo>
+                  <a:lnTo>
+                    <a:pt x="1617923" y="254976"/>
+                  </a:lnTo>
+                  <a:lnTo>
+                    <a:pt x="1688267" y="263747"/>
+                  </a:lnTo>
+                  <a:lnTo>
+                    <a:pt x="1758612" y="272354"/>
+                  </a:lnTo>
+                  <a:lnTo>
+                    <a:pt x="1828956" y="280801"/>
+                  </a:lnTo>
+                  <a:lnTo>
+                    <a:pt x="1899301" y="289089"/>
+                  </a:lnTo>
+                  <a:lnTo>
+                    <a:pt x="1969645" y="297223"/>
+                  </a:lnTo>
+                  <a:lnTo>
+                    <a:pt x="2039990" y="305205"/>
+                  </a:lnTo>
+                  <a:lnTo>
+                    <a:pt x="2110334" y="313037"/>
+                  </a:lnTo>
+                  <a:lnTo>
+                    <a:pt x="2180679" y="320724"/>
+                  </a:lnTo>
+                  <a:lnTo>
+                    <a:pt x="2251023" y="328266"/>
+                  </a:lnTo>
+                  <a:lnTo>
+                    <a:pt x="2321368" y="335668"/>
+                  </a:lnTo>
+                  <a:lnTo>
+                    <a:pt x="2391712" y="342931"/>
+                  </a:lnTo>
+                  <a:lnTo>
+                    <a:pt x="2462057" y="350058"/>
+                  </a:lnTo>
+                  <a:lnTo>
+                    <a:pt x="2532401" y="357053"/>
+                  </a:lnTo>
+                  <a:lnTo>
+                    <a:pt x="2602746" y="363916"/>
+                  </a:lnTo>
+                  <a:lnTo>
+                    <a:pt x="2673090" y="370652"/>
+                  </a:lnTo>
+                  <a:lnTo>
+                    <a:pt x="2743435" y="377261"/>
+                  </a:lnTo>
+                  <a:lnTo>
+                    <a:pt x="2813779" y="383747"/>
+                  </a:lnTo>
+                  <a:lnTo>
+                    <a:pt x="2884124" y="390112"/>
+                  </a:lnTo>
+                  <a:lnTo>
+                    <a:pt x="2954468" y="396357"/>
+                  </a:lnTo>
+                  <a:lnTo>
+                    <a:pt x="3024813" y="402486"/>
+                  </a:lnTo>
+                  <a:lnTo>
+                    <a:pt x="3095157" y="408501"/>
+                  </a:lnTo>
+                  <a:lnTo>
+                    <a:pt x="3165502" y="414403"/>
+                  </a:lnTo>
+                  <a:lnTo>
+                    <a:pt x="3235846" y="420195"/>
+                  </a:lnTo>
+                  <a:lnTo>
+                    <a:pt x="3306191" y="425878"/>
+                  </a:lnTo>
+                  <a:lnTo>
+                    <a:pt x="3376535" y="431456"/>
+                  </a:lnTo>
+                  <a:lnTo>
+                    <a:pt x="3446880" y="436929"/>
+                  </a:lnTo>
+                  <a:lnTo>
+                    <a:pt x="3517224" y="442300"/>
+                  </a:lnTo>
+                  <a:lnTo>
+                    <a:pt x="3587569" y="447570"/>
+                  </a:lnTo>
+                  <a:lnTo>
+                    <a:pt x="3657913" y="452742"/>
+                  </a:lnTo>
+                  <a:lnTo>
+                    <a:pt x="3728257" y="457817"/>
+                  </a:lnTo>
+                  <a:lnTo>
+                    <a:pt x="3798602" y="462798"/>
+                  </a:lnTo>
+                  <a:lnTo>
+                    <a:pt x="3868946" y="467685"/>
+                  </a:lnTo>
+                  <a:lnTo>
+                    <a:pt x="3939291" y="472481"/>
+                  </a:lnTo>
+                  <a:lnTo>
+                    <a:pt x="4009635" y="477188"/>
+                  </a:lnTo>
+                  <a:lnTo>
+                    <a:pt x="4079980" y="481806"/>
+                  </a:lnTo>
+                  <a:lnTo>
+                    <a:pt x="4150324" y="486338"/>
+                  </a:lnTo>
+                  <a:lnTo>
+                    <a:pt x="4220669" y="490786"/>
+                  </a:lnTo>
+                  <a:lnTo>
+                    <a:pt x="4291013" y="495150"/>
+                  </a:lnTo>
+                  <a:lnTo>
+                    <a:pt x="4361358" y="499433"/>
+                  </a:lnTo>
+                  <a:lnTo>
+                    <a:pt x="4431702" y="503636"/>
+                  </a:lnTo>
+                  <a:lnTo>
+                    <a:pt x="4502047" y="507760"/>
+                  </a:lnTo>
+                  <a:lnTo>
+                    <a:pt x="4572391" y="511807"/>
+                  </a:lnTo>
+                  <a:lnTo>
+                    <a:pt x="4642736" y="515779"/>
+                  </a:lnTo>
+                  <a:lnTo>
+                    <a:pt x="4713080" y="519676"/>
+                  </a:lnTo>
+                  <a:lnTo>
+                    <a:pt x="4783425" y="523500"/>
+                  </a:lnTo>
+                  <a:lnTo>
+                    <a:pt x="4853769" y="527253"/>
+                  </a:lnTo>
+                  <a:lnTo>
+                    <a:pt x="4924114" y="530936"/>
+                  </a:lnTo>
+                  <a:lnTo>
+                    <a:pt x="4994458" y="534550"/>
+                  </a:lnTo>
+                  <a:lnTo>
+                    <a:pt x="5064803" y="538096"/>
+                  </a:lnTo>
+                  <a:lnTo>
+                    <a:pt x="5135147" y="541577"/>
+                  </a:lnTo>
+                  <a:lnTo>
+                    <a:pt x="5205492" y="544992"/>
+                  </a:lnTo>
+                  <a:lnTo>
+                    <a:pt x="5275836" y="548343"/>
+                  </a:lnTo>
+                  <a:lnTo>
+                    <a:pt x="5346181" y="551632"/>
+                  </a:lnTo>
+                  <a:lnTo>
+                    <a:pt x="5416525" y="554859"/>
+                  </a:lnTo>
+                  <a:lnTo>
+                    <a:pt x="5486870" y="558026"/>
+                  </a:lnTo>
+                  <a:lnTo>
+                    <a:pt x="5557214" y="561134"/>
+                  </a:lnTo>
+                  <a:lnTo>
+                    <a:pt x="5627559" y="564183"/>
+                  </a:lnTo>
+                  <a:lnTo>
+                    <a:pt x="5697903" y="567176"/>
+                  </a:lnTo>
+                  <a:lnTo>
+                    <a:pt x="5768248" y="570113"/>
+                  </a:lnTo>
+                  <a:lnTo>
+                    <a:pt x="5838592" y="572995"/>
+                  </a:lnTo>
+                  <a:lnTo>
+                    <a:pt x="5908937" y="575823"/>
+                  </a:lnTo>
+                  <a:lnTo>
+                    <a:pt x="5979281" y="578598"/>
+                  </a:lnTo>
+                  <a:lnTo>
+                    <a:pt x="6049626" y="581321"/>
+                  </a:lnTo>
+                  <a:lnTo>
+                    <a:pt x="6119970" y="583993"/>
+                  </a:lnTo>
+                  <a:lnTo>
+                    <a:pt x="6190315" y="586616"/>
+                  </a:lnTo>
+                  <a:lnTo>
+                    <a:pt x="6260659" y="589189"/>
+                  </a:lnTo>
+                  <a:lnTo>
+                    <a:pt x="6331004" y="591715"/>
+                  </a:lnTo>
+                  <a:lnTo>
+                    <a:pt x="6401348" y="594193"/>
+                  </a:lnTo>
+                  <a:lnTo>
+                    <a:pt x="6471693" y="596625"/>
+                  </a:lnTo>
+                  <a:lnTo>
+                    <a:pt x="6542037" y="599011"/>
+                  </a:lnTo>
+                  <a:lnTo>
+                    <a:pt x="6612382" y="601353"/>
+                  </a:lnTo>
+                  <a:lnTo>
+                    <a:pt x="6682726" y="603651"/>
+                  </a:lnTo>
+                  <a:lnTo>
+                    <a:pt x="6753071" y="605906"/>
+                  </a:lnTo>
+                  <a:lnTo>
+                    <a:pt x="6823415" y="608119"/>
+                  </a:lnTo>
+                  <a:lnTo>
+                    <a:pt x="6893760" y="610290"/>
+                  </a:lnTo>
+                  <a:lnTo>
+                    <a:pt x="6964104" y="612421"/>
+                  </a:lnTo>
+                </a:path>
+              </a:pathLst>
+            </a:custGeom>
+            <a:ln w="27101" cap="flat">
+              <a:solidFill>
+                <a:srgbClr val="FF8C00">
+                  <a:alpha val="100000"/>
+                </a:srgbClr>
+              </a:solidFill>
+              <a:prstDash val="solid"/>
+              <a:round/>
+            </a:ln>
+          </p:spPr>
+          <p:txBody>
+            <a:bodyPr/>
+            <a:lstStyle/>
+            <a:p/>
+          </p:txBody>
+        </p:sp>
+        <p:sp>
+          <p:nvSpPr>
+            <p:cNvPr id="71" name="pl71"/>
+            <p:cNvSpPr/>
+            <p:nvPr/>
+          </p:nvSpPr>
+          <p:spPr>
+            <a:xfrm>
+              <a:off x="887106" y="5294352"/>
+              <a:ext cx="7660515" cy="0"/>
+            </a:xfrm>
+            <a:custGeom>
+              <a:avLst/>
+              <a:pathLst>
+                <a:path w="7660515" h="0">
+                  <a:moveTo>
+                    <a:pt x="0" y="0"/>
+                  </a:moveTo>
+                  <a:lnTo>
+                    <a:pt x="7660515" y="0"/>
+                  </a:lnTo>
+                  <a:lnTo>
+                    <a:pt x="7660515" y="0"/>
+                  </a:lnTo>
+                </a:path>
+              </a:pathLst>
+            </a:custGeom>
+            <a:ln w="13550" cap="flat">
+              <a:solidFill>
+                <a:srgbClr val="7F7F7F">
+                  <a:alpha val="100000"/>
+                </a:srgbClr>
+              </a:solidFill>
+              <a:prstDash val="dash"/>
+              <a:round/>
+            </a:ln>
+          </p:spPr>
+          <p:txBody>
+            <a:bodyPr/>
+            <a:lstStyle/>
+            <a:p/>
+          </p:txBody>
+        </p:sp>
+        <p:sp>
+          <p:nvSpPr>
+            <p:cNvPr id="72" name="pl72"/>
+            <p:cNvSpPr/>
+            <p:nvPr/>
+          </p:nvSpPr>
+          <p:spPr>
+            <a:xfrm>
+              <a:off x="4530353" y="4336484"/>
+              <a:ext cx="0" cy="1317069"/>
+            </a:xfrm>
+            <a:custGeom>
+              <a:avLst/>
+              <a:pathLst>
+                <a:path w="0" h="1317069">
+                  <a:moveTo>
+                    <a:pt x="0" y="1317069"/>
+                  </a:moveTo>
+                  <a:lnTo>
+                    <a:pt x="0" y="0"/>
+                  </a:lnTo>
+                  <a:lnTo>
+                    <a:pt x="0" y="0"/>
+                  </a:lnTo>
+                </a:path>
+              </a:pathLst>
+            </a:custGeom>
+            <a:ln w="13550" cap="flat">
+              <a:solidFill>
+                <a:srgbClr val="666666">
+                  <a:alpha val="100000"/>
+                </a:srgbClr>
+              </a:solidFill>
+              <a:prstDash val="dot"/>
+              <a:round/>
+            </a:ln>
+          </p:spPr>
+          <p:txBody>
+            <a:bodyPr/>
+            <a:lstStyle/>
+            <a:p/>
+          </p:txBody>
+        </p:sp>
+        <p:sp>
+          <p:nvSpPr>
+            <p:cNvPr id="73" name="tx73"/>
+            <p:cNvSpPr/>
+            <p:nvPr/>
+          </p:nvSpPr>
+          <p:spPr>
+            <a:xfrm>
+              <a:off x="762297" y="5553636"/>
+              <a:ext cx="62179" cy="80101"/>
+            </a:xfrm>
+            <a:prstGeom prst="rect">
+              <a:avLst/>
+            </a:prstGeom>
+            <a:noFill/>
+          </p:spPr>
+          <p:txBody>
+            <a:bodyPr lIns="0" rIns="0" tIns="0" bIns="0" anchorCtr="1" anchor="ctr" wrap="none"/>
+            <a:lstStyle/>
+            <a:p>
+              <a:pPr algn="l" marL="0" marR="0" indent="0">
+                <a:lnSpc>
+                  <a:spcPts val="880"/>
+                </a:lnSpc>
+                <a:spcBef>
+                  <a:spcPts val="0"/>
+                </a:spcBef>
+                <a:spcAft>
+                  <a:spcPts val="0"/>
+                </a:spcAft>
+              </a:pPr>
+              <a:r>
+                <a:rPr sz="880">
+                  <a:solidFill>
+                    <a:srgbClr val="4D4D4D">
+                      <a:alpha val="100000"/>
+                    </a:srgbClr>
+                  </a:solidFill>
+                  <a:latin typeface="Helvetica"/>
+                  <a:cs typeface="Helvetica"/>
+                </a:rPr>
+                <a:t>0</a:t>
+              </a:r>
+            </a:p>
+          </p:txBody>
+        </p:sp>
+        <p:sp>
+          <p:nvSpPr>
+            <p:cNvPr id="74" name="tx74"/>
+            <p:cNvSpPr/>
+            <p:nvPr/>
+          </p:nvSpPr>
+          <p:spPr>
+            <a:xfrm>
+              <a:off x="762297" y="5254302"/>
+              <a:ext cx="62179" cy="80101"/>
+            </a:xfrm>
+            <a:prstGeom prst="rect">
+              <a:avLst/>
+            </a:prstGeom>
+            <a:noFill/>
+          </p:spPr>
+          <p:txBody>
+            <a:bodyPr lIns="0" rIns="0" tIns="0" bIns="0" anchorCtr="1" anchor="ctr" wrap="none"/>
+            <a:lstStyle/>
+            <a:p>
+              <a:pPr algn="l" marL="0" marR="0" indent="0">
+                <a:lnSpc>
+                  <a:spcPts val="880"/>
+                </a:lnSpc>
+                <a:spcBef>
+                  <a:spcPts val="0"/>
+                </a:spcBef>
+                <a:spcAft>
+                  <a:spcPts val="0"/>
+                </a:spcAft>
+              </a:pPr>
+              <a:r>
+                <a:rPr sz="880">
+                  <a:solidFill>
+                    <a:srgbClr val="4D4D4D">
+                      <a:alpha val="100000"/>
+                    </a:srgbClr>
+                  </a:solidFill>
+                  <a:latin typeface="Helvetica"/>
+                  <a:cs typeface="Helvetica"/>
+                </a:rPr>
+                <a:t>1</a:t>
+              </a:r>
+            </a:p>
+          </p:txBody>
+        </p:sp>
+        <p:sp>
+          <p:nvSpPr>
+            <p:cNvPr id="75" name="tx75"/>
+            <p:cNvSpPr/>
+            <p:nvPr/>
+          </p:nvSpPr>
+          <p:spPr>
+            <a:xfrm>
+              <a:off x="762297" y="4954968"/>
+              <a:ext cx="62179" cy="80101"/>
+            </a:xfrm>
+            <a:prstGeom prst="rect">
+              <a:avLst/>
+            </a:prstGeom>
+            <a:noFill/>
+          </p:spPr>
+          <p:txBody>
+            <a:bodyPr lIns="0" rIns="0" tIns="0" bIns="0" anchorCtr="1" anchor="ctr" wrap="none"/>
+            <a:lstStyle/>
+            <a:p>
+              <a:pPr algn="l" marL="0" marR="0" indent="0">
+                <a:lnSpc>
+                  <a:spcPts val="880"/>
+                </a:lnSpc>
+                <a:spcBef>
+                  <a:spcPts val="0"/>
+                </a:spcBef>
+                <a:spcAft>
+                  <a:spcPts val="0"/>
+                </a:spcAft>
+              </a:pPr>
+              <a:r>
+                <a:rPr sz="880">
+                  <a:solidFill>
+                    <a:srgbClr val="4D4D4D">
+                      <a:alpha val="100000"/>
+                    </a:srgbClr>
+                  </a:solidFill>
+                  <a:latin typeface="Helvetica"/>
+                  <a:cs typeface="Helvetica"/>
+                </a:rPr>
+                <a:t>2</a:t>
+              </a:r>
+            </a:p>
+          </p:txBody>
+        </p:sp>
+        <p:sp>
+          <p:nvSpPr>
+            <p:cNvPr id="76" name="tx76"/>
+            <p:cNvSpPr/>
+            <p:nvPr/>
+          </p:nvSpPr>
+          <p:spPr>
+            <a:xfrm>
+              <a:off x="762297" y="4655634"/>
+              <a:ext cx="62179" cy="80101"/>
+            </a:xfrm>
+            <a:prstGeom prst="rect">
+              <a:avLst/>
+            </a:prstGeom>
+            <a:noFill/>
+          </p:spPr>
+          <p:txBody>
+            <a:bodyPr lIns="0" rIns="0" tIns="0" bIns="0" anchorCtr="1" anchor="ctr" wrap="none"/>
+            <a:lstStyle/>
+            <a:p>
+              <a:pPr algn="l" marL="0" marR="0" indent="0">
+                <a:lnSpc>
+                  <a:spcPts val="880"/>
+                </a:lnSpc>
+                <a:spcBef>
+                  <a:spcPts val="0"/>
+                </a:spcBef>
+                <a:spcAft>
+                  <a:spcPts val="0"/>
+                </a:spcAft>
+              </a:pPr>
+              <a:r>
+                <a:rPr sz="880">
+                  <a:solidFill>
+                    <a:srgbClr val="4D4D4D">
+                      <a:alpha val="100000"/>
+                    </a:srgbClr>
+                  </a:solidFill>
+                  <a:latin typeface="Helvetica"/>
+                  <a:cs typeface="Helvetica"/>
+                </a:rPr>
+                <a:t>3</a:t>
+              </a:r>
+            </a:p>
+          </p:txBody>
+        </p:sp>
+        <p:sp>
+          <p:nvSpPr>
+            <p:cNvPr id="77" name="tx77"/>
+            <p:cNvSpPr/>
+            <p:nvPr/>
+          </p:nvSpPr>
+          <p:spPr>
+            <a:xfrm>
+              <a:off x="762297" y="4356300"/>
+              <a:ext cx="62179" cy="80101"/>
+            </a:xfrm>
+            <a:prstGeom prst="rect">
+              <a:avLst/>
+            </a:prstGeom>
+            <a:noFill/>
+          </p:spPr>
+          <p:txBody>
+            <a:bodyPr lIns="0" rIns="0" tIns="0" bIns="0" anchorCtr="1" anchor="ctr" wrap="none"/>
+            <a:lstStyle/>
+            <a:p>
+              <a:pPr algn="l" marL="0" marR="0" indent="0">
+                <a:lnSpc>
+                  <a:spcPts val="880"/>
+                </a:lnSpc>
+                <a:spcBef>
+                  <a:spcPts val="0"/>
+                </a:spcBef>
+                <a:spcAft>
+                  <a:spcPts val="0"/>
+                </a:spcAft>
+              </a:pPr>
+              <a:r>
+                <a:rPr sz="880">
+                  <a:solidFill>
+                    <a:srgbClr val="4D4D4D">
+                      <a:alpha val="100000"/>
+                    </a:srgbClr>
+                  </a:solidFill>
+                  <a:latin typeface="Helvetica"/>
+                  <a:cs typeface="Helvetica"/>
+                </a:rPr>
+                <a:t>4</a:t>
+              </a:r>
+            </a:p>
+          </p:txBody>
+        </p:sp>
+        <p:sp>
+          <p:nvSpPr>
+            <p:cNvPr id="78" name="tx78"/>
+            <p:cNvSpPr/>
+            <p:nvPr/>
+          </p:nvSpPr>
+          <p:spPr>
+            <a:xfrm>
+              <a:off x="1241001" y="5716183"/>
+              <a:ext cx="161574" cy="80101"/>
+            </a:xfrm>
+            <a:prstGeom prst="rect">
+              <a:avLst/>
+            </a:prstGeom>
+            <a:noFill/>
+          </p:spPr>
+          <p:txBody>
+            <a:bodyPr lIns="0" rIns="0" tIns="0" bIns="0" anchorCtr="1" anchor="ctr" wrap="none"/>
+            <a:lstStyle/>
+            <a:p>
+              <a:pPr algn="l" marL="0" marR="0" indent="0">
+                <a:lnSpc>
+                  <a:spcPts val="880"/>
+                </a:lnSpc>
+                <a:spcBef>
+                  <a:spcPts val="0"/>
+                </a:spcBef>
+                <a:spcAft>
+                  <a:spcPts val="0"/>
+                </a:spcAft>
+              </a:pPr>
+              <a:r>
+                <a:rPr sz="880">
+                  <a:solidFill>
+                    <a:srgbClr val="4D4D4D">
+                      <a:alpha val="100000"/>
+                    </a:srgbClr>
+                  </a:solidFill>
+                  <a:latin typeface="Helvetica"/>
+                  <a:cs typeface="Helvetica"/>
+                </a:rPr>
+                <a:t>-40</a:t>
+              </a:r>
+            </a:p>
+          </p:txBody>
+        </p:sp>
+        <p:sp>
+          <p:nvSpPr>
+            <p:cNvPr id="79" name="tx79"/>
+            <p:cNvSpPr/>
+            <p:nvPr/>
+          </p:nvSpPr>
+          <p:spPr>
+            <a:xfrm>
+              <a:off x="2054602" y="5716183"/>
+              <a:ext cx="161574" cy="80101"/>
+            </a:xfrm>
+            <a:prstGeom prst="rect">
+              <a:avLst/>
+            </a:prstGeom>
+            <a:noFill/>
+          </p:spPr>
+          <p:txBody>
+            <a:bodyPr lIns="0" rIns="0" tIns="0" bIns="0" anchorCtr="1" anchor="ctr" wrap="none"/>
+            <a:lstStyle/>
+            <a:p>
+              <a:pPr algn="l" marL="0" marR="0" indent="0">
+                <a:lnSpc>
+                  <a:spcPts val="880"/>
+                </a:lnSpc>
+                <a:spcBef>
+                  <a:spcPts val="0"/>
+                </a:spcBef>
+                <a:spcAft>
+                  <a:spcPts val="0"/>
+                </a:spcAft>
+              </a:pPr>
+              <a:r>
+                <a:rPr sz="880">
+                  <a:solidFill>
+                    <a:srgbClr val="4D4D4D">
+                      <a:alpha val="100000"/>
+                    </a:srgbClr>
+                  </a:solidFill>
+                  <a:latin typeface="Helvetica"/>
+                  <a:cs typeface="Helvetica"/>
+                </a:rPr>
+                <a:t>-30</a:t>
+              </a:r>
+            </a:p>
+          </p:txBody>
+        </p:sp>
+        <p:sp>
+          <p:nvSpPr>
+            <p:cNvPr id="80" name="tx80"/>
+            <p:cNvSpPr/>
+            <p:nvPr/>
+          </p:nvSpPr>
+          <p:spPr>
+            <a:xfrm>
+              <a:off x="2868203" y="5716183"/>
+              <a:ext cx="161574" cy="80101"/>
+            </a:xfrm>
+            <a:prstGeom prst="rect">
+              <a:avLst/>
+            </a:prstGeom>
+            <a:noFill/>
+          </p:spPr>
+          <p:txBody>
+            <a:bodyPr lIns="0" rIns="0" tIns="0" bIns="0" anchorCtr="1" anchor="ctr" wrap="none"/>
+            <a:lstStyle/>
+            <a:p>
+              <a:pPr algn="l" marL="0" marR="0" indent="0">
+                <a:lnSpc>
+                  <a:spcPts val="880"/>
+                </a:lnSpc>
+                <a:spcBef>
+                  <a:spcPts val="0"/>
+                </a:spcBef>
+                <a:spcAft>
+                  <a:spcPts val="0"/>
+                </a:spcAft>
+              </a:pPr>
+              <a:r>
+                <a:rPr sz="880">
+                  <a:solidFill>
+                    <a:srgbClr val="4D4D4D">
+                      <a:alpha val="100000"/>
+                    </a:srgbClr>
+                  </a:solidFill>
+                  <a:latin typeface="Helvetica"/>
+                  <a:cs typeface="Helvetica"/>
+                </a:rPr>
+                <a:t>-20</a:t>
+              </a:r>
+            </a:p>
+          </p:txBody>
+        </p:sp>
+        <p:sp>
+          <p:nvSpPr>
+            <p:cNvPr id="81" name="tx81"/>
+            <p:cNvSpPr/>
+            <p:nvPr/>
+          </p:nvSpPr>
+          <p:spPr>
+            <a:xfrm>
+              <a:off x="3681805" y="5716183"/>
+              <a:ext cx="161574" cy="80101"/>
+            </a:xfrm>
+            <a:prstGeom prst="rect">
+              <a:avLst/>
+            </a:prstGeom>
+            <a:noFill/>
+          </p:spPr>
+          <p:txBody>
+            <a:bodyPr lIns="0" rIns="0" tIns="0" bIns="0" anchorCtr="1" anchor="ctr" wrap="none"/>
+            <a:lstStyle/>
+            <a:p>
+              <a:pPr algn="l" marL="0" marR="0" indent="0">
+                <a:lnSpc>
+                  <a:spcPts val="880"/>
+                </a:lnSpc>
+                <a:spcBef>
+                  <a:spcPts val="0"/>
+                </a:spcBef>
+                <a:spcAft>
+                  <a:spcPts val="0"/>
+                </a:spcAft>
+              </a:pPr>
+              <a:r>
+                <a:rPr sz="880">
+                  <a:solidFill>
+                    <a:srgbClr val="4D4D4D">
+                      <a:alpha val="100000"/>
+                    </a:srgbClr>
+                  </a:solidFill>
+                  <a:latin typeface="Helvetica"/>
+                  <a:cs typeface="Helvetica"/>
+                </a:rPr>
+                <a:t>-10</a:t>
+              </a:r>
+            </a:p>
+          </p:txBody>
+        </p:sp>
+        <p:sp>
+          <p:nvSpPr>
+            <p:cNvPr id="82" name="tx82"/>
+            <p:cNvSpPr/>
+            <p:nvPr/>
+          </p:nvSpPr>
+          <p:spPr>
+            <a:xfrm>
+              <a:off x="4545104" y="5716183"/>
+              <a:ext cx="62179" cy="80101"/>
+            </a:xfrm>
+            <a:prstGeom prst="rect">
+              <a:avLst/>
+            </a:prstGeom>
+            <a:noFill/>
+          </p:spPr>
+          <p:txBody>
+            <a:bodyPr lIns="0" rIns="0" tIns="0" bIns="0" anchorCtr="1" anchor="ctr" wrap="none"/>
+            <a:lstStyle/>
+            <a:p>
+              <a:pPr algn="l" marL="0" marR="0" indent="0">
+                <a:lnSpc>
+                  <a:spcPts val="880"/>
+                </a:lnSpc>
+                <a:spcBef>
+                  <a:spcPts val="0"/>
+                </a:spcBef>
+                <a:spcAft>
+                  <a:spcPts val="0"/>
+                </a:spcAft>
+              </a:pPr>
+              <a:r>
+                <a:rPr sz="880">
+                  <a:solidFill>
+                    <a:srgbClr val="4D4D4D">
+                      <a:alpha val="100000"/>
+                    </a:srgbClr>
+                  </a:solidFill>
+                  <a:latin typeface="Helvetica"/>
+                  <a:cs typeface="Helvetica"/>
+                </a:rPr>
+                <a:t>0</a:t>
+              </a:r>
+            </a:p>
+          </p:txBody>
+        </p:sp>
+        <p:sp>
+          <p:nvSpPr>
+            <p:cNvPr id="83" name="tx83"/>
+            <p:cNvSpPr/>
+            <p:nvPr/>
+          </p:nvSpPr>
+          <p:spPr>
+            <a:xfrm>
+              <a:off x="5327615" y="5716183"/>
+              <a:ext cx="124358" cy="80101"/>
+            </a:xfrm>
+            <a:prstGeom prst="rect">
+              <a:avLst/>
+            </a:prstGeom>
+            <a:noFill/>
+          </p:spPr>
+          <p:txBody>
+            <a:bodyPr lIns="0" rIns="0" tIns="0" bIns="0" anchorCtr="1" anchor="ctr" wrap="none"/>
+            <a:lstStyle/>
+            <a:p>
+              <a:pPr algn="l" marL="0" marR="0" indent="0">
+                <a:lnSpc>
+                  <a:spcPts val="880"/>
+                </a:lnSpc>
+                <a:spcBef>
+                  <a:spcPts val="0"/>
+                </a:spcBef>
+                <a:spcAft>
+                  <a:spcPts val="0"/>
+                </a:spcAft>
+              </a:pPr>
+              <a:r>
+                <a:rPr sz="880">
+                  <a:solidFill>
+                    <a:srgbClr val="4D4D4D">
+                      <a:alpha val="100000"/>
+                    </a:srgbClr>
+                  </a:solidFill>
+                  <a:latin typeface="Helvetica"/>
+                  <a:cs typeface="Helvetica"/>
+                </a:rPr>
+                <a:t>10</a:t>
+              </a:r>
+            </a:p>
+          </p:txBody>
+        </p:sp>
+        <p:sp>
+          <p:nvSpPr>
+            <p:cNvPr id="84" name="tx84"/>
+            <p:cNvSpPr/>
+            <p:nvPr/>
+          </p:nvSpPr>
+          <p:spPr>
+            <a:xfrm>
+              <a:off x="6141217" y="5716183"/>
+              <a:ext cx="124358" cy="80101"/>
+            </a:xfrm>
+            <a:prstGeom prst="rect">
+              <a:avLst/>
+            </a:prstGeom>
+            <a:noFill/>
+          </p:spPr>
+          <p:txBody>
+            <a:bodyPr lIns="0" rIns="0" tIns="0" bIns="0" anchorCtr="1" anchor="ctr" wrap="none"/>
+            <a:lstStyle/>
+            <a:p>
+              <a:pPr algn="l" marL="0" marR="0" indent="0">
+                <a:lnSpc>
+                  <a:spcPts val="880"/>
+                </a:lnSpc>
+                <a:spcBef>
+                  <a:spcPts val="0"/>
+                </a:spcBef>
+                <a:spcAft>
+                  <a:spcPts val="0"/>
+                </a:spcAft>
+              </a:pPr>
+              <a:r>
+                <a:rPr sz="880">
+                  <a:solidFill>
+                    <a:srgbClr val="4D4D4D">
+                      <a:alpha val="100000"/>
+                    </a:srgbClr>
+                  </a:solidFill>
+                  <a:latin typeface="Helvetica"/>
+                  <a:cs typeface="Helvetica"/>
+                </a:rPr>
+                <a:t>20</a:t>
+              </a:r>
+            </a:p>
+          </p:txBody>
+        </p:sp>
+        <p:sp>
+          <p:nvSpPr>
+            <p:cNvPr id="85" name="tx85"/>
+            <p:cNvSpPr/>
+            <p:nvPr/>
+          </p:nvSpPr>
+          <p:spPr>
+            <a:xfrm>
+              <a:off x="6954818" y="5716183"/>
+              <a:ext cx="124358" cy="80101"/>
+            </a:xfrm>
+            <a:prstGeom prst="rect">
+              <a:avLst/>
+            </a:prstGeom>
+            <a:noFill/>
+          </p:spPr>
+          <p:txBody>
+            <a:bodyPr lIns="0" rIns="0" tIns="0" bIns="0" anchorCtr="1" anchor="ctr" wrap="none"/>
+            <a:lstStyle/>
+            <a:p>
+              <a:pPr algn="l" marL="0" marR="0" indent="0">
+                <a:lnSpc>
+                  <a:spcPts val="880"/>
+                </a:lnSpc>
+                <a:spcBef>
+                  <a:spcPts val="0"/>
+                </a:spcBef>
+                <a:spcAft>
+                  <a:spcPts val="0"/>
+                </a:spcAft>
+              </a:pPr>
+              <a:r>
+                <a:rPr sz="880">
+                  <a:solidFill>
+                    <a:srgbClr val="4D4D4D">
+                      <a:alpha val="100000"/>
+                    </a:srgbClr>
+                  </a:solidFill>
+                  <a:latin typeface="Helvetica"/>
+                  <a:cs typeface="Helvetica"/>
+                </a:rPr>
+                <a:t>30</a:t>
+              </a:r>
+            </a:p>
+          </p:txBody>
+        </p:sp>
+        <p:sp>
+          <p:nvSpPr>
+            <p:cNvPr id="86" name="tx86"/>
+            <p:cNvSpPr/>
+            <p:nvPr/>
+          </p:nvSpPr>
+          <p:spPr>
+            <a:xfrm>
+              <a:off x="7768419" y="5716183"/>
+              <a:ext cx="124358" cy="80101"/>
+            </a:xfrm>
+            <a:prstGeom prst="rect">
+              <a:avLst/>
+            </a:prstGeom>
+            <a:noFill/>
+          </p:spPr>
+          <p:txBody>
+            <a:bodyPr lIns="0" rIns="0" tIns="0" bIns="0" anchorCtr="1" anchor="ctr" wrap="none"/>
+            <a:lstStyle/>
+            <a:p>
+              <a:pPr algn="l" marL="0" marR="0" indent="0">
+                <a:lnSpc>
+                  <a:spcPts val="880"/>
+                </a:lnSpc>
+                <a:spcBef>
+                  <a:spcPts val="0"/>
+                </a:spcBef>
+                <a:spcAft>
+                  <a:spcPts val="0"/>
+                </a:spcAft>
+              </a:pPr>
+              <a:r>
+                <a:rPr sz="880">
+                  <a:solidFill>
+                    <a:srgbClr val="4D4D4D">
+                      <a:alpha val="100000"/>
+                    </a:srgbClr>
+                  </a:solidFill>
+                  <a:latin typeface="Helvetica"/>
+                  <a:cs typeface="Helvetica"/>
+                </a:rPr>
+                <a:t>40</a:t>
+              </a:r>
+            </a:p>
+          </p:txBody>
+        </p:sp>
+        <p:sp>
+          <p:nvSpPr>
+            <p:cNvPr id="87" name="tx87"/>
+            <p:cNvSpPr/>
+            <p:nvPr/>
+          </p:nvSpPr>
+          <p:spPr>
+            <a:xfrm>
+              <a:off x="2928340" y="5855859"/>
+              <a:ext cx="3578047" cy="100218"/>
+            </a:xfrm>
+            <a:prstGeom prst="rect">
+              <a:avLst/>
+            </a:prstGeom>
+            <a:noFill/>
+          </p:spPr>
+          <p:txBody>
+            <a:bodyPr lIns="0" rIns="0" tIns="0" bIns="0" anchorCtr="1" anchor="ctr" wrap="none"/>
+            <a:lstStyle/>
+            <a:p>
+              <a:pPr algn="l" marL="0" marR="0" indent="0">
+                <a:lnSpc>
+                  <a:spcPts val="1100"/>
+                </a:lnSpc>
+                <a:spcBef>
+                  <a:spcPts val="0"/>
+                </a:spcBef>
+                <a:spcAft>
+                  <a:spcPts val="0"/>
+                </a:spcAft>
+              </a:pPr>
+              <a:r>
+                <a:rPr sz="1100">
+                  <a:solidFill>
+                    <a:srgbClr val="000000">
+                      <a:alpha val="100000"/>
+                    </a:srgbClr>
+                  </a:solidFill>
+                  <a:latin typeface="Helvetica"/>
+                  <a:cs typeface="Helvetica"/>
+                </a:rPr>
+                <a:t>eGFR difference (%): 100 × (CKD-EPI Cr-Cys − CG) / CG</a:t>
+              </a:r>
+            </a:p>
+          </p:txBody>
+        </p:sp>
+        <p:sp>
+          <p:nvSpPr>
+            <p:cNvPr id="88" name="tx88"/>
+            <p:cNvSpPr/>
+            <p:nvPr/>
+          </p:nvSpPr>
+          <p:spPr>
+            <a:xfrm rot="-5400000">
+              <a:off x="138035" y="4944909"/>
+              <a:ext cx="1016904" cy="100218"/>
+            </a:xfrm>
+            <a:prstGeom prst="rect">
+              <a:avLst/>
+            </a:prstGeom>
+            <a:noFill/>
+          </p:spPr>
+          <p:txBody>
+            <a:bodyPr lIns="0" rIns="0" tIns="0" bIns="0" anchorCtr="1" anchor="ctr" wrap="none"/>
+            <a:lstStyle/>
+            <a:p>
+              <a:pPr algn="l" marL="0" marR="0" indent="0">
+                <a:lnSpc>
+                  <a:spcPts val="1100"/>
+                </a:lnSpc>
+                <a:spcBef>
+                  <a:spcPts val="0"/>
+                </a:spcBef>
+                <a:spcAft>
+                  <a:spcPts val="0"/>
+                </a:spcAft>
+              </a:pPr>
+              <a:r>
+                <a:rPr sz="1100">
+                  <a:solidFill>
+                    <a:srgbClr val="000000">
+                      <a:alpha val="100000"/>
+                    </a:srgbClr>
+                  </a:solidFill>
+                  <a:latin typeface="Helvetica"/>
+                  <a:cs typeface="Helvetica"/>
+                </a:rPr>
+                <a:t>subHR (95% CI)</a:t>
+              </a:r>
+            </a:p>
+          </p:txBody>
+        </p:sp>
+        <p:sp>
+          <p:nvSpPr>
+            <p:cNvPr id="89" name="tx89"/>
+            <p:cNvSpPr/>
+            <p:nvPr/>
+          </p:nvSpPr>
+          <p:spPr>
+            <a:xfrm>
+              <a:off x="887106" y="4159544"/>
+              <a:ext cx="7052127" cy="82021"/>
+            </a:xfrm>
+            <a:prstGeom prst="rect">
+              <a:avLst/>
+            </a:prstGeom>
+            <a:noFill/>
+          </p:spPr>
+          <p:txBody>
+            <a:bodyPr lIns="0" rIns="0" tIns="0" bIns="0" anchorCtr="1" anchor="ctr" wrap="none"/>
+            <a:lstStyle/>
+            <a:p>
+              <a:pPr algn="l" marL="0" marR="0" indent="0">
+                <a:lnSpc>
+                  <a:spcPts val="900"/>
+                </a:lnSpc>
+                <a:spcBef>
+                  <a:spcPts val="0"/>
+                </a:spcBef>
+                <a:spcAft>
+                  <a:spcPts val="0"/>
+                </a:spcAft>
+              </a:pPr>
+              <a:r>
+                <a:rPr sz="900">
+                  <a:solidFill>
+                    <a:srgbClr val="404040">
+                      <a:alpha val="100000"/>
+                    </a:srgbClr>
+                  </a:solidFill>
+                  <a:latin typeface="Helvetica"/>
+                  <a:cs typeface="Helvetica"/>
+                </a:rPr>
+                <a:t>subHR per 10 % decline: 1.24 (1.14-1.36), p_Bonf = &lt;0.001 (n = 6)  |  per IQR decline (Δ = 29.9 %): 1.92 (1.48-2.50)  |  IQR: [-15.0, 14.9] %</a:t>
+              </a:r>
+            </a:p>
+          </p:txBody>
+        </p:sp>
+        <p:sp>
+          <p:nvSpPr>
+            <p:cNvPr id="90" name="tx90"/>
+            <p:cNvSpPr/>
+            <p:nvPr/>
+          </p:nvSpPr>
+          <p:spPr>
+            <a:xfrm>
+              <a:off x="887106" y="3932770"/>
               <a:ext cx="2234793" cy="120152"/>
             </a:xfrm>
             <a:prstGeom prst="rect">
